--- a/design/templates/mashrabiya-plum/template.pptx
+++ b/design/templates/mashrabiya-plum/template.pptx
@@ -126,7 +126,7 @@
           <p:cNvPr id="9" name="creative_background">
             <a:extLst>
               <a:ext uri="{FF2B5EF4-FFF2-40B4-BE49-F238E27FC236}">
-                <a16:creationId xmlns:a16="http://schemas.microsoft.com/office/drawing/2014/main" id="{3D5A1622-B0A7-E12A-D6EC-2D2B7F38D31A}"/>
+                <a16:creationId xmlns:a16="http://schemas.microsoft.com/office/drawing/2014/main" id="{77D2835E-FC2B-E1F1-6F9A-63310D67BC4A}"/>
               </a:ext>
             </a:extLst>
           </p:cNvPr>
@@ -169,8 +169,8 @@
         </p:nvSpPr>
         <p:spPr>
           <a:xfrm>
-            <a:off x="457200" y="4960137"/>
-            <a:ext cx="7772400" cy="1463040"/>
+            <a:off x="2072640" y="4960137"/>
+            <a:ext cx="6159500" cy="1463040"/>
           </a:xfrm>
         </p:spPr>
         <p:txBody>
@@ -281,7 +281,12 @@
             <p:ph type="dt" sz="half" idx="10"/>
           </p:nvPr>
         </p:nvSpPr>
-        <p:spPr/>
+        <p:spPr>
+          <a:xfrm>
+            <a:off x="2072640" y="6470704"/>
+            <a:ext cx="1104900" cy="274320"/>
+          </a:xfrm>
+        </p:spPr>
         <p:txBody>
           <a:bodyPr/>
           <a:lstStyle>
@@ -290,7 +295,7 @@
             </a:lvl1pPr>
           </a:lstStyle>
           <a:p>
-            <a:fld id="{0C2FB128-6CE9-48CA-A63B-D694A7BBCE3E}" type="datetimeFigureOut">
+            <a:fld id="{D8887631-421A-4B90-81F4-114CAE3EC1BA}" type="datetimeFigureOut">
               <a:rPr lang="en-US" smtClean="0"/>
               <a:t>10/3/2026</a:t>
             </a:fld>
@@ -332,7 +337,7 @@
           <a:bodyPr/>
           <a:lstStyle/>
           <a:p>
-            <a:fld id="{B2E7DF40-EA43-448D-AAC9-8AB76A8B3E4D}" type="slidenum">
+            <a:fld id="{030EC083-285A-4D45-98F3-6009BB62C01A}" type="slidenum">
               <a:rPr lang="en-US" smtClean="0"/>
               <a:t>‹#›</a:t>
             </a:fld>
@@ -343,7 +348,7 @@
     </p:spTree>
     <p:extLst>
       <p:ext uri="{BB962C8B-B14F-4D97-AF65-F5344CB8AC3E}">
-        <p14:creationId xmlns:p14="http://schemas.microsoft.com/office/powerpoint/2010/main" val="2422943226"/>
+        <p14:creationId xmlns:p14="http://schemas.microsoft.com/office/powerpoint/2010/main" val="100217875"/>
       </p:ext>
     </p:extLst>
   </p:cSld>
@@ -375,7 +380,7 @@
           <p:cNvPr id="7" name="creative_background">
             <a:extLst>
               <a:ext uri="{FF2B5EF4-FFF2-40B4-BE49-F238E27FC236}">
-                <a16:creationId xmlns:a16="http://schemas.microsoft.com/office/drawing/2014/main" id="{12D0CA40-39CC-39CC-82C5-D6F3885B8797}"/>
+                <a16:creationId xmlns:a16="http://schemas.microsoft.com/office/drawing/2014/main" id="{BA6618F1-156A-B62E-BDD1-427D2945B233}"/>
               </a:ext>
             </a:extLst>
           </p:cNvPr>
@@ -416,7 +421,12 @@
             <p:ph type="title"/>
           </p:nvPr>
         </p:nvSpPr>
-        <p:spPr/>
+        <p:spPr>
+          <a:xfrm>
+            <a:off x="2072640" y="585216"/>
+            <a:ext cx="8674100" cy="1499616"/>
+          </a:xfrm>
+        </p:spPr>
         <p:txBody>
           <a:bodyPr/>
           <a:lstStyle>
@@ -443,12 +453,17 @@
             <p:ph type="dt" sz="half" idx="10"/>
           </p:nvPr>
         </p:nvSpPr>
-        <p:spPr/>
+        <p:spPr>
+          <a:xfrm>
+            <a:off x="2072640" y="6470704"/>
+            <a:ext cx="1104900" cy="274320"/>
+          </a:xfrm>
+        </p:spPr>
         <p:txBody>
           <a:bodyPr/>
           <a:lstStyle/>
           <a:p>
-            <a:fld id="{0C2FB128-6CE9-48CA-A63B-D694A7BBCE3E}" type="datetimeFigureOut">
+            <a:fld id="{D8887631-421A-4B90-81F4-114CAE3EC1BA}" type="datetimeFigureOut">
               <a:rPr lang="en-US" smtClean="0"/>
               <a:t>10/3/2026</a:t>
             </a:fld>
@@ -490,7 +505,7 @@
           <a:bodyPr/>
           <a:lstStyle/>
           <a:p>
-            <a:fld id="{B2E7DF40-EA43-448D-AAC9-8AB76A8B3E4D}" type="slidenum">
+            <a:fld id="{030EC083-285A-4D45-98F3-6009BB62C01A}" type="slidenum">
               <a:rPr lang="en-US" smtClean="0"/>
               <a:t>‹#›</a:t>
             </a:fld>
@@ -503,7 +518,7 @@
           <p:cNvPr id="8" name="body">
             <a:extLst>
               <a:ext uri="{FF2B5EF4-FFF2-40B4-BE49-F238E27FC236}">
-                <a16:creationId xmlns:a16="http://schemas.microsoft.com/office/drawing/2014/main" id="{CCBA2B1F-63D8-54D4-65A4-392E43119528}"/>
+                <a16:creationId xmlns:a16="http://schemas.microsoft.com/office/drawing/2014/main" id="{333598C9-BB93-8914-47D9-0A1563A0055D}"/>
               </a:ext>
             </a:extLst>
           </p:cNvPr>
@@ -516,8 +531,8 @@
         </p:nvSpPr>
         <p:spPr>
           <a:xfrm>
-            <a:off x="1024128" y="2286000"/>
-            <a:ext cx="9720073" cy="3591560"/>
+            <a:off x="2072640" y="2286000"/>
+            <a:ext cx="8671561" cy="3591560"/>
           </a:xfrm>
         </p:spPr>
         <p:txBody>
@@ -543,7 +558,7 @@
           <p:cNvPr id="9" name="source">
             <a:extLst>
               <a:ext uri="{FF2B5EF4-FFF2-40B4-BE49-F238E27FC236}">
-                <a16:creationId xmlns:a16="http://schemas.microsoft.com/office/drawing/2014/main" id="{E7371C3E-98B7-EC20-D506-7D482C96A24D}"/>
+                <a16:creationId xmlns:a16="http://schemas.microsoft.com/office/drawing/2014/main" id="{32C7ED47-6A7E-BA74-99F8-5DC73ECC028A}"/>
               </a:ext>
             </a:extLst>
           </p:cNvPr>
@@ -556,7 +571,7 @@
         </p:nvSpPr>
         <p:spPr>
           <a:xfrm>
-            <a:off x="1024128" y="6004560"/>
+            <a:off x="2072640" y="6004560"/>
             <a:ext cx="1905000" cy="304800"/>
           </a:xfrm>
           <a:prstGeom prst="roundRect">
@@ -598,7 +613,7 @@
     </p:spTree>
     <p:extLst>
       <p:ext uri="{BB962C8B-B14F-4D97-AF65-F5344CB8AC3E}">
-        <p14:creationId xmlns:p14="http://schemas.microsoft.com/office/powerpoint/2010/main" val="562164568"/>
+        <p14:creationId xmlns:p14="http://schemas.microsoft.com/office/powerpoint/2010/main" val="4240176124"/>
       </p:ext>
     </p:extLst>
   </p:cSld>
@@ -630,7 +645,7 @@
           <p:cNvPr id="7" name="creative_background">
             <a:extLst>
               <a:ext uri="{FF2B5EF4-FFF2-40B4-BE49-F238E27FC236}">
-                <a16:creationId xmlns:a16="http://schemas.microsoft.com/office/drawing/2014/main" id="{375F333F-CD1A-009E-56E9-F228934AFDDC}"/>
+                <a16:creationId xmlns:a16="http://schemas.microsoft.com/office/drawing/2014/main" id="{7D5C79C4-A3E7-ECA4-4147-756B3C5589A8}"/>
               </a:ext>
             </a:extLst>
           </p:cNvPr>
@@ -671,7 +686,12 @@
             <p:ph type="title"/>
           </p:nvPr>
         </p:nvSpPr>
-        <p:spPr/>
+        <p:spPr>
+          <a:xfrm>
+            <a:off x="2072640" y="585216"/>
+            <a:ext cx="8674100" cy="1499616"/>
+          </a:xfrm>
+        </p:spPr>
         <p:txBody>
           <a:bodyPr/>
           <a:lstStyle>
@@ -698,12 +718,17 @@
             <p:ph type="dt" sz="half" idx="10"/>
           </p:nvPr>
         </p:nvSpPr>
-        <p:spPr/>
+        <p:spPr>
+          <a:xfrm>
+            <a:off x="2072640" y="6470704"/>
+            <a:ext cx="1104900" cy="274320"/>
+          </a:xfrm>
+        </p:spPr>
         <p:txBody>
           <a:bodyPr/>
           <a:lstStyle/>
           <a:p>
-            <a:fld id="{0C2FB128-6CE9-48CA-A63B-D694A7BBCE3E}" type="datetimeFigureOut">
+            <a:fld id="{D8887631-421A-4B90-81F4-114CAE3EC1BA}" type="datetimeFigureOut">
               <a:rPr lang="en-US" smtClean="0"/>
               <a:t>10/3/2026</a:t>
             </a:fld>
@@ -745,7 +770,7 @@
           <a:bodyPr/>
           <a:lstStyle/>
           <a:p>
-            <a:fld id="{B2E7DF40-EA43-448D-AAC9-8AB76A8B3E4D}" type="slidenum">
+            <a:fld id="{030EC083-285A-4D45-98F3-6009BB62C01A}" type="slidenum">
               <a:rPr lang="en-US" smtClean="0"/>
               <a:t>‹#›</a:t>
             </a:fld>
@@ -758,7 +783,7 @@
           <p:cNvPr id="8" name="body">
             <a:extLst>
               <a:ext uri="{FF2B5EF4-FFF2-40B4-BE49-F238E27FC236}">
-                <a16:creationId xmlns:a16="http://schemas.microsoft.com/office/drawing/2014/main" id="{D8FB9AA4-DB5F-19E2-269F-8F2F8418FB08}"/>
+                <a16:creationId xmlns:a16="http://schemas.microsoft.com/office/drawing/2014/main" id="{E9661C39-4E99-944C-543D-3CEB5A515D87}"/>
               </a:ext>
             </a:extLst>
           </p:cNvPr>
@@ -771,8 +796,8 @@
         </p:nvSpPr>
         <p:spPr>
           <a:xfrm>
-            <a:off x="1024128" y="2286000"/>
-            <a:ext cx="9720073" cy="3591560"/>
+            <a:off x="2072640" y="2286000"/>
+            <a:ext cx="8671561" cy="3591560"/>
           </a:xfrm>
         </p:spPr>
         <p:txBody>
@@ -801,7 +826,7 @@
     </p:spTree>
     <p:extLst>
       <p:ext uri="{BB962C8B-B14F-4D97-AF65-F5344CB8AC3E}">
-        <p14:creationId xmlns:p14="http://schemas.microsoft.com/office/powerpoint/2010/main" val="742588755"/>
+        <p14:creationId xmlns:p14="http://schemas.microsoft.com/office/powerpoint/2010/main" val="1215376158"/>
       </p:ext>
     </p:extLst>
   </p:cSld>
@@ -877,7 +902,7 @@
           <p:cNvPr id="6" name="section_number">
             <a:extLst>
               <a:ext uri="{FF2B5EF4-FFF2-40B4-BE49-F238E27FC236}">
-                <a16:creationId xmlns:a16="http://schemas.microsoft.com/office/drawing/2014/main" id="{6AC80164-B031-705B-2E2D-4397D5592337}"/>
+                <a16:creationId xmlns:a16="http://schemas.microsoft.com/office/drawing/2014/main" id="{176BFCD7-7F31-5FA8-C8F0-E1B9B417109F}"/>
               </a:ext>
             </a:extLst>
           </p:cNvPr>
@@ -930,7 +955,7 @@
           <p:cNvPr id="7" name="subtitle">
             <a:extLst>
               <a:ext uri="{FF2B5EF4-FFF2-40B4-BE49-F238E27FC236}">
-                <a16:creationId xmlns:a16="http://schemas.microsoft.com/office/drawing/2014/main" id="{130498CD-5CE5-17A7-8732-D6CFFA5929B2}"/>
+                <a16:creationId xmlns:a16="http://schemas.microsoft.com/office/drawing/2014/main" id="{BD4F2ADA-87DD-329C-B407-C55C35989366}"/>
               </a:ext>
             </a:extLst>
           </p:cNvPr>
@@ -982,7 +1007,7 @@
           <p:cNvPr id="8" name="pattern">
             <a:extLst>
               <a:ext uri="{FF2B5EF4-FFF2-40B4-BE49-F238E27FC236}">
-                <a16:creationId xmlns:a16="http://schemas.microsoft.com/office/drawing/2014/main" id="{3991D4CB-6B82-1CD2-8DDE-7439DB5EB8A5}"/>
+                <a16:creationId xmlns:a16="http://schemas.microsoft.com/office/drawing/2014/main" id="{D6CF40B2-4E4A-5B15-1E84-0DA42AD94313}"/>
               </a:ext>
             </a:extLst>
           </p:cNvPr>
@@ -1050,7 +1075,7 @@
           <p:cNvPr id="9" name="pattern">
             <a:extLst>
               <a:ext uri="{FF2B5EF4-FFF2-40B4-BE49-F238E27FC236}">
-                <a16:creationId xmlns:a16="http://schemas.microsoft.com/office/drawing/2014/main" id="{6E0B6616-183F-051D-BF70-0793746A926F}"/>
+                <a16:creationId xmlns:a16="http://schemas.microsoft.com/office/drawing/2014/main" id="{AFEF08B1-1674-4206-8009-41B403C36C22}"/>
               </a:ext>
             </a:extLst>
           </p:cNvPr>
@@ -1118,7 +1143,7 @@
           <p:cNvPr id="10" name="pattern">
             <a:extLst>
               <a:ext uri="{FF2B5EF4-FFF2-40B4-BE49-F238E27FC236}">
-                <a16:creationId xmlns:a16="http://schemas.microsoft.com/office/drawing/2014/main" id="{6E0A0E8E-EEAC-71A5-9FD8-4086ABED8332}"/>
+                <a16:creationId xmlns:a16="http://schemas.microsoft.com/office/drawing/2014/main" id="{9CB6F137-A85A-E13B-CF9B-B7B52EE08204}"/>
               </a:ext>
             </a:extLst>
           </p:cNvPr>
@@ -1186,7 +1211,7 @@
           <p:cNvPr id="11" name="pattern">
             <a:extLst>
               <a:ext uri="{FF2B5EF4-FFF2-40B4-BE49-F238E27FC236}">
-                <a16:creationId xmlns:a16="http://schemas.microsoft.com/office/drawing/2014/main" id="{AB1A122A-6096-BD11-DE7F-E66FCFE09D69}"/>
+                <a16:creationId xmlns:a16="http://schemas.microsoft.com/office/drawing/2014/main" id="{E136E921-5520-1919-0F37-770BED0342A5}"/>
               </a:ext>
             </a:extLst>
           </p:cNvPr>
@@ -1254,7 +1279,7 @@
           <p:cNvPr id="12" name="pattern">
             <a:extLst>
               <a:ext uri="{FF2B5EF4-FFF2-40B4-BE49-F238E27FC236}">
-                <a16:creationId xmlns:a16="http://schemas.microsoft.com/office/drawing/2014/main" id="{B7C980F6-E9E9-0B71-BED6-5412F2B0A984}"/>
+                <a16:creationId xmlns:a16="http://schemas.microsoft.com/office/drawing/2014/main" id="{80DAB25A-4F48-7C19-4F02-2AA5C798E601}"/>
               </a:ext>
             </a:extLst>
           </p:cNvPr>
@@ -1322,7 +1347,7 @@
           <p:cNvPr id="13" name="pattern">
             <a:extLst>
               <a:ext uri="{FF2B5EF4-FFF2-40B4-BE49-F238E27FC236}">
-                <a16:creationId xmlns:a16="http://schemas.microsoft.com/office/drawing/2014/main" id="{484DCE31-68CE-F8B4-F615-570234AFCD94}"/>
+                <a16:creationId xmlns:a16="http://schemas.microsoft.com/office/drawing/2014/main" id="{F11C20D3-2070-B784-04FD-05494EB95804}"/>
               </a:ext>
             </a:extLst>
           </p:cNvPr>
@@ -1390,7 +1415,7 @@
           <p:cNvPr id="14" name="pattern">
             <a:extLst>
               <a:ext uri="{FF2B5EF4-FFF2-40B4-BE49-F238E27FC236}">
-                <a16:creationId xmlns:a16="http://schemas.microsoft.com/office/drawing/2014/main" id="{6EC493CD-AB33-56A7-CA82-9DCBEEEA65A5}"/>
+                <a16:creationId xmlns:a16="http://schemas.microsoft.com/office/drawing/2014/main" id="{5115E2E4-5999-8E8B-B693-84D06F4AA569}"/>
               </a:ext>
             </a:extLst>
           </p:cNvPr>
@@ -1458,7 +1483,7 @@
           <p:cNvPr id="15" name="pattern">
             <a:extLst>
               <a:ext uri="{FF2B5EF4-FFF2-40B4-BE49-F238E27FC236}">
-                <a16:creationId xmlns:a16="http://schemas.microsoft.com/office/drawing/2014/main" id="{55E68C4D-FD29-CD8A-083F-11CFBC7271CB}"/>
+                <a16:creationId xmlns:a16="http://schemas.microsoft.com/office/drawing/2014/main" id="{5D8AF617-4637-9EC4-A77E-DF152C80BCE3}"/>
               </a:ext>
             </a:extLst>
           </p:cNvPr>
@@ -1526,7 +1551,7 @@
           <p:cNvPr id="16" name="pattern">
             <a:extLst>
               <a:ext uri="{FF2B5EF4-FFF2-40B4-BE49-F238E27FC236}">
-                <a16:creationId xmlns:a16="http://schemas.microsoft.com/office/drawing/2014/main" id="{FC2927AA-2D2C-77FC-90F5-0F8F1F53C108}"/>
+                <a16:creationId xmlns:a16="http://schemas.microsoft.com/office/drawing/2014/main" id="{E7AAA5B2-8BA3-2615-9CC0-1F022F592527}"/>
               </a:ext>
             </a:extLst>
           </p:cNvPr>
@@ -1594,7 +1619,7 @@
           <p:cNvPr id="17" name="pattern">
             <a:extLst>
               <a:ext uri="{FF2B5EF4-FFF2-40B4-BE49-F238E27FC236}">
-                <a16:creationId xmlns:a16="http://schemas.microsoft.com/office/drawing/2014/main" id="{A4D41D21-9AC8-1465-4802-E6E80D5CD346}"/>
+                <a16:creationId xmlns:a16="http://schemas.microsoft.com/office/drawing/2014/main" id="{490DC36C-9C34-EF2C-55E1-A879AA9DBB10}"/>
               </a:ext>
             </a:extLst>
           </p:cNvPr>
@@ -1662,7 +1687,7 @@
           <p:cNvPr id="18" name="pattern">
             <a:extLst>
               <a:ext uri="{FF2B5EF4-FFF2-40B4-BE49-F238E27FC236}">
-                <a16:creationId xmlns:a16="http://schemas.microsoft.com/office/drawing/2014/main" id="{92AC7C28-C200-2AB7-7D6C-A9AD7EAB2F41}"/>
+                <a16:creationId xmlns:a16="http://schemas.microsoft.com/office/drawing/2014/main" id="{A19798C1-0BDD-9B64-7A9C-B06C689A245F}"/>
               </a:ext>
             </a:extLst>
           </p:cNvPr>
@@ -1730,7 +1755,7 @@
           <p:cNvPr id="19" name="pattern">
             <a:extLst>
               <a:ext uri="{FF2B5EF4-FFF2-40B4-BE49-F238E27FC236}">
-                <a16:creationId xmlns:a16="http://schemas.microsoft.com/office/drawing/2014/main" id="{66BF2777-ED4C-6A83-694C-3F36845365B1}"/>
+                <a16:creationId xmlns:a16="http://schemas.microsoft.com/office/drawing/2014/main" id="{610E8778-5BB7-A9D3-61FB-7E0B05460433}"/>
               </a:ext>
             </a:extLst>
           </p:cNvPr>
@@ -1798,7 +1823,7 @@
           <p:cNvPr id="20" name="pattern">
             <a:extLst>
               <a:ext uri="{FF2B5EF4-FFF2-40B4-BE49-F238E27FC236}">
-                <a16:creationId xmlns:a16="http://schemas.microsoft.com/office/drawing/2014/main" id="{A24CA396-06F6-DF52-8D63-09194CCFAF4F}"/>
+                <a16:creationId xmlns:a16="http://schemas.microsoft.com/office/drawing/2014/main" id="{28618727-EFFD-3DFF-8F19-4715613818BC}"/>
               </a:ext>
             </a:extLst>
           </p:cNvPr>
@@ -1866,7 +1891,7 @@
           <p:cNvPr id="21" name="pattern">
             <a:extLst>
               <a:ext uri="{FF2B5EF4-FFF2-40B4-BE49-F238E27FC236}">
-                <a16:creationId xmlns:a16="http://schemas.microsoft.com/office/drawing/2014/main" id="{957EFD30-B7C2-7372-EA22-74A4914F28A0}"/>
+                <a16:creationId xmlns:a16="http://schemas.microsoft.com/office/drawing/2014/main" id="{E21713FD-E10C-A9A7-B17A-610580E29F07}"/>
               </a:ext>
             </a:extLst>
           </p:cNvPr>
@@ -1934,7 +1959,7 @@
           <p:cNvPr id="22" name="pattern">
             <a:extLst>
               <a:ext uri="{FF2B5EF4-FFF2-40B4-BE49-F238E27FC236}">
-                <a16:creationId xmlns:a16="http://schemas.microsoft.com/office/drawing/2014/main" id="{0CDF968E-E382-212F-2F64-21471CB12906}"/>
+                <a16:creationId xmlns:a16="http://schemas.microsoft.com/office/drawing/2014/main" id="{C106F1CD-EF4F-6E52-2A1D-325A8D462F73}"/>
               </a:ext>
             </a:extLst>
           </p:cNvPr>
@@ -2002,7 +2027,7 @@
           <p:cNvPr id="23" name="pattern">
             <a:extLst>
               <a:ext uri="{FF2B5EF4-FFF2-40B4-BE49-F238E27FC236}">
-                <a16:creationId xmlns:a16="http://schemas.microsoft.com/office/drawing/2014/main" id="{C4E21A30-B9A2-E790-F601-4D3931C0A07A}"/>
+                <a16:creationId xmlns:a16="http://schemas.microsoft.com/office/drawing/2014/main" id="{120B35A7-586E-253D-8557-D07C4B868275}"/>
               </a:ext>
             </a:extLst>
           </p:cNvPr>
@@ -2070,7 +2095,7 @@
           <p:cNvPr id="24" name="pattern">
             <a:extLst>
               <a:ext uri="{FF2B5EF4-FFF2-40B4-BE49-F238E27FC236}">
-                <a16:creationId xmlns:a16="http://schemas.microsoft.com/office/drawing/2014/main" id="{1F9D173D-8E52-EF2F-1752-53389314E720}"/>
+                <a16:creationId xmlns:a16="http://schemas.microsoft.com/office/drawing/2014/main" id="{385106DB-3D4E-491E-62C7-E8DB6CD32BBE}"/>
               </a:ext>
             </a:extLst>
           </p:cNvPr>
@@ -2138,7 +2163,7 @@
           <p:cNvPr id="25" name="pattern">
             <a:extLst>
               <a:ext uri="{FF2B5EF4-FFF2-40B4-BE49-F238E27FC236}">
-                <a16:creationId xmlns:a16="http://schemas.microsoft.com/office/drawing/2014/main" id="{329097BC-2DC6-3382-DE59-BF847A2F0603}"/>
+                <a16:creationId xmlns:a16="http://schemas.microsoft.com/office/drawing/2014/main" id="{21BBF887-C833-CC71-BEBE-E8C8D168B156}"/>
               </a:ext>
             </a:extLst>
           </p:cNvPr>
@@ -2206,7 +2231,7 @@
           <p:cNvPr id="26" name="pattern">
             <a:extLst>
               <a:ext uri="{FF2B5EF4-FFF2-40B4-BE49-F238E27FC236}">
-                <a16:creationId xmlns:a16="http://schemas.microsoft.com/office/drawing/2014/main" id="{3F9CC1C8-E246-113D-AAD2-354EB9521AF8}"/>
+                <a16:creationId xmlns:a16="http://schemas.microsoft.com/office/drawing/2014/main" id="{71CDF262-CF13-F629-8E27-827CAB4ED9A5}"/>
               </a:ext>
             </a:extLst>
           </p:cNvPr>
@@ -2274,7 +2299,7 @@
           <p:cNvPr id="27" name="pattern">
             <a:extLst>
               <a:ext uri="{FF2B5EF4-FFF2-40B4-BE49-F238E27FC236}">
-                <a16:creationId xmlns:a16="http://schemas.microsoft.com/office/drawing/2014/main" id="{2B5EFD9B-13D3-0748-6679-79E60342DA8B}"/>
+                <a16:creationId xmlns:a16="http://schemas.microsoft.com/office/drawing/2014/main" id="{C62E9F4B-1C3B-8B7D-051F-C75C0955A662}"/>
               </a:ext>
             </a:extLst>
           </p:cNvPr>
@@ -2342,7 +2367,7 @@
           <p:cNvPr id="28" name="pattern">
             <a:extLst>
               <a:ext uri="{FF2B5EF4-FFF2-40B4-BE49-F238E27FC236}">
-                <a16:creationId xmlns:a16="http://schemas.microsoft.com/office/drawing/2014/main" id="{601E9843-A10E-F625-B0FA-69E8A9FD6424}"/>
+                <a16:creationId xmlns:a16="http://schemas.microsoft.com/office/drawing/2014/main" id="{C3956FF8-1081-BF72-49FD-5E580135C2DA}"/>
               </a:ext>
             </a:extLst>
           </p:cNvPr>
@@ -2410,7 +2435,7 @@
           <p:cNvPr id="29" name="pattern">
             <a:extLst>
               <a:ext uri="{FF2B5EF4-FFF2-40B4-BE49-F238E27FC236}">
-                <a16:creationId xmlns:a16="http://schemas.microsoft.com/office/drawing/2014/main" id="{FC6FD962-A3E1-1A13-4D80-0E5A4E0F3DC3}"/>
+                <a16:creationId xmlns:a16="http://schemas.microsoft.com/office/drawing/2014/main" id="{EA6C6927-42C6-75C3-55F8-82B6BD7E61BC}"/>
               </a:ext>
             </a:extLst>
           </p:cNvPr>
@@ -2478,7 +2503,7 @@
           <p:cNvPr id="30" name="pattern">
             <a:extLst>
               <a:ext uri="{FF2B5EF4-FFF2-40B4-BE49-F238E27FC236}">
-                <a16:creationId xmlns:a16="http://schemas.microsoft.com/office/drawing/2014/main" id="{F6804E84-BDC2-2578-87A2-2282220913B7}"/>
+                <a16:creationId xmlns:a16="http://schemas.microsoft.com/office/drawing/2014/main" id="{6A881D36-0622-D4D1-A698-4B27F8BF52FE}"/>
               </a:ext>
             </a:extLst>
           </p:cNvPr>
@@ -2546,7 +2571,7 @@
           <p:cNvPr id="31" name="pattern">
             <a:extLst>
               <a:ext uri="{FF2B5EF4-FFF2-40B4-BE49-F238E27FC236}">
-                <a16:creationId xmlns:a16="http://schemas.microsoft.com/office/drawing/2014/main" id="{B8FE43D3-84BD-582C-62FC-BEDEE248D894}"/>
+                <a16:creationId xmlns:a16="http://schemas.microsoft.com/office/drawing/2014/main" id="{C54F087A-E7A1-EB01-94E0-556C18BDA2E1}"/>
               </a:ext>
             </a:extLst>
           </p:cNvPr>
@@ -2614,7 +2639,7 @@
           <p:cNvPr id="32" name="pattern">
             <a:extLst>
               <a:ext uri="{FF2B5EF4-FFF2-40B4-BE49-F238E27FC236}">
-                <a16:creationId xmlns:a16="http://schemas.microsoft.com/office/drawing/2014/main" id="{F1D9B4CD-1C32-7B81-C3D0-AC7E195229C4}"/>
+                <a16:creationId xmlns:a16="http://schemas.microsoft.com/office/drawing/2014/main" id="{E18B277C-EB08-A3FD-6B52-B61752CE3B7F}"/>
               </a:ext>
             </a:extLst>
           </p:cNvPr>
@@ -2682,7 +2707,7 @@
           <p:cNvPr id="33" name="pattern">
             <a:extLst>
               <a:ext uri="{FF2B5EF4-FFF2-40B4-BE49-F238E27FC236}">
-                <a16:creationId xmlns:a16="http://schemas.microsoft.com/office/drawing/2014/main" id="{2129487A-6BB0-0B5C-84F1-C59F8A83BBE5}"/>
+                <a16:creationId xmlns:a16="http://schemas.microsoft.com/office/drawing/2014/main" id="{A09A4555-B7EF-3BF2-38A5-A46D3DC68C54}"/>
               </a:ext>
             </a:extLst>
           </p:cNvPr>
@@ -2750,7 +2775,7 @@
           <p:cNvPr id="34" name="pattern">
             <a:extLst>
               <a:ext uri="{FF2B5EF4-FFF2-40B4-BE49-F238E27FC236}">
-                <a16:creationId xmlns:a16="http://schemas.microsoft.com/office/drawing/2014/main" id="{A9C750FC-A0C6-CB25-B1A7-F8D92FE8A16E}"/>
+                <a16:creationId xmlns:a16="http://schemas.microsoft.com/office/drawing/2014/main" id="{D3121E89-C65C-8C0A-5E00-BFE8CDB797F9}"/>
               </a:ext>
             </a:extLst>
           </p:cNvPr>
@@ -2818,7 +2843,7 @@
           <p:cNvPr id="35" name="pattern">
             <a:extLst>
               <a:ext uri="{FF2B5EF4-FFF2-40B4-BE49-F238E27FC236}">
-                <a16:creationId xmlns:a16="http://schemas.microsoft.com/office/drawing/2014/main" id="{45738BBE-793F-4866-D1A5-E7174AF439D7}"/>
+                <a16:creationId xmlns:a16="http://schemas.microsoft.com/office/drawing/2014/main" id="{D7D5D412-DC15-A892-C8D2-FD3A17102167}"/>
               </a:ext>
             </a:extLst>
           </p:cNvPr>
@@ -2886,7 +2911,7 @@
           <p:cNvPr id="36" name="pattern">
             <a:extLst>
               <a:ext uri="{FF2B5EF4-FFF2-40B4-BE49-F238E27FC236}">
-                <a16:creationId xmlns:a16="http://schemas.microsoft.com/office/drawing/2014/main" id="{B2103956-8794-FE52-56B0-40A7B4523C2C}"/>
+                <a16:creationId xmlns:a16="http://schemas.microsoft.com/office/drawing/2014/main" id="{B4C1C963-FF30-6B7F-7DD3-E9E34A0F5570}"/>
               </a:ext>
             </a:extLst>
           </p:cNvPr>
@@ -2954,7 +2979,7 @@
           <p:cNvPr id="37" name="pattern">
             <a:extLst>
               <a:ext uri="{FF2B5EF4-FFF2-40B4-BE49-F238E27FC236}">
-                <a16:creationId xmlns:a16="http://schemas.microsoft.com/office/drawing/2014/main" id="{B46C57AC-059F-2CAA-B3DE-09C121789D7B}"/>
+                <a16:creationId xmlns:a16="http://schemas.microsoft.com/office/drawing/2014/main" id="{8962CF0B-20BE-6185-1212-54CECAD37717}"/>
               </a:ext>
             </a:extLst>
           </p:cNvPr>
@@ -3022,7 +3047,7 @@
           <p:cNvPr id="38" name="pattern">
             <a:extLst>
               <a:ext uri="{FF2B5EF4-FFF2-40B4-BE49-F238E27FC236}">
-                <a16:creationId xmlns:a16="http://schemas.microsoft.com/office/drawing/2014/main" id="{9DD3C10F-6E6F-6A12-2BBE-9998FAB9A922}"/>
+                <a16:creationId xmlns:a16="http://schemas.microsoft.com/office/drawing/2014/main" id="{7888BB8F-0AB6-D59D-A974-7D6ED20223DB}"/>
               </a:ext>
             </a:extLst>
           </p:cNvPr>
@@ -3090,7 +3115,7 @@
           <p:cNvPr id="39" name="pattern">
             <a:extLst>
               <a:ext uri="{FF2B5EF4-FFF2-40B4-BE49-F238E27FC236}">
-                <a16:creationId xmlns:a16="http://schemas.microsoft.com/office/drawing/2014/main" id="{19409C0E-6660-ECC7-D0D0-A963999E70F0}"/>
+                <a16:creationId xmlns:a16="http://schemas.microsoft.com/office/drawing/2014/main" id="{8896BE7E-40AC-FB46-5BF0-D7C95DB02896}"/>
               </a:ext>
             </a:extLst>
           </p:cNvPr>
@@ -3158,7 +3183,7 @@
           <p:cNvPr id="40" name="pattern">
             <a:extLst>
               <a:ext uri="{FF2B5EF4-FFF2-40B4-BE49-F238E27FC236}">
-                <a16:creationId xmlns:a16="http://schemas.microsoft.com/office/drawing/2014/main" id="{5D4644EC-A2F4-A55D-779E-565F1368AACF}"/>
+                <a16:creationId xmlns:a16="http://schemas.microsoft.com/office/drawing/2014/main" id="{EA298442-F65F-A2E8-D1BF-4A0C7D7A8B49}"/>
               </a:ext>
             </a:extLst>
           </p:cNvPr>
@@ -3226,7 +3251,7 @@
           <p:cNvPr id="41" name="pattern">
             <a:extLst>
               <a:ext uri="{FF2B5EF4-FFF2-40B4-BE49-F238E27FC236}">
-                <a16:creationId xmlns:a16="http://schemas.microsoft.com/office/drawing/2014/main" id="{B4BB01D7-4C68-9507-8067-47567BC3CDD4}"/>
+                <a16:creationId xmlns:a16="http://schemas.microsoft.com/office/drawing/2014/main" id="{BD32795E-9F8C-35B9-A847-1779F7EBAD0D}"/>
               </a:ext>
             </a:extLst>
           </p:cNvPr>
@@ -3294,7 +3319,7 @@
           <p:cNvPr id="42" name="pattern">
             <a:extLst>
               <a:ext uri="{FF2B5EF4-FFF2-40B4-BE49-F238E27FC236}">
-                <a16:creationId xmlns:a16="http://schemas.microsoft.com/office/drawing/2014/main" id="{9DEBE83A-682F-6B31-7968-839A1061F933}"/>
+                <a16:creationId xmlns:a16="http://schemas.microsoft.com/office/drawing/2014/main" id="{E91FB005-5777-BA08-120F-D38B95DCD6DA}"/>
               </a:ext>
             </a:extLst>
           </p:cNvPr>
@@ -3362,7 +3387,7 @@
           <p:cNvPr id="43" name="pattern">
             <a:extLst>
               <a:ext uri="{FF2B5EF4-FFF2-40B4-BE49-F238E27FC236}">
-                <a16:creationId xmlns:a16="http://schemas.microsoft.com/office/drawing/2014/main" id="{8EC394BF-3DCD-E8AC-4E99-2562EC5DDD5F}"/>
+                <a16:creationId xmlns:a16="http://schemas.microsoft.com/office/drawing/2014/main" id="{F93EF362-173F-4313-6161-BB9338100A57}"/>
               </a:ext>
             </a:extLst>
           </p:cNvPr>
@@ -3430,7 +3455,7 @@
           <p:cNvPr id="44" name="pattern">
             <a:extLst>
               <a:ext uri="{FF2B5EF4-FFF2-40B4-BE49-F238E27FC236}">
-                <a16:creationId xmlns:a16="http://schemas.microsoft.com/office/drawing/2014/main" id="{6BA55FAA-5CE7-B7DD-3954-B143B1260074}"/>
+                <a16:creationId xmlns:a16="http://schemas.microsoft.com/office/drawing/2014/main" id="{55A057A0-6684-3824-7365-DE351B11140C}"/>
               </a:ext>
             </a:extLst>
           </p:cNvPr>
@@ -3498,7 +3523,7 @@
           <p:cNvPr id="45" name="pattern">
             <a:extLst>
               <a:ext uri="{FF2B5EF4-FFF2-40B4-BE49-F238E27FC236}">
-                <a16:creationId xmlns:a16="http://schemas.microsoft.com/office/drawing/2014/main" id="{13E82826-676F-7C71-457D-881786F9AA78}"/>
+                <a16:creationId xmlns:a16="http://schemas.microsoft.com/office/drawing/2014/main" id="{7A59EA8A-81AF-D531-B719-A67033A14257}"/>
               </a:ext>
             </a:extLst>
           </p:cNvPr>
@@ -3566,7 +3591,7 @@
           <p:cNvPr id="46" name="pattern">
             <a:extLst>
               <a:ext uri="{FF2B5EF4-FFF2-40B4-BE49-F238E27FC236}">
-                <a16:creationId xmlns:a16="http://schemas.microsoft.com/office/drawing/2014/main" id="{AEE74C1E-0959-3D0A-F3C6-5B44847009B4}"/>
+                <a16:creationId xmlns:a16="http://schemas.microsoft.com/office/drawing/2014/main" id="{F6F769E4-C572-6C9D-0360-AAE22A5CB220}"/>
               </a:ext>
             </a:extLst>
           </p:cNvPr>
@@ -3634,7 +3659,7 @@
           <p:cNvPr id="47" name="pattern">
             <a:extLst>
               <a:ext uri="{FF2B5EF4-FFF2-40B4-BE49-F238E27FC236}">
-                <a16:creationId xmlns:a16="http://schemas.microsoft.com/office/drawing/2014/main" id="{C9BAA8DD-0A48-F015-89A4-7181B44EF724}"/>
+                <a16:creationId xmlns:a16="http://schemas.microsoft.com/office/drawing/2014/main" id="{0C7B1694-F5C6-7582-CA24-614DF093A173}"/>
               </a:ext>
             </a:extLst>
           </p:cNvPr>
@@ -3702,7 +3727,7 @@
           <p:cNvPr id="48" name="pattern">
             <a:extLst>
               <a:ext uri="{FF2B5EF4-FFF2-40B4-BE49-F238E27FC236}">
-                <a16:creationId xmlns:a16="http://schemas.microsoft.com/office/drawing/2014/main" id="{4294B1E3-203D-E151-5D5B-78E38FD46FB2}"/>
+                <a16:creationId xmlns:a16="http://schemas.microsoft.com/office/drawing/2014/main" id="{0C386FA1-9A65-E48C-B0F5-80C0111DFE9C}"/>
               </a:ext>
             </a:extLst>
           </p:cNvPr>
@@ -3770,7 +3795,7 @@
           <p:cNvPr id="49" name="pattern">
             <a:extLst>
               <a:ext uri="{FF2B5EF4-FFF2-40B4-BE49-F238E27FC236}">
-                <a16:creationId xmlns:a16="http://schemas.microsoft.com/office/drawing/2014/main" id="{808C4CE3-4363-9165-AF93-10575CC62590}"/>
+                <a16:creationId xmlns:a16="http://schemas.microsoft.com/office/drawing/2014/main" id="{A496B8FA-D08C-54BD-7F8B-636A11180880}"/>
               </a:ext>
             </a:extLst>
           </p:cNvPr>
@@ -3838,7 +3863,7 @@
           <p:cNvPr id="50" name="pattern">
             <a:extLst>
               <a:ext uri="{FF2B5EF4-FFF2-40B4-BE49-F238E27FC236}">
-                <a16:creationId xmlns:a16="http://schemas.microsoft.com/office/drawing/2014/main" id="{4D1CA330-A00A-4B83-1502-A7ACBE5BB300}"/>
+                <a16:creationId xmlns:a16="http://schemas.microsoft.com/office/drawing/2014/main" id="{69966630-8050-1B37-02B5-7517D139F12C}"/>
               </a:ext>
             </a:extLst>
           </p:cNvPr>
@@ -3906,7 +3931,7 @@
           <p:cNvPr id="51" name="pattern">
             <a:extLst>
               <a:ext uri="{FF2B5EF4-FFF2-40B4-BE49-F238E27FC236}">
-                <a16:creationId xmlns:a16="http://schemas.microsoft.com/office/drawing/2014/main" id="{9274F983-6A72-043D-FC62-E6B926EEF90D}"/>
+                <a16:creationId xmlns:a16="http://schemas.microsoft.com/office/drawing/2014/main" id="{552D4AFF-5F73-8403-78FF-38BD9F3BC57D}"/>
               </a:ext>
             </a:extLst>
           </p:cNvPr>
@@ -3974,7 +3999,7 @@
           <p:cNvPr id="52" name="pattern">
             <a:extLst>
               <a:ext uri="{FF2B5EF4-FFF2-40B4-BE49-F238E27FC236}">
-                <a16:creationId xmlns:a16="http://schemas.microsoft.com/office/drawing/2014/main" id="{9B0D0284-AA2D-2293-8B14-1BEF4E8D4FE7}"/>
+                <a16:creationId xmlns:a16="http://schemas.microsoft.com/office/drawing/2014/main" id="{1B6EDCB3-DBD7-3694-DE6F-CB10CCEE63E9}"/>
               </a:ext>
             </a:extLst>
           </p:cNvPr>
@@ -4042,7 +4067,7 @@
           <p:cNvPr id="53" name="pattern">
             <a:extLst>
               <a:ext uri="{FF2B5EF4-FFF2-40B4-BE49-F238E27FC236}">
-                <a16:creationId xmlns:a16="http://schemas.microsoft.com/office/drawing/2014/main" id="{BEADFB59-1E68-D9ED-A5A3-1517C2F4E75C}"/>
+                <a16:creationId xmlns:a16="http://schemas.microsoft.com/office/drawing/2014/main" id="{7E708AF7-53C1-7D73-6159-7646C268FB57}"/>
               </a:ext>
             </a:extLst>
           </p:cNvPr>
@@ -4110,7 +4135,7 @@
           <p:cNvPr id="54" name="pattern">
             <a:extLst>
               <a:ext uri="{FF2B5EF4-FFF2-40B4-BE49-F238E27FC236}">
-                <a16:creationId xmlns:a16="http://schemas.microsoft.com/office/drawing/2014/main" id="{8E760386-76F0-D57F-12A0-F3C73D05A0E1}"/>
+                <a16:creationId xmlns:a16="http://schemas.microsoft.com/office/drawing/2014/main" id="{AEDBE4DE-6E4C-74B2-9A65-FB8E7359D0D2}"/>
               </a:ext>
             </a:extLst>
           </p:cNvPr>
@@ -4178,7 +4203,7 @@
           <p:cNvPr id="55" name="pattern">
             <a:extLst>
               <a:ext uri="{FF2B5EF4-FFF2-40B4-BE49-F238E27FC236}">
-                <a16:creationId xmlns:a16="http://schemas.microsoft.com/office/drawing/2014/main" id="{611BBB32-FE4E-C7D2-168D-00B79FAD0E98}"/>
+                <a16:creationId xmlns:a16="http://schemas.microsoft.com/office/drawing/2014/main" id="{1F97C2C6-24AD-BF7B-C824-FBE19B5E0859}"/>
               </a:ext>
             </a:extLst>
           </p:cNvPr>
@@ -4246,7 +4271,7 @@
           <p:cNvPr id="56" name="pattern">
             <a:extLst>
               <a:ext uri="{FF2B5EF4-FFF2-40B4-BE49-F238E27FC236}">
-                <a16:creationId xmlns:a16="http://schemas.microsoft.com/office/drawing/2014/main" id="{266A4EE7-5CEA-5D3A-24E3-14B46B906D99}"/>
+                <a16:creationId xmlns:a16="http://schemas.microsoft.com/office/drawing/2014/main" id="{5C9DA924-F9A3-9FF6-2D16-6DC23BA2E4B3}"/>
               </a:ext>
             </a:extLst>
           </p:cNvPr>
@@ -4314,7 +4339,7 @@
           <p:cNvPr id="57" name="pattern">
             <a:extLst>
               <a:ext uri="{FF2B5EF4-FFF2-40B4-BE49-F238E27FC236}">
-                <a16:creationId xmlns:a16="http://schemas.microsoft.com/office/drawing/2014/main" id="{47F0A7E7-F974-2746-D622-94611B59DA92}"/>
+                <a16:creationId xmlns:a16="http://schemas.microsoft.com/office/drawing/2014/main" id="{2C4EAFCD-D60C-8622-7BF7-80D2158C900D}"/>
               </a:ext>
             </a:extLst>
           </p:cNvPr>
@@ -4382,7 +4407,7 @@
           <p:cNvPr id="58" name="pattern">
             <a:extLst>
               <a:ext uri="{FF2B5EF4-FFF2-40B4-BE49-F238E27FC236}">
-                <a16:creationId xmlns:a16="http://schemas.microsoft.com/office/drawing/2014/main" id="{C4F6B499-D599-438B-F479-20E2B1AD8311}"/>
+                <a16:creationId xmlns:a16="http://schemas.microsoft.com/office/drawing/2014/main" id="{7F2ADCC7-542E-D9A4-D28D-9145022D8C48}"/>
               </a:ext>
             </a:extLst>
           </p:cNvPr>
@@ -4450,7 +4475,7 @@
           <p:cNvPr id="59" name="pattern">
             <a:extLst>
               <a:ext uri="{FF2B5EF4-FFF2-40B4-BE49-F238E27FC236}">
-                <a16:creationId xmlns:a16="http://schemas.microsoft.com/office/drawing/2014/main" id="{A9B401F7-CABD-D151-0836-5810B47F09B6}"/>
+                <a16:creationId xmlns:a16="http://schemas.microsoft.com/office/drawing/2014/main" id="{2E6AA026-0B1D-EDBE-04CD-3B25FC35490D}"/>
               </a:ext>
             </a:extLst>
           </p:cNvPr>
@@ -4518,7 +4543,7 @@
           <p:cNvPr id="60" name="pattern">
             <a:extLst>
               <a:ext uri="{FF2B5EF4-FFF2-40B4-BE49-F238E27FC236}">
-                <a16:creationId xmlns:a16="http://schemas.microsoft.com/office/drawing/2014/main" id="{268B26BA-6E7D-E121-7F10-D473573BC2D6}"/>
+                <a16:creationId xmlns:a16="http://schemas.microsoft.com/office/drawing/2014/main" id="{E445C4A8-A059-82E3-F996-F48D9AC05D7E}"/>
               </a:ext>
             </a:extLst>
           </p:cNvPr>
@@ -4586,7 +4611,7 @@
           <p:cNvPr id="61" name="pattern">
             <a:extLst>
               <a:ext uri="{FF2B5EF4-FFF2-40B4-BE49-F238E27FC236}">
-                <a16:creationId xmlns:a16="http://schemas.microsoft.com/office/drawing/2014/main" id="{F87A4FFD-F516-3F8B-CA8B-5583E629F6A1}"/>
+                <a16:creationId xmlns:a16="http://schemas.microsoft.com/office/drawing/2014/main" id="{70B6384E-C6B4-B305-0BDD-3D8918A6D92D}"/>
               </a:ext>
             </a:extLst>
           </p:cNvPr>
@@ -4654,7 +4679,7 @@
           <p:cNvPr id="62" name="pattern">
             <a:extLst>
               <a:ext uri="{FF2B5EF4-FFF2-40B4-BE49-F238E27FC236}">
-                <a16:creationId xmlns:a16="http://schemas.microsoft.com/office/drawing/2014/main" id="{EDD0C84D-A526-AC23-623E-8741D696B19F}"/>
+                <a16:creationId xmlns:a16="http://schemas.microsoft.com/office/drawing/2014/main" id="{1A49E83C-09C9-9AAE-0AB7-F0350F22E5D8}"/>
               </a:ext>
             </a:extLst>
           </p:cNvPr>
@@ -4722,7 +4747,7 @@
           <p:cNvPr id="63" name="pattern">
             <a:extLst>
               <a:ext uri="{FF2B5EF4-FFF2-40B4-BE49-F238E27FC236}">
-                <a16:creationId xmlns:a16="http://schemas.microsoft.com/office/drawing/2014/main" id="{AECD379B-8864-FB82-C129-D64E2B08CF0F}"/>
+                <a16:creationId xmlns:a16="http://schemas.microsoft.com/office/drawing/2014/main" id="{6E9B9F30-7995-D56B-FA39-B019E41CDA06}"/>
               </a:ext>
             </a:extLst>
           </p:cNvPr>
@@ -4790,7 +4815,7 @@
           <p:cNvPr id="64" name="pattern">
             <a:extLst>
               <a:ext uri="{FF2B5EF4-FFF2-40B4-BE49-F238E27FC236}">
-                <a16:creationId xmlns:a16="http://schemas.microsoft.com/office/drawing/2014/main" id="{F9C5AAA8-9F7B-B5D3-8DDA-8A52E734F40B}"/>
+                <a16:creationId xmlns:a16="http://schemas.microsoft.com/office/drawing/2014/main" id="{49A34428-043B-4F74-40EF-C3021DEB9389}"/>
               </a:ext>
             </a:extLst>
           </p:cNvPr>
@@ -4858,7 +4883,7 @@
           <p:cNvPr id="65" name="pattern">
             <a:extLst>
               <a:ext uri="{FF2B5EF4-FFF2-40B4-BE49-F238E27FC236}">
-                <a16:creationId xmlns:a16="http://schemas.microsoft.com/office/drawing/2014/main" id="{3D294FAB-2781-396F-077E-5E9725149D13}"/>
+                <a16:creationId xmlns:a16="http://schemas.microsoft.com/office/drawing/2014/main" id="{120A5118-E63B-6154-535D-BCE9A9AA02B1}"/>
               </a:ext>
             </a:extLst>
           </p:cNvPr>
@@ -4926,7 +4951,7 @@
           <p:cNvPr id="66" name="pattern">
             <a:extLst>
               <a:ext uri="{FF2B5EF4-FFF2-40B4-BE49-F238E27FC236}">
-                <a16:creationId xmlns:a16="http://schemas.microsoft.com/office/drawing/2014/main" id="{67BCF6F6-4276-6C61-76F7-3E3AD9D124F1}"/>
+                <a16:creationId xmlns:a16="http://schemas.microsoft.com/office/drawing/2014/main" id="{B5DE2516-0044-8378-CB70-D29DF24BAF09}"/>
               </a:ext>
             </a:extLst>
           </p:cNvPr>
@@ -4994,7 +5019,7 @@
           <p:cNvPr id="67" name="pattern">
             <a:extLst>
               <a:ext uri="{FF2B5EF4-FFF2-40B4-BE49-F238E27FC236}">
-                <a16:creationId xmlns:a16="http://schemas.microsoft.com/office/drawing/2014/main" id="{044CE036-8DF9-6D0B-0E0D-527E623E9F74}"/>
+                <a16:creationId xmlns:a16="http://schemas.microsoft.com/office/drawing/2014/main" id="{6ECDE149-A91B-FA35-8968-894672AE7BDC}"/>
               </a:ext>
             </a:extLst>
           </p:cNvPr>
@@ -5062,7 +5087,7 @@
           <p:cNvPr id="68" name="pattern">
             <a:extLst>
               <a:ext uri="{FF2B5EF4-FFF2-40B4-BE49-F238E27FC236}">
-                <a16:creationId xmlns:a16="http://schemas.microsoft.com/office/drawing/2014/main" id="{51FB3213-E79D-F163-0391-0EB75A2846A5}"/>
+                <a16:creationId xmlns:a16="http://schemas.microsoft.com/office/drawing/2014/main" id="{C79686B2-17D6-0A55-C9B6-97D4764C8808}"/>
               </a:ext>
             </a:extLst>
           </p:cNvPr>
@@ -5130,7 +5155,7 @@
           <p:cNvPr id="69" name="pattern">
             <a:extLst>
               <a:ext uri="{FF2B5EF4-FFF2-40B4-BE49-F238E27FC236}">
-                <a16:creationId xmlns:a16="http://schemas.microsoft.com/office/drawing/2014/main" id="{E13F2328-1E24-9F84-B21F-A84C15474CDC}"/>
+                <a16:creationId xmlns:a16="http://schemas.microsoft.com/office/drawing/2014/main" id="{68C3FE08-65E1-5967-3A26-40C27F69DAA5}"/>
               </a:ext>
             </a:extLst>
           </p:cNvPr>
@@ -5198,7 +5223,7 @@
           <p:cNvPr id="70" name="pattern">
             <a:extLst>
               <a:ext uri="{FF2B5EF4-FFF2-40B4-BE49-F238E27FC236}">
-                <a16:creationId xmlns:a16="http://schemas.microsoft.com/office/drawing/2014/main" id="{FE46C4C0-7B09-A852-5214-CA18C8211C79}"/>
+                <a16:creationId xmlns:a16="http://schemas.microsoft.com/office/drawing/2014/main" id="{2CAB88FB-946A-F2DA-F5F4-4C55DAA6FC47}"/>
               </a:ext>
             </a:extLst>
           </p:cNvPr>
@@ -5266,7 +5291,7 @@
           <p:cNvPr id="71" name="pattern">
             <a:extLst>
               <a:ext uri="{FF2B5EF4-FFF2-40B4-BE49-F238E27FC236}">
-                <a16:creationId xmlns:a16="http://schemas.microsoft.com/office/drawing/2014/main" id="{47F395C7-157D-8029-E760-B074ECF3D820}"/>
+                <a16:creationId xmlns:a16="http://schemas.microsoft.com/office/drawing/2014/main" id="{926C13FE-F558-2A05-5E57-8A8B6847860C}"/>
               </a:ext>
             </a:extLst>
           </p:cNvPr>
@@ -5334,7 +5359,7 @@
           <p:cNvPr id="72" name="pattern">
             <a:extLst>
               <a:ext uri="{FF2B5EF4-FFF2-40B4-BE49-F238E27FC236}">
-                <a16:creationId xmlns:a16="http://schemas.microsoft.com/office/drawing/2014/main" id="{6C442CE4-CF99-996A-51E5-4EC48C6C9A08}"/>
+                <a16:creationId xmlns:a16="http://schemas.microsoft.com/office/drawing/2014/main" id="{C0165CDE-74F3-FE68-14BB-5C26C07C66C8}"/>
               </a:ext>
             </a:extLst>
           </p:cNvPr>
@@ -5402,7 +5427,7 @@
           <p:cNvPr id="73" name="pattern">
             <a:extLst>
               <a:ext uri="{FF2B5EF4-FFF2-40B4-BE49-F238E27FC236}">
-                <a16:creationId xmlns:a16="http://schemas.microsoft.com/office/drawing/2014/main" id="{F20D7983-6557-4880-78AA-0BD2D54088DF}"/>
+                <a16:creationId xmlns:a16="http://schemas.microsoft.com/office/drawing/2014/main" id="{CB45BA18-9322-E3DA-EDFF-54FB38B0C146}"/>
               </a:ext>
             </a:extLst>
           </p:cNvPr>
@@ -5470,7 +5495,7 @@
           <p:cNvPr id="74" name="pattern">
             <a:extLst>
               <a:ext uri="{FF2B5EF4-FFF2-40B4-BE49-F238E27FC236}">
-                <a16:creationId xmlns:a16="http://schemas.microsoft.com/office/drawing/2014/main" id="{4DEF51F6-1098-8CE8-F910-0AA42BF0BF50}"/>
+                <a16:creationId xmlns:a16="http://schemas.microsoft.com/office/drawing/2014/main" id="{C600C2AE-602B-FB25-31AD-F335C6A6CE8C}"/>
               </a:ext>
             </a:extLst>
           </p:cNvPr>
@@ -5538,7 +5563,7 @@
           <p:cNvPr id="75" name="pattern">
             <a:extLst>
               <a:ext uri="{FF2B5EF4-FFF2-40B4-BE49-F238E27FC236}">
-                <a16:creationId xmlns:a16="http://schemas.microsoft.com/office/drawing/2014/main" id="{175585A4-5250-7B33-5CE7-0A6B32684BF6}"/>
+                <a16:creationId xmlns:a16="http://schemas.microsoft.com/office/drawing/2014/main" id="{9ECBF463-2192-E18B-2B7E-0BE179B1B803}"/>
               </a:ext>
             </a:extLst>
           </p:cNvPr>
@@ -5606,7 +5631,7 @@
           <p:cNvPr id="76" name="pattern">
             <a:extLst>
               <a:ext uri="{FF2B5EF4-FFF2-40B4-BE49-F238E27FC236}">
-                <a16:creationId xmlns:a16="http://schemas.microsoft.com/office/drawing/2014/main" id="{2EEAB0D1-DB2E-6E78-8830-F852BB8026BA}"/>
+                <a16:creationId xmlns:a16="http://schemas.microsoft.com/office/drawing/2014/main" id="{98FC7B79-08C7-F5AC-FBE4-B8962BF6F8EA}"/>
               </a:ext>
             </a:extLst>
           </p:cNvPr>
@@ -5674,7 +5699,7 @@
           <p:cNvPr id="77" name="pattern">
             <a:extLst>
               <a:ext uri="{FF2B5EF4-FFF2-40B4-BE49-F238E27FC236}">
-                <a16:creationId xmlns:a16="http://schemas.microsoft.com/office/drawing/2014/main" id="{88ED239A-DAA6-4B23-355C-F4EC15ABA887}"/>
+                <a16:creationId xmlns:a16="http://schemas.microsoft.com/office/drawing/2014/main" id="{00588A35-6C7F-CF17-3ABA-8F8EB2CB87D5}"/>
               </a:ext>
             </a:extLst>
           </p:cNvPr>
@@ -5742,7 +5767,7 @@
           <p:cNvPr id="78" name="pattern">
             <a:extLst>
               <a:ext uri="{FF2B5EF4-FFF2-40B4-BE49-F238E27FC236}">
-                <a16:creationId xmlns:a16="http://schemas.microsoft.com/office/drawing/2014/main" id="{2D97F9D8-8ABA-6136-AFF4-0DD6539E85C1}"/>
+                <a16:creationId xmlns:a16="http://schemas.microsoft.com/office/drawing/2014/main" id="{BA219AD9-AFF0-7980-ECCA-B202A9BF412F}"/>
               </a:ext>
             </a:extLst>
           </p:cNvPr>
@@ -5810,7 +5835,7 @@
           <p:cNvPr id="79" name="pattern">
             <a:extLst>
               <a:ext uri="{FF2B5EF4-FFF2-40B4-BE49-F238E27FC236}">
-                <a16:creationId xmlns:a16="http://schemas.microsoft.com/office/drawing/2014/main" id="{F759A05E-686C-ABD0-6519-FE51439FF8C5}"/>
+                <a16:creationId xmlns:a16="http://schemas.microsoft.com/office/drawing/2014/main" id="{7870AC1E-0D8C-87E0-8748-98D441856886}"/>
               </a:ext>
             </a:extLst>
           </p:cNvPr>
@@ -5878,7 +5903,7 @@
           <p:cNvPr id="80" name="pattern">
             <a:extLst>
               <a:ext uri="{FF2B5EF4-FFF2-40B4-BE49-F238E27FC236}">
-                <a16:creationId xmlns:a16="http://schemas.microsoft.com/office/drawing/2014/main" id="{33EC6925-B429-1CB1-DC9C-21E9183956A6}"/>
+                <a16:creationId xmlns:a16="http://schemas.microsoft.com/office/drawing/2014/main" id="{9DC583FF-8B1B-7BA0-2E06-15DD0F07BAAD}"/>
               </a:ext>
             </a:extLst>
           </p:cNvPr>
@@ -5946,7 +5971,7 @@
           <p:cNvPr id="81" name="pattern">
             <a:extLst>
               <a:ext uri="{FF2B5EF4-FFF2-40B4-BE49-F238E27FC236}">
-                <a16:creationId xmlns:a16="http://schemas.microsoft.com/office/drawing/2014/main" id="{A3EC8821-1E2F-6A8F-E672-D6088159D61B}"/>
+                <a16:creationId xmlns:a16="http://schemas.microsoft.com/office/drawing/2014/main" id="{920D0CDE-7D97-7F74-8BEF-C1B13A77BEBA}"/>
               </a:ext>
             </a:extLst>
           </p:cNvPr>
@@ -6014,7 +6039,7 @@
           <p:cNvPr id="82" name="pattern">
             <a:extLst>
               <a:ext uri="{FF2B5EF4-FFF2-40B4-BE49-F238E27FC236}">
-                <a16:creationId xmlns:a16="http://schemas.microsoft.com/office/drawing/2014/main" id="{02EE8686-064D-C1BA-5C17-E2646B9E9873}"/>
+                <a16:creationId xmlns:a16="http://schemas.microsoft.com/office/drawing/2014/main" id="{5746888B-DFD6-2BE5-1838-7C22C49EC2CD}"/>
               </a:ext>
             </a:extLst>
           </p:cNvPr>
@@ -6082,7 +6107,7 @@
           <p:cNvPr id="83" name="pattern">
             <a:extLst>
               <a:ext uri="{FF2B5EF4-FFF2-40B4-BE49-F238E27FC236}">
-                <a16:creationId xmlns:a16="http://schemas.microsoft.com/office/drawing/2014/main" id="{0EA4790C-65FC-8A57-7475-4856BB090BDC}"/>
+                <a16:creationId xmlns:a16="http://schemas.microsoft.com/office/drawing/2014/main" id="{7430E0D0-262B-E94E-715C-EB7A1404990B}"/>
               </a:ext>
             </a:extLst>
           </p:cNvPr>
@@ -6150,7 +6175,7 @@
           <p:cNvPr id="84" name="pattern">
             <a:extLst>
               <a:ext uri="{FF2B5EF4-FFF2-40B4-BE49-F238E27FC236}">
-                <a16:creationId xmlns:a16="http://schemas.microsoft.com/office/drawing/2014/main" id="{E86FA94A-EF59-98D3-0D60-4659B488144A}"/>
+                <a16:creationId xmlns:a16="http://schemas.microsoft.com/office/drawing/2014/main" id="{7914F503-A70D-3FDD-1C48-FD0902E89770}"/>
               </a:ext>
             </a:extLst>
           </p:cNvPr>
@@ -6218,7 +6243,7 @@
           <p:cNvPr id="85" name="pattern">
             <a:extLst>
               <a:ext uri="{FF2B5EF4-FFF2-40B4-BE49-F238E27FC236}">
-                <a16:creationId xmlns:a16="http://schemas.microsoft.com/office/drawing/2014/main" id="{4B541EE8-A5A6-403D-989C-3828E82192A0}"/>
+                <a16:creationId xmlns:a16="http://schemas.microsoft.com/office/drawing/2014/main" id="{83491B2E-6A4F-A28F-174F-AECA6620FD4B}"/>
               </a:ext>
             </a:extLst>
           </p:cNvPr>
@@ -6286,7 +6311,7 @@
           <p:cNvPr id="86" name="pattern">
             <a:extLst>
               <a:ext uri="{FF2B5EF4-FFF2-40B4-BE49-F238E27FC236}">
-                <a16:creationId xmlns:a16="http://schemas.microsoft.com/office/drawing/2014/main" id="{F4EDB7B7-C5EE-6A8E-6E45-695BD0EB7484}"/>
+                <a16:creationId xmlns:a16="http://schemas.microsoft.com/office/drawing/2014/main" id="{EB6C70A3-7DDA-E35D-5AED-711307889196}"/>
               </a:ext>
             </a:extLst>
           </p:cNvPr>
@@ -6354,7 +6379,7 @@
           <p:cNvPr id="87" name="pattern">
             <a:extLst>
               <a:ext uri="{FF2B5EF4-FFF2-40B4-BE49-F238E27FC236}">
-                <a16:creationId xmlns:a16="http://schemas.microsoft.com/office/drawing/2014/main" id="{B32BC022-ECF0-2BB0-9BA6-5CC4CE0787C3}"/>
+                <a16:creationId xmlns:a16="http://schemas.microsoft.com/office/drawing/2014/main" id="{E0169BFB-4B93-05F6-4631-44B3D2DDD74A}"/>
               </a:ext>
             </a:extLst>
           </p:cNvPr>
@@ -6422,7 +6447,7 @@
           <p:cNvPr id="88" name="pattern">
             <a:extLst>
               <a:ext uri="{FF2B5EF4-FFF2-40B4-BE49-F238E27FC236}">
-                <a16:creationId xmlns:a16="http://schemas.microsoft.com/office/drawing/2014/main" id="{214AA489-78B8-8F98-5131-E4287C736B6D}"/>
+                <a16:creationId xmlns:a16="http://schemas.microsoft.com/office/drawing/2014/main" id="{FDFE8CA5-3312-B513-95DD-78C578AF73D0}"/>
               </a:ext>
             </a:extLst>
           </p:cNvPr>
@@ -6490,7 +6515,7 @@
           <p:cNvPr id="89" name="pattern">
             <a:extLst>
               <a:ext uri="{FF2B5EF4-FFF2-40B4-BE49-F238E27FC236}">
-                <a16:creationId xmlns:a16="http://schemas.microsoft.com/office/drawing/2014/main" id="{93739489-0ECE-C9F2-C8EB-4F667AE34D95}"/>
+                <a16:creationId xmlns:a16="http://schemas.microsoft.com/office/drawing/2014/main" id="{19919B6B-C409-35CC-1F1F-D84C1D8FEFF2}"/>
               </a:ext>
             </a:extLst>
           </p:cNvPr>
@@ -6558,7 +6583,7 @@
           <p:cNvPr id="90" name="pattern">
             <a:extLst>
               <a:ext uri="{FF2B5EF4-FFF2-40B4-BE49-F238E27FC236}">
-                <a16:creationId xmlns:a16="http://schemas.microsoft.com/office/drawing/2014/main" id="{4F59492D-2B58-81DF-B48A-B4263FF40C49}"/>
+                <a16:creationId xmlns:a16="http://schemas.microsoft.com/office/drawing/2014/main" id="{EE038F0B-7AD6-4E44-1A23-F32772CF9CB3}"/>
               </a:ext>
             </a:extLst>
           </p:cNvPr>
@@ -6626,7 +6651,7 @@
           <p:cNvPr id="91" name="pattern">
             <a:extLst>
               <a:ext uri="{FF2B5EF4-FFF2-40B4-BE49-F238E27FC236}">
-                <a16:creationId xmlns:a16="http://schemas.microsoft.com/office/drawing/2014/main" id="{6EC2570E-FB5D-0ACF-CF58-8C885A70B82E}"/>
+                <a16:creationId xmlns:a16="http://schemas.microsoft.com/office/drawing/2014/main" id="{C2D1C170-74CE-5DEE-64F9-179D9DAF7122}"/>
               </a:ext>
             </a:extLst>
           </p:cNvPr>
@@ -6694,7 +6719,7 @@
           <p:cNvPr id="92" name="pattern">
             <a:extLst>
               <a:ext uri="{FF2B5EF4-FFF2-40B4-BE49-F238E27FC236}">
-                <a16:creationId xmlns:a16="http://schemas.microsoft.com/office/drawing/2014/main" id="{B6894D26-C241-1993-EFB4-A47FAE302DA8}"/>
+                <a16:creationId xmlns:a16="http://schemas.microsoft.com/office/drawing/2014/main" id="{D903CB17-6EA3-A8B3-1091-F922D5FECDC6}"/>
               </a:ext>
             </a:extLst>
           </p:cNvPr>
@@ -6762,7 +6787,7 @@
           <p:cNvPr id="93" name="pattern">
             <a:extLst>
               <a:ext uri="{FF2B5EF4-FFF2-40B4-BE49-F238E27FC236}">
-                <a16:creationId xmlns:a16="http://schemas.microsoft.com/office/drawing/2014/main" id="{78D71BA5-3FC7-32E1-25BA-84E11E5FB0B7}"/>
+                <a16:creationId xmlns:a16="http://schemas.microsoft.com/office/drawing/2014/main" id="{E538D1F8-5E0E-C00F-A560-7AD6A1C072DA}"/>
               </a:ext>
             </a:extLst>
           </p:cNvPr>
@@ -6830,7 +6855,7 @@
           <p:cNvPr id="94" name="pattern">
             <a:extLst>
               <a:ext uri="{FF2B5EF4-FFF2-40B4-BE49-F238E27FC236}">
-                <a16:creationId xmlns:a16="http://schemas.microsoft.com/office/drawing/2014/main" id="{B85E0528-E236-C6AC-9107-F39398EBE11C}"/>
+                <a16:creationId xmlns:a16="http://schemas.microsoft.com/office/drawing/2014/main" id="{EEEEBA4A-9DE3-4A95-A4C7-E9EAC6B10492}"/>
               </a:ext>
             </a:extLst>
           </p:cNvPr>
@@ -6898,7 +6923,7 @@
           <p:cNvPr id="95" name="pattern">
             <a:extLst>
               <a:ext uri="{FF2B5EF4-FFF2-40B4-BE49-F238E27FC236}">
-                <a16:creationId xmlns:a16="http://schemas.microsoft.com/office/drawing/2014/main" id="{89CA27AF-1355-7F7A-92A6-A20E36DF4450}"/>
+                <a16:creationId xmlns:a16="http://schemas.microsoft.com/office/drawing/2014/main" id="{3A43E359-F8F7-AF59-612C-714C247C9E05}"/>
               </a:ext>
             </a:extLst>
           </p:cNvPr>
@@ -6966,7 +6991,7 @@
           <p:cNvPr id="96" name="pattern">
             <a:extLst>
               <a:ext uri="{FF2B5EF4-FFF2-40B4-BE49-F238E27FC236}">
-                <a16:creationId xmlns:a16="http://schemas.microsoft.com/office/drawing/2014/main" id="{3259000B-D773-0F5B-EF35-BDB7A6AE9A1A}"/>
+                <a16:creationId xmlns:a16="http://schemas.microsoft.com/office/drawing/2014/main" id="{FDBDA16B-AF2F-7FE2-5B68-4827AE9F476F}"/>
               </a:ext>
             </a:extLst>
           </p:cNvPr>
@@ -7034,7 +7059,7 @@
           <p:cNvPr id="97" name="pattern">
             <a:extLst>
               <a:ext uri="{FF2B5EF4-FFF2-40B4-BE49-F238E27FC236}">
-                <a16:creationId xmlns:a16="http://schemas.microsoft.com/office/drawing/2014/main" id="{1B429A0F-B848-0182-756C-B712D5AA8D26}"/>
+                <a16:creationId xmlns:a16="http://schemas.microsoft.com/office/drawing/2014/main" id="{8CA0DE66-8991-5E20-BF4B-85CC45E000F7}"/>
               </a:ext>
             </a:extLst>
           </p:cNvPr>
@@ -7102,7 +7127,7 @@
           <p:cNvPr id="98" name="pattern">
             <a:extLst>
               <a:ext uri="{FF2B5EF4-FFF2-40B4-BE49-F238E27FC236}">
-                <a16:creationId xmlns:a16="http://schemas.microsoft.com/office/drawing/2014/main" id="{AA1FDECE-F65D-6540-4302-0F6BEF955074}"/>
+                <a16:creationId xmlns:a16="http://schemas.microsoft.com/office/drawing/2014/main" id="{DD139B2B-6D74-6F52-6353-DFC894935C6C}"/>
               </a:ext>
             </a:extLst>
           </p:cNvPr>
@@ -7170,7 +7195,7 @@
           <p:cNvPr id="99" name="pattern">
             <a:extLst>
               <a:ext uri="{FF2B5EF4-FFF2-40B4-BE49-F238E27FC236}">
-                <a16:creationId xmlns:a16="http://schemas.microsoft.com/office/drawing/2014/main" id="{FA16E2D8-4CD7-6846-F86C-0CC0FEBFE781}"/>
+                <a16:creationId xmlns:a16="http://schemas.microsoft.com/office/drawing/2014/main" id="{339C4164-712F-E0F6-77B2-B443599B1FB7}"/>
               </a:ext>
             </a:extLst>
           </p:cNvPr>
@@ -7238,7 +7263,7 @@
           <p:cNvPr id="100" name="pattern">
             <a:extLst>
               <a:ext uri="{FF2B5EF4-FFF2-40B4-BE49-F238E27FC236}">
-                <a16:creationId xmlns:a16="http://schemas.microsoft.com/office/drawing/2014/main" id="{E6C71202-40E8-AC6A-7609-2C3C998FDD56}"/>
+                <a16:creationId xmlns:a16="http://schemas.microsoft.com/office/drawing/2014/main" id="{6D5A86BC-14A7-9510-E964-591E85BABBDD}"/>
               </a:ext>
             </a:extLst>
           </p:cNvPr>
@@ -7306,7 +7331,7 @@
           <p:cNvPr id="101" name="pattern">
             <a:extLst>
               <a:ext uri="{FF2B5EF4-FFF2-40B4-BE49-F238E27FC236}">
-                <a16:creationId xmlns:a16="http://schemas.microsoft.com/office/drawing/2014/main" id="{B77D405F-B52C-F121-97EF-54A3407DC6CB}"/>
+                <a16:creationId xmlns:a16="http://schemas.microsoft.com/office/drawing/2014/main" id="{ADEF08D3-F98B-2FF8-C037-27B2A5D7C4AE}"/>
               </a:ext>
             </a:extLst>
           </p:cNvPr>
@@ -7374,7 +7399,7 @@
           <p:cNvPr id="102" name="pattern">
             <a:extLst>
               <a:ext uri="{FF2B5EF4-FFF2-40B4-BE49-F238E27FC236}">
-                <a16:creationId xmlns:a16="http://schemas.microsoft.com/office/drawing/2014/main" id="{63385568-3A79-4CCB-F2C2-2E8EB4178672}"/>
+                <a16:creationId xmlns:a16="http://schemas.microsoft.com/office/drawing/2014/main" id="{612301DC-A8D8-1CE8-2AE4-35557E88B84C}"/>
               </a:ext>
             </a:extLst>
           </p:cNvPr>
@@ -7442,7 +7467,7 @@
           <p:cNvPr id="103" name="pattern">
             <a:extLst>
               <a:ext uri="{FF2B5EF4-FFF2-40B4-BE49-F238E27FC236}">
-                <a16:creationId xmlns:a16="http://schemas.microsoft.com/office/drawing/2014/main" id="{11D75F8D-8854-E5EE-D8DA-6D322ECE4EDD}"/>
+                <a16:creationId xmlns:a16="http://schemas.microsoft.com/office/drawing/2014/main" id="{07ACB345-156E-A40C-2D29-5DE153BFE2DD}"/>
               </a:ext>
             </a:extLst>
           </p:cNvPr>
@@ -7510,7 +7535,7 @@
           <p:cNvPr id="104" name="pattern">
             <a:extLst>
               <a:ext uri="{FF2B5EF4-FFF2-40B4-BE49-F238E27FC236}">
-                <a16:creationId xmlns:a16="http://schemas.microsoft.com/office/drawing/2014/main" id="{FAE69898-8CDB-EB75-0464-CDBEA452213E}"/>
+                <a16:creationId xmlns:a16="http://schemas.microsoft.com/office/drawing/2014/main" id="{DC90F5C1-C3AB-0660-44CD-4BA9E9DA0A58}"/>
               </a:ext>
             </a:extLst>
           </p:cNvPr>
@@ -7578,7 +7603,7 @@
           <p:cNvPr id="105" name="pattern">
             <a:extLst>
               <a:ext uri="{FF2B5EF4-FFF2-40B4-BE49-F238E27FC236}">
-                <a16:creationId xmlns:a16="http://schemas.microsoft.com/office/drawing/2014/main" id="{92740F59-FB57-80D1-A25E-7820297EAF6C}"/>
+                <a16:creationId xmlns:a16="http://schemas.microsoft.com/office/drawing/2014/main" id="{E1F22995-0947-8780-C51F-564EB69085D7}"/>
               </a:ext>
             </a:extLst>
           </p:cNvPr>
@@ -7646,7 +7671,7 @@
           <p:cNvPr id="106" name="pattern">
             <a:extLst>
               <a:ext uri="{FF2B5EF4-FFF2-40B4-BE49-F238E27FC236}">
-                <a16:creationId xmlns:a16="http://schemas.microsoft.com/office/drawing/2014/main" id="{9AA5640E-DFEA-A521-0E5D-598E45B7AD28}"/>
+                <a16:creationId xmlns:a16="http://schemas.microsoft.com/office/drawing/2014/main" id="{5B546A8A-10F1-5E6E-DA55-B1C2FB5A9C12}"/>
               </a:ext>
             </a:extLst>
           </p:cNvPr>
@@ -7714,7 +7739,7 @@
           <p:cNvPr id="107" name="pattern">
             <a:extLst>
               <a:ext uri="{FF2B5EF4-FFF2-40B4-BE49-F238E27FC236}">
-                <a16:creationId xmlns:a16="http://schemas.microsoft.com/office/drawing/2014/main" id="{D26A13F4-4BB3-40FC-BE2F-0EDD9F4E296B}"/>
+                <a16:creationId xmlns:a16="http://schemas.microsoft.com/office/drawing/2014/main" id="{30705A6A-F701-0C36-3CF4-5FE2853B2053}"/>
               </a:ext>
             </a:extLst>
           </p:cNvPr>
@@ -7782,7 +7807,7 @@
           <p:cNvPr id="108" name="pattern">
             <a:extLst>
               <a:ext uri="{FF2B5EF4-FFF2-40B4-BE49-F238E27FC236}">
-                <a16:creationId xmlns:a16="http://schemas.microsoft.com/office/drawing/2014/main" id="{45F44359-79FE-C056-B6AA-F9FAF51CDDB7}"/>
+                <a16:creationId xmlns:a16="http://schemas.microsoft.com/office/drawing/2014/main" id="{715E2562-7DF5-50A9-1623-5436F52FF4FC}"/>
               </a:ext>
             </a:extLst>
           </p:cNvPr>
@@ -7850,7 +7875,7 @@
           <p:cNvPr id="109" name="pattern">
             <a:extLst>
               <a:ext uri="{FF2B5EF4-FFF2-40B4-BE49-F238E27FC236}">
-                <a16:creationId xmlns:a16="http://schemas.microsoft.com/office/drawing/2014/main" id="{FF3C2352-71A7-7BD2-D316-BDAA3ED9A5CF}"/>
+                <a16:creationId xmlns:a16="http://schemas.microsoft.com/office/drawing/2014/main" id="{AF975666-489F-F088-F53F-10BB5F9D9242}"/>
               </a:ext>
             </a:extLst>
           </p:cNvPr>
@@ -7918,7 +7943,7 @@
           <p:cNvPr id="110" name="pattern">
             <a:extLst>
               <a:ext uri="{FF2B5EF4-FFF2-40B4-BE49-F238E27FC236}">
-                <a16:creationId xmlns:a16="http://schemas.microsoft.com/office/drawing/2014/main" id="{35D60C3E-2092-C496-9200-EB8A4A1E337D}"/>
+                <a16:creationId xmlns:a16="http://schemas.microsoft.com/office/drawing/2014/main" id="{A7A3D2D3-CA76-317A-3685-07A77B1CAE2A}"/>
               </a:ext>
             </a:extLst>
           </p:cNvPr>
@@ -7986,7 +8011,7 @@
           <p:cNvPr id="111" name="pattern">
             <a:extLst>
               <a:ext uri="{FF2B5EF4-FFF2-40B4-BE49-F238E27FC236}">
-                <a16:creationId xmlns:a16="http://schemas.microsoft.com/office/drawing/2014/main" id="{4FF7EAF5-0FF4-A1B0-4E92-69AA644BEB3F}"/>
+                <a16:creationId xmlns:a16="http://schemas.microsoft.com/office/drawing/2014/main" id="{79EAAF1E-B1BA-C6CD-DAE9-481C8BDA1F60}"/>
               </a:ext>
             </a:extLst>
           </p:cNvPr>
@@ -8054,7 +8079,7 @@
           <p:cNvPr id="112" name="pattern">
             <a:extLst>
               <a:ext uri="{FF2B5EF4-FFF2-40B4-BE49-F238E27FC236}">
-                <a16:creationId xmlns:a16="http://schemas.microsoft.com/office/drawing/2014/main" id="{F90FC4D4-BA0E-AA70-0F21-060CD7FFBC90}"/>
+                <a16:creationId xmlns:a16="http://schemas.microsoft.com/office/drawing/2014/main" id="{2C47B2CC-3F1D-076F-2A36-2FC93D82A696}"/>
               </a:ext>
             </a:extLst>
           </p:cNvPr>
@@ -8122,7 +8147,7 @@
           <p:cNvPr id="113" name="pattern">
             <a:extLst>
               <a:ext uri="{FF2B5EF4-FFF2-40B4-BE49-F238E27FC236}">
-                <a16:creationId xmlns:a16="http://schemas.microsoft.com/office/drawing/2014/main" id="{9E718DD0-DECB-4BD1-90B9-E5977CC8C848}"/>
+                <a16:creationId xmlns:a16="http://schemas.microsoft.com/office/drawing/2014/main" id="{D93C2575-44D6-792C-38F5-628E51352DAA}"/>
               </a:ext>
             </a:extLst>
           </p:cNvPr>
@@ -8190,7 +8215,7 @@
           <p:cNvPr id="114" name="pattern">
             <a:extLst>
               <a:ext uri="{FF2B5EF4-FFF2-40B4-BE49-F238E27FC236}">
-                <a16:creationId xmlns:a16="http://schemas.microsoft.com/office/drawing/2014/main" id="{84FA4A34-29E8-250F-9028-1FAD17D35DF0}"/>
+                <a16:creationId xmlns:a16="http://schemas.microsoft.com/office/drawing/2014/main" id="{0D4936D7-A69B-C17A-695E-DADC77E5F3B7}"/>
               </a:ext>
             </a:extLst>
           </p:cNvPr>
@@ -8258,7 +8283,7 @@
           <p:cNvPr id="115" name="pattern">
             <a:extLst>
               <a:ext uri="{FF2B5EF4-FFF2-40B4-BE49-F238E27FC236}">
-                <a16:creationId xmlns:a16="http://schemas.microsoft.com/office/drawing/2014/main" id="{FB29C57F-B3BC-AD03-74ED-CF11DE2AB265}"/>
+                <a16:creationId xmlns:a16="http://schemas.microsoft.com/office/drawing/2014/main" id="{01ABDC72-FA84-0D33-63CF-40F0A1048C72}"/>
               </a:ext>
             </a:extLst>
           </p:cNvPr>
@@ -8326,7 +8351,7 @@
           <p:cNvPr id="116" name="pattern">
             <a:extLst>
               <a:ext uri="{FF2B5EF4-FFF2-40B4-BE49-F238E27FC236}">
-                <a16:creationId xmlns:a16="http://schemas.microsoft.com/office/drawing/2014/main" id="{5526B858-6919-04A2-D892-6F30C189987B}"/>
+                <a16:creationId xmlns:a16="http://schemas.microsoft.com/office/drawing/2014/main" id="{D93F1AC6-D8FC-2C21-CB1B-06FCF04B3B78}"/>
               </a:ext>
             </a:extLst>
           </p:cNvPr>
@@ -8394,7 +8419,7 @@
           <p:cNvPr id="117" name="pattern">
             <a:extLst>
               <a:ext uri="{FF2B5EF4-FFF2-40B4-BE49-F238E27FC236}">
-                <a16:creationId xmlns:a16="http://schemas.microsoft.com/office/drawing/2014/main" id="{36F5F6BF-2900-B096-162C-5742B9695062}"/>
+                <a16:creationId xmlns:a16="http://schemas.microsoft.com/office/drawing/2014/main" id="{060466AD-89ED-31DC-B568-04D969F5FC92}"/>
               </a:ext>
             </a:extLst>
           </p:cNvPr>
@@ -8462,7 +8487,7 @@
           <p:cNvPr id="118" name="pattern">
             <a:extLst>
               <a:ext uri="{FF2B5EF4-FFF2-40B4-BE49-F238E27FC236}">
-                <a16:creationId xmlns:a16="http://schemas.microsoft.com/office/drawing/2014/main" id="{A060BAC4-B078-E0E6-D5E8-A033C745D24E}"/>
+                <a16:creationId xmlns:a16="http://schemas.microsoft.com/office/drawing/2014/main" id="{13612DBE-2C58-EF7C-EAFC-969F892E960A}"/>
               </a:ext>
             </a:extLst>
           </p:cNvPr>
@@ -8530,7 +8555,7 @@
           <p:cNvPr id="119" name="pattern">
             <a:extLst>
               <a:ext uri="{FF2B5EF4-FFF2-40B4-BE49-F238E27FC236}">
-                <a16:creationId xmlns:a16="http://schemas.microsoft.com/office/drawing/2014/main" id="{C5F581F6-F1D1-91E9-A4F4-DF533567F6A5}"/>
+                <a16:creationId xmlns:a16="http://schemas.microsoft.com/office/drawing/2014/main" id="{A158CB72-3547-881C-5772-97480DC02751}"/>
               </a:ext>
             </a:extLst>
           </p:cNvPr>
@@ -8598,7 +8623,7 @@
           <p:cNvPr id="120" name="pattern">
             <a:extLst>
               <a:ext uri="{FF2B5EF4-FFF2-40B4-BE49-F238E27FC236}">
-                <a16:creationId xmlns:a16="http://schemas.microsoft.com/office/drawing/2014/main" id="{6A87D4D4-C6AB-2B63-EF87-65091F1B1495}"/>
+                <a16:creationId xmlns:a16="http://schemas.microsoft.com/office/drawing/2014/main" id="{45495684-907C-62A7-5321-72E08761B772}"/>
               </a:ext>
             </a:extLst>
           </p:cNvPr>
@@ -8666,7 +8691,7 @@
           <p:cNvPr id="121" name="pattern">
             <a:extLst>
               <a:ext uri="{FF2B5EF4-FFF2-40B4-BE49-F238E27FC236}">
-                <a16:creationId xmlns:a16="http://schemas.microsoft.com/office/drawing/2014/main" id="{89647C81-5710-3C2C-9C70-1836741D4904}"/>
+                <a16:creationId xmlns:a16="http://schemas.microsoft.com/office/drawing/2014/main" id="{11EEF196-9FCD-FB6B-EA0A-7B27529072BE}"/>
               </a:ext>
             </a:extLst>
           </p:cNvPr>
@@ -8734,7 +8759,7 @@
           <p:cNvPr id="122" name="pattern">
             <a:extLst>
               <a:ext uri="{FF2B5EF4-FFF2-40B4-BE49-F238E27FC236}">
-                <a16:creationId xmlns:a16="http://schemas.microsoft.com/office/drawing/2014/main" id="{B91EC006-99BE-9ADF-E0D5-7097BAA7BEEA}"/>
+                <a16:creationId xmlns:a16="http://schemas.microsoft.com/office/drawing/2014/main" id="{94226140-EEEA-2B5D-8083-FD537B0E98C7}"/>
               </a:ext>
             </a:extLst>
           </p:cNvPr>
@@ -8802,7 +8827,7 @@
           <p:cNvPr id="123" name="pattern">
             <a:extLst>
               <a:ext uri="{FF2B5EF4-FFF2-40B4-BE49-F238E27FC236}">
-                <a16:creationId xmlns:a16="http://schemas.microsoft.com/office/drawing/2014/main" id="{129F49F8-805D-D8C9-08D5-AC431CDD0130}"/>
+                <a16:creationId xmlns:a16="http://schemas.microsoft.com/office/drawing/2014/main" id="{430BD7BA-8F4F-D724-5735-4DAC3538F480}"/>
               </a:ext>
             </a:extLst>
           </p:cNvPr>
@@ -8870,7 +8895,7 @@
           <p:cNvPr id="124" name="pattern">
             <a:extLst>
               <a:ext uri="{FF2B5EF4-FFF2-40B4-BE49-F238E27FC236}">
-                <a16:creationId xmlns:a16="http://schemas.microsoft.com/office/drawing/2014/main" id="{AB96E242-CEBD-467C-9B17-53A362872F70}"/>
+                <a16:creationId xmlns:a16="http://schemas.microsoft.com/office/drawing/2014/main" id="{B9C956A6-0D9F-B275-2312-B639B25F9A1A}"/>
               </a:ext>
             </a:extLst>
           </p:cNvPr>
@@ -8938,7 +8963,7 @@
           <p:cNvPr id="125" name="pattern">
             <a:extLst>
               <a:ext uri="{FF2B5EF4-FFF2-40B4-BE49-F238E27FC236}">
-                <a16:creationId xmlns:a16="http://schemas.microsoft.com/office/drawing/2014/main" id="{6F0DBE19-6C93-06CD-40AA-3D75412412B0}"/>
+                <a16:creationId xmlns:a16="http://schemas.microsoft.com/office/drawing/2014/main" id="{35B2A67A-DF2F-8141-6E95-A4BA37DD8091}"/>
               </a:ext>
             </a:extLst>
           </p:cNvPr>
@@ -9006,7 +9031,7 @@
           <p:cNvPr id="126" name="pattern">
             <a:extLst>
               <a:ext uri="{FF2B5EF4-FFF2-40B4-BE49-F238E27FC236}">
-                <a16:creationId xmlns:a16="http://schemas.microsoft.com/office/drawing/2014/main" id="{6D693455-1356-F44B-F54F-B9AC09C535A9}"/>
+                <a16:creationId xmlns:a16="http://schemas.microsoft.com/office/drawing/2014/main" id="{57FCCCCF-7A78-0855-E55B-25A04D1B03AA}"/>
               </a:ext>
             </a:extLst>
           </p:cNvPr>
@@ -9074,7 +9099,7 @@
           <p:cNvPr id="127" name="pattern">
             <a:extLst>
               <a:ext uri="{FF2B5EF4-FFF2-40B4-BE49-F238E27FC236}">
-                <a16:creationId xmlns:a16="http://schemas.microsoft.com/office/drawing/2014/main" id="{486BE4A0-1191-9C0F-F28D-177391BE655B}"/>
+                <a16:creationId xmlns:a16="http://schemas.microsoft.com/office/drawing/2014/main" id="{3D0A8640-513F-9742-C441-90BFBFECBE25}"/>
               </a:ext>
             </a:extLst>
           </p:cNvPr>
@@ -9142,7 +9167,7 @@
           <p:cNvPr id="128" name="pattern">
             <a:extLst>
               <a:ext uri="{FF2B5EF4-FFF2-40B4-BE49-F238E27FC236}">
-                <a16:creationId xmlns:a16="http://schemas.microsoft.com/office/drawing/2014/main" id="{C04F874A-1B98-1610-C9ED-521D8FF33C9A}"/>
+                <a16:creationId xmlns:a16="http://schemas.microsoft.com/office/drawing/2014/main" id="{6A22AD30-09BC-1A6B-5B68-CD6C6C79D56F}"/>
               </a:ext>
             </a:extLst>
           </p:cNvPr>
@@ -9210,7 +9235,7 @@
           <p:cNvPr id="129" name="pattern">
             <a:extLst>
               <a:ext uri="{FF2B5EF4-FFF2-40B4-BE49-F238E27FC236}">
-                <a16:creationId xmlns:a16="http://schemas.microsoft.com/office/drawing/2014/main" id="{215A58EA-3EAC-72EC-31B5-5970AE324D83}"/>
+                <a16:creationId xmlns:a16="http://schemas.microsoft.com/office/drawing/2014/main" id="{EFD758B5-6D43-B5E3-078C-5B158D2B4D02}"/>
               </a:ext>
             </a:extLst>
           </p:cNvPr>
@@ -9278,7 +9303,7 @@
           <p:cNvPr id="130" name="pattern">
             <a:extLst>
               <a:ext uri="{FF2B5EF4-FFF2-40B4-BE49-F238E27FC236}">
-                <a16:creationId xmlns:a16="http://schemas.microsoft.com/office/drawing/2014/main" id="{F1D537F3-5FAE-DBCF-508C-AB0948E93EFE}"/>
+                <a16:creationId xmlns:a16="http://schemas.microsoft.com/office/drawing/2014/main" id="{7507BEAF-AD0A-9A94-BB03-7141D5F4EFFD}"/>
               </a:ext>
             </a:extLst>
           </p:cNvPr>
@@ -9346,7 +9371,7 @@
           <p:cNvPr id="131" name="pattern">
             <a:extLst>
               <a:ext uri="{FF2B5EF4-FFF2-40B4-BE49-F238E27FC236}">
-                <a16:creationId xmlns:a16="http://schemas.microsoft.com/office/drawing/2014/main" id="{F28FAF37-D07C-8029-DD4D-779EA9FAADEC}"/>
+                <a16:creationId xmlns:a16="http://schemas.microsoft.com/office/drawing/2014/main" id="{8C4665BF-7D96-F39D-34FA-252C7BE78296}"/>
               </a:ext>
             </a:extLst>
           </p:cNvPr>
@@ -9414,7 +9439,7 @@
           <p:cNvPr id="132" name="pattern">
             <a:extLst>
               <a:ext uri="{FF2B5EF4-FFF2-40B4-BE49-F238E27FC236}">
-                <a16:creationId xmlns:a16="http://schemas.microsoft.com/office/drawing/2014/main" id="{921A991C-C9B6-FC3A-09EA-53C798C47C39}"/>
+                <a16:creationId xmlns:a16="http://schemas.microsoft.com/office/drawing/2014/main" id="{DDA314C8-EC76-66E3-4351-82EEC04B1293}"/>
               </a:ext>
             </a:extLst>
           </p:cNvPr>
@@ -9482,7 +9507,7 @@
           <p:cNvPr id="133" name="pattern">
             <a:extLst>
               <a:ext uri="{FF2B5EF4-FFF2-40B4-BE49-F238E27FC236}">
-                <a16:creationId xmlns:a16="http://schemas.microsoft.com/office/drawing/2014/main" id="{329A9367-B89D-CF06-49DB-E16F4783FB3C}"/>
+                <a16:creationId xmlns:a16="http://schemas.microsoft.com/office/drawing/2014/main" id="{4AE8C024-7740-29A3-B2E6-1E428A4CE682}"/>
               </a:ext>
             </a:extLst>
           </p:cNvPr>
@@ -9550,7 +9575,7 @@
           <p:cNvPr id="134" name="pattern">
             <a:extLst>
               <a:ext uri="{FF2B5EF4-FFF2-40B4-BE49-F238E27FC236}">
-                <a16:creationId xmlns:a16="http://schemas.microsoft.com/office/drawing/2014/main" id="{490B497D-3F70-99E9-75C7-A6A601158875}"/>
+                <a16:creationId xmlns:a16="http://schemas.microsoft.com/office/drawing/2014/main" id="{A37A14FF-0D0F-2715-E404-1994F5BAAEBA}"/>
               </a:ext>
             </a:extLst>
           </p:cNvPr>
@@ -9618,7 +9643,7 @@
           <p:cNvPr id="135" name="pattern">
             <a:extLst>
               <a:ext uri="{FF2B5EF4-FFF2-40B4-BE49-F238E27FC236}">
-                <a16:creationId xmlns:a16="http://schemas.microsoft.com/office/drawing/2014/main" id="{BA19A917-BDEA-C928-4747-114D4949E2D6}"/>
+                <a16:creationId xmlns:a16="http://schemas.microsoft.com/office/drawing/2014/main" id="{796F66A0-B59A-8CE3-6061-2FDD9F295F9D}"/>
               </a:ext>
             </a:extLst>
           </p:cNvPr>
@@ -9684,7 +9709,7 @@
     </p:spTree>
     <p:extLst>
       <p:ext uri="{BB962C8B-B14F-4D97-AF65-F5344CB8AC3E}">
-        <p14:creationId xmlns:p14="http://schemas.microsoft.com/office/powerpoint/2010/main" val="2205525424"/>
+        <p14:creationId xmlns:p14="http://schemas.microsoft.com/office/powerpoint/2010/main" val="337799682"/>
       </p:ext>
     </p:extLst>
   </p:cSld>
@@ -9716,7 +9741,7 @@
           <p:cNvPr id="7" name="creative_background">
             <a:extLst>
               <a:ext uri="{FF2B5EF4-FFF2-40B4-BE49-F238E27FC236}">
-                <a16:creationId xmlns:a16="http://schemas.microsoft.com/office/drawing/2014/main" id="{5047C35A-F864-7FBB-A1BC-88FEE98336CA}"/>
+                <a16:creationId xmlns:a16="http://schemas.microsoft.com/office/drawing/2014/main" id="{78603F49-99B6-5523-F55D-0B87EC251C08}"/>
               </a:ext>
             </a:extLst>
           </p:cNvPr>
@@ -9757,7 +9782,12 @@
             <p:ph type="title"/>
           </p:nvPr>
         </p:nvSpPr>
-        <p:spPr/>
+        <p:spPr>
+          <a:xfrm>
+            <a:off x="2072640" y="585216"/>
+            <a:ext cx="8674100" cy="1499616"/>
+          </a:xfrm>
+        </p:spPr>
         <p:txBody>
           <a:bodyPr/>
           <a:lstStyle>
@@ -9784,12 +9814,17 @@
             <p:ph type="dt" sz="half" idx="10"/>
           </p:nvPr>
         </p:nvSpPr>
-        <p:spPr/>
+        <p:spPr>
+          <a:xfrm>
+            <a:off x="2072640" y="6470704"/>
+            <a:ext cx="1104900" cy="274320"/>
+          </a:xfrm>
+        </p:spPr>
         <p:txBody>
           <a:bodyPr/>
           <a:lstStyle/>
           <a:p>
-            <a:fld id="{0C2FB128-6CE9-48CA-A63B-D694A7BBCE3E}" type="datetimeFigureOut">
+            <a:fld id="{D8887631-421A-4B90-81F4-114CAE3EC1BA}" type="datetimeFigureOut">
               <a:rPr lang="en-US" smtClean="0"/>
               <a:t>10/3/2026</a:t>
             </a:fld>
@@ -9831,7 +9866,7 @@
           <a:bodyPr/>
           <a:lstStyle/>
           <a:p>
-            <a:fld id="{B2E7DF40-EA43-448D-AAC9-8AB76A8B3E4D}" type="slidenum">
+            <a:fld id="{030EC083-285A-4D45-98F3-6009BB62C01A}" type="slidenum">
               <a:rPr lang="en-US" smtClean="0"/>
               <a:t>‹#›</a:t>
             </a:fld>
@@ -9844,7 +9879,7 @@
           <p:cNvPr id="8" name="item_1_title">
             <a:extLst>
               <a:ext uri="{FF2B5EF4-FFF2-40B4-BE49-F238E27FC236}">
-                <a16:creationId xmlns:a16="http://schemas.microsoft.com/office/drawing/2014/main" id="{B6EC0D64-47AC-F789-6668-E91B0831191F}"/>
+                <a16:creationId xmlns:a16="http://schemas.microsoft.com/office/drawing/2014/main" id="{0089A524-F2D0-5727-A60B-7C1E4E255606}"/>
               </a:ext>
             </a:extLst>
           </p:cNvPr>
@@ -9857,8 +9892,8 @@
         </p:nvSpPr>
         <p:spPr>
           <a:xfrm>
-            <a:off x="1148744" y="2419022"/>
-            <a:ext cx="2841252" cy="532083"/>
+            <a:off x="2183814" y="2419022"/>
+            <a:ext cx="2534764" cy="532083"/>
           </a:xfrm>
         </p:spPr>
         <p:txBody>
@@ -9894,7 +9929,7 @@
           <p:cNvPr id="9" name="item_1">
             <a:extLst>
               <a:ext uri="{FF2B5EF4-FFF2-40B4-BE49-F238E27FC236}">
-                <a16:creationId xmlns:a16="http://schemas.microsoft.com/office/drawing/2014/main" id="{1BDC9E2F-3299-96A1-8808-B918CEDB8F17}"/>
+                <a16:creationId xmlns:a16="http://schemas.microsoft.com/office/drawing/2014/main" id="{AB0F9F3B-E5A8-11B0-A098-D31789624890}"/>
               </a:ext>
             </a:extLst>
           </p:cNvPr>
@@ -9907,8 +9942,8 @@
         </p:nvSpPr>
         <p:spPr>
           <a:xfrm>
-            <a:off x="4089691" y="2419022"/>
-            <a:ext cx="6529895" cy="532083"/>
+            <a:off x="4807517" y="2419022"/>
+            <a:ext cx="5825510" cy="532083"/>
           </a:xfrm>
           <a:prstGeom prst="rect">
             <a:avLst/>
@@ -9942,7 +9977,7 @@
           <p:cNvPr id="10" name="item_2_title">
             <a:extLst>
               <a:ext uri="{FF2B5EF4-FFF2-40B4-BE49-F238E27FC236}">
-                <a16:creationId xmlns:a16="http://schemas.microsoft.com/office/drawing/2014/main" id="{C6A42551-5CA4-1D09-AE9A-B5FEEBA8C2EB}"/>
+                <a16:creationId xmlns:a16="http://schemas.microsoft.com/office/drawing/2014/main" id="{64D91349-A3D2-C5E4-4B67-8F2D4CBDF47B}"/>
               </a:ext>
             </a:extLst>
           </p:cNvPr>
@@ -9955,8 +9990,8 @@
         </p:nvSpPr>
         <p:spPr>
           <a:xfrm>
-            <a:off x="1148744" y="3350167"/>
-            <a:ext cx="2841252" cy="532083"/>
+            <a:off x="2183814" y="3350167"/>
+            <a:ext cx="2534764" cy="532083"/>
           </a:xfrm>
           <a:prstGeom prst="rect">
             <a:avLst/>
@@ -9995,7 +10030,7 @@
           <p:cNvPr id="11" name="item_2">
             <a:extLst>
               <a:ext uri="{FF2B5EF4-FFF2-40B4-BE49-F238E27FC236}">
-                <a16:creationId xmlns:a16="http://schemas.microsoft.com/office/drawing/2014/main" id="{0CA2A4EA-A2F7-2775-FAEE-6E03D69E1578}"/>
+                <a16:creationId xmlns:a16="http://schemas.microsoft.com/office/drawing/2014/main" id="{35BAFBEA-696D-8463-D3DF-059BB193B131}"/>
               </a:ext>
             </a:extLst>
           </p:cNvPr>
@@ -10008,8 +10043,8 @@
         </p:nvSpPr>
         <p:spPr>
           <a:xfrm>
-            <a:off x="4089691" y="3350167"/>
-            <a:ext cx="6529895" cy="532083"/>
+            <a:off x="4807517" y="3350167"/>
+            <a:ext cx="5825510" cy="532083"/>
           </a:xfrm>
           <a:prstGeom prst="rect">
             <a:avLst/>
@@ -10043,7 +10078,7 @@
           <p:cNvPr id="12" name="item_3_title">
             <a:extLst>
               <a:ext uri="{FF2B5EF4-FFF2-40B4-BE49-F238E27FC236}">
-                <a16:creationId xmlns:a16="http://schemas.microsoft.com/office/drawing/2014/main" id="{65F3F71D-281D-7131-8352-255205C0505A}"/>
+                <a16:creationId xmlns:a16="http://schemas.microsoft.com/office/drawing/2014/main" id="{7BB491BA-F67C-AB9F-CDCE-790ED48ED478}"/>
               </a:ext>
             </a:extLst>
           </p:cNvPr>
@@ -10056,8 +10091,8 @@
         </p:nvSpPr>
         <p:spPr>
           <a:xfrm>
-            <a:off x="1148744" y="4281312"/>
-            <a:ext cx="2841252" cy="532083"/>
+            <a:off x="2183814" y="4281312"/>
+            <a:ext cx="2534764" cy="532083"/>
           </a:xfrm>
           <a:prstGeom prst="rect">
             <a:avLst/>
@@ -10096,7 +10131,7 @@
           <p:cNvPr id="13" name="item_3">
             <a:extLst>
               <a:ext uri="{FF2B5EF4-FFF2-40B4-BE49-F238E27FC236}">
-                <a16:creationId xmlns:a16="http://schemas.microsoft.com/office/drawing/2014/main" id="{620D5C81-D8A4-455E-5242-934DBD980888}"/>
+                <a16:creationId xmlns:a16="http://schemas.microsoft.com/office/drawing/2014/main" id="{564C8F4C-3F53-0D97-45D3-DFB7C765D7B4}"/>
               </a:ext>
             </a:extLst>
           </p:cNvPr>
@@ -10109,8 +10144,8 @@
         </p:nvSpPr>
         <p:spPr>
           <a:xfrm>
-            <a:off x="4089691" y="4281312"/>
-            <a:ext cx="6529895" cy="532083"/>
+            <a:off x="4807517" y="4281312"/>
+            <a:ext cx="5825510" cy="532083"/>
           </a:xfrm>
           <a:prstGeom prst="rect">
             <a:avLst/>
@@ -10144,7 +10179,7 @@
           <p:cNvPr id="14" name="item_4_title">
             <a:extLst>
               <a:ext uri="{FF2B5EF4-FFF2-40B4-BE49-F238E27FC236}">
-                <a16:creationId xmlns:a16="http://schemas.microsoft.com/office/drawing/2014/main" id="{92E6501D-413C-D490-D7FD-5AFEE0C9A37C}"/>
+                <a16:creationId xmlns:a16="http://schemas.microsoft.com/office/drawing/2014/main" id="{4D4C7095-D671-64EA-EC8F-E2C156B37D91}"/>
               </a:ext>
             </a:extLst>
           </p:cNvPr>
@@ -10157,8 +10192,8 @@
         </p:nvSpPr>
         <p:spPr>
           <a:xfrm>
-            <a:off x="1148744" y="5212457"/>
-            <a:ext cx="2841252" cy="532083"/>
+            <a:off x="2183814" y="5212457"/>
+            <a:ext cx="2534764" cy="532083"/>
           </a:xfrm>
           <a:prstGeom prst="rect">
             <a:avLst/>
@@ -10197,7 +10232,7 @@
           <p:cNvPr id="15" name="item_4">
             <a:extLst>
               <a:ext uri="{FF2B5EF4-FFF2-40B4-BE49-F238E27FC236}">
-                <a16:creationId xmlns:a16="http://schemas.microsoft.com/office/drawing/2014/main" id="{6A122695-4F97-85F4-08F7-A707E293627E}"/>
+                <a16:creationId xmlns:a16="http://schemas.microsoft.com/office/drawing/2014/main" id="{1CC551E1-D3F0-AA64-D86D-DE0BC0A88116}"/>
               </a:ext>
             </a:extLst>
           </p:cNvPr>
@@ -10210,8 +10245,8 @@
         </p:nvSpPr>
         <p:spPr>
           <a:xfrm>
-            <a:off x="4089691" y="5212457"/>
-            <a:ext cx="6529895" cy="532083"/>
+            <a:off x="4807517" y="5212457"/>
+            <a:ext cx="5825510" cy="532083"/>
           </a:xfrm>
           <a:prstGeom prst="rect">
             <a:avLst/>
@@ -10245,7 +10280,7 @@
           <p:cNvPr id="16" name="source">
             <a:extLst>
               <a:ext uri="{FF2B5EF4-FFF2-40B4-BE49-F238E27FC236}">
-                <a16:creationId xmlns:a16="http://schemas.microsoft.com/office/drawing/2014/main" id="{9044F81D-1BEE-545F-A899-A2ECA778C808}"/>
+                <a16:creationId xmlns:a16="http://schemas.microsoft.com/office/drawing/2014/main" id="{B5F5E7A2-DF62-2AE8-CBF4-081008AC445C}"/>
               </a:ext>
             </a:extLst>
           </p:cNvPr>
@@ -10258,7 +10293,7 @@
         </p:nvSpPr>
         <p:spPr>
           <a:xfrm>
-            <a:off x="1024128" y="6004560"/>
+            <a:off x="2072640" y="6004560"/>
             <a:ext cx="1905000" cy="304800"/>
           </a:xfrm>
           <a:prstGeom prst="roundRect">
@@ -10300,7 +10335,7 @@
     </p:spTree>
     <p:extLst>
       <p:ext uri="{BB962C8B-B14F-4D97-AF65-F5344CB8AC3E}">
-        <p14:creationId xmlns:p14="http://schemas.microsoft.com/office/powerpoint/2010/main" val="660385533"/>
+        <p14:creationId xmlns:p14="http://schemas.microsoft.com/office/powerpoint/2010/main" val="1200283526"/>
       </p:ext>
     </p:extLst>
   </p:cSld>
@@ -10332,7 +10367,7 @@
           <p:cNvPr id="7" name="creative_background">
             <a:extLst>
               <a:ext uri="{FF2B5EF4-FFF2-40B4-BE49-F238E27FC236}">
-                <a16:creationId xmlns:a16="http://schemas.microsoft.com/office/drawing/2014/main" id="{885465CA-90B5-4000-47F3-87346B222B55}"/>
+                <a16:creationId xmlns:a16="http://schemas.microsoft.com/office/drawing/2014/main" id="{3A6BA556-0BC7-6E28-E1D3-18121E215535}"/>
               </a:ext>
             </a:extLst>
           </p:cNvPr>
@@ -10373,7 +10408,12 @@
             <p:ph type="title"/>
           </p:nvPr>
         </p:nvSpPr>
-        <p:spPr/>
+        <p:spPr>
+          <a:xfrm>
+            <a:off x="2072640" y="585216"/>
+            <a:ext cx="8674100" cy="1499616"/>
+          </a:xfrm>
+        </p:spPr>
         <p:txBody>
           <a:bodyPr/>
           <a:lstStyle>
@@ -10400,12 +10440,17 @@
             <p:ph type="dt" sz="half" idx="10"/>
           </p:nvPr>
         </p:nvSpPr>
-        <p:spPr/>
+        <p:spPr>
+          <a:xfrm>
+            <a:off x="2072640" y="6470704"/>
+            <a:ext cx="1104900" cy="274320"/>
+          </a:xfrm>
+        </p:spPr>
         <p:txBody>
           <a:bodyPr/>
           <a:lstStyle/>
           <a:p>
-            <a:fld id="{0C2FB128-6CE9-48CA-A63B-D694A7BBCE3E}" type="datetimeFigureOut">
+            <a:fld id="{D8887631-421A-4B90-81F4-114CAE3EC1BA}" type="datetimeFigureOut">
               <a:rPr lang="en-US" smtClean="0"/>
               <a:t>10/3/2026</a:t>
             </a:fld>
@@ -10447,7 +10492,7 @@
           <a:bodyPr/>
           <a:lstStyle/>
           <a:p>
-            <a:fld id="{B2E7DF40-EA43-448D-AAC9-8AB76A8B3E4D}" type="slidenum">
+            <a:fld id="{030EC083-285A-4D45-98F3-6009BB62C01A}" type="slidenum">
               <a:rPr lang="en-US" smtClean="0"/>
               <a:t>‹#›</a:t>
             </a:fld>
@@ -10460,7 +10505,7 @@
           <p:cNvPr id="8" name="body">
             <a:extLst>
               <a:ext uri="{FF2B5EF4-FFF2-40B4-BE49-F238E27FC236}">
-                <a16:creationId xmlns:a16="http://schemas.microsoft.com/office/drawing/2014/main" id="{0B259A79-E006-AF6D-C2A6-F89118A7A38F}"/>
+                <a16:creationId xmlns:a16="http://schemas.microsoft.com/office/drawing/2014/main" id="{502BC4DA-3574-4D47-66FC-90A489FA32E9}"/>
               </a:ext>
             </a:extLst>
           </p:cNvPr>
@@ -10473,8 +10518,8 @@
         </p:nvSpPr>
         <p:spPr>
           <a:xfrm>
-            <a:off x="1024128" y="2286000"/>
-            <a:ext cx="9720073" cy="3591560"/>
+            <a:off x="2072640" y="2286000"/>
+            <a:ext cx="8671561" cy="3591560"/>
           </a:xfrm>
         </p:spPr>
         <p:txBody>
@@ -10505,7 +10550,7 @@
           <p:cNvPr id="9" name="source">
             <a:extLst>
               <a:ext uri="{FF2B5EF4-FFF2-40B4-BE49-F238E27FC236}">
-                <a16:creationId xmlns:a16="http://schemas.microsoft.com/office/drawing/2014/main" id="{A9A3EAFD-A299-CDD6-17FE-45A53AB12ABD}"/>
+                <a16:creationId xmlns:a16="http://schemas.microsoft.com/office/drawing/2014/main" id="{A5E59367-109A-1329-93C8-4C4FA39A0585}"/>
               </a:ext>
             </a:extLst>
           </p:cNvPr>
@@ -10518,7 +10563,7 @@
         </p:nvSpPr>
         <p:spPr>
           <a:xfrm>
-            <a:off x="1024128" y="6004560"/>
+            <a:off x="2072640" y="6004560"/>
             <a:ext cx="1905000" cy="304800"/>
           </a:xfrm>
           <a:prstGeom prst="roundRect">
@@ -10560,7 +10605,7 @@
     </p:spTree>
     <p:extLst>
       <p:ext uri="{BB962C8B-B14F-4D97-AF65-F5344CB8AC3E}">
-        <p14:creationId xmlns:p14="http://schemas.microsoft.com/office/powerpoint/2010/main" val="2212494331"/>
+        <p14:creationId xmlns:p14="http://schemas.microsoft.com/office/powerpoint/2010/main" val="3617757885"/>
       </p:ext>
     </p:extLst>
   </p:cSld>
@@ -10592,7 +10637,7 @@
           <p:cNvPr id="7" name="creative_background">
             <a:extLst>
               <a:ext uri="{FF2B5EF4-FFF2-40B4-BE49-F238E27FC236}">
-                <a16:creationId xmlns:a16="http://schemas.microsoft.com/office/drawing/2014/main" id="{F87AD16B-04EF-4E85-E207-DAB57F209F7B}"/>
+                <a16:creationId xmlns:a16="http://schemas.microsoft.com/office/drawing/2014/main" id="{8B2B5949-4562-5A7C-6B01-6312E93FBDB3}"/>
               </a:ext>
             </a:extLst>
           </p:cNvPr>
@@ -10633,7 +10678,12 @@
             <p:ph type="title"/>
           </p:nvPr>
         </p:nvSpPr>
-        <p:spPr/>
+        <p:spPr>
+          <a:xfrm>
+            <a:off x="2072640" y="585216"/>
+            <a:ext cx="8674100" cy="1499616"/>
+          </a:xfrm>
+        </p:spPr>
         <p:txBody>
           <a:bodyPr/>
           <a:lstStyle>
@@ -10660,12 +10710,17 @@
             <p:ph type="dt" sz="half" idx="10"/>
           </p:nvPr>
         </p:nvSpPr>
-        <p:spPr/>
+        <p:spPr>
+          <a:xfrm>
+            <a:off x="2072640" y="6470704"/>
+            <a:ext cx="1104900" cy="274320"/>
+          </a:xfrm>
+        </p:spPr>
         <p:txBody>
           <a:bodyPr/>
           <a:lstStyle/>
           <a:p>
-            <a:fld id="{0C2FB128-6CE9-48CA-A63B-D694A7BBCE3E}" type="datetimeFigureOut">
+            <a:fld id="{D8887631-421A-4B90-81F4-114CAE3EC1BA}" type="datetimeFigureOut">
               <a:rPr lang="en-US" smtClean="0"/>
               <a:t>10/3/2026</a:t>
             </a:fld>
@@ -10707,7 +10762,7 @@
           <a:bodyPr/>
           <a:lstStyle/>
           <a:p>
-            <a:fld id="{B2E7DF40-EA43-448D-AAC9-8AB76A8B3E4D}" type="slidenum">
+            <a:fld id="{030EC083-285A-4D45-98F3-6009BB62C01A}" type="slidenum">
               <a:rPr lang="en-US" smtClean="0"/>
               <a:t>‹#›</a:t>
             </a:fld>
@@ -10720,7 +10775,7 @@
           <p:cNvPr id="8" name="item_1_title">
             <a:extLst>
               <a:ext uri="{FF2B5EF4-FFF2-40B4-BE49-F238E27FC236}">
-                <a16:creationId xmlns:a16="http://schemas.microsoft.com/office/drawing/2014/main" id="{D6E126AB-C595-5299-4958-D0F534DBE7E4}"/>
+                <a16:creationId xmlns:a16="http://schemas.microsoft.com/office/drawing/2014/main" id="{F8B8DCEC-A5D3-9D99-47E4-9E95168880FA}"/>
               </a:ext>
             </a:extLst>
           </p:cNvPr>
@@ -10733,8 +10788,8 @@
         </p:nvSpPr>
         <p:spPr>
           <a:xfrm>
-            <a:off x="1198591" y="2472230"/>
-            <a:ext cx="4411418" cy="387325"/>
+            <a:off x="2228283" y="2472230"/>
+            <a:ext cx="3935555" cy="387325"/>
           </a:xfrm>
         </p:spPr>
         <p:txBody>
@@ -10770,7 +10825,7 @@
           <p:cNvPr id="9" name="item_1">
             <a:extLst>
               <a:ext uri="{FF2B5EF4-FFF2-40B4-BE49-F238E27FC236}">
-                <a16:creationId xmlns:a16="http://schemas.microsoft.com/office/drawing/2014/main" id="{D13FA25E-9E9C-4272-60BF-5DF57690C59F}"/>
+                <a16:creationId xmlns:a16="http://schemas.microsoft.com/office/drawing/2014/main" id="{334C697F-0F53-D125-B64A-38AA143F672C}"/>
               </a:ext>
             </a:extLst>
           </p:cNvPr>
@@ -10783,8 +10838,8 @@
         </p:nvSpPr>
         <p:spPr>
           <a:xfrm>
-            <a:off x="1198591" y="2859554"/>
-            <a:ext cx="4411418" cy="929580"/>
+            <a:off x="2228284" y="2859554"/>
+            <a:ext cx="3935555" cy="929580"/>
           </a:xfrm>
           <a:prstGeom prst="rect">
             <a:avLst/>
@@ -10818,7 +10873,7 @@
           <p:cNvPr id="10" name="item_2_title">
             <a:extLst>
               <a:ext uri="{FF2B5EF4-FFF2-40B4-BE49-F238E27FC236}">
-                <a16:creationId xmlns:a16="http://schemas.microsoft.com/office/drawing/2014/main" id="{E9E60FA8-9E34-E6C4-5624-BDCD51C2790A}"/>
+                <a16:creationId xmlns:a16="http://schemas.microsoft.com/office/drawing/2014/main" id="{23BE62A1-0220-89F4-14E0-C3F1893E1C7F}"/>
               </a:ext>
             </a:extLst>
           </p:cNvPr>
@@ -10831,8 +10886,8 @@
         </p:nvSpPr>
         <p:spPr>
           <a:xfrm>
-            <a:off x="6158321" y="2472230"/>
-            <a:ext cx="4411418" cy="387325"/>
+            <a:off x="6653004" y="2472230"/>
+            <a:ext cx="3935555" cy="387325"/>
           </a:xfrm>
           <a:prstGeom prst="rect">
             <a:avLst/>
@@ -10871,7 +10926,7 @@
           <p:cNvPr id="11" name="item_2">
             <a:extLst>
               <a:ext uri="{FF2B5EF4-FFF2-40B4-BE49-F238E27FC236}">
-                <a16:creationId xmlns:a16="http://schemas.microsoft.com/office/drawing/2014/main" id="{3E3F7D01-9A9B-8821-2E81-07AE4E04201E}"/>
+                <a16:creationId xmlns:a16="http://schemas.microsoft.com/office/drawing/2014/main" id="{C7B78F10-8F04-2D56-0ED2-90A007343525}"/>
               </a:ext>
             </a:extLst>
           </p:cNvPr>
@@ -10884,8 +10939,8 @@
         </p:nvSpPr>
         <p:spPr>
           <a:xfrm>
-            <a:off x="6158321" y="2859554"/>
-            <a:ext cx="4411418" cy="929580"/>
+            <a:off x="6653004" y="2859554"/>
+            <a:ext cx="3935555" cy="929580"/>
           </a:xfrm>
           <a:prstGeom prst="rect">
             <a:avLst/>
@@ -10919,7 +10974,7 @@
           <p:cNvPr id="12" name="item_3_title">
             <a:extLst>
               <a:ext uri="{FF2B5EF4-FFF2-40B4-BE49-F238E27FC236}">
-                <a16:creationId xmlns:a16="http://schemas.microsoft.com/office/drawing/2014/main" id="{7EB1EC0B-E909-54BA-F2E3-1A11E0D78060}"/>
+                <a16:creationId xmlns:a16="http://schemas.microsoft.com/office/drawing/2014/main" id="{9B709E6D-86D4-4B59-3E73-963445736CFD}"/>
               </a:ext>
             </a:extLst>
           </p:cNvPr>
@@ -10932,8 +10987,8 @@
         </p:nvSpPr>
         <p:spPr>
           <a:xfrm>
-            <a:off x="1198591" y="4374427"/>
-            <a:ext cx="4411418" cy="387325"/>
+            <a:off x="2228284" y="4374427"/>
+            <a:ext cx="3935555" cy="387325"/>
           </a:xfrm>
           <a:prstGeom prst="rect">
             <a:avLst/>
@@ -10972,7 +11027,7 @@
           <p:cNvPr id="13" name="item_3">
             <a:extLst>
               <a:ext uri="{FF2B5EF4-FFF2-40B4-BE49-F238E27FC236}">
-                <a16:creationId xmlns:a16="http://schemas.microsoft.com/office/drawing/2014/main" id="{3F9B5B90-7377-9360-2BE6-577791D4EC59}"/>
+                <a16:creationId xmlns:a16="http://schemas.microsoft.com/office/drawing/2014/main" id="{706DBCB1-BA70-985F-0C28-89A0220FC4B9}"/>
               </a:ext>
             </a:extLst>
           </p:cNvPr>
@@ -10985,8 +11040,8 @@
         </p:nvSpPr>
         <p:spPr>
           <a:xfrm>
-            <a:off x="1198591" y="4761750"/>
-            <a:ext cx="4411418" cy="929580"/>
+            <a:off x="2228284" y="4761750"/>
+            <a:ext cx="3935555" cy="929580"/>
           </a:xfrm>
           <a:prstGeom prst="rect">
             <a:avLst/>
@@ -11020,7 +11075,7 @@
           <p:cNvPr id="14" name="item_4_title">
             <a:extLst>
               <a:ext uri="{FF2B5EF4-FFF2-40B4-BE49-F238E27FC236}">
-                <a16:creationId xmlns:a16="http://schemas.microsoft.com/office/drawing/2014/main" id="{489C8209-8A39-DAF7-50ED-8C5E618F6D3E}"/>
+                <a16:creationId xmlns:a16="http://schemas.microsoft.com/office/drawing/2014/main" id="{CA1AD4C8-7B8A-6741-7E4F-9F0B6935875F}"/>
               </a:ext>
             </a:extLst>
           </p:cNvPr>
@@ -11033,8 +11088,8 @@
         </p:nvSpPr>
         <p:spPr>
           <a:xfrm>
-            <a:off x="6158321" y="4374427"/>
-            <a:ext cx="4411418" cy="387325"/>
+            <a:off x="6653004" y="4374427"/>
+            <a:ext cx="3935555" cy="387325"/>
           </a:xfrm>
           <a:prstGeom prst="rect">
             <a:avLst/>
@@ -11073,7 +11128,7 @@
           <p:cNvPr id="15" name="item_4">
             <a:extLst>
               <a:ext uri="{FF2B5EF4-FFF2-40B4-BE49-F238E27FC236}">
-                <a16:creationId xmlns:a16="http://schemas.microsoft.com/office/drawing/2014/main" id="{0FA9B903-E353-997E-590A-B03626973630}"/>
+                <a16:creationId xmlns:a16="http://schemas.microsoft.com/office/drawing/2014/main" id="{7F8FBD56-0433-2289-E1B2-7FAC932462E7}"/>
               </a:ext>
             </a:extLst>
           </p:cNvPr>
@@ -11086,8 +11141,8 @@
         </p:nvSpPr>
         <p:spPr>
           <a:xfrm>
-            <a:off x="6158321" y="4761750"/>
-            <a:ext cx="4411418" cy="929580"/>
+            <a:off x="6653004" y="4761750"/>
+            <a:ext cx="3935555" cy="929580"/>
           </a:xfrm>
           <a:prstGeom prst="rect">
             <a:avLst/>
@@ -11121,7 +11176,7 @@
           <p:cNvPr id="16" name="source">
             <a:extLst>
               <a:ext uri="{FF2B5EF4-FFF2-40B4-BE49-F238E27FC236}">
-                <a16:creationId xmlns:a16="http://schemas.microsoft.com/office/drawing/2014/main" id="{B392060E-2C3F-F627-4E87-0B98BB55816E}"/>
+                <a16:creationId xmlns:a16="http://schemas.microsoft.com/office/drawing/2014/main" id="{791E7608-CE8E-C8D0-9B2A-E38136BAB25D}"/>
               </a:ext>
             </a:extLst>
           </p:cNvPr>
@@ -11134,7 +11189,7 @@
         </p:nvSpPr>
         <p:spPr>
           <a:xfrm>
-            <a:off x="1024128" y="6004560"/>
+            <a:off x="2072640" y="6004560"/>
             <a:ext cx="1905000" cy="304800"/>
           </a:xfrm>
           <a:prstGeom prst="roundRect">
@@ -11176,7 +11231,7 @@
     </p:spTree>
     <p:extLst>
       <p:ext uri="{BB962C8B-B14F-4D97-AF65-F5344CB8AC3E}">
-        <p14:creationId xmlns:p14="http://schemas.microsoft.com/office/powerpoint/2010/main" val="2732793934"/>
+        <p14:creationId xmlns:p14="http://schemas.microsoft.com/office/powerpoint/2010/main" val="1838223051"/>
       </p:ext>
     </p:extLst>
   </p:cSld>
@@ -11208,7 +11263,7 @@
           <p:cNvPr id="7" name="creative_background">
             <a:extLst>
               <a:ext uri="{FF2B5EF4-FFF2-40B4-BE49-F238E27FC236}">
-                <a16:creationId xmlns:a16="http://schemas.microsoft.com/office/drawing/2014/main" id="{FBD9D298-5B8F-A6D1-2AB5-967893B89F99}"/>
+                <a16:creationId xmlns:a16="http://schemas.microsoft.com/office/drawing/2014/main" id="{674BC3CE-0D70-438A-75C2-DFB3DEB65684}"/>
               </a:ext>
             </a:extLst>
           </p:cNvPr>
@@ -11249,7 +11304,12 @@
             <p:ph type="title"/>
           </p:nvPr>
         </p:nvSpPr>
-        <p:spPr/>
+        <p:spPr>
+          <a:xfrm>
+            <a:off x="2072640" y="585216"/>
+            <a:ext cx="8674100" cy="1499616"/>
+          </a:xfrm>
+        </p:spPr>
         <p:txBody>
           <a:bodyPr/>
           <a:lstStyle>
@@ -11276,12 +11336,17 @@
             <p:ph type="dt" sz="half" idx="10"/>
           </p:nvPr>
         </p:nvSpPr>
-        <p:spPr/>
+        <p:spPr>
+          <a:xfrm>
+            <a:off x="2072640" y="6470704"/>
+            <a:ext cx="1104900" cy="274320"/>
+          </a:xfrm>
+        </p:spPr>
         <p:txBody>
           <a:bodyPr/>
           <a:lstStyle/>
           <a:p>
-            <a:fld id="{0C2FB128-6CE9-48CA-A63B-D694A7BBCE3E}" type="datetimeFigureOut">
+            <a:fld id="{D8887631-421A-4B90-81F4-114CAE3EC1BA}" type="datetimeFigureOut">
               <a:rPr lang="en-US" smtClean="0"/>
               <a:t>10/3/2026</a:t>
             </a:fld>
@@ -11323,7 +11388,7 @@
           <a:bodyPr/>
           <a:lstStyle/>
           <a:p>
-            <a:fld id="{B2E7DF40-EA43-448D-AAC9-8AB76A8B3E4D}" type="slidenum">
+            <a:fld id="{030EC083-285A-4D45-98F3-6009BB62C01A}" type="slidenum">
               <a:rPr lang="en-US" smtClean="0"/>
               <a:t>‹#›</a:t>
             </a:fld>
@@ -11336,7 +11401,7 @@
           <p:cNvPr id="8" name="body">
             <a:extLst>
               <a:ext uri="{FF2B5EF4-FFF2-40B4-BE49-F238E27FC236}">
-                <a16:creationId xmlns:a16="http://schemas.microsoft.com/office/drawing/2014/main" id="{6162B913-8739-EC60-6B67-E0E924E08745}"/>
+                <a16:creationId xmlns:a16="http://schemas.microsoft.com/office/drawing/2014/main" id="{5F33BDFE-F705-07F4-50B5-B47FBF3C1C62}"/>
               </a:ext>
             </a:extLst>
           </p:cNvPr>
@@ -11349,8 +11414,8 @@
         </p:nvSpPr>
         <p:spPr>
           <a:xfrm>
-            <a:off x="7244975" y="2824734"/>
-            <a:ext cx="3499226" cy="2514092"/>
+            <a:off x="7622439" y="2824734"/>
+            <a:ext cx="3121762" cy="2514092"/>
           </a:xfrm>
         </p:spPr>
         <p:txBody>
@@ -11376,7 +11441,7 @@
           <p:cNvPr id="9" name="kpi_value_1">
             <a:extLst>
               <a:ext uri="{FF2B5EF4-FFF2-40B4-BE49-F238E27FC236}">
-                <a16:creationId xmlns:a16="http://schemas.microsoft.com/office/drawing/2014/main" id="{8A02ED38-0465-E80D-1D70-F51F1D3E5BC4}"/>
+                <a16:creationId xmlns:a16="http://schemas.microsoft.com/office/drawing/2014/main" id="{EAB1FF35-EBC6-3E1E-00AC-6B69D8AEF697}"/>
               </a:ext>
             </a:extLst>
           </p:cNvPr>
@@ -11389,8 +11454,8 @@
         </p:nvSpPr>
         <p:spPr>
           <a:xfrm>
-            <a:off x="1024128" y="2286000"/>
-            <a:ext cx="5832044" cy="2308860"/>
+            <a:off x="2072641" y="2286000"/>
+            <a:ext cx="5202937" cy="2308860"/>
           </a:xfrm>
           <a:prstGeom prst="rect">
             <a:avLst/>
@@ -11429,7 +11494,7 @@
           <p:cNvPr id="10" name="kpi_label_1">
             <a:extLst>
               <a:ext uri="{FF2B5EF4-FFF2-40B4-BE49-F238E27FC236}">
-                <a16:creationId xmlns:a16="http://schemas.microsoft.com/office/drawing/2014/main" id="{3533580F-D176-074D-5D14-5C915849FDAE}"/>
+                <a16:creationId xmlns:a16="http://schemas.microsoft.com/office/drawing/2014/main" id="{88FC4C86-7FAB-1176-6E16-EE6ED8B7C8FE}"/>
               </a:ext>
             </a:extLst>
           </p:cNvPr>
@@ -11442,8 +11507,8 @@
         </p:nvSpPr>
         <p:spPr>
           <a:xfrm>
-            <a:off x="1024128" y="4594860"/>
-            <a:ext cx="5832044" cy="1282700"/>
+            <a:off x="2072641" y="4594860"/>
+            <a:ext cx="5202937" cy="1282700"/>
           </a:xfrm>
           <a:prstGeom prst="rect">
             <a:avLst/>
@@ -11477,7 +11542,7 @@
           <p:cNvPr id="11" name="source">
             <a:extLst>
               <a:ext uri="{FF2B5EF4-FFF2-40B4-BE49-F238E27FC236}">
-                <a16:creationId xmlns:a16="http://schemas.microsoft.com/office/drawing/2014/main" id="{1A5D0A64-664E-F502-554D-4A224F2FC7AA}"/>
+                <a16:creationId xmlns:a16="http://schemas.microsoft.com/office/drawing/2014/main" id="{9B8FF99D-1F69-4526-63F6-EC052AECFB64}"/>
               </a:ext>
             </a:extLst>
           </p:cNvPr>
@@ -11490,7 +11555,7 @@
         </p:nvSpPr>
         <p:spPr>
           <a:xfrm>
-            <a:off x="1024128" y="6004560"/>
+            <a:off x="2072640" y="6004560"/>
             <a:ext cx="1905000" cy="304800"/>
           </a:xfrm>
           <a:prstGeom prst="roundRect">
@@ -11532,7 +11597,7 @@
     </p:spTree>
     <p:extLst>
       <p:ext uri="{BB962C8B-B14F-4D97-AF65-F5344CB8AC3E}">
-        <p14:creationId xmlns:p14="http://schemas.microsoft.com/office/powerpoint/2010/main" val="3138886781"/>
+        <p14:creationId xmlns:p14="http://schemas.microsoft.com/office/powerpoint/2010/main" val="525294267"/>
       </p:ext>
     </p:extLst>
   </p:cSld>
@@ -11564,7 +11629,7 @@
           <p:cNvPr id="7" name="creative_background">
             <a:extLst>
               <a:ext uri="{FF2B5EF4-FFF2-40B4-BE49-F238E27FC236}">
-                <a16:creationId xmlns:a16="http://schemas.microsoft.com/office/drawing/2014/main" id="{81B65FD6-937E-810B-E76C-A63A78245550}"/>
+                <a16:creationId xmlns:a16="http://schemas.microsoft.com/office/drawing/2014/main" id="{2D588195-7175-7D33-319D-30E8BABDF123}"/>
               </a:ext>
             </a:extLst>
           </p:cNvPr>
@@ -11605,7 +11670,12 @@
             <p:ph type="title"/>
           </p:nvPr>
         </p:nvSpPr>
-        <p:spPr/>
+        <p:spPr>
+          <a:xfrm>
+            <a:off x="2072640" y="585216"/>
+            <a:ext cx="8674100" cy="1499616"/>
+          </a:xfrm>
+        </p:spPr>
         <p:txBody>
           <a:bodyPr/>
           <a:lstStyle>
@@ -11632,12 +11702,17 @@
             <p:ph type="dt" sz="half" idx="10"/>
           </p:nvPr>
         </p:nvSpPr>
-        <p:spPr/>
+        <p:spPr>
+          <a:xfrm>
+            <a:off x="2072640" y="6470704"/>
+            <a:ext cx="1104900" cy="274320"/>
+          </a:xfrm>
+        </p:spPr>
         <p:txBody>
           <a:bodyPr/>
           <a:lstStyle/>
           <a:p>
-            <a:fld id="{0C2FB128-6CE9-48CA-A63B-D694A7BBCE3E}" type="datetimeFigureOut">
+            <a:fld id="{D8887631-421A-4B90-81F4-114CAE3EC1BA}" type="datetimeFigureOut">
               <a:rPr lang="en-US" smtClean="0"/>
               <a:t>10/3/2026</a:t>
             </a:fld>
@@ -11679,7 +11754,7 @@
           <a:bodyPr/>
           <a:lstStyle/>
           <a:p>
-            <a:fld id="{B2E7DF40-EA43-448D-AAC9-8AB76A8B3E4D}" type="slidenum">
+            <a:fld id="{030EC083-285A-4D45-98F3-6009BB62C01A}" type="slidenum">
               <a:rPr lang="en-US" smtClean="0"/>
               <a:t>‹#›</a:t>
             </a:fld>
@@ -11692,7 +11767,7 @@
           <p:cNvPr id="8" name="body">
             <a:extLst>
               <a:ext uri="{FF2B5EF4-FFF2-40B4-BE49-F238E27FC236}">
-                <a16:creationId xmlns:a16="http://schemas.microsoft.com/office/drawing/2014/main" id="{AD830669-3C27-F539-B07A-CE848726E585}"/>
+                <a16:creationId xmlns:a16="http://schemas.microsoft.com/office/drawing/2014/main" id="{42DF423B-ACA7-2A4F-C533-A5BF6FE13A77}"/>
               </a:ext>
             </a:extLst>
           </p:cNvPr>
@@ -11705,8 +11780,8 @@
         </p:nvSpPr>
         <p:spPr>
           <a:xfrm>
-            <a:off x="1024128" y="5231080"/>
-            <a:ext cx="9720073" cy="646481"/>
+            <a:off x="2072640" y="5231080"/>
+            <a:ext cx="8671561" cy="646481"/>
           </a:xfrm>
         </p:spPr>
         <p:txBody>
@@ -11732,7 +11807,7 @@
           <p:cNvPr id="9" name="kpi_value_1">
             <a:extLst>
               <a:ext uri="{FF2B5EF4-FFF2-40B4-BE49-F238E27FC236}">
-                <a16:creationId xmlns:a16="http://schemas.microsoft.com/office/drawing/2014/main" id="{B241CF29-5599-05C7-319F-0CA39B49D0E7}"/>
+                <a16:creationId xmlns:a16="http://schemas.microsoft.com/office/drawing/2014/main" id="{F3FE3AE2-3578-4A80-2F48-34B1C323110A}"/>
               </a:ext>
             </a:extLst>
           </p:cNvPr>
@@ -11745,8 +11820,8 @@
         </p:nvSpPr>
         <p:spPr>
           <a:xfrm>
-            <a:off x="1198592" y="2472230"/>
-            <a:ext cx="4511111" cy="1561473"/>
+            <a:off x="2228283" y="2472230"/>
+            <a:ext cx="4024494" cy="1561473"/>
           </a:xfrm>
           <a:prstGeom prst="rect">
             <a:avLst/>
@@ -11785,7 +11860,7 @@
           <p:cNvPr id="10" name="kpi_label_1">
             <a:extLst>
               <a:ext uri="{FF2B5EF4-FFF2-40B4-BE49-F238E27FC236}">
-                <a16:creationId xmlns:a16="http://schemas.microsoft.com/office/drawing/2014/main" id="{885E68E2-A0D6-A422-C7F5-0C14BB815769}"/>
+                <a16:creationId xmlns:a16="http://schemas.microsoft.com/office/drawing/2014/main" id="{BC577F0C-640F-0367-BA6B-1FAA661FC108}"/>
               </a:ext>
             </a:extLst>
           </p:cNvPr>
@@ -11798,8 +11873,8 @@
         </p:nvSpPr>
         <p:spPr>
           <a:xfrm>
-            <a:off x="1198592" y="4033703"/>
-            <a:ext cx="4511111" cy="867485"/>
+            <a:off x="2228283" y="4033703"/>
+            <a:ext cx="4024494" cy="867485"/>
           </a:xfrm>
           <a:prstGeom prst="rect">
             <a:avLst/>
@@ -11833,7 +11908,7 @@
           <p:cNvPr id="11" name="kpi_value_2">
             <a:extLst>
               <a:ext uri="{FF2B5EF4-FFF2-40B4-BE49-F238E27FC236}">
-                <a16:creationId xmlns:a16="http://schemas.microsoft.com/office/drawing/2014/main" id="{75168804-E576-FB07-7E30-D9158B956394}"/>
+                <a16:creationId xmlns:a16="http://schemas.microsoft.com/office/drawing/2014/main" id="{44B5A912-D176-ACE0-A349-152FF6859E95}"/>
               </a:ext>
             </a:extLst>
           </p:cNvPr>
@@ -11846,8 +11921,8 @@
         </p:nvSpPr>
         <p:spPr>
           <a:xfrm>
-            <a:off x="6258015" y="2472230"/>
-            <a:ext cx="4311725" cy="592607"/>
+            <a:off x="6741942" y="2472230"/>
+            <a:ext cx="3846616" cy="592607"/>
           </a:xfrm>
           <a:prstGeom prst="rect">
             <a:avLst/>
@@ -11886,7 +11961,7 @@
           <p:cNvPr id="12" name="kpi_label_2">
             <a:extLst>
               <a:ext uri="{FF2B5EF4-FFF2-40B4-BE49-F238E27FC236}">
-                <a16:creationId xmlns:a16="http://schemas.microsoft.com/office/drawing/2014/main" id="{0DE5281B-2DA5-88ED-F3CC-A3361BCDB986}"/>
+                <a16:creationId xmlns:a16="http://schemas.microsoft.com/office/drawing/2014/main" id="{6F66F821-1302-0A2F-9383-ACFF1D623EDA}"/>
               </a:ext>
             </a:extLst>
           </p:cNvPr>
@@ -11899,8 +11974,8 @@
         </p:nvSpPr>
         <p:spPr>
           <a:xfrm>
-            <a:off x="6258015" y="3064836"/>
-            <a:ext cx="4311725" cy="329226"/>
+            <a:off x="6741942" y="3064836"/>
+            <a:ext cx="3846616" cy="329226"/>
           </a:xfrm>
           <a:prstGeom prst="rect">
             <a:avLst/>
@@ -11934,7 +12009,7 @@
           <p:cNvPr id="13" name="kpi_value_3">
             <a:extLst>
               <a:ext uri="{FF2B5EF4-FFF2-40B4-BE49-F238E27FC236}">
-                <a16:creationId xmlns:a16="http://schemas.microsoft.com/office/drawing/2014/main" id="{7B6A5604-213D-C9C9-2FBB-EDC0B9A59F7B}"/>
+                <a16:creationId xmlns:a16="http://schemas.microsoft.com/office/drawing/2014/main" id="{26C03958-4845-C50A-D002-4731F8439096}"/>
               </a:ext>
             </a:extLst>
           </p:cNvPr>
@@ -11947,8 +12022,8 @@
         </p:nvSpPr>
         <p:spPr>
           <a:xfrm>
-            <a:off x="6258014" y="3979355"/>
-            <a:ext cx="1881706" cy="592607"/>
+            <a:off x="6741943" y="3979355"/>
+            <a:ext cx="1678725" cy="592607"/>
           </a:xfrm>
           <a:prstGeom prst="rect">
             <a:avLst/>
@@ -11987,7 +12062,7 @@
           <p:cNvPr id="14" name="kpi_label_3">
             <a:extLst>
               <a:ext uri="{FF2B5EF4-FFF2-40B4-BE49-F238E27FC236}">
-                <a16:creationId xmlns:a16="http://schemas.microsoft.com/office/drawing/2014/main" id="{A665A5F6-125F-7244-9E14-2781AC373573}"/>
+                <a16:creationId xmlns:a16="http://schemas.microsoft.com/office/drawing/2014/main" id="{B56AA25A-1F26-8DB4-F253-8744096A26A4}"/>
               </a:ext>
             </a:extLst>
           </p:cNvPr>
@@ -12000,8 +12075,8 @@
         </p:nvSpPr>
         <p:spPr>
           <a:xfrm>
-            <a:off x="6258014" y="4571961"/>
-            <a:ext cx="1881706" cy="329226"/>
+            <a:off x="6741943" y="4571961"/>
+            <a:ext cx="1678725" cy="329226"/>
           </a:xfrm>
           <a:prstGeom prst="rect">
             <a:avLst/>
@@ -12035,7 +12110,7 @@
           <p:cNvPr id="15" name="kpi_value_4">
             <a:extLst>
               <a:ext uri="{FF2B5EF4-FFF2-40B4-BE49-F238E27FC236}">
-                <a16:creationId xmlns:a16="http://schemas.microsoft.com/office/drawing/2014/main" id="{F9AB2331-8D57-3C5A-D416-01261AC5161A}"/>
+                <a16:creationId xmlns:a16="http://schemas.microsoft.com/office/drawing/2014/main" id="{D7870A5C-84CC-ECCB-CB91-ED7153B53537}"/>
               </a:ext>
             </a:extLst>
           </p:cNvPr>
@@ -12048,8 +12123,8 @@
         </p:nvSpPr>
         <p:spPr>
           <a:xfrm>
-            <a:off x="8688032" y="3979355"/>
-            <a:ext cx="1881706" cy="592607"/>
+            <a:off x="8909834" y="3979355"/>
+            <a:ext cx="1678725" cy="592607"/>
           </a:xfrm>
           <a:prstGeom prst="rect">
             <a:avLst/>
@@ -12088,7 +12163,7 @@
           <p:cNvPr id="16" name="kpi_label_4">
             <a:extLst>
               <a:ext uri="{FF2B5EF4-FFF2-40B4-BE49-F238E27FC236}">
-                <a16:creationId xmlns:a16="http://schemas.microsoft.com/office/drawing/2014/main" id="{DA64DC8F-929A-066F-6B6A-9562BE556848}"/>
+                <a16:creationId xmlns:a16="http://schemas.microsoft.com/office/drawing/2014/main" id="{8EAD38C5-4E13-7A94-326B-F05B35F2EAC1}"/>
               </a:ext>
             </a:extLst>
           </p:cNvPr>
@@ -12101,8 +12176,8 @@
         </p:nvSpPr>
         <p:spPr>
           <a:xfrm>
-            <a:off x="8688032" y="4571961"/>
-            <a:ext cx="1881706" cy="329226"/>
+            <a:off x="8909834" y="4571961"/>
+            <a:ext cx="1678725" cy="329226"/>
           </a:xfrm>
           <a:prstGeom prst="rect">
             <a:avLst/>
@@ -12136,7 +12211,7 @@
           <p:cNvPr id="17" name="source">
             <a:extLst>
               <a:ext uri="{FF2B5EF4-FFF2-40B4-BE49-F238E27FC236}">
-                <a16:creationId xmlns:a16="http://schemas.microsoft.com/office/drawing/2014/main" id="{6A39C06C-0BB5-76ED-DB8D-11F3CAF246C1}"/>
+                <a16:creationId xmlns:a16="http://schemas.microsoft.com/office/drawing/2014/main" id="{7188DB7A-E094-11DC-3410-04E4790822E9}"/>
               </a:ext>
             </a:extLst>
           </p:cNvPr>
@@ -12149,7 +12224,7 @@
         </p:nvSpPr>
         <p:spPr>
           <a:xfrm>
-            <a:off x="1024128" y="6004560"/>
+            <a:off x="2072640" y="6004560"/>
             <a:ext cx="1905000" cy="304800"/>
           </a:xfrm>
           <a:prstGeom prst="roundRect">
@@ -12191,7 +12266,7 @@
     </p:spTree>
     <p:extLst>
       <p:ext uri="{BB962C8B-B14F-4D97-AF65-F5344CB8AC3E}">
-        <p14:creationId xmlns:p14="http://schemas.microsoft.com/office/powerpoint/2010/main" val="4237100155"/>
+        <p14:creationId xmlns:p14="http://schemas.microsoft.com/office/powerpoint/2010/main" val="2182479485"/>
       </p:ext>
     </p:extLst>
   </p:cSld>
@@ -12223,7 +12298,7 @@
           <p:cNvPr id="7" name="creative_background">
             <a:extLst>
               <a:ext uri="{FF2B5EF4-FFF2-40B4-BE49-F238E27FC236}">
-                <a16:creationId xmlns:a16="http://schemas.microsoft.com/office/drawing/2014/main" id="{3F43DD85-E2ED-1859-F8C5-12AA17684A35}"/>
+                <a16:creationId xmlns:a16="http://schemas.microsoft.com/office/drawing/2014/main" id="{E36147AD-50A2-A4FD-E754-91966993A9A1}"/>
               </a:ext>
             </a:extLst>
           </p:cNvPr>
@@ -12264,7 +12339,12 @@
             <p:ph type="title"/>
           </p:nvPr>
         </p:nvSpPr>
-        <p:spPr/>
+        <p:spPr>
+          <a:xfrm>
+            <a:off x="2072640" y="585216"/>
+            <a:ext cx="8674100" cy="1499616"/>
+          </a:xfrm>
+        </p:spPr>
         <p:txBody>
           <a:bodyPr/>
           <a:lstStyle>
@@ -12291,12 +12371,17 @@
             <p:ph type="dt" sz="half" idx="10"/>
           </p:nvPr>
         </p:nvSpPr>
-        <p:spPr/>
+        <p:spPr>
+          <a:xfrm>
+            <a:off x="2072640" y="6470704"/>
+            <a:ext cx="1104900" cy="274320"/>
+          </a:xfrm>
+        </p:spPr>
         <p:txBody>
           <a:bodyPr/>
           <a:lstStyle/>
           <a:p>
-            <a:fld id="{0C2FB128-6CE9-48CA-A63B-D694A7BBCE3E}" type="datetimeFigureOut">
+            <a:fld id="{D8887631-421A-4B90-81F4-114CAE3EC1BA}" type="datetimeFigureOut">
               <a:rPr lang="en-US" smtClean="0"/>
               <a:t>10/3/2026</a:t>
             </a:fld>
@@ -12338,7 +12423,7 @@
           <a:bodyPr/>
           <a:lstStyle/>
           <a:p>
-            <a:fld id="{B2E7DF40-EA43-448D-AAC9-8AB76A8B3E4D}" type="slidenum">
+            <a:fld id="{030EC083-285A-4D45-98F3-6009BB62C01A}" type="slidenum">
               <a:rPr lang="en-US" smtClean="0"/>
               <a:t>‹#›</a:t>
             </a:fld>
@@ -12351,7 +12436,7 @@
           <p:cNvPr id="8" name="body">
             <a:extLst>
               <a:ext uri="{FF2B5EF4-FFF2-40B4-BE49-F238E27FC236}">
-                <a16:creationId xmlns:a16="http://schemas.microsoft.com/office/drawing/2014/main" id="{B81C777B-C826-CA4C-C5DF-8C059C2A3A53}"/>
+                <a16:creationId xmlns:a16="http://schemas.microsoft.com/office/drawing/2014/main" id="{4E4CFB07-0D0F-8132-A442-050F8A33FF6A}"/>
               </a:ext>
             </a:extLst>
           </p:cNvPr>
@@ -12364,8 +12449,8 @@
         </p:nvSpPr>
         <p:spPr>
           <a:xfrm>
-            <a:off x="1024128" y="5231080"/>
-            <a:ext cx="9720073" cy="646481"/>
+            <a:off x="2072640" y="5231080"/>
+            <a:ext cx="8671561" cy="646481"/>
           </a:xfrm>
         </p:spPr>
         <p:txBody>
@@ -12391,7 +12476,7 @@
           <p:cNvPr id="9" name="kpi_value_1">
             <a:extLst>
               <a:ext uri="{FF2B5EF4-FFF2-40B4-BE49-F238E27FC236}">
-                <a16:creationId xmlns:a16="http://schemas.microsoft.com/office/drawing/2014/main" id="{2DE88345-0CAD-A10B-E3CE-02278701EFD3}"/>
+                <a16:creationId xmlns:a16="http://schemas.microsoft.com/office/drawing/2014/main" id="{1A944D52-833E-E9BC-E9F1-4D9F3CB6A7CB}"/>
               </a:ext>
             </a:extLst>
           </p:cNvPr>
@@ -12404,8 +12489,8 @@
         </p:nvSpPr>
         <p:spPr>
           <a:xfrm>
-            <a:off x="1198591" y="2472229"/>
-            <a:ext cx="4411418" cy="1181656"/>
+            <a:off x="2228284" y="2472229"/>
+            <a:ext cx="3935555" cy="1181656"/>
           </a:xfrm>
           <a:prstGeom prst="rect">
             <a:avLst/>
@@ -12444,7 +12529,7 @@
           <p:cNvPr id="10" name="kpi_label_1">
             <a:extLst>
               <a:ext uri="{FF2B5EF4-FFF2-40B4-BE49-F238E27FC236}">
-                <a16:creationId xmlns:a16="http://schemas.microsoft.com/office/drawing/2014/main" id="{ABE42E78-1D44-3D7D-BFBA-A7C37F7F3A0E}"/>
+                <a16:creationId xmlns:a16="http://schemas.microsoft.com/office/drawing/2014/main" id="{7753B592-9650-3B07-D935-6A08CBADFCB5}"/>
               </a:ext>
             </a:extLst>
           </p:cNvPr>
@@ -12457,8 +12542,8 @@
         </p:nvSpPr>
         <p:spPr>
           <a:xfrm>
-            <a:off x="1198591" y="3653886"/>
-            <a:ext cx="4411418" cy="656475"/>
+            <a:off x="2228284" y="3653886"/>
+            <a:ext cx="3935555" cy="656475"/>
           </a:xfrm>
           <a:prstGeom prst="rect">
             <a:avLst/>
@@ -12492,7 +12577,7 @@
           <p:cNvPr id="11" name="kpi_value_2">
             <a:extLst>
               <a:ext uri="{FF2B5EF4-FFF2-40B4-BE49-F238E27FC236}">
-                <a16:creationId xmlns:a16="http://schemas.microsoft.com/office/drawing/2014/main" id="{D89ED2AD-6DB8-3C5A-C02B-DF811F7CE39D}"/>
+                <a16:creationId xmlns:a16="http://schemas.microsoft.com/office/drawing/2014/main" id="{6A2AFA44-9EB0-A42C-4F4F-86771B89F6A9}"/>
               </a:ext>
             </a:extLst>
           </p:cNvPr>
@@ -12505,8 +12590,8 @@
         </p:nvSpPr>
         <p:spPr>
           <a:xfrm>
-            <a:off x="6158321" y="2472229"/>
-            <a:ext cx="4411418" cy="1181656"/>
+            <a:off x="6653004" y="2472229"/>
+            <a:ext cx="3935555" cy="1181656"/>
           </a:xfrm>
           <a:prstGeom prst="rect">
             <a:avLst/>
@@ -12545,7 +12630,7 @@
           <p:cNvPr id="12" name="kpi_label_2">
             <a:extLst>
               <a:ext uri="{FF2B5EF4-FFF2-40B4-BE49-F238E27FC236}">
-                <a16:creationId xmlns:a16="http://schemas.microsoft.com/office/drawing/2014/main" id="{C99A9ACC-3FC0-5FE8-9E8A-B6CB3E4F522A}"/>
+                <a16:creationId xmlns:a16="http://schemas.microsoft.com/office/drawing/2014/main" id="{45767EA7-4824-5659-FECC-377EB5F8E7A4}"/>
               </a:ext>
             </a:extLst>
           </p:cNvPr>
@@ -12558,8 +12643,8 @@
         </p:nvSpPr>
         <p:spPr>
           <a:xfrm>
-            <a:off x="6158321" y="3653886"/>
-            <a:ext cx="4411418" cy="656475"/>
+            <a:off x="6653004" y="3653886"/>
+            <a:ext cx="3935555" cy="656475"/>
           </a:xfrm>
           <a:prstGeom prst="rect">
             <a:avLst/>
@@ -12593,7 +12678,7 @@
           <p:cNvPr id="13" name="source">
             <a:extLst>
               <a:ext uri="{FF2B5EF4-FFF2-40B4-BE49-F238E27FC236}">
-                <a16:creationId xmlns:a16="http://schemas.microsoft.com/office/drawing/2014/main" id="{74EA175E-F20F-874B-ABF7-F7DBBFC5CFB3}"/>
+                <a16:creationId xmlns:a16="http://schemas.microsoft.com/office/drawing/2014/main" id="{DA7806EA-C686-6984-91BF-01C30D0D64C2}"/>
               </a:ext>
             </a:extLst>
           </p:cNvPr>
@@ -12606,7 +12691,7 @@
         </p:nvSpPr>
         <p:spPr>
           <a:xfrm>
-            <a:off x="1024128" y="6004560"/>
+            <a:off x="2072640" y="6004560"/>
             <a:ext cx="1905000" cy="304800"/>
           </a:xfrm>
           <a:prstGeom prst="roundRect">
@@ -12648,7 +12733,7 @@
     </p:spTree>
     <p:extLst>
       <p:ext uri="{BB962C8B-B14F-4D97-AF65-F5344CB8AC3E}">
-        <p14:creationId xmlns:p14="http://schemas.microsoft.com/office/powerpoint/2010/main" val="2287973038"/>
+        <p14:creationId xmlns:p14="http://schemas.microsoft.com/office/powerpoint/2010/main" val="1836186835"/>
       </p:ext>
     </p:extLst>
   </p:cSld>
@@ -12680,7 +12765,7 @@
           <p:cNvPr id="7" name="creative_background">
             <a:extLst>
               <a:ext uri="{FF2B5EF4-FFF2-40B4-BE49-F238E27FC236}">
-                <a16:creationId xmlns:a16="http://schemas.microsoft.com/office/drawing/2014/main" id="{8ACBCFA5-4228-18F1-D72F-69711E2AA355}"/>
+                <a16:creationId xmlns:a16="http://schemas.microsoft.com/office/drawing/2014/main" id="{084B9E5E-668D-D086-15BD-3B9493FF1A64}"/>
               </a:ext>
             </a:extLst>
           </p:cNvPr>
@@ -12721,7 +12806,12 @@
             <p:ph type="title"/>
           </p:nvPr>
         </p:nvSpPr>
-        <p:spPr/>
+        <p:spPr>
+          <a:xfrm>
+            <a:off x="2072640" y="585216"/>
+            <a:ext cx="8674100" cy="1499616"/>
+          </a:xfrm>
+        </p:spPr>
         <p:txBody>
           <a:bodyPr/>
           <a:lstStyle>
@@ -12748,12 +12838,17 @@
             <p:ph type="dt" sz="half" idx="10"/>
           </p:nvPr>
         </p:nvSpPr>
-        <p:spPr/>
+        <p:spPr>
+          <a:xfrm>
+            <a:off x="2072640" y="6470704"/>
+            <a:ext cx="1104900" cy="274320"/>
+          </a:xfrm>
+        </p:spPr>
         <p:txBody>
           <a:bodyPr/>
           <a:lstStyle/>
           <a:p>
-            <a:fld id="{0C2FB128-6CE9-48CA-A63B-D694A7BBCE3E}" type="datetimeFigureOut">
+            <a:fld id="{D8887631-421A-4B90-81F4-114CAE3EC1BA}" type="datetimeFigureOut">
               <a:rPr lang="en-US" smtClean="0"/>
               <a:t>10/3/2026</a:t>
             </a:fld>
@@ -12795,7 +12890,7 @@
           <a:bodyPr/>
           <a:lstStyle/>
           <a:p>
-            <a:fld id="{B2E7DF40-EA43-448D-AAC9-8AB76A8B3E4D}" type="slidenum">
+            <a:fld id="{030EC083-285A-4D45-98F3-6009BB62C01A}" type="slidenum">
               <a:rPr lang="en-US" smtClean="0"/>
               <a:t>‹#›</a:t>
             </a:fld>
@@ -12808,7 +12903,7 @@
           <p:cNvPr id="8" name="body">
             <a:extLst>
               <a:ext uri="{FF2B5EF4-FFF2-40B4-BE49-F238E27FC236}">
-                <a16:creationId xmlns:a16="http://schemas.microsoft.com/office/drawing/2014/main" id="{8861A23E-AF93-1729-FF99-D7D69D9CD3A4}"/>
+                <a16:creationId xmlns:a16="http://schemas.microsoft.com/office/drawing/2014/main" id="{1295F5CC-86EC-C65F-6583-7EFEA7AC61BB}"/>
               </a:ext>
             </a:extLst>
           </p:cNvPr>
@@ -12821,8 +12916,8 @@
         </p:nvSpPr>
         <p:spPr>
           <a:xfrm>
-            <a:off x="1024128" y="5231080"/>
-            <a:ext cx="9720073" cy="646481"/>
+            <a:off x="2072640" y="5231080"/>
+            <a:ext cx="8671561" cy="646481"/>
           </a:xfrm>
         </p:spPr>
         <p:txBody>
@@ -12848,7 +12943,7 @@
           <p:cNvPr id="9" name="kpi_value_1">
             <a:extLst>
               <a:ext uri="{FF2B5EF4-FFF2-40B4-BE49-F238E27FC236}">
-                <a16:creationId xmlns:a16="http://schemas.microsoft.com/office/drawing/2014/main" id="{AF83B81A-B83B-D8C1-1A25-D254699FF3EF}"/>
+                <a16:creationId xmlns:a16="http://schemas.microsoft.com/office/drawing/2014/main" id="{D0897CD4-9811-A0FD-36F7-E8E63B0E5920}"/>
               </a:ext>
             </a:extLst>
           </p:cNvPr>
@@ -12861,8 +12956,8 @@
         </p:nvSpPr>
         <p:spPr>
           <a:xfrm>
-            <a:off x="1148744" y="2419022"/>
-            <a:ext cx="2462418" cy="334547"/>
+            <a:off x="2183814" y="2419022"/>
+            <a:ext cx="2196796" cy="334547"/>
           </a:xfrm>
           <a:prstGeom prst="rect">
             <a:avLst/>
@@ -12901,7 +12996,7 @@
           <p:cNvPr id="10" name="kpi_label_1">
             <a:extLst>
               <a:ext uri="{FF2B5EF4-FFF2-40B4-BE49-F238E27FC236}">
-                <a16:creationId xmlns:a16="http://schemas.microsoft.com/office/drawing/2014/main" id="{10999F0F-5926-92D2-29D6-D977E2DBFD5F}"/>
+                <a16:creationId xmlns:a16="http://schemas.microsoft.com/office/drawing/2014/main" id="{ABB13779-7C5F-C49E-0FA2-AFFC4D7429AC}"/>
               </a:ext>
             </a:extLst>
           </p:cNvPr>
@@ -12914,8 +13009,8 @@
         </p:nvSpPr>
         <p:spPr>
           <a:xfrm>
-            <a:off x="3710857" y="2419022"/>
-            <a:ext cx="6908729" cy="247813"/>
+            <a:off x="4469550" y="2419022"/>
+            <a:ext cx="6163479" cy="247813"/>
           </a:xfrm>
           <a:prstGeom prst="rect">
             <a:avLst/>
@@ -12949,7 +13044,7 @@
           <p:cNvPr id="11" name="kpi_value_2">
             <a:extLst>
               <a:ext uri="{FF2B5EF4-FFF2-40B4-BE49-F238E27FC236}">
-                <a16:creationId xmlns:a16="http://schemas.microsoft.com/office/drawing/2014/main" id="{DD3A7862-5F46-C14A-FDC1-9303EE328AC3}"/>
+                <a16:creationId xmlns:a16="http://schemas.microsoft.com/office/drawing/2014/main" id="{B12093DA-72BF-D091-F14D-CC6365052692}"/>
               </a:ext>
             </a:extLst>
           </p:cNvPr>
@@ -12962,8 +13057,8 @@
         </p:nvSpPr>
         <p:spPr>
           <a:xfrm>
-            <a:off x="1148744" y="3152631"/>
-            <a:ext cx="2462418" cy="334547"/>
+            <a:off x="2183814" y="3152631"/>
+            <a:ext cx="2196796" cy="334547"/>
           </a:xfrm>
           <a:prstGeom prst="rect">
             <a:avLst/>
@@ -13002,7 +13097,7 @@
           <p:cNvPr id="12" name="kpi_label_2">
             <a:extLst>
               <a:ext uri="{FF2B5EF4-FFF2-40B4-BE49-F238E27FC236}">
-                <a16:creationId xmlns:a16="http://schemas.microsoft.com/office/drawing/2014/main" id="{2AEAAF69-7461-8BD8-429C-191F16087C91}"/>
+                <a16:creationId xmlns:a16="http://schemas.microsoft.com/office/drawing/2014/main" id="{B746F3CA-FB86-2CF4-0E88-0565C2FEE68F}"/>
               </a:ext>
             </a:extLst>
           </p:cNvPr>
@@ -13015,8 +13110,8 @@
         </p:nvSpPr>
         <p:spPr>
           <a:xfrm>
-            <a:off x="3710857" y="3152631"/>
-            <a:ext cx="6908729" cy="247813"/>
+            <a:off x="4469550" y="3152631"/>
+            <a:ext cx="6163479" cy="247813"/>
           </a:xfrm>
           <a:prstGeom prst="rect">
             <a:avLst/>
@@ -13050,7 +13145,7 @@
           <p:cNvPr id="13" name="kpi_value_3">
             <a:extLst>
               <a:ext uri="{FF2B5EF4-FFF2-40B4-BE49-F238E27FC236}">
-                <a16:creationId xmlns:a16="http://schemas.microsoft.com/office/drawing/2014/main" id="{78D327B1-5ECC-9594-AB43-840994097BB7}"/>
+                <a16:creationId xmlns:a16="http://schemas.microsoft.com/office/drawing/2014/main" id="{F767DEB8-DE26-7BFD-0F13-B39983E6BF78}"/>
               </a:ext>
             </a:extLst>
           </p:cNvPr>
@@ -13063,8 +13158,8 @@
         </p:nvSpPr>
         <p:spPr>
           <a:xfrm>
-            <a:off x="1148744" y="3886241"/>
-            <a:ext cx="2462418" cy="334547"/>
+            <a:off x="2183814" y="3886241"/>
+            <a:ext cx="2196796" cy="334547"/>
           </a:xfrm>
           <a:prstGeom prst="rect">
             <a:avLst/>
@@ -13103,7 +13198,7 @@
           <p:cNvPr id="14" name="kpi_label_3">
             <a:extLst>
               <a:ext uri="{FF2B5EF4-FFF2-40B4-BE49-F238E27FC236}">
-                <a16:creationId xmlns:a16="http://schemas.microsoft.com/office/drawing/2014/main" id="{3C7B8735-84A7-471A-D29F-2820908F124C}"/>
+                <a16:creationId xmlns:a16="http://schemas.microsoft.com/office/drawing/2014/main" id="{716B4D5F-D2D0-C192-7459-04ECFB56A722}"/>
               </a:ext>
             </a:extLst>
           </p:cNvPr>
@@ -13116,8 +13211,8 @@
         </p:nvSpPr>
         <p:spPr>
           <a:xfrm>
-            <a:off x="3710857" y="3886241"/>
-            <a:ext cx="6908729" cy="247813"/>
+            <a:off x="4469550" y="3886241"/>
+            <a:ext cx="6163479" cy="247813"/>
           </a:xfrm>
           <a:prstGeom prst="rect">
             <a:avLst/>
@@ -13151,7 +13246,7 @@
           <p:cNvPr id="15" name="kpi_value_4">
             <a:extLst>
               <a:ext uri="{FF2B5EF4-FFF2-40B4-BE49-F238E27FC236}">
-                <a16:creationId xmlns:a16="http://schemas.microsoft.com/office/drawing/2014/main" id="{1DDCE605-D11E-AEE5-4EBE-20DCDF05F4DA}"/>
+                <a16:creationId xmlns:a16="http://schemas.microsoft.com/office/drawing/2014/main" id="{6F6A6204-4613-A3B7-7C21-BD0F480EF0B1}"/>
               </a:ext>
             </a:extLst>
           </p:cNvPr>
@@ -13164,8 +13259,8 @@
         </p:nvSpPr>
         <p:spPr>
           <a:xfrm>
-            <a:off x="1148744" y="4619850"/>
-            <a:ext cx="2462418" cy="334547"/>
+            <a:off x="2183814" y="4619850"/>
+            <a:ext cx="2196796" cy="334547"/>
           </a:xfrm>
           <a:prstGeom prst="rect">
             <a:avLst/>
@@ -13204,7 +13299,7 @@
           <p:cNvPr id="16" name="kpi_label_4">
             <a:extLst>
               <a:ext uri="{FF2B5EF4-FFF2-40B4-BE49-F238E27FC236}">
-                <a16:creationId xmlns:a16="http://schemas.microsoft.com/office/drawing/2014/main" id="{64A841F3-A0AC-FB1A-DEF8-51B43953F7CB}"/>
+                <a16:creationId xmlns:a16="http://schemas.microsoft.com/office/drawing/2014/main" id="{52759681-0457-B21A-EC3E-3FE463B6430C}"/>
               </a:ext>
             </a:extLst>
           </p:cNvPr>
@@ -13217,8 +13312,8 @@
         </p:nvSpPr>
         <p:spPr>
           <a:xfrm>
-            <a:off x="3710857" y="4619850"/>
-            <a:ext cx="6908729" cy="247813"/>
+            <a:off x="4469550" y="4619850"/>
+            <a:ext cx="6163479" cy="247813"/>
           </a:xfrm>
           <a:prstGeom prst="rect">
             <a:avLst/>
@@ -13252,7 +13347,7 @@
           <p:cNvPr id="17" name="source">
             <a:extLst>
               <a:ext uri="{FF2B5EF4-FFF2-40B4-BE49-F238E27FC236}">
-                <a16:creationId xmlns:a16="http://schemas.microsoft.com/office/drawing/2014/main" id="{DE21C0C8-0498-3AD5-1AEA-B53F6FD60175}"/>
+                <a16:creationId xmlns:a16="http://schemas.microsoft.com/office/drawing/2014/main" id="{0506AD36-AC79-C51B-B1F0-161F72288B13}"/>
               </a:ext>
             </a:extLst>
           </p:cNvPr>
@@ -13265,7 +13360,7 @@
         </p:nvSpPr>
         <p:spPr>
           <a:xfrm>
-            <a:off x="1024128" y="6004560"/>
+            <a:off x="2072640" y="6004560"/>
             <a:ext cx="1905000" cy="304800"/>
           </a:xfrm>
           <a:prstGeom prst="roundRect">
@@ -13307,7 +13402,7 @@
     </p:spTree>
     <p:extLst>
       <p:ext uri="{BB962C8B-B14F-4D97-AF65-F5344CB8AC3E}">
-        <p14:creationId xmlns:p14="http://schemas.microsoft.com/office/powerpoint/2010/main" val="4021215403"/>
+        <p14:creationId xmlns:p14="http://schemas.microsoft.com/office/powerpoint/2010/main" val="1252894221"/>
       </p:ext>
     </p:extLst>
   </p:cSld>
@@ -13339,7 +13434,7 @@
           <p:cNvPr id="7" name="creative_background">
             <a:extLst>
               <a:ext uri="{FF2B5EF4-FFF2-40B4-BE49-F238E27FC236}">
-                <a16:creationId xmlns:a16="http://schemas.microsoft.com/office/drawing/2014/main" id="{80C75766-E81D-DE9A-50C6-41DF96C97D8A}"/>
+                <a16:creationId xmlns:a16="http://schemas.microsoft.com/office/drawing/2014/main" id="{B08C9785-E22C-1824-00CC-98003FC9830D}"/>
               </a:ext>
             </a:extLst>
           </p:cNvPr>
@@ -13380,7 +13475,12 @@
             <p:ph type="title"/>
           </p:nvPr>
         </p:nvSpPr>
-        <p:spPr/>
+        <p:spPr>
+          <a:xfrm>
+            <a:off x="2072640" y="585216"/>
+            <a:ext cx="8674100" cy="1499616"/>
+          </a:xfrm>
+        </p:spPr>
         <p:txBody>
           <a:bodyPr/>
           <a:lstStyle>
@@ -13407,12 +13507,17 @@
             <p:ph type="dt" sz="half" idx="10"/>
           </p:nvPr>
         </p:nvSpPr>
-        <p:spPr/>
+        <p:spPr>
+          <a:xfrm>
+            <a:off x="2072640" y="6470704"/>
+            <a:ext cx="1104900" cy="274320"/>
+          </a:xfrm>
+        </p:spPr>
         <p:txBody>
           <a:bodyPr/>
           <a:lstStyle/>
           <a:p>
-            <a:fld id="{0C2FB128-6CE9-48CA-A63B-D694A7BBCE3E}" type="datetimeFigureOut">
+            <a:fld id="{D8887631-421A-4B90-81F4-114CAE3EC1BA}" type="datetimeFigureOut">
               <a:rPr lang="en-US" smtClean="0"/>
               <a:t>10/3/2026</a:t>
             </a:fld>
@@ -13454,7 +13559,7 @@
           <a:bodyPr/>
           <a:lstStyle/>
           <a:p>
-            <a:fld id="{B2E7DF40-EA43-448D-AAC9-8AB76A8B3E4D}" type="slidenum">
+            <a:fld id="{030EC083-285A-4D45-98F3-6009BB62C01A}" type="slidenum">
               <a:rPr lang="en-US" smtClean="0"/>
               <a:t>‹#›</a:t>
             </a:fld>
@@ -13467,7 +13572,7 @@
           <p:cNvPr id="8" name="item_1_title">
             <a:extLst>
               <a:ext uri="{FF2B5EF4-FFF2-40B4-BE49-F238E27FC236}">
-                <a16:creationId xmlns:a16="http://schemas.microsoft.com/office/drawing/2014/main" id="{4FA6E046-B276-FDC3-C4E9-12990C8D2924}"/>
+                <a16:creationId xmlns:a16="http://schemas.microsoft.com/office/drawing/2014/main" id="{6A7FF8EB-D6BC-2626-99C1-5E424D69DA05}"/>
               </a:ext>
             </a:extLst>
           </p:cNvPr>
@@ -13480,8 +13585,8 @@
         </p:nvSpPr>
         <p:spPr>
           <a:xfrm>
-            <a:off x="1148744" y="2419022"/>
-            <a:ext cx="2841252" cy="532083"/>
+            <a:off x="2183814" y="2419022"/>
+            <a:ext cx="2534764" cy="532083"/>
           </a:xfrm>
         </p:spPr>
         <p:txBody>
@@ -13517,7 +13622,7 @@
           <p:cNvPr id="9" name="item_1">
             <a:extLst>
               <a:ext uri="{FF2B5EF4-FFF2-40B4-BE49-F238E27FC236}">
-                <a16:creationId xmlns:a16="http://schemas.microsoft.com/office/drawing/2014/main" id="{DF805FA1-576E-74CF-6A4A-1A65C0A3A483}"/>
+                <a16:creationId xmlns:a16="http://schemas.microsoft.com/office/drawing/2014/main" id="{643D53BE-3C71-7AE6-3278-29771CC36162}"/>
               </a:ext>
             </a:extLst>
           </p:cNvPr>
@@ -13530,8 +13635,8 @@
         </p:nvSpPr>
         <p:spPr>
           <a:xfrm>
-            <a:off x="4089691" y="2419022"/>
-            <a:ext cx="6529895" cy="532083"/>
+            <a:off x="4807517" y="2419022"/>
+            <a:ext cx="5825510" cy="532083"/>
           </a:xfrm>
           <a:prstGeom prst="rect">
             <a:avLst/>
@@ -13565,7 +13670,7 @@
           <p:cNvPr id="10" name="item_2_title">
             <a:extLst>
               <a:ext uri="{FF2B5EF4-FFF2-40B4-BE49-F238E27FC236}">
-                <a16:creationId xmlns:a16="http://schemas.microsoft.com/office/drawing/2014/main" id="{6DE389AA-B042-5A5D-D126-3393AD7D4C8C}"/>
+                <a16:creationId xmlns:a16="http://schemas.microsoft.com/office/drawing/2014/main" id="{887276C7-F2A3-FA7E-9C53-A033BEC04542}"/>
               </a:ext>
             </a:extLst>
           </p:cNvPr>
@@ -13578,8 +13683,8 @@
         </p:nvSpPr>
         <p:spPr>
           <a:xfrm>
-            <a:off x="1148744" y="3350167"/>
-            <a:ext cx="2841252" cy="532083"/>
+            <a:off x="2183814" y="3350167"/>
+            <a:ext cx="2534764" cy="532083"/>
           </a:xfrm>
           <a:prstGeom prst="rect">
             <a:avLst/>
@@ -13618,7 +13723,7 @@
           <p:cNvPr id="11" name="item_2">
             <a:extLst>
               <a:ext uri="{FF2B5EF4-FFF2-40B4-BE49-F238E27FC236}">
-                <a16:creationId xmlns:a16="http://schemas.microsoft.com/office/drawing/2014/main" id="{46E1BA19-9579-DCCF-5C29-8231F6A50C5A}"/>
+                <a16:creationId xmlns:a16="http://schemas.microsoft.com/office/drawing/2014/main" id="{4A1F4567-7FF7-0F02-6B85-C1DA9CD21570}"/>
               </a:ext>
             </a:extLst>
           </p:cNvPr>
@@ -13631,8 +13736,8 @@
         </p:nvSpPr>
         <p:spPr>
           <a:xfrm>
-            <a:off x="4089691" y="3350167"/>
-            <a:ext cx="6529895" cy="532083"/>
+            <a:off x="4807517" y="3350167"/>
+            <a:ext cx="5825510" cy="532083"/>
           </a:xfrm>
           <a:prstGeom prst="rect">
             <a:avLst/>
@@ -13666,7 +13771,7 @@
           <p:cNvPr id="12" name="item_3_title">
             <a:extLst>
               <a:ext uri="{FF2B5EF4-FFF2-40B4-BE49-F238E27FC236}">
-                <a16:creationId xmlns:a16="http://schemas.microsoft.com/office/drawing/2014/main" id="{6D3749B4-FD10-4E22-EF71-3026D843C0C0}"/>
+                <a16:creationId xmlns:a16="http://schemas.microsoft.com/office/drawing/2014/main" id="{82EBCBDC-7327-0807-6A53-6089198EEEF4}"/>
               </a:ext>
             </a:extLst>
           </p:cNvPr>
@@ -13679,8 +13784,8 @@
         </p:nvSpPr>
         <p:spPr>
           <a:xfrm>
-            <a:off x="1148744" y="4281312"/>
-            <a:ext cx="2841252" cy="532083"/>
+            <a:off x="2183814" y="4281312"/>
+            <a:ext cx="2534764" cy="532083"/>
           </a:xfrm>
           <a:prstGeom prst="rect">
             <a:avLst/>
@@ -13719,7 +13824,7 @@
           <p:cNvPr id="13" name="item_3">
             <a:extLst>
               <a:ext uri="{FF2B5EF4-FFF2-40B4-BE49-F238E27FC236}">
-                <a16:creationId xmlns:a16="http://schemas.microsoft.com/office/drawing/2014/main" id="{80EE202C-CA5A-2D62-C85B-1B349033F555}"/>
+                <a16:creationId xmlns:a16="http://schemas.microsoft.com/office/drawing/2014/main" id="{A3790F13-867E-5F1E-C645-8D06F5DE9219}"/>
               </a:ext>
             </a:extLst>
           </p:cNvPr>
@@ -13732,8 +13837,8 @@
         </p:nvSpPr>
         <p:spPr>
           <a:xfrm>
-            <a:off x="4089691" y="4281312"/>
-            <a:ext cx="6529895" cy="532083"/>
+            <a:off x="4807517" y="4281312"/>
+            <a:ext cx="5825510" cy="532083"/>
           </a:xfrm>
           <a:prstGeom prst="rect">
             <a:avLst/>
@@ -13767,7 +13872,7 @@
           <p:cNvPr id="14" name="item_4_title">
             <a:extLst>
               <a:ext uri="{FF2B5EF4-FFF2-40B4-BE49-F238E27FC236}">
-                <a16:creationId xmlns:a16="http://schemas.microsoft.com/office/drawing/2014/main" id="{B722CAEC-B916-7D0D-5BB5-4C7780B8D22C}"/>
+                <a16:creationId xmlns:a16="http://schemas.microsoft.com/office/drawing/2014/main" id="{7B6D2CBF-6056-1997-A7DE-42C445E03E37}"/>
               </a:ext>
             </a:extLst>
           </p:cNvPr>
@@ -13780,8 +13885,8 @@
         </p:nvSpPr>
         <p:spPr>
           <a:xfrm>
-            <a:off x="1148744" y="5212457"/>
-            <a:ext cx="2841252" cy="532083"/>
+            <a:off x="2183814" y="5212457"/>
+            <a:ext cx="2534764" cy="532083"/>
           </a:xfrm>
           <a:prstGeom prst="rect">
             <a:avLst/>
@@ -13820,7 +13925,7 @@
           <p:cNvPr id="15" name="item_4">
             <a:extLst>
               <a:ext uri="{FF2B5EF4-FFF2-40B4-BE49-F238E27FC236}">
-                <a16:creationId xmlns:a16="http://schemas.microsoft.com/office/drawing/2014/main" id="{81668785-21BB-7784-954D-8D051D07200E}"/>
+                <a16:creationId xmlns:a16="http://schemas.microsoft.com/office/drawing/2014/main" id="{C82B6F2B-7C72-6453-5A04-73EE9D0B64D2}"/>
               </a:ext>
             </a:extLst>
           </p:cNvPr>
@@ -13833,8 +13938,8 @@
         </p:nvSpPr>
         <p:spPr>
           <a:xfrm>
-            <a:off x="4089691" y="5212457"/>
-            <a:ext cx="6529895" cy="532083"/>
+            <a:off x="4807517" y="5212457"/>
+            <a:ext cx="5825510" cy="532083"/>
           </a:xfrm>
           <a:prstGeom prst="rect">
             <a:avLst/>
@@ -13868,7 +13973,7 @@
           <p:cNvPr id="16" name="source">
             <a:extLst>
               <a:ext uri="{FF2B5EF4-FFF2-40B4-BE49-F238E27FC236}">
-                <a16:creationId xmlns:a16="http://schemas.microsoft.com/office/drawing/2014/main" id="{B49F780A-E65A-5CB8-0191-F4CF3F936B13}"/>
+                <a16:creationId xmlns:a16="http://schemas.microsoft.com/office/drawing/2014/main" id="{14890E4A-A761-CBF8-99B9-13E48D6929A5}"/>
               </a:ext>
             </a:extLst>
           </p:cNvPr>
@@ -13881,7 +13986,7 @@
         </p:nvSpPr>
         <p:spPr>
           <a:xfrm>
-            <a:off x="1024128" y="6004560"/>
+            <a:off x="2072640" y="6004560"/>
             <a:ext cx="1905000" cy="304800"/>
           </a:xfrm>
           <a:prstGeom prst="roundRect">
@@ -13923,7 +14028,7 @@
     </p:spTree>
     <p:extLst>
       <p:ext uri="{BB962C8B-B14F-4D97-AF65-F5344CB8AC3E}">
-        <p14:creationId xmlns:p14="http://schemas.microsoft.com/office/powerpoint/2010/main" val="278932265"/>
+        <p14:creationId xmlns:p14="http://schemas.microsoft.com/office/powerpoint/2010/main" val="2903133957"/>
       </p:ext>
     </p:extLst>
   </p:cSld>
@@ -13955,7 +14060,7 @@
           <p:cNvPr id="7" name="creative_background">
             <a:extLst>
               <a:ext uri="{FF2B5EF4-FFF2-40B4-BE49-F238E27FC236}">
-                <a16:creationId xmlns:a16="http://schemas.microsoft.com/office/drawing/2014/main" id="{CB5D870A-E332-3780-C805-D134758A5B71}"/>
+                <a16:creationId xmlns:a16="http://schemas.microsoft.com/office/drawing/2014/main" id="{D1101E78-1F9E-A99B-C346-782510A0B8B6}"/>
               </a:ext>
             </a:extLst>
           </p:cNvPr>
@@ -13996,7 +14101,12 @@
             <p:ph type="title"/>
           </p:nvPr>
         </p:nvSpPr>
-        <p:spPr/>
+        <p:spPr>
+          <a:xfrm>
+            <a:off x="2072640" y="585216"/>
+            <a:ext cx="8674100" cy="1499616"/>
+          </a:xfrm>
+        </p:spPr>
         <p:txBody>
           <a:bodyPr/>
           <a:lstStyle>
@@ -14023,12 +14133,17 @@
             <p:ph type="dt" sz="half" idx="10"/>
           </p:nvPr>
         </p:nvSpPr>
-        <p:spPr/>
+        <p:spPr>
+          <a:xfrm>
+            <a:off x="2072640" y="6470704"/>
+            <a:ext cx="1104900" cy="274320"/>
+          </a:xfrm>
+        </p:spPr>
         <p:txBody>
           <a:bodyPr/>
           <a:lstStyle/>
           <a:p>
-            <a:fld id="{0C2FB128-6CE9-48CA-A63B-D694A7BBCE3E}" type="datetimeFigureOut">
+            <a:fld id="{D8887631-421A-4B90-81F4-114CAE3EC1BA}" type="datetimeFigureOut">
               <a:rPr lang="en-US" smtClean="0"/>
               <a:t>10/3/2026</a:t>
             </a:fld>
@@ -14070,7 +14185,7 @@
           <a:bodyPr/>
           <a:lstStyle/>
           <a:p>
-            <a:fld id="{B2E7DF40-EA43-448D-AAC9-8AB76A8B3E4D}" type="slidenum">
+            <a:fld id="{030EC083-285A-4D45-98F3-6009BB62C01A}" type="slidenum">
               <a:rPr lang="en-US" smtClean="0"/>
               <a:t>‹#›</a:t>
             </a:fld>
@@ -14083,7 +14198,7 @@
           <p:cNvPr id="8" name="marker_1">
             <a:extLst>
               <a:ext uri="{FF2B5EF4-FFF2-40B4-BE49-F238E27FC236}">
-                <a16:creationId xmlns:a16="http://schemas.microsoft.com/office/drawing/2014/main" id="{53661609-F095-2C67-7B8B-D32F18BCE852}"/>
+                <a16:creationId xmlns:a16="http://schemas.microsoft.com/office/drawing/2014/main" id="{BD912433-1979-E3DD-2F50-DB0C24446C4A}"/>
               </a:ext>
             </a:extLst>
           </p:cNvPr>
@@ -14096,8 +14211,8 @@
         </p:nvSpPr>
         <p:spPr>
           <a:xfrm>
-            <a:off x="1198591" y="2472230"/>
-            <a:ext cx="548312" cy="585291"/>
+            <a:off x="2228283" y="2472230"/>
+            <a:ext cx="489165" cy="585291"/>
           </a:xfrm>
           <a:prstGeom prst="ellipse">
             <a:avLst/>
@@ -14139,7 +14254,7 @@
           <p:cNvPr id="9" name="item_1_title">
             <a:extLst>
               <a:ext uri="{FF2B5EF4-FFF2-40B4-BE49-F238E27FC236}">
-                <a16:creationId xmlns:a16="http://schemas.microsoft.com/office/drawing/2014/main" id="{A0798594-22C4-5302-8BB1-5C59B362D83B}"/>
+                <a16:creationId xmlns:a16="http://schemas.microsoft.com/office/drawing/2014/main" id="{5DA4015A-DFC6-00D7-346E-CFF933FF749B}"/>
               </a:ext>
             </a:extLst>
           </p:cNvPr>
@@ -14152,8 +14267,8 @@
         </p:nvSpPr>
         <p:spPr>
           <a:xfrm>
-            <a:off x="1846597" y="2472230"/>
-            <a:ext cx="8723143" cy="387325"/>
+            <a:off x="2806388" y="2472230"/>
+            <a:ext cx="7782171" cy="387325"/>
           </a:xfrm>
           <a:prstGeom prst="rect">
             <a:avLst/>
@@ -14192,7 +14307,7 @@
           <p:cNvPr id="10" name="item_1">
             <a:extLst>
               <a:ext uri="{FF2B5EF4-FFF2-40B4-BE49-F238E27FC236}">
-                <a16:creationId xmlns:a16="http://schemas.microsoft.com/office/drawing/2014/main" id="{7A09D665-8E4C-1626-B152-ABF782C7677E}"/>
+                <a16:creationId xmlns:a16="http://schemas.microsoft.com/office/drawing/2014/main" id="{F2DBCB2C-DEEB-5F34-D5DA-2F342BE01731}"/>
               </a:ext>
             </a:extLst>
           </p:cNvPr>
@@ -14205,8 +14320,8 @@
         </p:nvSpPr>
         <p:spPr>
           <a:xfrm>
-            <a:off x="1846597" y="2859554"/>
-            <a:ext cx="8723143" cy="929580"/>
+            <a:off x="2806388" y="2859554"/>
+            <a:ext cx="7782171" cy="929580"/>
           </a:xfrm>
           <a:prstGeom prst="rect">
             <a:avLst/>
@@ -14240,7 +14355,7 @@
           <p:cNvPr id="11" name="marker_2">
             <a:extLst>
               <a:ext uri="{FF2B5EF4-FFF2-40B4-BE49-F238E27FC236}">
-                <a16:creationId xmlns:a16="http://schemas.microsoft.com/office/drawing/2014/main" id="{3488F948-59E5-BAEF-4238-8177D1C734A7}"/>
+                <a16:creationId xmlns:a16="http://schemas.microsoft.com/office/drawing/2014/main" id="{77C5C0CC-2A50-AD92-584E-09E6F0FB6EDB}"/>
               </a:ext>
             </a:extLst>
           </p:cNvPr>
@@ -14253,8 +14368,8 @@
         </p:nvSpPr>
         <p:spPr>
           <a:xfrm>
-            <a:off x="1198591" y="4374427"/>
-            <a:ext cx="548312" cy="585291"/>
+            <a:off x="2228284" y="4374427"/>
+            <a:ext cx="489165" cy="585291"/>
           </a:xfrm>
           <a:prstGeom prst="ellipse">
             <a:avLst/>
@@ -14296,7 +14411,7 @@
           <p:cNvPr id="12" name="item_2_title">
             <a:extLst>
               <a:ext uri="{FF2B5EF4-FFF2-40B4-BE49-F238E27FC236}">
-                <a16:creationId xmlns:a16="http://schemas.microsoft.com/office/drawing/2014/main" id="{560D4CA9-BF1F-F487-9AA9-A1E111209153}"/>
+                <a16:creationId xmlns:a16="http://schemas.microsoft.com/office/drawing/2014/main" id="{EB18324D-FC1C-BF09-D75E-9707FED8B3BC}"/>
               </a:ext>
             </a:extLst>
           </p:cNvPr>
@@ -14309,8 +14424,8 @@
         </p:nvSpPr>
         <p:spPr>
           <a:xfrm>
-            <a:off x="1846597" y="4374427"/>
-            <a:ext cx="8723143" cy="387325"/>
+            <a:off x="2806388" y="4374427"/>
+            <a:ext cx="7782171" cy="387325"/>
           </a:xfrm>
           <a:prstGeom prst="rect">
             <a:avLst/>
@@ -14349,7 +14464,7 @@
           <p:cNvPr id="13" name="item_2">
             <a:extLst>
               <a:ext uri="{FF2B5EF4-FFF2-40B4-BE49-F238E27FC236}">
-                <a16:creationId xmlns:a16="http://schemas.microsoft.com/office/drawing/2014/main" id="{991136ED-133B-CDD1-39A7-177D5E7C0835}"/>
+                <a16:creationId xmlns:a16="http://schemas.microsoft.com/office/drawing/2014/main" id="{CF469754-45DF-F9B4-FAFF-F913202F8AEB}"/>
               </a:ext>
             </a:extLst>
           </p:cNvPr>
@@ -14362,8 +14477,8 @@
         </p:nvSpPr>
         <p:spPr>
           <a:xfrm>
-            <a:off x="1846597" y="4761750"/>
-            <a:ext cx="8723143" cy="929580"/>
+            <a:off x="2806388" y="4761750"/>
+            <a:ext cx="7782171" cy="929580"/>
           </a:xfrm>
           <a:prstGeom prst="rect">
             <a:avLst/>
@@ -14397,7 +14512,7 @@
           <p:cNvPr id="14" name="source">
             <a:extLst>
               <a:ext uri="{FF2B5EF4-FFF2-40B4-BE49-F238E27FC236}">
-                <a16:creationId xmlns:a16="http://schemas.microsoft.com/office/drawing/2014/main" id="{1B49AEFA-2962-3FCE-E049-E0FBCDA9EE63}"/>
+                <a16:creationId xmlns:a16="http://schemas.microsoft.com/office/drawing/2014/main" id="{C21431B9-973A-D1E3-6DF8-CA7D6C84A37C}"/>
               </a:ext>
             </a:extLst>
           </p:cNvPr>
@@ -14410,7 +14525,7 @@
         </p:nvSpPr>
         <p:spPr>
           <a:xfrm>
-            <a:off x="1024128" y="6004560"/>
+            <a:off x="2072640" y="6004560"/>
             <a:ext cx="1905000" cy="304800"/>
           </a:xfrm>
           <a:prstGeom prst="roundRect">
@@ -14452,7 +14567,7 @@
     </p:spTree>
     <p:extLst>
       <p:ext uri="{BB962C8B-B14F-4D97-AF65-F5344CB8AC3E}">
-        <p14:creationId xmlns:p14="http://schemas.microsoft.com/office/powerpoint/2010/main" val="3592263993"/>
+        <p14:creationId xmlns:p14="http://schemas.microsoft.com/office/powerpoint/2010/main" val="3874180633"/>
       </p:ext>
     </p:extLst>
   </p:cSld>
@@ -14484,7 +14599,7 @@
           <p:cNvPr id="7" name="creative_background">
             <a:extLst>
               <a:ext uri="{FF2B5EF4-FFF2-40B4-BE49-F238E27FC236}">
-                <a16:creationId xmlns:a16="http://schemas.microsoft.com/office/drawing/2014/main" id="{4D02AEA4-FE88-8C81-5313-5BCC68B6DF79}"/>
+                <a16:creationId xmlns:a16="http://schemas.microsoft.com/office/drawing/2014/main" id="{24474828-7CF7-17E7-1DEF-9BD9B1E1918F}"/>
               </a:ext>
             </a:extLst>
           </p:cNvPr>
@@ -14525,7 +14640,12 @@
             <p:ph type="title"/>
           </p:nvPr>
         </p:nvSpPr>
-        <p:spPr/>
+        <p:spPr>
+          <a:xfrm>
+            <a:off x="2072640" y="585216"/>
+            <a:ext cx="8674100" cy="1499616"/>
+          </a:xfrm>
+        </p:spPr>
         <p:txBody>
           <a:bodyPr/>
           <a:lstStyle>
@@ -14552,12 +14672,17 @@
             <p:ph type="dt" sz="half" idx="10"/>
           </p:nvPr>
         </p:nvSpPr>
-        <p:spPr/>
+        <p:spPr>
+          <a:xfrm>
+            <a:off x="2072640" y="6470704"/>
+            <a:ext cx="1104900" cy="274320"/>
+          </a:xfrm>
+        </p:spPr>
         <p:txBody>
           <a:bodyPr/>
           <a:lstStyle/>
           <a:p>
-            <a:fld id="{0C2FB128-6CE9-48CA-A63B-D694A7BBCE3E}" type="datetimeFigureOut">
+            <a:fld id="{D8887631-421A-4B90-81F4-114CAE3EC1BA}" type="datetimeFigureOut">
               <a:rPr lang="en-US" smtClean="0"/>
               <a:t>10/3/2026</a:t>
             </a:fld>
@@ -14599,7 +14724,7 @@
           <a:bodyPr/>
           <a:lstStyle/>
           <a:p>
-            <a:fld id="{B2E7DF40-EA43-448D-AAC9-8AB76A8B3E4D}" type="slidenum">
+            <a:fld id="{030EC083-285A-4D45-98F3-6009BB62C01A}" type="slidenum">
               <a:rPr lang="en-US" smtClean="0"/>
               <a:t>‹#›</a:t>
             </a:fld>
@@ -14612,7 +14737,7 @@
           <p:cNvPr id="8" name="item_1_title">
             <a:extLst>
               <a:ext uri="{FF2B5EF4-FFF2-40B4-BE49-F238E27FC236}">
-                <a16:creationId xmlns:a16="http://schemas.microsoft.com/office/drawing/2014/main" id="{79B9D831-CA48-1564-4557-46DDDF3A79E9}"/>
+                <a16:creationId xmlns:a16="http://schemas.microsoft.com/office/drawing/2014/main" id="{B514784F-0EE7-D1A0-F134-82A283F2D02D}"/>
               </a:ext>
             </a:extLst>
           </p:cNvPr>
@@ -14625,8 +14750,8 @@
         </p:nvSpPr>
         <p:spPr>
           <a:xfrm>
-            <a:off x="1198591" y="2472230"/>
-            <a:ext cx="4411418" cy="387325"/>
+            <a:off x="2228283" y="2472230"/>
+            <a:ext cx="3935555" cy="387325"/>
           </a:xfrm>
         </p:spPr>
         <p:txBody>
@@ -14662,7 +14787,7 @@
           <p:cNvPr id="9" name="item_1">
             <a:extLst>
               <a:ext uri="{FF2B5EF4-FFF2-40B4-BE49-F238E27FC236}">
-                <a16:creationId xmlns:a16="http://schemas.microsoft.com/office/drawing/2014/main" id="{9A10043D-261B-4BE4-0419-56E660309528}"/>
+                <a16:creationId xmlns:a16="http://schemas.microsoft.com/office/drawing/2014/main" id="{99FD1503-56CC-E6B9-AF54-922EF4EE5997}"/>
               </a:ext>
             </a:extLst>
           </p:cNvPr>
@@ -14675,8 +14800,8 @@
         </p:nvSpPr>
         <p:spPr>
           <a:xfrm>
-            <a:off x="1198591" y="2859554"/>
-            <a:ext cx="4411418" cy="929580"/>
+            <a:off x="2228284" y="2859554"/>
+            <a:ext cx="3935555" cy="929580"/>
           </a:xfrm>
           <a:prstGeom prst="rect">
             <a:avLst/>
@@ -14710,7 +14835,7 @@
           <p:cNvPr id="10" name="item_2_title">
             <a:extLst>
               <a:ext uri="{FF2B5EF4-FFF2-40B4-BE49-F238E27FC236}">
-                <a16:creationId xmlns:a16="http://schemas.microsoft.com/office/drawing/2014/main" id="{F633A11A-D1F9-3444-8F32-557E45846926}"/>
+                <a16:creationId xmlns:a16="http://schemas.microsoft.com/office/drawing/2014/main" id="{BED159D9-DEDF-735D-1529-2BD14C50ECA9}"/>
               </a:ext>
             </a:extLst>
           </p:cNvPr>
@@ -14723,8 +14848,8 @@
         </p:nvSpPr>
         <p:spPr>
           <a:xfrm>
-            <a:off x="6158321" y="2472230"/>
-            <a:ext cx="4411418" cy="387325"/>
+            <a:off x="6653004" y="2472230"/>
+            <a:ext cx="3935555" cy="387325"/>
           </a:xfrm>
           <a:prstGeom prst="rect">
             <a:avLst/>
@@ -14763,7 +14888,7 @@
           <p:cNvPr id="11" name="item_2">
             <a:extLst>
               <a:ext uri="{FF2B5EF4-FFF2-40B4-BE49-F238E27FC236}">
-                <a16:creationId xmlns:a16="http://schemas.microsoft.com/office/drawing/2014/main" id="{3EEEAE3D-72C8-FA3F-4F23-6FECAD19E42C}"/>
+                <a16:creationId xmlns:a16="http://schemas.microsoft.com/office/drawing/2014/main" id="{7749E16A-7DFD-D003-62D4-6BE9D0EB0CF9}"/>
               </a:ext>
             </a:extLst>
           </p:cNvPr>
@@ -14776,8 +14901,8 @@
         </p:nvSpPr>
         <p:spPr>
           <a:xfrm>
-            <a:off x="6158321" y="2859554"/>
-            <a:ext cx="4411418" cy="929580"/>
+            <a:off x="6653004" y="2859554"/>
+            <a:ext cx="3935555" cy="929580"/>
           </a:xfrm>
           <a:prstGeom prst="rect">
             <a:avLst/>
@@ -14811,7 +14936,7 @@
           <p:cNvPr id="12" name="item_3_title">
             <a:extLst>
               <a:ext uri="{FF2B5EF4-FFF2-40B4-BE49-F238E27FC236}">
-                <a16:creationId xmlns:a16="http://schemas.microsoft.com/office/drawing/2014/main" id="{D8F4BEE0-C917-A770-081A-851F21B42CB4}"/>
+                <a16:creationId xmlns:a16="http://schemas.microsoft.com/office/drawing/2014/main" id="{BEE16419-2531-AB0E-5BA7-14DCD62B6F06}"/>
               </a:ext>
             </a:extLst>
           </p:cNvPr>
@@ -14824,8 +14949,8 @@
         </p:nvSpPr>
         <p:spPr>
           <a:xfrm>
-            <a:off x="1198591" y="4374427"/>
-            <a:ext cx="4411418" cy="387325"/>
+            <a:off x="2228284" y="4374427"/>
+            <a:ext cx="3935555" cy="387325"/>
           </a:xfrm>
           <a:prstGeom prst="rect">
             <a:avLst/>
@@ -14864,7 +14989,7 @@
           <p:cNvPr id="13" name="item_3">
             <a:extLst>
               <a:ext uri="{FF2B5EF4-FFF2-40B4-BE49-F238E27FC236}">
-                <a16:creationId xmlns:a16="http://schemas.microsoft.com/office/drawing/2014/main" id="{02DB51B3-603D-243F-4D0F-C482EF678BE5}"/>
+                <a16:creationId xmlns:a16="http://schemas.microsoft.com/office/drawing/2014/main" id="{2D877595-FAF0-ECAA-A7B0-393854D213CB}"/>
               </a:ext>
             </a:extLst>
           </p:cNvPr>
@@ -14877,8 +15002,8 @@
         </p:nvSpPr>
         <p:spPr>
           <a:xfrm>
-            <a:off x="1198591" y="4761750"/>
-            <a:ext cx="4411418" cy="929580"/>
+            <a:off x="2228284" y="4761750"/>
+            <a:ext cx="3935555" cy="929580"/>
           </a:xfrm>
           <a:prstGeom prst="rect">
             <a:avLst/>
@@ -14912,7 +15037,7 @@
           <p:cNvPr id="14" name="item_4_title">
             <a:extLst>
               <a:ext uri="{FF2B5EF4-FFF2-40B4-BE49-F238E27FC236}">
-                <a16:creationId xmlns:a16="http://schemas.microsoft.com/office/drawing/2014/main" id="{C0DF73F4-14C9-DEF2-2BB9-89A40121844F}"/>
+                <a16:creationId xmlns:a16="http://schemas.microsoft.com/office/drawing/2014/main" id="{30E79AC0-E2FC-95DA-E84B-61B56C24239E}"/>
               </a:ext>
             </a:extLst>
           </p:cNvPr>
@@ -14925,8 +15050,8 @@
         </p:nvSpPr>
         <p:spPr>
           <a:xfrm>
-            <a:off x="6158321" y="4374427"/>
-            <a:ext cx="4411418" cy="387325"/>
+            <a:off x="6653004" y="4374427"/>
+            <a:ext cx="3935555" cy="387325"/>
           </a:xfrm>
           <a:prstGeom prst="rect">
             <a:avLst/>
@@ -14965,7 +15090,7 @@
           <p:cNvPr id="15" name="item_4">
             <a:extLst>
               <a:ext uri="{FF2B5EF4-FFF2-40B4-BE49-F238E27FC236}">
-                <a16:creationId xmlns:a16="http://schemas.microsoft.com/office/drawing/2014/main" id="{05E2B007-5539-3700-AE6A-1A0D264077AA}"/>
+                <a16:creationId xmlns:a16="http://schemas.microsoft.com/office/drawing/2014/main" id="{B2CD9B4B-A805-BC23-70C4-77D3B85B60BA}"/>
               </a:ext>
             </a:extLst>
           </p:cNvPr>
@@ -14978,8 +15103,8 @@
         </p:nvSpPr>
         <p:spPr>
           <a:xfrm>
-            <a:off x="6158321" y="4761750"/>
-            <a:ext cx="4411418" cy="929580"/>
+            <a:off x="6653004" y="4761750"/>
+            <a:ext cx="3935555" cy="929580"/>
           </a:xfrm>
           <a:prstGeom prst="rect">
             <a:avLst/>
@@ -15013,7 +15138,7 @@
           <p:cNvPr id="16" name="source">
             <a:extLst>
               <a:ext uri="{FF2B5EF4-FFF2-40B4-BE49-F238E27FC236}">
-                <a16:creationId xmlns:a16="http://schemas.microsoft.com/office/drawing/2014/main" id="{9FBA9D29-F361-7214-667B-5E04FE22774C}"/>
+                <a16:creationId xmlns:a16="http://schemas.microsoft.com/office/drawing/2014/main" id="{11B6B2A4-7682-4E04-44CB-79C782277AB5}"/>
               </a:ext>
             </a:extLst>
           </p:cNvPr>
@@ -15026,7 +15151,7 @@
         </p:nvSpPr>
         <p:spPr>
           <a:xfrm>
-            <a:off x="1024128" y="6004560"/>
+            <a:off x="2072640" y="6004560"/>
             <a:ext cx="1905000" cy="304800"/>
           </a:xfrm>
           <a:prstGeom prst="roundRect">
@@ -15068,7 +15193,7 @@
     </p:spTree>
     <p:extLst>
       <p:ext uri="{BB962C8B-B14F-4D97-AF65-F5344CB8AC3E}">
-        <p14:creationId xmlns:p14="http://schemas.microsoft.com/office/powerpoint/2010/main" val="2977655638"/>
+        <p14:creationId xmlns:p14="http://schemas.microsoft.com/office/powerpoint/2010/main" val="2420834013"/>
       </p:ext>
     </p:extLst>
   </p:cSld>
@@ -15100,7 +15225,7 @@
           <p:cNvPr id="7" name="creative_background">
             <a:extLst>
               <a:ext uri="{FF2B5EF4-FFF2-40B4-BE49-F238E27FC236}">
-                <a16:creationId xmlns:a16="http://schemas.microsoft.com/office/drawing/2014/main" id="{ED449333-B1C0-E2A8-1665-BCCCE48F80FE}"/>
+                <a16:creationId xmlns:a16="http://schemas.microsoft.com/office/drawing/2014/main" id="{702A9A75-BA31-63E5-16A5-A2A8C5BFEB53}"/>
               </a:ext>
             </a:extLst>
           </p:cNvPr>
@@ -15141,7 +15266,12 @@
             <p:ph type="title"/>
           </p:nvPr>
         </p:nvSpPr>
-        <p:spPr/>
+        <p:spPr>
+          <a:xfrm>
+            <a:off x="2072640" y="585216"/>
+            <a:ext cx="8674100" cy="1499616"/>
+          </a:xfrm>
+        </p:spPr>
         <p:txBody>
           <a:bodyPr/>
           <a:lstStyle>
@@ -15168,12 +15298,17 @@
             <p:ph type="dt" sz="half" idx="10"/>
           </p:nvPr>
         </p:nvSpPr>
-        <p:spPr/>
+        <p:spPr>
+          <a:xfrm>
+            <a:off x="2072640" y="6470704"/>
+            <a:ext cx="1104900" cy="274320"/>
+          </a:xfrm>
+        </p:spPr>
         <p:txBody>
           <a:bodyPr/>
           <a:lstStyle/>
           <a:p>
-            <a:fld id="{0C2FB128-6CE9-48CA-A63B-D694A7BBCE3E}" type="datetimeFigureOut">
+            <a:fld id="{D8887631-421A-4B90-81F4-114CAE3EC1BA}" type="datetimeFigureOut">
               <a:rPr lang="en-US" smtClean="0"/>
               <a:t>10/3/2026</a:t>
             </a:fld>
@@ -15215,7 +15350,7 @@
           <a:bodyPr/>
           <a:lstStyle/>
           <a:p>
-            <a:fld id="{B2E7DF40-EA43-448D-AAC9-8AB76A8B3E4D}" type="slidenum">
+            <a:fld id="{030EC083-285A-4D45-98F3-6009BB62C01A}" type="slidenum">
               <a:rPr lang="en-US" smtClean="0"/>
               <a:t>‹#›</a:t>
             </a:fld>
@@ -15228,7 +15363,7 @@
           <p:cNvPr id="8" name="item_1_title">
             <a:extLst>
               <a:ext uri="{FF2B5EF4-FFF2-40B4-BE49-F238E27FC236}">
-                <a16:creationId xmlns:a16="http://schemas.microsoft.com/office/drawing/2014/main" id="{46618CF8-39A9-AE12-378E-7EBCE3F39653}"/>
+                <a16:creationId xmlns:a16="http://schemas.microsoft.com/office/drawing/2014/main" id="{AB4796FE-591C-0615-E0F0-F93DC20606BD}"/>
               </a:ext>
             </a:extLst>
           </p:cNvPr>
@@ -15241,8 +15376,8 @@
         </p:nvSpPr>
         <p:spPr>
           <a:xfrm>
-            <a:off x="1198591" y="2811082"/>
-            <a:ext cx="1931553" cy="847132"/>
+            <a:off x="2228283" y="2811082"/>
+            <a:ext cx="1723195" cy="847132"/>
           </a:xfrm>
         </p:spPr>
         <p:txBody>
@@ -15278,7 +15413,7 @@
           <p:cNvPr id="9" name="item_1">
             <a:extLst>
               <a:ext uri="{FF2B5EF4-FFF2-40B4-BE49-F238E27FC236}">
-                <a16:creationId xmlns:a16="http://schemas.microsoft.com/office/drawing/2014/main" id="{4446581C-CC87-96FF-121E-ED4AAD16050F}"/>
+                <a16:creationId xmlns:a16="http://schemas.microsoft.com/office/drawing/2014/main" id="{9A3362E4-D824-73D2-5D32-5AB444ACFDB3}"/>
               </a:ext>
             </a:extLst>
           </p:cNvPr>
@@ -15291,8 +15426,8 @@
         </p:nvSpPr>
         <p:spPr>
           <a:xfrm>
-            <a:off x="1198592" y="3658215"/>
-            <a:ext cx="1931553" cy="2033117"/>
+            <a:off x="2228284" y="3658215"/>
+            <a:ext cx="1723195" cy="2033117"/>
           </a:xfrm>
           <a:prstGeom prst="rect">
             <a:avLst/>
@@ -15326,7 +15461,7 @@
           <p:cNvPr id="10" name="item_2_title">
             <a:extLst>
               <a:ext uri="{FF2B5EF4-FFF2-40B4-BE49-F238E27FC236}">
-                <a16:creationId xmlns:a16="http://schemas.microsoft.com/office/drawing/2014/main" id="{9B883B29-C008-23DA-E9AE-3A10C3720CB8}"/>
+                <a16:creationId xmlns:a16="http://schemas.microsoft.com/office/drawing/2014/main" id="{6A95A663-6415-9D88-D9F5-F8862493B65D}"/>
               </a:ext>
             </a:extLst>
           </p:cNvPr>
@@ -15339,8 +15474,8 @@
         </p:nvSpPr>
         <p:spPr>
           <a:xfrm>
-            <a:off x="3678457" y="2811082"/>
-            <a:ext cx="1931553" cy="847132"/>
+            <a:off x="4440644" y="2811082"/>
+            <a:ext cx="1723195" cy="847132"/>
           </a:xfrm>
           <a:prstGeom prst="rect">
             <a:avLst/>
@@ -15379,7 +15514,7 @@
           <p:cNvPr id="11" name="item_2">
             <a:extLst>
               <a:ext uri="{FF2B5EF4-FFF2-40B4-BE49-F238E27FC236}">
-                <a16:creationId xmlns:a16="http://schemas.microsoft.com/office/drawing/2014/main" id="{FB1E527B-83B6-9201-79FA-4B1CA297D9BD}"/>
+                <a16:creationId xmlns:a16="http://schemas.microsoft.com/office/drawing/2014/main" id="{210A806D-C737-4BDF-218E-ACC10606D96F}"/>
               </a:ext>
             </a:extLst>
           </p:cNvPr>
@@ -15392,8 +15527,8 @@
         </p:nvSpPr>
         <p:spPr>
           <a:xfrm>
-            <a:off x="3678457" y="3658215"/>
-            <a:ext cx="1931553" cy="2033117"/>
+            <a:off x="4440644" y="3658215"/>
+            <a:ext cx="1723195" cy="2033117"/>
           </a:xfrm>
           <a:prstGeom prst="rect">
             <a:avLst/>
@@ -15427,7 +15562,7 @@
           <p:cNvPr id="12" name="item_3_title">
             <a:extLst>
               <a:ext uri="{FF2B5EF4-FFF2-40B4-BE49-F238E27FC236}">
-                <a16:creationId xmlns:a16="http://schemas.microsoft.com/office/drawing/2014/main" id="{13DF24A0-2EF1-EDCD-BEDB-CAE0DC0E3F63}"/>
+                <a16:creationId xmlns:a16="http://schemas.microsoft.com/office/drawing/2014/main" id="{2B355F66-F00C-0E88-02F2-99DCC4F9ACE6}"/>
               </a:ext>
             </a:extLst>
           </p:cNvPr>
@@ -15440,8 +15575,8 @@
         </p:nvSpPr>
         <p:spPr>
           <a:xfrm>
-            <a:off x="6158322" y="2811082"/>
-            <a:ext cx="1931553" cy="847132"/>
+            <a:off x="6653004" y="2811082"/>
+            <a:ext cx="1723195" cy="847132"/>
           </a:xfrm>
           <a:prstGeom prst="rect">
             <a:avLst/>
@@ -15480,7 +15615,7 @@
           <p:cNvPr id="13" name="item_3">
             <a:extLst>
               <a:ext uri="{FF2B5EF4-FFF2-40B4-BE49-F238E27FC236}">
-                <a16:creationId xmlns:a16="http://schemas.microsoft.com/office/drawing/2014/main" id="{B7DB4616-8E98-4BFB-6404-E7711D8817A0}"/>
+                <a16:creationId xmlns:a16="http://schemas.microsoft.com/office/drawing/2014/main" id="{9C94C1AB-253C-A994-F969-A1FB51203E79}"/>
               </a:ext>
             </a:extLst>
           </p:cNvPr>
@@ -15493,8 +15628,8 @@
         </p:nvSpPr>
         <p:spPr>
           <a:xfrm>
-            <a:off x="6158322" y="3658215"/>
-            <a:ext cx="1931553" cy="2033117"/>
+            <a:off x="6653004" y="3658215"/>
+            <a:ext cx="1723195" cy="2033117"/>
           </a:xfrm>
           <a:prstGeom prst="rect">
             <a:avLst/>
@@ -15528,7 +15663,7 @@
           <p:cNvPr id="14" name="item_4_title">
             <a:extLst>
               <a:ext uri="{FF2B5EF4-FFF2-40B4-BE49-F238E27FC236}">
-                <a16:creationId xmlns:a16="http://schemas.microsoft.com/office/drawing/2014/main" id="{06FF0967-1388-A919-9A5F-0F31CD77D815}"/>
+                <a16:creationId xmlns:a16="http://schemas.microsoft.com/office/drawing/2014/main" id="{6C2CB319-54E0-AF67-3B78-DE50B6821754}"/>
               </a:ext>
             </a:extLst>
           </p:cNvPr>
@@ -15541,8 +15676,8 @@
         </p:nvSpPr>
         <p:spPr>
           <a:xfrm>
-            <a:off x="8638186" y="2811082"/>
-            <a:ext cx="1931553" cy="847132"/>
+            <a:off x="8865364" y="2811082"/>
+            <a:ext cx="1723195" cy="847132"/>
           </a:xfrm>
           <a:prstGeom prst="rect">
             <a:avLst/>
@@ -15581,7 +15716,7 @@
           <p:cNvPr id="15" name="item_4">
             <a:extLst>
               <a:ext uri="{FF2B5EF4-FFF2-40B4-BE49-F238E27FC236}">
-                <a16:creationId xmlns:a16="http://schemas.microsoft.com/office/drawing/2014/main" id="{77224943-56A2-A986-3960-124D4CD54929}"/>
+                <a16:creationId xmlns:a16="http://schemas.microsoft.com/office/drawing/2014/main" id="{B0E23F74-5088-002D-F920-BDA5E768ED12}"/>
               </a:ext>
             </a:extLst>
           </p:cNvPr>
@@ -15594,8 +15729,8 @@
         </p:nvSpPr>
         <p:spPr>
           <a:xfrm>
-            <a:off x="8638186" y="3658215"/>
-            <a:ext cx="1931553" cy="2033117"/>
+            <a:off x="8865364" y="3658215"/>
+            <a:ext cx="1723195" cy="2033117"/>
           </a:xfrm>
           <a:prstGeom prst="rect">
             <a:avLst/>
@@ -15629,7 +15764,7 @@
           <p:cNvPr id="16" name="source">
             <a:extLst>
               <a:ext uri="{FF2B5EF4-FFF2-40B4-BE49-F238E27FC236}">
-                <a16:creationId xmlns:a16="http://schemas.microsoft.com/office/drawing/2014/main" id="{5587208A-AAFC-C35E-3A78-C25B9F4EB2E7}"/>
+                <a16:creationId xmlns:a16="http://schemas.microsoft.com/office/drawing/2014/main" id="{3C557CF0-6E55-E436-84B0-9288E01011E1}"/>
               </a:ext>
             </a:extLst>
           </p:cNvPr>
@@ -15642,7 +15777,7 @@
         </p:nvSpPr>
         <p:spPr>
           <a:xfrm>
-            <a:off x="1024128" y="6004560"/>
+            <a:off x="2072640" y="6004560"/>
             <a:ext cx="1905000" cy="304800"/>
           </a:xfrm>
           <a:prstGeom prst="roundRect">
@@ -15684,7 +15819,7 @@
     </p:spTree>
     <p:extLst>
       <p:ext uri="{BB962C8B-B14F-4D97-AF65-F5344CB8AC3E}">
-        <p14:creationId xmlns:p14="http://schemas.microsoft.com/office/powerpoint/2010/main" val="2117549434"/>
+        <p14:creationId xmlns:p14="http://schemas.microsoft.com/office/powerpoint/2010/main" val="4239406287"/>
       </p:ext>
     </p:extLst>
   </p:cSld>
@@ -15716,7 +15851,7 @@
           <p:cNvPr id="7" name="creative_background">
             <a:extLst>
               <a:ext uri="{FF2B5EF4-FFF2-40B4-BE49-F238E27FC236}">
-                <a16:creationId xmlns:a16="http://schemas.microsoft.com/office/drawing/2014/main" id="{11370A0C-ADC3-7768-FB38-E9EC85A481AB}"/>
+                <a16:creationId xmlns:a16="http://schemas.microsoft.com/office/drawing/2014/main" id="{BBA042B4-D5E8-9E11-DE90-10A9AE77D73C}"/>
               </a:ext>
             </a:extLst>
           </p:cNvPr>
@@ -15757,7 +15892,12 @@
             <p:ph type="title"/>
           </p:nvPr>
         </p:nvSpPr>
-        <p:spPr/>
+        <p:spPr>
+          <a:xfrm>
+            <a:off x="2072640" y="585216"/>
+            <a:ext cx="8674100" cy="1499616"/>
+          </a:xfrm>
+        </p:spPr>
         <p:txBody>
           <a:bodyPr/>
           <a:lstStyle>
@@ -15784,12 +15924,17 @@
             <p:ph type="dt" sz="half" idx="10"/>
           </p:nvPr>
         </p:nvSpPr>
-        <p:spPr/>
+        <p:spPr>
+          <a:xfrm>
+            <a:off x="2072640" y="6470704"/>
+            <a:ext cx="1104900" cy="274320"/>
+          </a:xfrm>
+        </p:spPr>
         <p:txBody>
           <a:bodyPr/>
           <a:lstStyle/>
           <a:p>
-            <a:fld id="{0C2FB128-6CE9-48CA-A63B-D694A7BBCE3E}" type="datetimeFigureOut">
+            <a:fld id="{D8887631-421A-4B90-81F4-114CAE3EC1BA}" type="datetimeFigureOut">
               <a:rPr lang="en-US" smtClean="0"/>
               <a:t>10/3/2026</a:t>
             </a:fld>
@@ -15831,7 +15976,7 @@
           <a:bodyPr/>
           <a:lstStyle/>
           <a:p>
-            <a:fld id="{B2E7DF40-EA43-448D-AAC9-8AB76A8B3E4D}" type="slidenum">
+            <a:fld id="{030EC083-285A-4D45-98F3-6009BB62C01A}" type="slidenum">
               <a:rPr lang="en-US" smtClean="0"/>
               <a:t>‹#›</a:t>
             </a:fld>
@@ -15844,7 +15989,7 @@
           <p:cNvPr id="8" name="kpi_value_1">
             <a:extLst>
               <a:ext uri="{FF2B5EF4-FFF2-40B4-BE49-F238E27FC236}">
-                <a16:creationId xmlns:a16="http://schemas.microsoft.com/office/drawing/2014/main" id="{39085D11-535B-EBB5-9148-2FCF99EE5070}"/>
+                <a16:creationId xmlns:a16="http://schemas.microsoft.com/office/drawing/2014/main" id="{92B90432-4C41-B990-6DB7-F40ECC0DA5DF}"/>
               </a:ext>
             </a:extLst>
           </p:cNvPr>
@@ -15857,8 +16002,8 @@
         </p:nvSpPr>
         <p:spPr>
           <a:xfrm>
-            <a:off x="1198591" y="2472230"/>
-            <a:ext cx="4705512" cy="1995843"/>
+            <a:off x="2228283" y="2472230"/>
+            <a:ext cx="4197925" cy="1995843"/>
           </a:xfrm>
         </p:spPr>
         <p:txBody>
@@ -15894,7 +16039,7 @@
           <p:cNvPr id="9" name="kpi_label_1">
             <a:extLst>
               <a:ext uri="{FF2B5EF4-FFF2-40B4-BE49-F238E27FC236}">
-                <a16:creationId xmlns:a16="http://schemas.microsoft.com/office/drawing/2014/main" id="{CFC37CB8-42E8-8AC4-E4DA-C63D9CCE18E5}"/>
+                <a16:creationId xmlns:a16="http://schemas.microsoft.com/office/drawing/2014/main" id="{58E59069-E552-289A-2C74-5EFBAB53EC33}"/>
               </a:ext>
             </a:extLst>
           </p:cNvPr>
@@ -15907,8 +16052,8 @@
         </p:nvSpPr>
         <p:spPr>
           <a:xfrm>
-            <a:off x="1198591" y="4532455"/>
-            <a:ext cx="4705512" cy="1158877"/>
+            <a:off x="2228284" y="4532455"/>
+            <a:ext cx="4197925" cy="1158877"/>
           </a:xfrm>
           <a:prstGeom prst="rect">
             <a:avLst/>
@@ -15942,7 +16087,7 @@
           <p:cNvPr id="10" name="quote">
             <a:extLst>
               <a:ext uri="{FF2B5EF4-FFF2-40B4-BE49-F238E27FC236}">
-                <a16:creationId xmlns:a16="http://schemas.microsoft.com/office/drawing/2014/main" id="{4292C077-E6F4-11E3-D637-10573D73A0F3}"/>
+                <a16:creationId xmlns:a16="http://schemas.microsoft.com/office/drawing/2014/main" id="{3DB77994-EEB5-7534-7D1E-41030F08076D}"/>
               </a:ext>
             </a:extLst>
           </p:cNvPr>
@@ -15955,8 +16100,8 @@
         </p:nvSpPr>
         <p:spPr>
           <a:xfrm>
-            <a:off x="1198591" y="2472230"/>
-            <a:ext cx="4705512" cy="2510899"/>
+            <a:off x="2228284" y="2472230"/>
+            <a:ext cx="4197925" cy="2510899"/>
           </a:xfrm>
           <a:prstGeom prst="rect">
             <a:avLst/>
@@ -15992,7 +16137,7 @@
           <p:cNvPr id="11" name="attribution">
             <a:extLst>
               <a:ext uri="{FF2B5EF4-FFF2-40B4-BE49-F238E27FC236}">
-                <a16:creationId xmlns:a16="http://schemas.microsoft.com/office/drawing/2014/main" id="{D9C6D402-37EB-5DE4-0097-59B72C704C08}"/>
+                <a16:creationId xmlns:a16="http://schemas.microsoft.com/office/drawing/2014/main" id="{84F112C5-9ECD-BEE9-2DBE-54106CB9702F}"/>
               </a:ext>
             </a:extLst>
           </p:cNvPr>
@@ -16005,8 +16150,8 @@
         </p:nvSpPr>
         <p:spPr>
           <a:xfrm>
-            <a:off x="1198591" y="5047511"/>
-            <a:ext cx="4705512" cy="643820"/>
+            <a:off x="2228284" y="5047511"/>
+            <a:ext cx="4197925" cy="643820"/>
           </a:xfrm>
           <a:prstGeom prst="rect">
             <a:avLst/>
@@ -16040,7 +16185,7 @@
           <p:cNvPr id="12" name="item_1_title">
             <a:extLst>
               <a:ext uri="{FF2B5EF4-FFF2-40B4-BE49-F238E27FC236}">
-                <a16:creationId xmlns:a16="http://schemas.microsoft.com/office/drawing/2014/main" id="{235E01D0-59BE-3C2F-76A0-1DDAF140E4EB}"/>
+                <a16:creationId xmlns:a16="http://schemas.microsoft.com/office/drawing/2014/main" id="{1AE790B1-9ACF-4A16-399A-89B09E1185CD}"/>
               </a:ext>
             </a:extLst>
           </p:cNvPr>
@@ -16053,8 +16198,8 @@
         </p:nvSpPr>
         <p:spPr>
           <a:xfrm>
-            <a:off x="6467369" y="2286001"/>
-            <a:ext cx="4276832" cy="1056341"/>
+            <a:off x="6928715" y="2286001"/>
+            <a:ext cx="3815487" cy="1056341"/>
           </a:xfrm>
           <a:prstGeom prst="rect">
             <a:avLst/>
@@ -16093,7 +16238,7 @@
           <p:cNvPr id="13" name="item_1">
             <a:extLst>
               <a:ext uri="{FF2B5EF4-FFF2-40B4-BE49-F238E27FC236}">
-                <a16:creationId xmlns:a16="http://schemas.microsoft.com/office/drawing/2014/main" id="{E9917CCA-AF4D-A8E5-3349-FDDD4678B682}"/>
+                <a16:creationId xmlns:a16="http://schemas.microsoft.com/office/drawing/2014/main" id="{CBFC8A79-43E8-FDB9-2104-627E0F753BB8}"/>
               </a:ext>
             </a:extLst>
           </p:cNvPr>
@@ -16106,8 +16251,8 @@
         </p:nvSpPr>
         <p:spPr>
           <a:xfrm>
-            <a:off x="6467369" y="3342342"/>
-            <a:ext cx="4276832" cy="2535219"/>
+            <a:off x="6928715" y="3342342"/>
+            <a:ext cx="3815487" cy="2535219"/>
           </a:xfrm>
           <a:prstGeom prst="rect">
             <a:avLst/>
@@ -16141,7 +16286,7 @@
           <p:cNvPr id="14" name="source">
             <a:extLst>
               <a:ext uri="{FF2B5EF4-FFF2-40B4-BE49-F238E27FC236}">
-                <a16:creationId xmlns:a16="http://schemas.microsoft.com/office/drawing/2014/main" id="{9FF00B5B-9292-3680-83B3-D623CF41F0D7}"/>
+                <a16:creationId xmlns:a16="http://schemas.microsoft.com/office/drawing/2014/main" id="{EFB8D1DC-9849-7740-499F-AE2CCE3E25BF}"/>
               </a:ext>
             </a:extLst>
           </p:cNvPr>
@@ -16154,7 +16299,7 @@
         </p:nvSpPr>
         <p:spPr>
           <a:xfrm>
-            <a:off x="1024128" y="6004560"/>
+            <a:off x="2072640" y="6004560"/>
             <a:ext cx="1905000" cy="304800"/>
           </a:xfrm>
           <a:prstGeom prst="roundRect">
@@ -16196,7 +16341,7 @@
     </p:spTree>
     <p:extLst>
       <p:ext uri="{BB962C8B-B14F-4D97-AF65-F5344CB8AC3E}">
-        <p14:creationId xmlns:p14="http://schemas.microsoft.com/office/powerpoint/2010/main" val="1697204258"/>
+        <p14:creationId xmlns:p14="http://schemas.microsoft.com/office/powerpoint/2010/main" val="1839188322"/>
       </p:ext>
     </p:extLst>
   </p:cSld>
@@ -16228,7 +16373,7 @@
           <p:cNvPr id="7" name="creative_background">
             <a:extLst>
               <a:ext uri="{FF2B5EF4-FFF2-40B4-BE49-F238E27FC236}">
-                <a16:creationId xmlns:a16="http://schemas.microsoft.com/office/drawing/2014/main" id="{7C2DAE60-0307-0948-837B-44A2E500EB2D}"/>
+                <a16:creationId xmlns:a16="http://schemas.microsoft.com/office/drawing/2014/main" id="{B1298B01-C826-1218-FB25-4BD0566136F1}"/>
               </a:ext>
             </a:extLst>
           </p:cNvPr>
@@ -16269,7 +16414,12 @@
             <p:ph type="title"/>
           </p:nvPr>
         </p:nvSpPr>
-        <p:spPr/>
+        <p:spPr>
+          <a:xfrm>
+            <a:off x="2072640" y="585216"/>
+            <a:ext cx="8674100" cy="1499616"/>
+          </a:xfrm>
+        </p:spPr>
         <p:txBody>
           <a:bodyPr/>
           <a:lstStyle>
@@ -16296,12 +16446,17 @@
             <p:ph type="dt" sz="half" idx="10"/>
           </p:nvPr>
         </p:nvSpPr>
-        <p:spPr/>
+        <p:spPr>
+          <a:xfrm>
+            <a:off x="2072640" y="6470704"/>
+            <a:ext cx="1104900" cy="274320"/>
+          </a:xfrm>
+        </p:spPr>
         <p:txBody>
           <a:bodyPr/>
           <a:lstStyle/>
           <a:p>
-            <a:fld id="{0C2FB128-6CE9-48CA-A63B-D694A7BBCE3E}" type="datetimeFigureOut">
+            <a:fld id="{D8887631-421A-4B90-81F4-114CAE3EC1BA}" type="datetimeFigureOut">
               <a:rPr lang="en-US" smtClean="0"/>
               <a:t>10/3/2026</a:t>
             </a:fld>
@@ -16343,7 +16498,7 @@
           <a:bodyPr/>
           <a:lstStyle/>
           <a:p>
-            <a:fld id="{B2E7DF40-EA43-448D-AAC9-8AB76A8B3E4D}" type="slidenum">
+            <a:fld id="{030EC083-285A-4D45-98F3-6009BB62C01A}" type="slidenum">
               <a:rPr lang="en-US" smtClean="0"/>
               <a:t>‹#›</a:t>
             </a:fld>
@@ -16356,7 +16511,7 @@
           <p:cNvPr id="8" name="item_1_title">
             <a:extLst>
               <a:ext uri="{FF2B5EF4-FFF2-40B4-BE49-F238E27FC236}">
-                <a16:creationId xmlns:a16="http://schemas.microsoft.com/office/drawing/2014/main" id="{91591170-30E7-867E-7BA9-E1B4649095D5}"/>
+                <a16:creationId xmlns:a16="http://schemas.microsoft.com/office/drawing/2014/main" id="{974C669D-EDD4-98B5-F4F7-8345BBFBA313}"/>
               </a:ext>
             </a:extLst>
           </p:cNvPr>
@@ -16369,8 +16524,8 @@
         </p:nvSpPr>
         <p:spPr>
           <a:xfrm>
-            <a:off x="1198591" y="2472230"/>
-            <a:ext cx="2758175" cy="946795"/>
+            <a:off x="2228283" y="2472230"/>
+            <a:ext cx="2460648" cy="946795"/>
           </a:xfrm>
         </p:spPr>
         <p:txBody>
@@ -16406,7 +16561,7 @@
           <p:cNvPr id="9" name="item_1">
             <a:extLst>
               <a:ext uri="{FF2B5EF4-FFF2-40B4-BE49-F238E27FC236}">
-                <a16:creationId xmlns:a16="http://schemas.microsoft.com/office/drawing/2014/main" id="{34651A63-68E7-038E-44D8-2482A9D2F2D9}"/>
+                <a16:creationId xmlns:a16="http://schemas.microsoft.com/office/drawing/2014/main" id="{0AAA6C9C-8338-9EB0-C866-A81826B059D0}"/>
               </a:ext>
             </a:extLst>
           </p:cNvPr>
@@ -16419,8 +16574,8 @@
         </p:nvSpPr>
         <p:spPr>
           <a:xfrm>
-            <a:off x="1198592" y="3419025"/>
-            <a:ext cx="2758175" cy="2272307"/>
+            <a:off x="2228283" y="3419025"/>
+            <a:ext cx="2460648" cy="2272307"/>
           </a:xfrm>
           <a:prstGeom prst="rect">
             <a:avLst/>
@@ -16454,7 +16609,7 @@
           <p:cNvPr id="10" name="item_2_title">
             <a:extLst>
               <a:ext uri="{FF2B5EF4-FFF2-40B4-BE49-F238E27FC236}">
-                <a16:creationId xmlns:a16="http://schemas.microsoft.com/office/drawing/2014/main" id="{A5821A37-BDE9-1FC5-7CA0-F143E294CBF8}"/>
+                <a16:creationId xmlns:a16="http://schemas.microsoft.com/office/drawing/2014/main" id="{78ECE221-14E3-A860-0EFC-1F1348D3C728}"/>
               </a:ext>
             </a:extLst>
           </p:cNvPr>
@@ -16467,8 +16622,8 @@
         </p:nvSpPr>
         <p:spPr>
           <a:xfrm>
-            <a:off x="4505078" y="2472230"/>
-            <a:ext cx="2758175" cy="946795"/>
+            <a:off x="5178097" y="2472230"/>
+            <a:ext cx="2460648" cy="946795"/>
           </a:xfrm>
           <a:prstGeom prst="rect">
             <a:avLst/>
@@ -16507,7 +16662,7 @@
           <p:cNvPr id="11" name="item_2">
             <a:extLst>
               <a:ext uri="{FF2B5EF4-FFF2-40B4-BE49-F238E27FC236}">
-                <a16:creationId xmlns:a16="http://schemas.microsoft.com/office/drawing/2014/main" id="{FE09D74F-A56B-8643-F699-A43F4CB0B666}"/>
+                <a16:creationId xmlns:a16="http://schemas.microsoft.com/office/drawing/2014/main" id="{1C6C3E9B-6BE6-F1A0-28C9-C31B7EF76701}"/>
               </a:ext>
             </a:extLst>
           </p:cNvPr>
@@ -16520,8 +16675,8 @@
         </p:nvSpPr>
         <p:spPr>
           <a:xfrm>
-            <a:off x="4505078" y="3419025"/>
-            <a:ext cx="2758175" cy="2272307"/>
+            <a:off x="5178097" y="3419025"/>
+            <a:ext cx="2460648" cy="2272307"/>
           </a:xfrm>
           <a:prstGeom prst="rect">
             <a:avLst/>
@@ -16555,7 +16710,7 @@
           <p:cNvPr id="12" name="item_3_title">
             <a:extLst>
               <a:ext uri="{FF2B5EF4-FFF2-40B4-BE49-F238E27FC236}">
-                <a16:creationId xmlns:a16="http://schemas.microsoft.com/office/drawing/2014/main" id="{59022F30-D94D-1929-980D-9B431351A401}"/>
+                <a16:creationId xmlns:a16="http://schemas.microsoft.com/office/drawing/2014/main" id="{43B557F3-6C27-DFB0-9F61-03198CF0C349}"/>
               </a:ext>
             </a:extLst>
           </p:cNvPr>
@@ -16568,8 +16723,8 @@
         </p:nvSpPr>
         <p:spPr>
           <a:xfrm>
-            <a:off x="7811565" y="2472230"/>
-            <a:ext cx="2758175" cy="946795"/>
+            <a:off x="8127910" y="2472230"/>
+            <a:ext cx="2460648" cy="946795"/>
           </a:xfrm>
           <a:prstGeom prst="rect">
             <a:avLst/>
@@ -16608,7 +16763,7 @@
           <p:cNvPr id="13" name="item_3">
             <a:extLst>
               <a:ext uri="{FF2B5EF4-FFF2-40B4-BE49-F238E27FC236}">
-                <a16:creationId xmlns:a16="http://schemas.microsoft.com/office/drawing/2014/main" id="{9B8903B9-4B50-1704-2C53-86EE8014682F}"/>
+                <a16:creationId xmlns:a16="http://schemas.microsoft.com/office/drawing/2014/main" id="{0D123C70-65BD-8CB5-F279-5CB863B77873}"/>
               </a:ext>
             </a:extLst>
           </p:cNvPr>
@@ -16621,8 +16776,8 @@
         </p:nvSpPr>
         <p:spPr>
           <a:xfrm>
-            <a:off x="7811565" y="3419025"/>
-            <a:ext cx="2758175" cy="2272307"/>
+            <a:off x="8127910" y="3419025"/>
+            <a:ext cx="2460648" cy="2272307"/>
           </a:xfrm>
           <a:prstGeom prst="rect">
             <a:avLst/>
@@ -16656,7 +16811,7 @@
           <p:cNvPr id="14" name="source">
             <a:extLst>
               <a:ext uri="{FF2B5EF4-FFF2-40B4-BE49-F238E27FC236}">
-                <a16:creationId xmlns:a16="http://schemas.microsoft.com/office/drawing/2014/main" id="{17637E38-0E0D-2A31-02DD-945F8193F522}"/>
+                <a16:creationId xmlns:a16="http://schemas.microsoft.com/office/drawing/2014/main" id="{88E7192C-B05E-058F-516E-559D85C6E1B5}"/>
               </a:ext>
             </a:extLst>
           </p:cNvPr>
@@ -16669,7 +16824,7 @@
         </p:nvSpPr>
         <p:spPr>
           <a:xfrm>
-            <a:off x="1024128" y="6004560"/>
+            <a:off x="2072640" y="6004560"/>
             <a:ext cx="1905000" cy="304800"/>
           </a:xfrm>
           <a:prstGeom prst="roundRect">
@@ -16711,7 +16866,7 @@
     </p:spTree>
     <p:extLst>
       <p:ext uri="{BB962C8B-B14F-4D97-AF65-F5344CB8AC3E}">
-        <p14:creationId xmlns:p14="http://schemas.microsoft.com/office/powerpoint/2010/main" val="3619125340"/>
+        <p14:creationId xmlns:p14="http://schemas.microsoft.com/office/powerpoint/2010/main" val="292457935"/>
       </p:ext>
     </p:extLst>
   </p:cSld>
@@ -16743,7 +16898,7 @@
           <p:cNvPr id="7" name="creative_background">
             <a:extLst>
               <a:ext uri="{FF2B5EF4-FFF2-40B4-BE49-F238E27FC236}">
-                <a16:creationId xmlns:a16="http://schemas.microsoft.com/office/drawing/2014/main" id="{817561B2-8AD5-FA41-4985-3D56B7C96564}"/>
+                <a16:creationId xmlns:a16="http://schemas.microsoft.com/office/drawing/2014/main" id="{16E3D915-F499-8560-CE69-8A804207FEA8}"/>
               </a:ext>
             </a:extLst>
           </p:cNvPr>
@@ -16784,7 +16939,12 @@
             <p:ph type="title"/>
           </p:nvPr>
         </p:nvSpPr>
-        <p:spPr/>
+        <p:spPr>
+          <a:xfrm>
+            <a:off x="2072640" y="585216"/>
+            <a:ext cx="8674100" cy="1499616"/>
+          </a:xfrm>
+        </p:spPr>
         <p:txBody>
           <a:bodyPr/>
           <a:lstStyle>
@@ -16811,12 +16971,17 @@
             <p:ph type="dt" sz="half" idx="10"/>
           </p:nvPr>
         </p:nvSpPr>
-        <p:spPr/>
+        <p:spPr>
+          <a:xfrm>
+            <a:off x="2072640" y="6470704"/>
+            <a:ext cx="1104900" cy="274320"/>
+          </a:xfrm>
+        </p:spPr>
         <p:txBody>
           <a:bodyPr/>
           <a:lstStyle/>
           <a:p>
-            <a:fld id="{0C2FB128-6CE9-48CA-A63B-D694A7BBCE3E}" type="datetimeFigureOut">
+            <a:fld id="{D8887631-421A-4B90-81F4-114CAE3EC1BA}" type="datetimeFigureOut">
               <a:rPr lang="en-US" smtClean="0"/>
               <a:t>10/3/2026</a:t>
             </a:fld>
@@ -16858,7 +17023,7 @@
           <a:bodyPr/>
           <a:lstStyle/>
           <a:p>
-            <a:fld id="{B2E7DF40-EA43-448D-AAC9-8AB76A8B3E4D}" type="slidenum">
+            <a:fld id="{030EC083-285A-4D45-98F3-6009BB62C01A}" type="slidenum">
               <a:rPr lang="en-US" smtClean="0"/>
               <a:t>‹#›</a:t>
             </a:fld>
@@ -16871,7 +17036,7 @@
           <p:cNvPr id="8" name="marker_1">
             <a:extLst>
               <a:ext uri="{FF2B5EF4-FFF2-40B4-BE49-F238E27FC236}">
-                <a16:creationId xmlns:a16="http://schemas.microsoft.com/office/drawing/2014/main" id="{A071D688-4C73-3F6F-EA43-B454F3ABC616}"/>
+                <a16:creationId xmlns:a16="http://schemas.microsoft.com/office/drawing/2014/main" id="{11B7BC93-47F8-F06C-2120-663B1860900A}"/>
               </a:ext>
             </a:extLst>
           </p:cNvPr>
@@ -16884,8 +17049,8 @@
         </p:nvSpPr>
         <p:spPr>
           <a:xfrm>
-            <a:off x="1198591" y="2472230"/>
-            <a:ext cx="548312" cy="585291"/>
+            <a:off x="2228283" y="2472230"/>
+            <a:ext cx="489165" cy="585291"/>
           </a:xfrm>
           <a:prstGeom prst="ellipse">
             <a:avLst/>
@@ -16927,7 +17092,7 @@
           <p:cNvPr id="9" name="item_1_title">
             <a:extLst>
               <a:ext uri="{FF2B5EF4-FFF2-40B4-BE49-F238E27FC236}">
-                <a16:creationId xmlns:a16="http://schemas.microsoft.com/office/drawing/2014/main" id="{378F0DB4-F461-36CC-D8EE-11E12F5EC9EF}"/>
+                <a16:creationId xmlns:a16="http://schemas.microsoft.com/office/drawing/2014/main" id="{ECCF3E13-E876-814F-A891-035545E7EC15}"/>
               </a:ext>
             </a:extLst>
           </p:cNvPr>
@@ -16940,8 +17105,8 @@
         </p:nvSpPr>
         <p:spPr>
           <a:xfrm>
-            <a:off x="1846597" y="2472230"/>
-            <a:ext cx="8723143" cy="387325"/>
+            <a:off x="2806388" y="2472230"/>
+            <a:ext cx="7782171" cy="387325"/>
           </a:xfrm>
           <a:prstGeom prst="rect">
             <a:avLst/>
@@ -16980,7 +17145,7 @@
           <p:cNvPr id="10" name="item_1">
             <a:extLst>
               <a:ext uri="{FF2B5EF4-FFF2-40B4-BE49-F238E27FC236}">
-                <a16:creationId xmlns:a16="http://schemas.microsoft.com/office/drawing/2014/main" id="{57FF37DE-E0ED-CC39-CE90-8A620C24F659}"/>
+                <a16:creationId xmlns:a16="http://schemas.microsoft.com/office/drawing/2014/main" id="{6446AF21-772E-C0C7-5FD0-73B6101303E0}"/>
               </a:ext>
             </a:extLst>
           </p:cNvPr>
@@ -16993,8 +17158,8 @@
         </p:nvSpPr>
         <p:spPr>
           <a:xfrm>
-            <a:off x="1846597" y="2859554"/>
-            <a:ext cx="8723143" cy="929580"/>
+            <a:off x="2806388" y="2859554"/>
+            <a:ext cx="7782171" cy="929580"/>
           </a:xfrm>
           <a:prstGeom prst="rect">
             <a:avLst/>
@@ -17028,7 +17193,7 @@
           <p:cNvPr id="11" name="marker_2">
             <a:extLst>
               <a:ext uri="{FF2B5EF4-FFF2-40B4-BE49-F238E27FC236}">
-                <a16:creationId xmlns:a16="http://schemas.microsoft.com/office/drawing/2014/main" id="{CF819A8D-9C3E-34DE-5979-DF4E4B58AB5A}"/>
+                <a16:creationId xmlns:a16="http://schemas.microsoft.com/office/drawing/2014/main" id="{B0BA52C4-85F8-9531-FEAD-F06C7CA042A1}"/>
               </a:ext>
             </a:extLst>
           </p:cNvPr>
@@ -17041,8 +17206,8 @@
         </p:nvSpPr>
         <p:spPr>
           <a:xfrm>
-            <a:off x="1198591" y="4374427"/>
-            <a:ext cx="548312" cy="585291"/>
+            <a:off x="2228284" y="4374427"/>
+            <a:ext cx="489165" cy="585291"/>
           </a:xfrm>
           <a:prstGeom prst="ellipse">
             <a:avLst/>
@@ -17084,7 +17249,7 @@
           <p:cNvPr id="12" name="item_2_title">
             <a:extLst>
               <a:ext uri="{FF2B5EF4-FFF2-40B4-BE49-F238E27FC236}">
-                <a16:creationId xmlns:a16="http://schemas.microsoft.com/office/drawing/2014/main" id="{F1AC090E-3610-1120-E657-69F5A51F678E}"/>
+                <a16:creationId xmlns:a16="http://schemas.microsoft.com/office/drawing/2014/main" id="{A8427360-A6B1-1A48-7438-BD939DF062F1}"/>
               </a:ext>
             </a:extLst>
           </p:cNvPr>
@@ -17097,8 +17262,8 @@
         </p:nvSpPr>
         <p:spPr>
           <a:xfrm>
-            <a:off x="1846597" y="4374427"/>
-            <a:ext cx="8723143" cy="387325"/>
+            <a:off x="2806388" y="4374427"/>
+            <a:ext cx="7782171" cy="387325"/>
           </a:xfrm>
           <a:prstGeom prst="rect">
             <a:avLst/>
@@ -17137,7 +17302,7 @@
           <p:cNvPr id="13" name="item_2">
             <a:extLst>
               <a:ext uri="{FF2B5EF4-FFF2-40B4-BE49-F238E27FC236}">
-                <a16:creationId xmlns:a16="http://schemas.microsoft.com/office/drawing/2014/main" id="{18E6A5EF-1A35-7B56-FBC1-2694A668B3AF}"/>
+                <a16:creationId xmlns:a16="http://schemas.microsoft.com/office/drawing/2014/main" id="{C24F6EAE-8BD7-2452-FECF-085F8312B289}"/>
               </a:ext>
             </a:extLst>
           </p:cNvPr>
@@ -17150,8 +17315,8 @@
         </p:nvSpPr>
         <p:spPr>
           <a:xfrm>
-            <a:off x="1846597" y="4761750"/>
-            <a:ext cx="8723143" cy="929580"/>
+            <a:off x="2806388" y="4761750"/>
+            <a:ext cx="7782171" cy="929580"/>
           </a:xfrm>
           <a:prstGeom prst="rect">
             <a:avLst/>
@@ -17185,7 +17350,7 @@
           <p:cNvPr id="14" name="source">
             <a:extLst>
               <a:ext uri="{FF2B5EF4-FFF2-40B4-BE49-F238E27FC236}">
-                <a16:creationId xmlns:a16="http://schemas.microsoft.com/office/drawing/2014/main" id="{743592FF-F600-2589-461A-ACBFC8F75567}"/>
+                <a16:creationId xmlns:a16="http://schemas.microsoft.com/office/drawing/2014/main" id="{0A104B50-6A1A-0B10-1D7F-4EA5113DCFAD}"/>
               </a:ext>
             </a:extLst>
           </p:cNvPr>
@@ -17198,7 +17363,7 @@
         </p:nvSpPr>
         <p:spPr>
           <a:xfrm>
-            <a:off x="1024128" y="6004560"/>
+            <a:off x="2072640" y="6004560"/>
             <a:ext cx="1905000" cy="304800"/>
           </a:xfrm>
           <a:prstGeom prst="roundRect">
@@ -17240,7 +17405,7 @@
     </p:spTree>
     <p:extLst>
       <p:ext uri="{BB962C8B-B14F-4D97-AF65-F5344CB8AC3E}">
-        <p14:creationId xmlns:p14="http://schemas.microsoft.com/office/powerpoint/2010/main" val="738429155"/>
+        <p14:creationId xmlns:p14="http://schemas.microsoft.com/office/powerpoint/2010/main" val="1337632277"/>
       </p:ext>
     </p:extLst>
   </p:cSld>
@@ -17272,7 +17437,7 @@
           <p:cNvPr id="7" name="creative_background">
             <a:extLst>
               <a:ext uri="{FF2B5EF4-FFF2-40B4-BE49-F238E27FC236}">
-                <a16:creationId xmlns:a16="http://schemas.microsoft.com/office/drawing/2014/main" id="{4C18A1C4-698C-6935-3B28-14C93C8E57E2}"/>
+                <a16:creationId xmlns:a16="http://schemas.microsoft.com/office/drawing/2014/main" id="{6810E634-E5D0-07E0-7D68-EE66EB954C3A}"/>
               </a:ext>
             </a:extLst>
           </p:cNvPr>
@@ -17313,7 +17478,12 @@
             <p:ph type="title"/>
           </p:nvPr>
         </p:nvSpPr>
-        <p:spPr/>
+        <p:spPr>
+          <a:xfrm>
+            <a:off x="2072640" y="585216"/>
+            <a:ext cx="8674100" cy="1499616"/>
+          </a:xfrm>
+        </p:spPr>
         <p:txBody>
           <a:bodyPr/>
           <a:lstStyle>
@@ -17340,12 +17510,17 @@
             <p:ph type="dt" sz="half" idx="10"/>
           </p:nvPr>
         </p:nvSpPr>
-        <p:spPr/>
+        <p:spPr>
+          <a:xfrm>
+            <a:off x="2072640" y="6470704"/>
+            <a:ext cx="1104900" cy="274320"/>
+          </a:xfrm>
+        </p:spPr>
         <p:txBody>
           <a:bodyPr/>
           <a:lstStyle/>
           <a:p>
-            <a:fld id="{0C2FB128-6CE9-48CA-A63B-D694A7BBCE3E}" type="datetimeFigureOut">
+            <a:fld id="{D8887631-421A-4B90-81F4-114CAE3EC1BA}" type="datetimeFigureOut">
               <a:rPr lang="en-US" smtClean="0"/>
               <a:t>10/3/2026</a:t>
             </a:fld>
@@ -17387,7 +17562,7 @@
           <a:bodyPr/>
           <a:lstStyle/>
           <a:p>
-            <a:fld id="{B2E7DF40-EA43-448D-AAC9-8AB76A8B3E4D}" type="slidenum">
+            <a:fld id="{030EC083-285A-4D45-98F3-6009BB62C01A}" type="slidenum">
               <a:rPr lang="en-US" smtClean="0"/>
               <a:t>‹#›</a:t>
             </a:fld>
@@ -17400,7 +17575,7 @@
           <p:cNvPr id="8" name="kpi_value_1">
             <a:extLst>
               <a:ext uri="{FF2B5EF4-FFF2-40B4-BE49-F238E27FC236}">
-                <a16:creationId xmlns:a16="http://schemas.microsoft.com/office/drawing/2014/main" id="{F14EFFF6-A89A-8F23-6116-35CBC312F5BC}"/>
+                <a16:creationId xmlns:a16="http://schemas.microsoft.com/office/drawing/2014/main" id="{96F011A6-47B1-DBEA-D697-CEE3C25F3E26}"/>
               </a:ext>
             </a:extLst>
           </p:cNvPr>
@@ -17413,8 +17588,8 @@
         </p:nvSpPr>
         <p:spPr>
           <a:xfrm>
-            <a:off x="1198591" y="2472230"/>
-            <a:ext cx="4705512" cy="1995843"/>
+            <a:off x="2228283" y="2472230"/>
+            <a:ext cx="4197925" cy="1995843"/>
           </a:xfrm>
         </p:spPr>
         <p:txBody>
@@ -17450,7 +17625,7 @@
           <p:cNvPr id="9" name="kpi_label_1">
             <a:extLst>
               <a:ext uri="{FF2B5EF4-FFF2-40B4-BE49-F238E27FC236}">
-                <a16:creationId xmlns:a16="http://schemas.microsoft.com/office/drawing/2014/main" id="{3C830647-11C5-EE6C-A8D0-770E27B90BF4}"/>
+                <a16:creationId xmlns:a16="http://schemas.microsoft.com/office/drawing/2014/main" id="{A52421EC-F98C-0B1F-87C4-E48B44B0662C}"/>
               </a:ext>
             </a:extLst>
           </p:cNvPr>
@@ -17463,8 +17638,8 @@
         </p:nvSpPr>
         <p:spPr>
           <a:xfrm>
-            <a:off x="1198591" y="4532455"/>
-            <a:ext cx="4705512" cy="1158877"/>
+            <a:off x="2228284" y="4532455"/>
+            <a:ext cx="4197925" cy="1158877"/>
           </a:xfrm>
           <a:prstGeom prst="rect">
             <a:avLst/>
@@ -17498,7 +17673,7 @@
           <p:cNvPr id="10" name="quote">
             <a:extLst>
               <a:ext uri="{FF2B5EF4-FFF2-40B4-BE49-F238E27FC236}">
-                <a16:creationId xmlns:a16="http://schemas.microsoft.com/office/drawing/2014/main" id="{A9C7CBD1-0997-325F-F783-781B138D95B2}"/>
+                <a16:creationId xmlns:a16="http://schemas.microsoft.com/office/drawing/2014/main" id="{C2BD440E-809B-5931-57B8-E19E6DB4B123}"/>
               </a:ext>
             </a:extLst>
           </p:cNvPr>
@@ -17511,8 +17686,8 @@
         </p:nvSpPr>
         <p:spPr>
           <a:xfrm>
-            <a:off x="1198591" y="2472230"/>
-            <a:ext cx="4705512" cy="2510899"/>
+            <a:off x="2228284" y="2472230"/>
+            <a:ext cx="4197925" cy="2510899"/>
           </a:xfrm>
           <a:prstGeom prst="rect">
             <a:avLst/>
@@ -17548,7 +17723,7 @@
           <p:cNvPr id="11" name="attribution">
             <a:extLst>
               <a:ext uri="{FF2B5EF4-FFF2-40B4-BE49-F238E27FC236}">
-                <a16:creationId xmlns:a16="http://schemas.microsoft.com/office/drawing/2014/main" id="{6B608356-A4D8-A8D7-7C84-05C9428C17ED}"/>
+                <a16:creationId xmlns:a16="http://schemas.microsoft.com/office/drawing/2014/main" id="{7C10A1FF-D5D3-16C1-D8B3-4094F9A5C6F9}"/>
               </a:ext>
             </a:extLst>
           </p:cNvPr>
@@ -17561,8 +17736,8 @@
         </p:nvSpPr>
         <p:spPr>
           <a:xfrm>
-            <a:off x="1198591" y="5047511"/>
-            <a:ext cx="4705512" cy="643820"/>
+            <a:off x="2228284" y="5047511"/>
+            <a:ext cx="4197925" cy="643820"/>
           </a:xfrm>
           <a:prstGeom prst="rect">
             <a:avLst/>
@@ -17596,7 +17771,7 @@
           <p:cNvPr id="12" name="item_1_title">
             <a:extLst>
               <a:ext uri="{FF2B5EF4-FFF2-40B4-BE49-F238E27FC236}">
-                <a16:creationId xmlns:a16="http://schemas.microsoft.com/office/drawing/2014/main" id="{26B01FDB-7FBB-5F9B-FF27-E1F2A3AE7789}"/>
+                <a16:creationId xmlns:a16="http://schemas.microsoft.com/office/drawing/2014/main" id="{E20105A4-DCF0-00EB-96A5-9CEA5D073F67}"/>
               </a:ext>
             </a:extLst>
           </p:cNvPr>
@@ -17609,8 +17784,8 @@
         </p:nvSpPr>
         <p:spPr>
           <a:xfrm>
-            <a:off x="6467369" y="2286001"/>
-            <a:ext cx="4276832" cy="1056341"/>
+            <a:off x="6928715" y="2286001"/>
+            <a:ext cx="3815487" cy="1056341"/>
           </a:xfrm>
           <a:prstGeom prst="rect">
             <a:avLst/>
@@ -17649,7 +17824,7 @@
           <p:cNvPr id="13" name="item_1">
             <a:extLst>
               <a:ext uri="{FF2B5EF4-FFF2-40B4-BE49-F238E27FC236}">
-                <a16:creationId xmlns:a16="http://schemas.microsoft.com/office/drawing/2014/main" id="{65687392-70D4-3E35-95B5-93CECA18DE22}"/>
+                <a16:creationId xmlns:a16="http://schemas.microsoft.com/office/drawing/2014/main" id="{787DFD28-D99D-7E09-E204-F6DAB811C082}"/>
               </a:ext>
             </a:extLst>
           </p:cNvPr>
@@ -17662,8 +17837,8 @@
         </p:nvSpPr>
         <p:spPr>
           <a:xfrm>
-            <a:off x="6467369" y="3342342"/>
-            <a:ext cx="4276832" cy="2535219"/>
+            <a:off x="6928715" y="3342342"/>
+            <a:ext cx="3815487" cy="2535219"/>
           </a:xfrm>
           <a:prstGeom prst="rect">
             <a:avLst/>
@@ -17697,7 +17872,7 @@
           <p:cNvPr id="14" name="source">
             <a:extLst>
               <a:ext uri="{FF2B5EF4-FFF2-40B4-BE49-F238E27FC236}">
-                <a16:creationId xmlns:a16="http://schemas.microsoft.com/office/drawing/2014/main" id="{A0FED9FE-7D6C-FE18-C847-31FF68F7005C}"/>
+                <a16:creationId xmlns:a16="http://schemas.microsoft.com/office/drawing/2014/main" id="{9993040B-FCC5-4B1F-670A-040A7B314BEE}"/>
               </a:ext>
             </a:extLst>
           </p:cNvPr>
@@ -17710,7 +17885,7 @@
         </p:nvSpPr>
         <p:spPr>
           <a:xfrm>
-            <a:off x="1024128" y="6004560"/>
+            <a:off x="2072640" y="6004560"/>
             <a:ext cx="1905000" cy="304800"/>
           </a:xfrm>
           <a:prstGeom prst="roundRect">
@@ -17752,7 +17927,7 @@
     </p:spTree>
     <p:extLst>
       <p:ext uri="{BB962C8B-B14F-4D97-AF65-F5344CB8AC3E}">
-        <p14:creationId xmlns:p14="http://schemas.microsoft.com/office/powerpoint/2010/main" val="2460654445"/>
+        <p14:creationId xmlns:p14="http://schemas.microsoft.com/office/powerpoint/2010/main" val="121224255"/>
       </p:ext>
     </p:extLst>
   </p:cSld>
@@ -17784,7 +17959,7 @@
           <p:cNvPr id="7" name="creative_background">
             <a:extLst>
               <a:ext uri="{FF2B5EF4-FFF2-40B4-BE49-F238E27FC236}">
-                <a16:creationId xmlns:a16="http://schemas.microsoft.com/office/drawing/2014/main" id="{3023144D-9137-D3EA-C293-BB442E13CA57}"/>
+                <a16:creationId xmlns:a16="http://schemas.microsoft.com/office/drawing/2014/main" id="{3827D195-82A8-F1F6-66F5-DE02CE1ED0FC}"/>
               </a:ext>
             </a:extLst>
           </p:cNvPr>
@@ -17825,7 +18000,12 @@
             <p:ph type="title"/>
           </p:nvPr>
         </p:nvSpPr>
-        <p:spPr/>
+        <p:spPr>
+          <a:xfrm>
+            <a:off x="2072640" y="585216"/>
+            <a:ext cx="8674100" cy="1499616"/>
+          </a:xfrm>
+        </p:spPr>
         <p:txBody>
           <a:bodyPr/>
           <a:lstStyle>
@@ -17852,12 +18032,17 @@
             <p:ph type="dt" sz="half" idx="10"/>
           </p:nvPr>
         </p:nvSpPr>
-        <p:spPr/>
+        <p:spPr>
+          <a:xfrm>
+            <a:off x="2072640" y="6470704"/>
+            <a:ext cx="1104900" cy="274320"/>
+          </a:xfrm>
+        </p:spPr>
         <p:txBody>
           <a:bodyPr/>
           <a:lstStyle/>
           <a:p>
-            <a:fld id="{0C2FB128-6CE9-48CA-A63B-D694A7BBCE3E}" type="datetimeFigureOut">
+            <a:fld id="{D8887631-421A-4B90-81F4-114CAE3EC1BA}" type="datetimeFigureOut">
               <a:rPr lang="en-US" smtClean="0"/>
               <a:t>10/3/2026</a:t>
             </a:fld>
@@ -17899,7 +18084,7 @@
           <a:bodyPr/>
           <a:lstStyle/>
           <a:p>
-            <a:fld id="{B2E7DF40-EA43-448D-AAC9-8AB76A8B3E4D}" type="slidenum">
+            <a:fld id="{030EC083-285A-4D45-98F3-6009BB62C01A}" type="slidenum">
               <a:rPr lang="en-US" smtClean="0"/>
               <a:t>‹#›</a:t>
             </a:fld>
@@ -17912,7 +18097,7 @@
           <p:cNvPr id="8" name="marker_1">
             <a:extLst>
               <a:ext uri="{FF2B5EF4-FFF2-40B4-BE49-F238E27FC236}">
-                <a16:creationId xmlns:a16="http://schemas.microsoft.com/office/drawing/2014/main" id="{ED461EBF-0231-DAB2-298F-DAD2195CDA84}"/>
+                <a16:creationId xmlns:a16="http://schemas.microsoft.com/office/drawing/2014/main" id="{669DCE2E-D96E-0CFC-4349-37602ACBC073}"/>
               </a:ext>
             </a:extLst>
           </p:cNvPr>
@@ -17925,8 +18110,8 @@
         </p:nvSpPr>
         <p:spPr>
           <a:xfrm>
-            <a:off x="1148744" y="2419022"/>
-            <a:ext cx="548312" cy="585291"/>
+            <a:off x="2183814" y="2419022"/>
+            <a:ext cx="489165" cy="585291"/>
           </a:xfrm>
           <a:prstGeom prst="ellipse">
             <a:avLst/>
@@ -17968,7 +18153,7 @@
           <p:cNvPr id="9" name="item_1">
             <a:extLst>
               <a:ext uri="{FF2B5EF4-FFF2-40B4-BE49-F238E27FC236}">
-                <a16:creationId xmlns:a16="http://schemas.microsoft.com/office/drawing/2014/main" id="{DFBD5E98-F7B2-1A4B-1741-E3FBB6B493A8}"/>
+                <a16:creationId xmlns:a16="http://schemas.microsoft.com/office/drawing/2014/main" id="{4258023E-9F18-69A1-0982-01AA81772357}"/>
               </a:ext>
             </a:extLst>
           </p:cNvPr>
@@ -17981,8 +18166,8 @@
         </p:nvSpPr>
         <p:spPr>
           <a:xfrm>
-            <a:off x="1796749" y="2419022"/>
-            <a:ext cx="8822836" cy="532083"/>
+            <a:off x="2761919" y="2419022"/>
+            <a:ext cx="7871109" cy="532083"/>
           </a:xfrm>
           <a:prstGeom prst="rect">
             <a:avLst/>
@@ -18016,7 +18201,7 @@
           <p:cNvPr id="10" name="marker_2">
             <a:extLst>
               <a:ext uri="{FF2B5EF4-FFF2-40B4-BE49-F238E27FC236}">
-                <a16:creationId xmlns:a16="http://schemas.microsoft.com/office/drawing/2014/main" id="{15706138-708C-A2C0-5DC0-6E8CBE6B36AF}"/>
+                <a16:creationId xmlns:a16="http://schemas.microsoft.com/office/drawing/2014/main" id="{A64B9C31-EC56-2DC9-5376-90D60DDF35EF}"/>
               </a:ext>
             </a:extLst>
           </p:cNvPr>
@@ -18029,8 +18214,8 @@
         </p:nvSpPr>
         <p:spPr>
           <a:xfrm>
-            <a:off x="1148744" y="3350167"/>
-            <a:ext cx="548312" cy="585291"/>
+            <a:off x="2183815" y="3350167"/>
+            <a:ext cx="489165" cy="585291"/>
           </a:xfrm>
           <a:prstGeom prst="ellipse">
             <a:avLst/>
@@ -18072,7 +18257,7 @@
           <p:cNvPr id="11" name="item_2">
             <a:extLst>
               <a:ext uri="{FF2B5EF4-FFF2-40B4-BE49-F238E27FC236}">
-                <a16:creationId xmlns:a16="http://schemas.microsoft.com/office/drawing/2014/main" id="{124FE8C6-2AA3-D4B4-CA5A-B795ACC424F6}"/>
+                <a16:creationId xmlns:a16="http://schemas.microsoft.com/office/drawing/2014/main" id="{DA8E8007-81F8-2C10-A0E3-EAA29C86EE36}"/>
               </a:ext>
             </a:extLst>
           </p:cNvPr>
@@ -18085,8 +18270,8 @@
         </p:nvSpPr>
         <p:spPr>
           <a:xfrm>
-            <a:off x="1796749" y="3350167"/>
-            <a:ext cx="8822836" cy="532083"/>
+            <a:off x="2761919" y="3350167"/>
+            <a:ext cx="7871109" cy="532083"/>
           </a:xfrm>
           <a:prstGeom prst="rect">
             <a:avLst/>
@@ -18120,7 +18305,7 @@
           <p:cNvPr id="12" name="marker_3">
             <a:extLst>
               <a:ext uri="{FF2B5EF4-FFF2-40B4-BE49-F238E27FC236}">
-                <a16:creationId xmlns:a16="http://schemas.microsoft.com/office/drawing/2014/main" id="{28B1E3D3-34F9-AB15-CA74-DD0BF2D33811}"/>
+                <a16:creationId xmlns:a16="http://schemas.microsoft.com/office/drawing/2014/main" id="{96C56E56-398E-F7F4-30F1-23E1165D9ED4}"/>
               </a:ext>
             </a:extLst>
           </p:cNvPr>
@@ -18133,8 +18318,8 @@
         </p:nvSpPr>
         <p:spPr>
           <a:xfrm>
-            <a:off x="1148744" y="4281312"/>
-            <a:ext cx="548312" cy="585291"/>
+            <a:off x="2183815" y="4281312"/>
+            <a:ext cx="489165" cy="585291"/>
           </a:xfrm>
           <a:prstGeom prst="ellipse">
             <a:avLst/>
@@ -18176,7 +18361,7 @@
           <p:cNvPr id="13" name="item_3">
             <a:extLst>
               <a:ext uri="{FF2B5EF4-FFF2-40B4-BE49-F238E27FC236}">
-                <a16:creationId xmlns:a16="http://schemas.microsoft.com/office/drawing/2014/main" id="{7A052BEA-8A6B-C2CA-4105-A593D1FFEB11}"/>
+                <a16:creationId xmlns:a16="http://schemas.microsoft.com/office/drawing/2014/main" id="{10B7C1C2-E674-6F8C-9243-4889D91428DE}"/>
               </a:ext>
             </a:extLst>
           </p:cNvPr>
@@ -18189,8 +18374,8 @@
         </p:nvSpPr>
         <p:spPr>
           <a:xfrm>
-            <a:off x="1796749" y="4281312"/>
-            <a:ext cx="8822836" cy="532083"/>
+            <a:off x="2761919" y="4281312"/>
+            <a:ext cx="7871109" cy="532083"/>
           </a:xfrm>
           <a:prstGeom prst="rect">
             <a:avLst/>
@@ -18224,7 +18409,7 @@
           <p:cNvPr id="14" name="marker_4">
             <a:extLst>
               <a:ext uri="{FF2B5EF4-FFF2-40B4-BE49-F238E27FC236}">
-                <a16:creationId xmlns:a16="http://schemas.microsoft.com/office/drawing/2014/main" id="{4A9197D5-E186-B8EA-A8E7-008B3470D55F}"/>
+                <a16:creationId xmlns:a16="http://schemas.microsoft.com/office/drawing/2014/main" id="{86BA4019-68C5-16C0-04E0-4EE1E0C5A700}"/>
               </a:ext>
             </a:extLst>
           </p:cNvPr>
@@ -18237,8 +18422,8 @@
         </p:nvSpPr>
         <p:spPr>
           <a:xfrm>
-            <a:off x="1148744" y="5212457"/>
-            <a:ext cx="548312" cy="585291"/>
+            <a:off x="2183815" y="5212457"/>
+            <a:ext cx="489165" cy="585291"/>
           </a:xfrm>
           <a:prstGeom prst="ellipse">
             <a:avLst/>
@@ -18280,7 +18465,7 @@
           <p:cNvPr id="15" name="item_4">
             <a:extLst>
               <a:ext uri="{FF2B5EF4-FFF2-40B4-BE49-F238E27FC236}">
-                <a16:creationId xmlns:a16="http://schemas.microsoft.com/office/drawing/2014/main" id="{960F87B6-A650-C980-C6FC-A13DDC18F3F0}"/>
+                <a16:creationId xmlns:a16="http://schemas.microsoft.com/office/drawing/2014/main" id="{CE5D65AE-7BA8-03E4-9DFC-BD2D147F556C}"/>
               </a:ext>
             </a:extLst>
           </p:cNvPr>
@@ -18293,8 +18478,8 @@
         </p:nvSpPr>
         <p:spPr>
           <a:xfrm>
-            <a:off x="1796749" y="5212457"/>
-            <a:ext cx="8822836" cy="532083"/>
+            <a:off x="2761919" y="5212457"/>
+            <a:ext cx="7871109" cy="532083"/>
           </a:xfrm>
           <a:prstGeom prst="rect">
             <a:avLst/>
@@ -18328,7 +18513,7 @@
           <p:cNvPr id="16" name="source">
             <a:extLst>
               <a:ext uri="{FF2B5EF4-FFF2-40B4-BE49-F238E27FC236}">
-                <a16:creationId xmlns:a16="http://schemas.microsoft.com/office/drawing/2014/main" id="{15AF3CD0-DECE-6AB2-6289-9893B2133024}"/>
+                <a16:creationId xmlns:a16="http://schemas.microsoft.com/office/drawing/2014/main" id="{1D5026DF-6EB6-1E57-515B-ACBDF192D681}"/>
               </a:ext>
             </a:extLst>
           </p:cNvPr>
@@ -18341,7 +18526,7 @@
         </p:nvSpPr>
         <p:spPr>
           <a:xfrm>
-            <a:off x="1024128" y="6004560"/>
+            <a:off x="2072640" y="6004560"/>
             <a:ext cx="1905000" cy="304800"/>
           </a:xfrm>
           <a:prstGeom prst="roundRect">
@@ -18383,7 +18568,7 @@
     </p:spTree>
     <p:extLst>
       <p:ext uri="{BB962C8B-B14F-4D97-AF65-F5344CB8AC3E}">
-        <p14:creationId xmlns:p14="http://schemas.microsoft.com/office/powerpoint/2010/main" val="319358935"/>
+        <p14:creationId xmlns:p14="http://schemas.microsoft.com/office/powerpoint/2010/main" val="4049993685"/>
       </p:ext>
     </p:extLst>
   </p:cSld>
@@ -18415,7 +18600,7 @@
           <p:cNvPr id="7" name="creative_background">
             <a:extLst>
               <a:ext uri="{FF2B5EF4-FFF2-40B4-BE49-F238E27FC236}">
-                <a16:creationId xmlns:a16="http://schemas.microsoft.com/office/drawing/2014/main" id="{4CE7A53E-43C2-98D5-16B3-9E837597E769}"/>
+                <a16:creationId xmlns:a16="http://schemas.microsoft.com/office/drawing/2014/main" id="{A89793DF-175F-E724-E14F-590CECCC0795}"/>
               </a:ext>
             </a:extLst>
           </p:cNvPr>
@@ -18456,7 +18641,12 @@
             <p:ph type="title"/>
           </p:nvPr>
         </p:nvSpPr>
-        <p:spPr/>
+        <p:spPr>
+          <a:xfrm>
+            <a:off x="2072640" y="585216"/>
+            <a:ext cx="8674100" cy="1499616"/>
+          </a:xfrm>
+        </p:spPr>
         <p:txBody>
           <a:bodyPr/>
           <a:lstStyle>
@@ -18483,12 +18673,17 @@
             <p:ph type="dt" sz="half" idx="10"/>
           </p:nvPr>
         </p:nvSpPr>
-        <p:spPr/>
+        <p:spPr>
+          <a:xfrm>
+            <a:off x="2072640" y="6470704"/>
+            <a:ext cx="1104900" cy="274320"/>
+          </a:xfrm>
+        </p:spPr>
         <p:txBody>
           <a:bodyPr/>
           <a:lstStyle/>
           <a:p>
-            <a:fld id="{0C2FB128-6CE9-48CA-A63B-D694A7BBCE3E}" type="datetimeFigureOut">
+            <a:fld id="{D8887631-421A-4B90-81F4-114CAE3EC1BA}" type="datetimeFigureOut">
               <a:rPr lang="en-US" smtClean="0"/>
               <a:t>10/3/2026</a:t>
             </a:fld>
@@ -18530,7 +18725,7 @@
           <a:bodyPr/>
           <a:lstStyle/>
           <a:p>
-            <a:fld id="{B2E7DF40-EA43-448D-AAC9-8AB76A8B3E4D}" type="slidenum">
+            <a:fld id="{030EC083-285A-4D45-98F3-6009BB62C01A}" type="slidenum">
               <a:rPr lang="en-US" smtClean="0"/>
               <a:t>‹#›</a:t>
             </a:fld>
@@ -18543,7 +18738,7 @@
           <p:cNvPr id="8" name="decisions_title">
             <a:extLst>
               <a:ext uri="{FF2B5EF4-FFF2-40B4-BE49-F238E27FC236}">
-                <a16:creationId xmlns:a16="http://schemas.microsoft.com/office/drawing/2014/main" id="{ECA1DEAD-E3E5-68ED-A958-60EB495D75C9}"/>
+                <a16:creationId xmlns:a16="http://schemas.microsoft.com/office/drawing/2014/main" id="{7E901BD3-D2FB-39B8-160E-7905982694AF}"/>
               </a:ext>
             </a:extLst>
           </p:cNvPr>
@@ -18556,8 +18751,8 @@
         </p:nvSpPr>
         <p:spPr>
           <a:xfrm>
-            <a:off x="1198591" y="4842659"/>
-            <a:ext cx="2352756" cy="848672"/>
+            <a:off x="2228283" y="4842659"/>
+            <a:ext cx="2098963" cy="848672"/>
           </a:xfrm>
         </p:spPr>
         <p:txBody>
@@ -18593,7 +18788,7 @@
           <p:cNvPr id="9" name="decisions">
             <a:extLst>
               <a:ext uri="{FF2B5EF4-FFF2-40B4-BE49-F238E27FC236}">
-                <a16:creationId xmlns:a16="http://schemas.microsoft.com/office/drawing/2014/main" id="{FE310B95-664B-FD9E-E84D-2AA5AB0E4459}"/>
+                <a16:creationId xmlns:a16="http://schemas.microsoft.com/office/drawing/2014/main" id="{659619E1-522D-9DB6-CF22-6D52CFC4CF56}"/>
               </a:ext>
             </a:extLst>
           </p:cNvPr>
@@ -18606,8 +18801,8 @@
         </p:nvSpPr>
         <p:spPr>
           <a:xfrm>
-            <a:off x="3648549" y="4842659"/>
-            <a:ext cx="6921191" cy="848672"/>
+            <a:off x="4413962" y="4842659"/>
+            <a:ext cx="6174596" cy="848672"/>
           </a:xfrm>
           <a:prstGeom prst="rect">
             <a:avLst/>
@@ -18636,7 +18831,7 @@
           <p:cNvPr id="10" name="item_1_title">
             <a:extLst>
               <a:ext uri="{FF2B5EF4-FFF2-40B4-BE49-F238E27FC236}">
-                <a16:creationId xmlns:a16="http://schemas.microsoft.com/office/drawing/2014/main" id="{374303EB-E6BF-8C3C-0A88-4CA09AB58A9A}"/>
+                <a16:creationId xmlns:a16="http://schemas.microsoft.com/office/drawing/2014/main" id="{86F0247B-EAB2-D52C-198A-20482213AAC6}"/>
               </a:ext>
             </a:extLst>
           </p:cNvPr>
@@ -18649,8 +18844,8 @@
         </p:nvSpPr>
         <p:spPr>
           <a:xfrm>
-            <a:off x="1198592" y="2472229"/>
-            <a:ext cx="2758175" cy="524258"/>
+            <a:off x="2228283" y="2472229"/>
+            <a:ext cx="2460648" cy="524258"/>
           </a:xfrm>
           <a:prstGeom prst="rect">
             <a:avLst/>
@@ -18689,7 +18884,7 @@
           <p:cNvPr id="11" name="item_1">
             <a:extLst>
               <a:ext uri="{FF2B5EF4-FFF2-40B4-BE49-F238E27FC236}">
-                <a16:creationId xmlns:a16="http://schemas.microsoft.com/office/drawing/2014/main" id="{3AB006E4-8504-3C83-9D2D-58C37A496B71}"/>
+                <a16:creationId xmlns:a16="http://schemas.microsoft.com/office/drawing/2014/main" id="{336A914A-28DD-0938-05D8-77E05C4DCD12}"/>
               </a:ext>
             </a:extLst>
           </p:cNvPr>
@@ -18702,8 +18897,8 @@
         </p:nvSpPr>
         <p:spPr>
           <a:xfrm>
-            <a:off x="1198592" y="2996487"/>
-            <a:ext cx="2758175" cy="1258220"/>
+            <a:off x="2228283" y="2996487"/>
+            <a:ext cx="2460648" cy="1258220"/>
           </a:xfrm>
           <a:prstGeom prst="rect">
             <a:avLst/>
@@ -18737,7 +18932,7 @@
           <p:cNvPr id="12" name="item_2_title">
             <a:extLst>
               <a:ext uri="{FF2B5EF4-FFF2-40B4-BE49-F238E27FC236}">
-                <a16:creationId xmlns:a16="http://schemas.microsoft.com/office/drawing/2014/main" id="{CC0E3B59-8DE8-E058-506A-DEBF0900E460}"/>
+                <a16:creationId xmlns:a16="http://schemas.microsoft.com/office/drawing/2014/main" id="{0305C88C-A7DB-1C4C-C93C-28626C9E268F}"/>
               </a:ext>
             </a:extLst>
           </p:cNvPr>
@@ -18750,8 +18945,8 @@
         </p:nvSpPr>
         <p:spPr>
           <a:xfrm>
-            <a:off x="4505078" y="2472229"/>
-            <a:ext cx="2758175" cy="524258"/>
+            <a:off x="5178097" y="2472229"/>
+            <a:ext cx="2460648" cy="524258"/>
           </a:xfrm>
           <a:prstGeom prst="rect">
             <a:avLst/>
@@ -18790,7 +18985,7 @@
           <p:cNvPr id="13" name="item_2">
             <a:extLst>
               <a:ext uri="{FF2B5EF4-FFF2-40B4-BE49-F238E27FC236}">
-                <a16:creationId xmlns:a16="http://schemas.microsoft.com/office/drawing/2014/main" id="{CCB71224-8AC1-664D-4C85-199A09644DB4}"/>
+                <a16:creationId xmlns:a16="http://schemas.microsoft.com/office/drawing/2014/main" id="{D7CBA92D-D0D3-ADF4-EC75-F3DD62E70013}"/>
               </a:ext>
             </a:extLst>
           </p:cNvPr>
@@ -18803,8 +18998,8 @@
         </p:nvSpPr>
         <p:spPr>
           <a:xfrm>
-            <a:off x="4505078" y="2996487"/>
-            <a:ext cx="2758175" cy="1258220"/>
+            <a:off x="5178097" y="2996487"/>
+            <a:ext cx="2460648" cy="1258220"/>
           </a:xfrm>
           <a:prstGeom prst="rect">
             <a:avLst/>
@@ -18838,7 +19033,7 @@
           <p:cNvPr id="14" name="item_3_title">
             <a:extLst>
               <a:ext uri="{FF2B5EF4-FFF2-40B4-BE49-F238E27FC236}">
-                <a16:creationId xmlns:a16="http://schemas.microsoft.com/office/drawing/2014/main" id="{D29CF1B5-992C-6C54-CC6A-4117749C499C}"/>
+                <a16:creationId xmlns:a16="http://schemas.microsoft.com/office/drawing/2014/main" id="{064DD7EB-DA98-BAB3-9DFE-1323508A28CC}"/>
               </a:ext>
             </a:extLst>
           </p:cNvPr>
@@ -18851,8 +19046,8 @@
         </p:nvSpPr>
         <p:spPr>
           <a:xfrm>
-            <a:off x="7811565" y="2472229"/>
-            <a:ext cx="2758175" cy="524258"/>
+            <a:off x="8127910" y="2472229"/>
+            <a:ext cx="2460648" cy="524258"/>
           </a:xfrm>
           <a:prstGeom prst="rect">
             <a:avLst/>
@@ -18891,7 +19086,7 @@
           <p:cNvPr id="15" name="item_3">
             <a:extLst>
               <a:ext uri="{FF2B5EF4-FFF2-40B4-BE49-F238E27FC236}">
-                <a16:creationId xmlns:a16="http://schemas.microsoft.com/office/drawing/2014/main" id="{0595F02D-BC6F-276A-8299-67CB05C82DC6}"/>
+                <a16:creationId xmlns:a16="http://schemas.microsoft.com/office/drawing/2014/main" id="{37F0D237-450C-395D-AED0-CFE11F87729F}"/>
               </a:ext>
             </a:extLst>
           </p:cNvPr>
@@ -18904,8 +19099,8 @@
         </p:nvSpPr>
         <p:spPr>
           <a:xfrm>
-            <a:off x="7811565" y="2996487"/>
-            <a:ext cx="2758175" cy="1258220"/>
+            <a:off x="8127910" y="2996487"/>
+            <a:ext cx="2460648" cy="1258220"/>
           </a:xfrm>
           <a:prstGeom prst="rect">
             <a:avLst/>
@@ -18939,7 +19134,7 @@
           <p:cNvPr id="16" name="source">
             <a:extLst>
               <a:ext uri="{FF2B5EF4-FFF2-40B4-BE49-F238E27FC236}">
-                <a16:creationId xmlns:a16="http://schemas.microsoft.com/office/drawing/2014/main" id="{18084392-C0CD-93E3-2286-FB58CA1247B5}"/>
+                <a16:creationId xmlns:a16="http://schemas.microsoft.com/office/drawing/2014/main" id="{F43D4032-7E72-344F-8FE4-8B71FA950784}"/>
               </a:ext>
             </a:extLst>
           </p:cNvPr>
@@ -18952,7 +19147,7 @@
         </p:nvSpPr>
         <p:spPr>
           <a:xfrm>
-            <a:off x="1024128" y="6004560"/>
+            <a:off x="2072640" y="6004560"/>
             <a:ext cx="1905000" cy="304800"/>
           </a:xfrm>
           <a:prstGeom prst="roundRect">
@@ -18994,7 +19189,7 @@
     </p:spTree>
     <p:extLst>
       <p:ext uri="{BB962C8B-B14F-4D97-AF65-F5344CB8AC3E}">
-        <p14:creationId xmlns:p14="http://schemas.microsoft.com/office/powerpoint/2010/main" val="189106099"/>
+        <p14:creationId xmlns:p14="http://schemas.microsoft.com/office/powerpoint/2010/main" val="877472727"/>
       </p:ext>
     </p:extLst>
   </p:cSld>
@@ -19026,7 +19221,7 @@
           <p:cNvPr id="7" name="creative_background">
             <a:extLst>
               <a:ext uri="{FF2B5EF4-FFF2-40B4-BE49-F238E27FC236}">
-                <a16:creationId xmlns:a16="http://schemas.microsoft.com/office/drawing/2014/main" id="{185D9895-4D0B-120A-89B0-013DE054B01B}"/>
+                <a16:creationId xmlns:a16="http://schemas.microsoft.com/office/drawing/2014/main" id="{B94E7306-7A5D-672F-9266-CD6657FE166A}"/>
               </a:ext>
             </a:extLst>
           </p:cNvPr>
@@ -19067,7 +19262,12 @@
             <p:ph type="title"/>
           </p:nvPr>
         </p:nvSpPr>
-        <p:spPr/>
+        <p:spPr>
+          <a:xfrm>
+            <a:off x="2072640" y="585216"/>
+            <a:ext cx="8674100" cy="1499616"/>
+          </a:xfrm>
+        </p:spPr>
         <p:txBody>
           <a:bodyPr/>
           <a:lstStyle>
@@ -19094,12 +19294,17 @@
             <p:ph type="dt" sz="half" idx="10"/>
           </p:nvPr>
         </p:nvSpPr>
-        <p:spPr/>
+        <p:spPr>
+          <a:xfrm>
+            <a:off x="2072640" y="6470704"/>
+            <a:ext cx="1104900" cy="274320"/>
+          </a:xfrm>
+        </p:spPr>
         <p:txBody>
           <a:bodyPr/>
           <a:lstStyle/>
           <a:p>
-            <a:fld id="{0C2FB128-6CE9-48CA-A63B-D694A7BBCE3E}" type="datetimeFigureOut">
+            <a:fld id="{D8887631-421A-4B90-81F4-114CAE3EC1BA}" type="datetimeFigureOut">
               <a:rPr lang="en-US" smtClean="0"/>
               <a:t>10/3/2026</a:t>
             </a:fld>
@@ -19141,7 +19346,7 @@
           <a:bodyPr/>
           <a:lstStyle/>
           <a:p>
-            <a:fld id="{B2E7DF40-EA43-448D-AAC9-8AB76A8B3E4D}" type="slidenum">
+            <a:fld id="{030EC083-285A-4D45-98F3-6009BB62C01A}" type="slidenum">
               <a:rPr lang="en-US" smtClean="0"/>
               <a:t>‹#›</a:t>
             </a:fld>
@@ -19154,7 +19359,7 @@
           <p:cNvPr id="8" name="body">
             <a:extLst>
               <a:ext uri="{FF2B5EF4-FFF2-40B4-BE49-F238E27FC236}">
-                <a16:creationId xmlns:a16="http://schemas.microsoft.com/office/drawing/2014/main" id="{2E0A1381-CEC2-DAE0-4D57-5C2C2425538C}"/>
+                <a16:creationId xmlns:a16="http://schemas.microsoft.com/office/drawing/2014/main" id="{5D705AC9-649D-18AE-2237-AFAC881057DC}"/>
               </a:ext>
             </a:extLst>
           </p:cNvPr>
@@ -19167,8 +19372,8 @@
         </p:nvSpPr>
         <p:spPr>
           <a:xfrm>
-            <a:off x="1024128" y="5159248"/>
-            <a:ext cx="9720073" cy="718312"/>
+            <a:off x="2072640" y="5159248"/>
+            <a:ext cx="8671561" cy="718312"/>
           </a:xfrm>
         </p:spPr>
         <p:txBody>
@@ -19194,7 +19399,7 @@
           <p:cNvPr id="9" name="kpi_value_1">
             <a:extLst>
               <a:ext uri="{FF2B5EF4-FFF2-40B4-BE49-F238E27FC236}">
-                <a16:creationId xmlns:a16="http://schemas.microsoft.com/office/drawing/2014/main" id="{001509DC-B0C2-4E2D-026D-488FD722EEF3}"/>
+                <a16:creationId xmlns:a16="http://schemas.microsoft.com/office/drawing/2014/main" id="{6339D812-FC18-B108-A13B-3E7F13BF4DC2}"/>
               </a:ext>
             </a:extLst>
           </p:cNvPr>
@@ -19207,8 +19412,8 @@
         </p:nvSpPr>
         <p:spPr>
           <a:xfrm>
-            <a:off x="1198591" y="2472229"/>
-            <a:ext cx="4411418" cy="1515296"/>
+            <a:off x="2228284" y="2472229"/>
+            <a:ext cx="3935555" cy="1515296"/>
           </a:xfrm>
           <a:prstGeom prst="rect">
             <a:avLst/>
@@ -19247,7 +19452,7 @@
           <p:cNvPr id="10" name="kpi_label_1">
             <a:extLst>
               <a:ext uri="{FF2B5EF4-FFF2-40B4-BE49-F238E27FC236}">
-                <a16:creationId xmlns:a16="http://schemas.microsoft.com/office/drawing/2014/main" id="{2A62F7A6-6286-895B-82D8-379DCC3B3526}"/>
+                <a16:creationId xmlns:a16="http://schemas.microsoft.com/office/drawing/2014/main" id="{936C0D16-D79C-6411-E960-F01E62C2EA2B}"/>
               </a:ext>
             </a:extLst>
           </p:cNvPr>
@@ -19260,8 +19465,8 @@
         </p:nvSpPr>
         <p:spPr>
           <a:xfrm>
-            <a:off x="1198591" y="3987526"/>
-            <a:ext cx="4411418" cy="841831"/>
+            <a:off x="2228284" y="3987526"/>
+            <a:ext cx="3935555" cy="841831"/>
           </a:xfrm>
           <a:prstGeom prst="rect">
             <a:avLst/>
@@ -19295,7 +19500,7 @@
           <p:cNvPr id="11" name="kpi_value_2">
             <a:extLst>
               <a:ext uri="{FF2B5EF4-FFF2-40B4-BE49-F238E27FC236}">
-                <a16:creationId xmlns:a16="http://schemas.microsoft.com/office/drawing/2014/main" id="{A0787F2C-9104-5168-862B-3870EA1AB695}"/>
+                <a16:creationId xmlns:a16="http://schemas.microsoft.com/office/drawing/2014/main" id="{0A843882-76CF-D6C5-716A-80265C74DAB3}"/>
               </a:ext>
             </a:extLst>
           </p:cNvPr>
@@ -19308,8 +19513,8 @@
         </p:nvSpPr>
         <p:spPr>
           <a:xfrm>
-            <a:off x="6158321" y="2472229"/>
-            <a:ext cx="4411418" cy="1515296"/>
+            <a:off x="6653004" y="2472229"/>
+            <a:ext cx="3935555" cy="1515296"/>
           </a:xfrm>
           <a:prstGeom prst="rect">
             <a:avLst/>
@@ -19348,7 +19553,7 @@
           <p:cNvPr id="12" name="kpi_label_2">
             <a:extLst>
               <a:ext uri="{FF2B5EF4-FFF2-40B4-BE49-F238E27FC236}">
-                <a16:creationId xmlns:a16="http://schemas.microsoft.com/office/drawing/2014/main" id="{9D9F720D-09C9-3475-C138-7ED01225AF06}"/>
+                <a16:creationId xmlns:a16="http://schemas.microsoft.com/office/drawing/2014/main" id="{47E36131-073A-F364-B7FA-9C9B3D5E2210}"/>
               </a:ext>
             </a:extLst>
           </p:cNvPr>
@@ -19361,8 +19566,8 @@
         </p:nvSpPr>
         <p:spPr>
           <a:xfrm>
-            <a:off x="6158321" y="3987526"/>
-            <a:ext cx="4411418" cy="841831"/>
+            <a:off x="6653004" y="3987526"/>
+            <a:ext cx="3935555" cy="841831"/>
           </a:xfrm>
           <a:prstGeom prst="rect">
             <a:avLst/>
@@ -19396,7 +19601,7 @@
           <p:cNvPr id="13" name="source">
             <a:extLst>
               <a:ext uri="{FF2B5EF4-FFF2-40B4-BE49-F238E27FC236}">
-                <a16:creationId xmlns:a16="http://schemas.microsoft.com/office/drawing/2014/main" id="{C1A32B1B-997C-EF4C-D1ED-AD0F0BA8372F}"/>
+                <a16:creationId xmlns:a16="http://schemas.microsoft.com/office/drawing/2014/main" id="{65C4EB83-4287-8770-D505-9D71C8CFBCA3}"/>
               </a:ext>
             </a:extLst>
           </p:cNvPr>
@@ -19409,7 +19614,7 @@
         </p:nvSpPr>
         <p:spPr>
           <a:xfrm>
-            <a:off x="1024128" y="6004560"/>
+            <a:off x="2072640" y="6004560"/>
             <a:ext cx="1905000" cy="304800"/>
           </a:xfrm>
           <a:prstGeom prst="roundRect">
@@ -19451,7 +19656,7 @@
     </p:spTree>
     <p:extLst>
       <p:ext uri="{BB962C8B-B14F-4D97-AF65-F5344CB8AC3E}">
-        <p14:creationId xmlns:p14="http://schemas.microsoft.com/office/powerpoint/2010/main" val="2911215263"/>
+        <p14:creationId xmlns:p14="http://schemas.microsoft.com/office/powerpoint/2010/main" val="746777690"/>
       </p:ext>
     </p:extLst>
   </p:cSld>
@@ -19483,7 +19688,7 @@
           <p:cNvPr id="7" name="creative_background">
             <a:extLst>
               <a:ext uri="{FF2B5EF4-FFF2-40B4-BE49-F238E27FC236}">
-                <a16:creationId xmlns:a16="http://schemas.microsoft.com/office/drawing/2014/main" id="{CCF0255F-ADF0-FC85-8BDD-6426F6D7FEA9}"/>
+                <a16:creationId xmlns:a16="http://schemas.microsoft.com/office/drawing/2014/main" id="{CF1D5ED9-F183-ED3A-521C-AE7964453DA2}"/>
               </a:ext>
             </a:extLst>
           </p:cNvPr>
@@ -19524,7 +19729,12 @@
             <p:ph type="title"/>
           </p:nvPr>
         </p:nvSpPr>
-        <p:spPr/>
+        <p:spPr>
+          <a:xfrm>
+            <a:off x="2072640" y="585216"/>
+            <a:ext cx="8674100" cy="1499616"/>
+          </a:xfrm>
+        </p:spPr>
         <p:txBody>
           <a:bodyPr/>
           <a:lstStyle>
@@ -19551,12 +19761,17 @@
             <p:ph type="dt" sz="half" idx="10"/>
           </p:nvPr>
         </p:nvSpPr>
-        <p:spPr/>
+        <p:spPr>
+          <a:xfrm>
+            <a:off x="2072640" y="6470704"/>
+            <a:ext cx="1104900" cy="274320"/>
+          </a:xfrm>
+        </p:spPr>
         <p:txBody>
           <a:bodyPr/>
           <a:lstStyle/>
           <a:p>
-            <a:fld id="{0C2FB128-6CE9-48CA-A63B-D694A7BBCE3E}" type="datetimeFigureOut">
+            <a:fld id="{D8887631-421A-4B90-81F4-114CAE3EC1BA}" type="datetimeFigureOut">
               <a:rPr lang="en-US" smtClean="0"/>
               <a:t>10/3/2026</a:t>
             </a:fld>
@@ -19598,7 +19813,7 @@
           <a:bodyPr/>
           <a:lstStyle/>
           <a:p>
-            <a:fld id="{B2E7DF40-EA43-448D-AAC9-8AB76A8B3E4D}" type="slidenum">
+            <a:fld id="{030EC083-285A-4D45-98F3-6009BB62C01A}" type="slidenum">
               <a:rPr lang="en-US" smtClean="0"/>
               <a:t>‹#›</a:t>
             </a:fld>
@@ -19611,7 +19826,7 @@
           <p:cNvPr id="8" name="body">
             <a:extLst>
               <a:ext uri="{FF2B5EF4-FFF2-40B4-BE49-F238E27FC236}">
-                <a16:creationId xmlns:a16="http://schemas.microsoft.com/office/drawing/2014/main" id="{70D62AE0-1969-4375-7CBF-4E71302F2A3D}"/>
+                <a16:creationId xmlns:a16="http://schemas.microsoft.com/office/drawing/2014/main" id="{CE828636-F5F5-3CA0-7C07-27A180C5BF23}"/>
               </a:ext>
             </a:extLst>
           </p:cNvPr>
@@ -19624,8 +19839,8 @@
         </p:nvSpPr>
         <p:spPr>
           <a:xfrm>
-            <a:off x="1024128" y="5159248"/>
-            <a:ext cx="9720073" cy="718312"/>
+            <a:off x="2072640" y="5159248"/>
+            <a:ext cx="8671561" cy="718312"/>
           </a:xfrm>
         </p:spPr>
         <p:txBody>
@@ -19651,7 +19866,7 @@
           <p:cNvPr id="9" name="kpi_value_1">
             <a:extLst>
               <a:ext uri="{FF2B5EF4-FFF2-40B4-BE49-F238E27FC236}">
-                <a16:creationId xmlns:a16="http://schemas.microsoft.com/office/drawing/2014/main" id="{86ACED90-5308-AF14-F49E-966852A544FC}"/>
+                <a16:creationId xmlns:a16="http://schemas.microsoft.com/office/drawing/2014/main" id="{1E3D28FC-6838-6011-65A3-D4B3334DFD94}"/>
               </a:ext>
             </a:extLst>
           </p:cNvPr>
@@ -19664,8 +19879,8 @@
         </p:nvSpPr>
         <p:spPr>
           <a:xfrm>
-            <a:off x="1198592" y="2472229"/>
-            <a:ext cx="1931553" cy="1515296"/>
+            <a:off x="2228284" y="2472229"/>
+            <a:ext cx="1723195" cy="1515296"/>
           </a:xfrm>
           <a:prstGeom prst="rect">
             <a:avLst/>
@@ -19704,7 +19919,7 @@
           <p:cNvPr id="10" name="kpi_label_1">
             <a:extLst>
               <a:ext uri="{FF2B5EF4-FFF2-40B4-BE49-F238E27FC236}">
-                <a16:creationId xmlns:a16="http://schemas.microsoft.com/office/drawing/2014/main" id="{1E3F3745-F234-A5E1-4215-42F95B0A3A44}"/>
+                <a16:creationId xmlns:a16="http://schemas.microsoft.com/office/drawing/2014/main" id="{B2C3C53A-DE86-D629-4D61-4A325FADC9EE}"/>
               </a:ext>
             </a:extLst>
           </p:cNvPr>
@@ -19717,8 +19932,8 @@
         </p:nvSpPr>
         <p:spPr>
           <a:xfrm>
-            <a:off x="1198592" y="3987526"/>
-            <a:ext cx="1931553" cy="841831"/>
+            <a:off x="2228284" y="3987526"/>
+            <a:ext cx="1723195" cy="841831"/>
           </a:xfrm>
           <a:prstGeom prst="rect">
             <a:avLst/>
@@ -19752,7 +19967,7 @@
           <p:cNvPr id="11" name="kpi_value_2">
             <a:extLst>
               <a:ext uri="{FF2B5EF4-FFF2-40B4-BE49-F238E27FC236}">
-                <a16:creationId xmlns:a16="http://schemas.microsoft.com/office/drawing/2014/main" id="{0B990A46-5520-2752-43C7-98D22DC4771F}"/>
+                <a16:creationId xmlns:a16="http://schemas.microsoft.com/office/drawing/2014/main" id="{A8E26330-DA3F-8290-4544-5AE3D67E0275}"/>
               </a:ext>
             </a:extLst>
           </p:cNvPr>
@@ -19765,8 +19980,8 @@
         </p:nvSpPr>
         <p:spPr>
           <a:xfrm>
-            <a:off x="3678457" y="2472229"/>
-            <a:ext cx="1931553" cy="1515296"/>
+            <a:off x="4440644" y="2472229"/>
+            <a:ext cx="1723195" cy="1515296"/>
           </a:xfrm>
           <a:prstGeom prst="rect">
             <a:avLst/>
@@ -19805,7 +20020,7 @@
           <p:cNvPr id="12" name="kpi_label_2">
             <a:extLst>
               <a:ext uri="{FF2B5EF4-FFF2-40B4-BE49-F238E27FC236}">
-                <a16:creationId xmlns:a16="http://schemas.microsoft.com/office/drawing/2014/main" id="{BC1D404F-20E7-76A9-998E-75B1E06C765B}"/>
+                <a16:creationId xmlns:a16="http://schemas.microsoft.com/office/drawing/2014/main" id="{27136362-C0A7-214D-85CD-97015E1F975E}"/>
               </a:ext>
             </a:extLst>
           </p:cNvPr>
@@ -19818,8 +20033,8 @@
         </p:nvSpPr>
         <p:spPr>
           <a:xfrm>
-            <a:off x="3678457" y="3987526"/>
-            <a:ext cx="1931553" cy="841831"/>
+            <a:off x="4440644" y="3987526"/>
+            <a:ext cx="1723195" cy="841831"/>
           </a:xfrm>
           <a:prstGeom prst="rect">
             <a:avLst/>
@@ -19853,7 +20068,7 @@
           <p:cNvPr id="13" name="kpi_value_3">
             <a:extLst>
               <a:ext uri="{FF2B5EF4-FFF2-40B4-BE49-F238E27FC236}">
-                <a16:creationId xmlns:a16="http://schemas.microsoft.com/office/drawing/2014/main" id="{94632B5C-A9AB-4C35-DE42-D44B35AA91DA}"/>
+                <a16:creationId xmlns:a16="http://schemas.microsoft.com/office/drawing/2014/main" id="{644996F9-E79A-DD2C-E8B0-B397277F4A63}"/>
               </a:ext>
             </a:extLst>
           </p:cNvPr>
@@ -19866,8 +20081,8 @@
         </p:nvSpPr>
         <p:spPr>
           <a:xfrm>
-            <a:off x="6158322" y="2472229"/>
-            <a:ext cx="1931553" cy="1515296"/>
+            <a:off x="6653004" y="2472229"/>
+            <a:ext cx="1723195" cy="1515296"/>
           </a:xfrm>
           <a:prstGeom prst="rect">
             <a:avLst/>
@@ -19906,7 +20121,7 @@
           <p:cNvPr id="14" name="kpi_label_3">
             <a:extLst>
               <a:ext uri="{FF2B5EF4-FFF2-40B4-BE49-F238E27FC236}">
-                <a16:creationId xmlns:a16="http://schemas.microsoft.com/office/drawing/2014/main" id="{0E7912D2-5933-18A2-E659-1C3617F6727C}"/>
+                <a16:creationId xmlns:a16="http://schemas.microsoft.com/office/drawing/2014/main" id="{77DB1560-9828-A5B2-77E4-CED36B97EAD3}"/>
               </a:ext>
             </a:extLst>
           </p:cNvPr>
@@ -19919,8 +20134,8 @@
         </p:nvSpPr>
         <p:spPr>
           <a:xfrm>
-            <a:off x="6158322" y="3987526"/>
-            <a:ext cx="1931553" cy="841831"/>
+            <a:off x="6653004" y="3987526"/>
+            <a:ext cx="1723195" cy="841831"/>
           </a:xfrm>
           <a:prstGeom prst="rect">
             <a:avLst/>
@@ -19954,7 +20169,7 @@
           <p:cNvPr id="15" name="kpi_value_4">
             <a:extLst>
               <a:ext uri="{FF2B5EF4-FFF2-40B4-BE49-F238E27FC236}">
-                <a16:creationId xmlns:a16="http://schemas.microsoft.com/office/drawing/2014/main" id="{EEB5F46D-4FC8-87B9-E23F-512628246C6C}"/>
+                <a16:creationId xmlns:a16="http://schemas.microsoft.com/office/drawing/2014/main" id="{10025CD0-DE1A-FA47-A111-EEC74E456036}"/>
               </a:ext>
             </a:extLst>
           </p:cNvPr>
@@ -19967,8 +20182,8 @@
         </p:nvSpPr>
         <p:spPr>
           <a:xfrm>
-            <a:off x="8638186" y="2472229"/>
-            <a:ext cx="1931553" cy="1515296"/>
+            <a:off x="8865364" y="2472229"/>
+            <a:ext cx="1723195" cy="1515296"/>
           </a:xfrm>
           <a:prstGeom prst="rect">
             <a:avLst/>
@@ -20007,7 +20222,7 @@
           <p:cNvPr id="16" name="kpi_label_4">
             <a:extLst>
               <a:ext uri="{FF2B5EF4-FFF2-40B4-BE49-F238E27FC236}">
-                <a16:creationId xmlns:a16="http://schemas.microsoft.com/office/drawing/2014/main" id="{883E2FA3-6BEE-019E-CBA7-24794451AABC}"/>
+                <a16:creationId xmlns:a16="http://schemas.microsoft.com/office/drawing/2014/main" id="{9045E619-B64E-D64B-B045-A43B37BB7C69}"/>
               </a:ext>
             </a:extLst>
           </p:cNvPr>
@@ -20020,8 +20235,8 @@
         </p:nvSpPr>
         <p:spPr>
           <a:xfrm>
-            <a:off x="8638186" y="3987526"/>
-            <a:ext cx="1931553" cy="841831"/>
+            <a:off x="8865364" y="3987526"/>
+            <a:ext cx="1723195" cy="841831"/>
           </a:xfrm>
           <a:prstGeom prst="rect">
             <a:avLst/>
@@ -20055,7 +20270,7 @@
           <p:cNvPr id="17" name="source">
             <a:extLst>
               <a:ext uri="{FF2B5EF4-FFF2-40B4-BE49-F238E27FC236}">
-                <a16:creationId xmlns:a16="http://schemas.microsoft.com/office/drawing/2014/main" id="{65C11BF7-6443-43D3-E123-92E2EEE44F64}"/>
+                <a16:creationId xmlns:a16="http://schemas.microsoft.com/office/drawing/2014/main" id="{D6FE39A8-F6AC-D5D7-A7D2-3A328FA47A2C}"/>
               </a:ext>
             </a:extLst>
           </p:cNvPr>
@@ -20068,7 +20283,7 @@
         </p:nvSpPr>
         <p:spPr>
           <a:xfrm>
-            <a:off x="1024128" y="6004560"/>
+            <a:off x="2072640" y="6004560"/>
             <a:ext cx="1905000" cy="304800"/>
           </a:xfrm>
           <a:prstGeom prst="roundRect">
@@ -20110,7 +20325,7 @@
     </p:spTree>
     <p:extLst>
       <p:ext uri="{BB962C8B-B14F-4D97-AF65-F5344CB8AC3E}">
-        <p14:creationId xmlns:p14="http://schemas.microsoft.com/office/powerpoint/2010/main" val="1221684799"/>
+        <p14:creationId xmlns:p14="http://schemas.microsoft.com/office/powerpoint/2010/main" val="2548721282"/>
       </p:ext>
     </p:extLst>
   </p:cSld>
@@ -20142,7 +20357,7 @@
           <p:cNvPr id="7" name="creative_background">
             <a:extLst>
               <a:ext uri="{FF2B5EF4-FFF2-40B4-BE49-F238E27FC236}">
-                <a16:creationId xmlns:a16="http://schemas.microsoft.com/office/drawing/2014/main" id="{6FF055DE-2C1F-7760-85BD-518E0A2035AB}"/>
+                <a16:creationId xmlns:a16="http://schemas.microsoft.com/office/drawing/2014/main" id="{84CFA40B-DA4A-B125-0D8F-DB4C9139DF57}"/>
               </a:ext>
             </a:extLst>
           </p:cNvPr>
@@ -20183,7 +20398,12 @@
             <p:ph type="title"/>
           </p:nvPr>
         </p:nvSpPr>
-        <p:spPr/>
+        <p:spPr>
+          <a:xfrm>
+            <a:off x="2072640" y="585216"/>
+            <a:ext cx="8674100" cy="1499616"/>
+          </a:xfrm>
+        </p:spPr>
         <p:txBody>
           <a:bodyPr/>
           <a:lstStyle>
@@ -20210,12 +20430,17 @@
             <p:ph type="dt" sz="half" idx="10"/>
           </p:nvPr>
         </p:nvSpPr>
-        <p:spPr/>
+        <p:spPr>
+          <a:xfrm>
+            <a:off x="2072640" y="6470704"/>
+            <a:ext cx="1104900" cy="274320"/>
+          </a:xfrm>
+        </p:spPr>
         <p:txBody>
           <a:bodyPr/>
           <a:lstStyle/>
           <a:p>
-            <a:fld id="{0C2FB128-6CE9-48CA-A63B-D694A7BBCE3E}" type="datetimeFigureOut">
+            <a:fld id="{D8887631-421A-4B90-81F4-114CAE3EC1BA}" type="datetimeFigureOut">
               <a:rPr lang="en-US" smtClean="0"/>
               <a:t>10/3/2026</a:t>
             </a:fld>
@@ -20257,7 +20482,7 @@
           <a:bodyPr/>
           <a:lstStyle/>
           <a:p>
-            <a:fld id="{B2E7DF40-EA43-448D-AAC9-8AB76A8B3E4D}" type="slidenum">
+            <a:fld id="{030EC083-285A-4D45-98F3-6009BB62C01A}" type="slidenum">
               <a:rPr lang="en-US" smtClean="0"/>
               <a:t>‹#›</a:t>
             </a:fld>
@@ -20270,7 +20495,7 @@
           <p:cNvPr id="8" name="body">
             <a:extLst>
               <a:ext uri="{FF2B5EF4-FFF2-40B4-BE49-F238E27FC236}">
-                <a16:creationId xmlns:a16="http://schemas.microsoft.com/office/drawing/2014/main" id="{AB4FC5F5-F648-D8F2-42B5-F0C85F007984}"/>
+                <a16:creationId xmlns:a16="http://schemas.microsoft.com/office/drawing/2014/main" id="{82916589-6EA9-6E69-5AEA-178A2EED854D}"/>
               </a:ext>
             </a:extLst>
           </p:cNvPr>
@@ -20283,8 +20508,8 @@
         </p:nvSpPr>
         <p:spPr>
           <a:xfrm>
-            <a:off x="1024128" y="2286000"/>
-            <a:ext cx="5443241" cy="3591560"/>
+            <a:off x="2072640" y="2286000"/>
+            <a:ext cx="4856075" cy="3591560"/>
           </a:xfrm>
         </p:spPr>
         <p:txBody>
@@ -20310,7 +20535,7 @@
           <p:cNvPr id="9" name="quote">
             <a:extLst>
               <a:ext uri="{FF2B5EF4-FFF2-40B4-BE49-F238E27FC236}">
-                <a16:creationId xmlns:a16="http://schemas.microsoft.com/office/drawing/2014/main" id="{D111A713-B249-3E10-BB68-566EE8D399BF}"/>
+                <a16:creationId xmlns:a16="http://schemas.microsoft.com/office/drawing/2014/main" id="{C126E4DB-5C3B-7D81-A032-DB3568DB6BF9}"/>
               </a:ext>
             </a:extLst>
           </p:cNvPr>
@@ -20323,8 +20548,8 @@
         </p:nvSpPr>
         <p:spPr>
           <a:xfrm>
-            <a:off x="7030635" y="2472230"/>
-            <a:ext cx="3539104" cy="2687019"/>
+            <a:off x="7431220" y="2472230"/>
+            <a:ext cx="3157338" cy="2687019"/>
           </a:xfrm>
           <a:prstGeom prst="rect">
             <a:avLst/>
@@ -20360,7 +20585,7 @@
           <p:cNvPr id="10" name="attribution">
             <a:extLst>
               <a:ext uri="{FF2B5EF4-FFF2-40B4-BE49-F238E27FC236}">
-                <a16:creationId xmlns:a16="http://schemas.microsoft.com/office/drawing/2014/main" id="{846295E8-876F-4747-4A2D-50D3DC761870}"/>
+                <a16:creationId xmlns:a16="http://schemas.microsoft.com/office/drawing/2014/main" id="{E3378EA5-65B7-FD93-AAE4-05C9441E01F5}"/>
               </a:ext>
             </a:extLst>
           </p:cNvPr>
@@ -20373,8 +20598,8 @@
         </p:nvSpPr>
         <p:spPr>
           <a:xfrm>
-            <a:off x="7030635" y="5159249"/>
-            <a:ext cx="3539104" cy="532083"/>
+            <a:off x="7431220" y="5159249"/>
+            <a:ext cx="3157338" cy="532083"/>
           </a:xfrm>
           <a:prstGeom prst="rect">
             <a:avLst/>
@@ -20408,7 +20633,7 @@
           <p:cNvPr id="11" name="source">
             <a:extLst>
               <a:ext uri="{FF2B5EF4-FFF2-40B4-BE49-F238E27FC236}">
-                <a16:creationId xmlns:a16="http://schemas.microsoft.com/office/drawing/2014/main" id="{33A3BB3F-3174-B950-45F4-A7AE70C7F5EC}"/>
+                <a16:creationId xmlns:a16="http://schemas.microsoft.com/office/drawing/2014/main" id="{9C4DE8AA-E6F9-9757-1E78-5E71C4C623C9}"/>
               </a:ext>
             </a:extLst>
           </p:cNvPr>
@@ -20421,7 +20646,7 @@
         </p:nvSpPr>
         <p:spPr>
           <a:xfrm>
-            <a:off x="1024128" y="6004560"/>
+            <a:off x="2072640" y="6004560"/>
             <a:ext cx="1905000" cy="304800"/>
           </a:xfrm>
           <a:prstGeom prst="roundRect">
@@ -20463,7 +20688,7 @@
     </p:spTree>
     <p:extLst>
       <p:ext uri="{BB962C8B-B14F-4D97-AF65-F5344CB8AC3E}">
-        <p14:creationId xmlns:p14="http://schemas.microsoft.com/office/powerpoint/2010/main" val="4287093499"/>
+        <p14:creationId xmlns:p14="http://schemas.microsoft.com/office/powerpoint/2010/main" val="3278155858"/>
       </p:ext>
     </p:extLst>
   </p:cSld>
@@ -20495,7 +20720,7 @@
           <p:cNvPr id="7" name="creative_background">
             <a:extLst>
               <a:ext uri="{FF2B5EF4-FFF2-40B4-BE49-F238E27FC236}">
-                <a16:creationId xmlns:a16="http://schemas.microsoft.com/office/drawing/2014/main" id="{7C47C555-2F1D-9863-FC87-6816632F699A}"/>
+                <a16:creationId xmlns:a16="http://schemas.microsoft.com/office/drawing/2014/main" id="{3CB90FDE-6BE6-A96A-F5FD-BAB62F06F5D7}"/>
               </a:ext>
             </a:extLst>
           </p:cNvPr>
@@ -20536,7 +20761,12 @@
             <p:ph type="title"/>
           </p:nvPr>
         </p:nvSpPr>
-        <p:spPr/>
+        <p:spPr>
+          <a:xfrm>
+            <a:off x="2072640" y="585216"/>
+            <a:ext cx="8674100" cy="1499616"/>
+          </a:xfrm>
+        </p:spPr>
         <p:txBody>
           <a:bodyPr/>
           <a:lstStyle>
@@ -20563,12 +20793,17 @@
             <p:ph type="dt" sz="half" idx="10"/>
           </p:nvPr>
         </p:nvSpPr>
-        <p:spPr/>
+        <p:spPr>
+          <a:xfrm>
+            <a:off x="2072640" y="6470704"/>
+            <a:ext cx="1104900" cy="274320"/>
+          </a:xfrm>
+        </p:spPr>
         <p:txBody>
           <a:bodyPr/>
           <a:lstStyle/>
           <a:p>
-            <a:fld id="{0C2FB128-6CE9-48CA-A63B-D694A7BBCE3E}" type="datetimeFigureOut">
+            <a:fld id="{D8887631-421A-4B90-81F4-114CAE3EC1BA}" type="datetimeFigureOut">
               <a:rPr lang="en-US" smtClean="0"/>
               <a:t>10/3/2026</a:t>
             </a:fld>
@@ -20610,7 +20845,7 @@
           <a:bodyPr/>
           <a:lstStyle/>
           <a:p>
-            <a:fld id="{B2E7DF40-EA43-448D-AAC9-8AB76A8B3E4D}" type="slidenum">
+            <a:fld id="{030EC083-285A-4D45-98F3-6009BB62C01A}" type="slidenum">
               <a:rPr lang="en-US" smtClean="0"/>
               <a:t>‹#›</a:t>
             </a:fld>
@@ -20623,7 +20858,7 @@
           <p:cNvPr id="8" name="item_1_title">
             <a:extLst>
               <a:ext uri="{FF2B5EF4-FFF2-40B4-BE49-F238E27FC236}">
-                <a16:creationId xmlns:a16="http://schemas.microsoft.com/office/drawing/2014/main" id="{51ADCF89-A175-8F87-298C-3AAE6A0DDE89}"/>
+                <a16:creationId xmlns:a16="http://schemas.microsoft.com/office/drawing/2014/main" id="{C99B8770-4F84-99C2-7318-896F1FCE49E0}"/>
               </a:ext>
             </a:extLst>
           </p:cNvPr>
@@ -20636,8 +20871,8 @@
         </p:nvSpPr>
         <p:spPr>
           <a:xfrm>
-            <a:off x="1198591" y="2472230"/>
-            <a:ext cx="2758175" cy="946795"/>
+            <a:off x="2228283" y="2472230"/>
+            <a:ext cx="2460648" cy="946795"/>
           </a:xfrm>
         </p:spPr>
         <p:txBody>
@@ -20673,7 +20908,7 @@
           <p:cNvPr id="9" name="item_1">
             <a:extLst>
               <a:ext uri="{FF2B5EF4-FFF2-40B4-BE49-F238E27FC236}">
-                <a16:creationId xmlns:a16="http://schemas.microsoft.com/office/drawing/2014/main" id="{6BEFCA59-6B55-6CDC-41BA-229506962915}"/>
+                <a16:creationId xmlns:a16="http://schemas.microsoft.com/office/drawing/2014/main" id="{7151A94B-46F7-C3E6-48AE-CCC9BAD94BD2}"/>
               </a:ext>
             </a:extLst>
           </p:cNvPr>
@@ -20686,8 +20921,8 @@
         </p:nvSpPr>
         <p:spPr>
           <a:xfrm>
-            <a:off x="1198592" y="3419025"/>
-            <a:ext cx="2758175" cy="2272307"/>
+            <a:off x="2228283" y="3419025"/>
+            <a:ext cx="2460648" cy="2272307"/>
           </a:xfrm>
           <a:prstGeom prst="rect">
             <a:avLst/>
@@ -20721,7 +20956,7 @@
           <p:cNvPr id="10" name="item_2_title">
             <a:extLst>
               <a:ext uri="{FF2B5EF4-FFF2-40B4-BE49-F238E27FC236}">
-                <a16:creationId xmlns:a16="http://schemas.microsoft.com/office/drawing/2014/main" id="{04990E72-D359-0B5C-1647-6F559D02CE69}"/>
+                <a16:creationId xmlns:a16="http://schemas.microsoft.com/office/drawing/2014/main" id="{D0C2E571-79B8-96AC-FAD1-0C7A9031B15D}"/>
               </a:ext>
             </a:extLst>
           </p:cNvPr>
@@ -20734,8 +20969,8 @@
         </p:nvSpPr>
         <p:spPr>
           <a:xfrm>
-            <a:off x="4505078" y="2472230"/>
-            <a:ext cx="2758175" cy="946795"/>
+            <a:off x="5178097" y="2472230"/>
+            <a:ext cx="2460648" cy="946795"/>
           </a:xfrm>
           <a:prstGeom prst="rect">
             <a:avLst/>
@@ -20774,7 +21009,7 @@
           <p:cNvPr id="11" name="item_2">
             <a:extLst>
               <a:ext uri="{FF2B5EF4-FFF2-40B4-BE49-F238E27FC236}">
-                <a16:creationId xmlns:a16="http://schemas.microsoft.com/office/drawing/2014/main" id="{0F352C2A-3547-4C71-64E5-5F58404EBEB4}"/>
+                <a16:creationId xmlns:a16="http://schemas.microsoft.com/office/drawing/2014/main" id="{AA249AF2-181F-A018-B908-D102976B45F6}"/>
               </a:ext>
             </a:extLst>
           </p:cNvPr>
@@ -20787,8 +21022,8 @@
         </p:nvSpPr>
         <p:spPr>
           <a:xfrm>
-            <a:off x="4505078" y="3419025"/>
-            <a:ext cx="2758175" cy="2272307"/>
+            <a:off x="5178097" y="3419025"/>
+            <a:ext cx="2460648" cy="2272307"/>
           </a:xfrm>
           <a:prstGeom prst="rect">
             <a:avLst/>
@@ -20822,7 +21057,7 @@
           <p:cNvPr id="12" name="item_3_title">
             <a:extLst>
               <a:ext uri="{FF2B5EF4-FFF2-40B4-BE49-F238E27FC236}">
-                <a16:creationId xmlns:a16="http://schemas.microsoft.com/office/drawing/2014/main" id="{18B778E6-C906-D543-94FA-8A2E450BDE3A}"/>
+                <a16:creationId xmlns:a16="http://schemas.microsoft.com/office/drawing/2014/main" id="{EC1B7031-18F1-E7A9-EA0A-55D1A726BB1A}"/>
               </a:ext>
             </a:extLst>
           </p:cNvPr>
@@ -20835,8 +21070,8 @@
         </p:nvSpPr>
         <p:spPr>
           <a:xfrm>
-            <a:off x="7811565" y="2472230"/>
-            <a:ext cx="2758175" cy="946795"/>
+            <a:off x="8127910" y="2472230"/>
+            <a:ext cx="2460648" cy="946795"/>
           </a:xfrm>
           <a:prstGeom prst="rect">
             <a:avLst/>
@@ -20875,7 +21110,7 @@
           <p:cNvPr id="13" name="item_3">
             <a:extLst>
               <a:ext uri="{FF2B5EF4-FFF2-40B4-BE49-F238E27FC236}">
-                <a16:creationId xmlns:a16="http://schemas.microsoft.com/office/drawing/2014/main" id="{F3C7E502-EBB2-A03D-9D8F-4FFBFD63C522}"/>
+                <a16:creationId xmlns:a16="http://schemas.microsoft.com/office/drawing/2014/main" id="{C384D99C-72FA-5DC4-144F-05395E4CC466}"/>
               </a:ext>
             </a:extLst>
           </p:cNvPr>
@@ -20888,8 +21123,8 @@
         </p:nvSpPr>
         <p:spPr>
           <a:xfrm>
-            <a:off x="7811565" y="3419025"/>
-            <a:ext cx="2758175" cy="2272307"/>
+            <a:off x="8127910" y="3419025"/>
+            <a:ext cx="2460648" cy="2272307"/>
           </a:xfrm>
           <a:prstGeom prst="rect">
             <a:avLst/>
@@ -20923,7 +21158,7 @@
           <p:cNvPr id="14" name="source">
             <a:extLst>
               <a:ext uri="{FF2B5EF4-FFF2-40B4-BE49-F238E27FC236}">
-                <a16:creationId xmlns:a16="http://schemas.microsoft.com/office/drawing/2014/main" id="{7DCBDFC5-B586-CFB2-DD66-5B12BDE7AE5F}"/>
+                <a16:creationId xmlns:a16="http://schemas.microsoft.com/office/drawing/2014/main" id="{FD24D303-D08A-0D7B-781A-BEF028951C9B}"/>
               </a:ext>
             </a:extLst>
           </p:cNvPr>
@@ -20936,7 +21171,7 @@
         </p:nvSpPr>
         <p:spPr>
           <a:xfrm>
-            <a:off x="1024128" y="6004560"/>
+            <a:off x="2072640" y="6004560"/>
             <a:ext cx="1905000" cy="304800"/>
           </a:xfrm>
           <a:prstGeom prst="roundRect">
@@ -20978,7 +21213,7 @@
     </p:spTree>
     <p:extLst>
       <p:ext uri="{BB962C8B-B14F-4D97-AF65-F5344CB8AC3E}">
-        <p14:creationId xmlns:p14="http://schemas.microsoft.com/office/powerpoint/2010/main" val="2770625310"/>
+        <p14:creationId xmlns:p14="http://schemas.microsoft.com/office/powerpoint/2010/main" val="1436115623"/>
       </p:ext>
     </p:extLst>
   </p:cSld>
@@ -21010,7 +21245,7 @@
           <p:cNvPr id="7" name="creative_background">
             <a:extLst>
               <a:ext uri="{FF2B5EF4-FFF2-40B4-BE49-F238E27FC236}">
-                <a16:creationId xmlns:a16="http://schemas.microsoft.com/office/drawing/2014/main" id="{90862F44-8D9D-AF00-2F6D-85EEB450E3B3}"/>
+                <a16:creationId xmlns:a16="http://schemas.microsoft.com/office/drawing/2014/main" id="{7ABD1E3D-3CF6-2DB1-ADC0-DC6DF1F3E13B}"/>
               </a:ext>
             </a:extLst>
           </p:cNvPr>
@@ -21051,7 +21286,12 @@
             <p:ph type="title"/>
           </p:nvPr>
         </p:nvSpPr>
-        <p:spPr/>
+        <p:spPr>
+          <a:xfrm>
+            <a:off x="2072640" y="585216"/>
+            <a:ext cx="8674100" cy="1499616"/>
+          </a:xfrm>
+        </p:spPr>
         <p:txBody>
           <a:bodyPr/>
           <a:lstStyle>
@@ -21078,12 +21318,17 @@
             <p:ph type="dt" sz="half" idx="10"/>
           </p:nvPr>
         </p:nvSpPr>
-        <p:spPr/>
+        <p:spPr>
+          <a:xfrm>
+            <a:off x="2072640" y="6470704"/>
+            <a:ext cx="1104900" cy="274320"/>
+          </a:xfrm>
+        </p:spPr>
         <p:txBody>
           <a:bodyPr/>
           <a:lstStyle/>
           <a:p>
-            <a:fld id="{0C2FB128-6CE9-48CA-A63B-D694A7BBCE3E}" type="datetimeFigureOut">
+            <a:fld id="{D8887631-421A-4B90-81F4-114CAE3EC1BA}" type="datetimeFigureOut">
               <a:rPr lang="en-US" smtClean="0"/>
               <a:t>10/3/2026</a:t>
             </a:fld>
@@ -21125,7 +21370,7 @@
           <a:bodyPr/>
           <a:lstStyle/>
           <a:p>
-            <a:fld id="{B2E7DF40-EA43-448D-AAC9-8AB76A8B3E4D}" type="slidenum">
+            <a:fld id="{030EC083-285A-4D45-98F3-6009BB62C01A}" type="slidenum">
               <a:rPr lang="en-US" smtClean="0"/>
               <a:t>‹#›</a:t>
             </a:fld>
@@ -21138,7 +21383,7 @@
           <p:cNvPr id="8" name="item_1_title">
             <a:extLst>
               <a:ext uri="{FF2B5EF4-FFF2-40B4-BE49-F238E27FC236}">
-                <a16:creationId xmlns:a16="http://schemas.microsoft.com/office/drawing/2014/main" id="{CD954DFF-5092-8A35-20E7-FC52A8F36B0C}"/>
+                <a16:creationId xmlns:a16="http://schemas.microsoft.com/office/drawing/2014/main" id="{E894B60B-DDC0-A4F8-5A06-82329B23ACA8}"/>
               </a:ext>
             </a:extLst>
           </p:cNvPr>
@@ -21151,8 +21396,8 @@
         </p:nvSpPr>
         <p:spPr>
           <a:xfrm>
-            <a:off x="1198591" y="2472230"/>
-            <a:ext cx="4411418" cy="946795"/>
+            <a:off x="2228283" y="2472230"/>
+            <a:ext cx="3935555" cy="946795"/>
           </a:xfrm>
         </p:spPr>
         <p:txBody>
@@ -21188,7 +21433,7 @@
           <p:cNvPr id="9" name="item_1">
             <a:extLst>
               <a:ext uri="{FF2B5EF4-FFF2-40B4-BE49-F238E27FC236}">
-                <a16:creationId xmlns:a16="http://schemas.microsoft.com/office/drawing/2014/main" id="{2FE0925E-4F74-7191-8755-B94E5694F95F}"/>
+                <a16:creationId xmlns:a16="http://schemas.microsoft.com/office/drawing/2014/main" id="{CE9AEBE8-E859-361E-2FE8-353DA056CADB}"/>
               </a:ext>
             </a:extLst>
           </p:cNvPr>
@@ -21201,8 +21446,8 @@
         </p:nvSpPr>
         <p:spPr>
           <a:xfrm>
-            <a:off x="1198591" y="3419025"/>
-            <a:ext cx="4411418" cy="2272307"/>
+            <a:off x="2228284" y="3419025"/>
+            <a:ext cx="3935555" cy="2272307"/>
           </a:xfrm>
           <a:prstGeom prst="rect">
             <a:avLst/>
@@ -21236,7 +21481,7 @@
           <p:cNvPr id="10" name="item_2_title">
             <a:extLst>
               <a:ext uri="{FF2B5EF4-FFF2-40B4-BE49-F238E27FC236}">
-                <a16:creationId xmlns:a16="http://schemas.microsoft.com/office/drawing/2014/main" id="{27F1EC6A-216F-B561-63DE-7655612C3DE8}"/>
+                <a16:creationId xmlns:a16="http://schemas.microsoft.com/office/drawing/2014/main" id="{93600ADA-0609-AB85-472F-DC56170E4AC2}"/>
               </a:ext>
             </a:extLst>
           </p:cNvPr>
@@ -21249,8 +21494,8 @@
         </p:nvSpPr>
         <p:spPr>
           <a:xfrm>
-            <a:off x="6158321" y="2472230"/>
-            <a:ext cx="4411418" cy="946795"/>
+            <a:off x="6653004" y="2472230"/>
+            <a:ext cx="3935555" cy="946795"/>
           </a:xfrm>
           <a:prstGeom prst="rect">
             <a:avLst/>
@@ -21289,7 +21534,7 @@
           <p:cNvPr id="11" name="item_2">
             <a:extLst>
               <a:ext uri="{FF2B5EF4-FFF2-40B4-BE49-F238E27FC236}">
-                <a16:creationId xmlns:a16="http://schemas.microsoft.com/office/drawing/2014/main" id="{99360700-24DD-D888-832C-9479B8252302}"/>
+                <a16:creationId xmlns:a16="http://schemas.microsoft.com/office/drawing/2014/main" id="{235EEC07-24BF-F222-0B5D-2C52A4BCF341}"/>
               </a:ext>
             </a:extLst>
           </p:cNvPr>
@@ -21302,8 +21547,8 @@
         </p:nvSpPr>
         <p:spPr>
           <a:xfrm>
-            <a:off x="6158321" y="3419025"/>
-            <a:ext cx="4411418" cy="2272307"/>
+            <a:off x="6653004" y="3419025"/>
+            <a:ext cx="3935555" cy="2272307"/>
           </a:xfrm>
           <a:prstGeom prst="rect">
             <a:avLst/>
@@ -21337,7 +21582,7 @@
           <p:cNvPr id="12" name="source">
             <a:extLst>
               <a:ext uri="{FF2B5EF4-FFF2-40B4-BE49-F238E27FC236}">
-                <a16:creationId xmlns:a16="http://schemas.microsoft.com/office/drawing/2014/main" id="{FFBCCCC5-4C66-A765-B0EC-81B3A80BBA88}"/>
+                <a16:creationId xmlns:a16="http://schemas.microsoft.com/office/drawing/2014/main" id="{05AE656E-99B7-F684-DBC8-29739AD04639}"/>
               </a:ext>
             </a:extLst>
           </p:cNvPr>
@@ -21350,7 +21595,7 @@
         </p:nvSpPr>
         <p:spPr>
           <a:xfrm>
-            <a:off x="1024128" y="6004560"/>
+            <a:off x="2072640" y="6004560"/>
             <a:ext cx="1905000" cy="304800"/>
           </a:xfrm>
           <a:prstGeom prst="roundRect">
@@ -21392,7 +21637,7 @@
     </p:spTree>
     <p:extLst>
       <p:ext uri="{BB962C8B-B14F-4D97-AF65-F5344CB8AC3E}">
-        <p14:creationId xmlns:p14="http://schemas.microsoft.com/office/powerpoint/2010/main" val="1760148966"/>
+        <p14:creationId xmlns:p14="http://schemas.microsoft.com/office/powerpoint/2010/main" val="2993036378"/>
       </p:ext>
     </p:extLst>
   </p:cSld>
@@ -21424,7 +21669,7 @@
           <p:cNvPr id="7" name="creative_background">
             <a:extLst>
               <a:ext uri="{FF2B5EF4-FFF2-40B4-BE49-F238E27FC236}">
-                <a16:creationId xmlns:a16="http://schemas.microsoft.com/office/drawing/2014/main" id="{90EF4AE0-60BF-C42A-D633-7FBDEA9F54A7}"/>
+                <a16:creationId xmlns:a16="http://schemas.microsoft.com/office/drawing/2014/main" id="{8411B4D7-0363-4EFA-1E31-E8023FC4F0AE}"/>
               </a:ext>
             </a:extLst>
           </p:cNvPr>
@@ -21465,7 +21710,12 @@
             <p:ph type="title"/>
           </p:nvPr>
         </p:nvSpPr>
-        <p:spPr/>
+        <p:spPr>
+          <a:xfrm>
+            <a:off x="2072640" y="585216"/>
+            <a:ext cx="8674100" cy="1499616"/>
+          </a:xfrm>
+        </p:spPr>
         <p:txBody>
           <a:bodyPr/>
           <a:lstStyle>
@@ -21492,12 +21742,17 @@
             <p:ph type="dt" sz="half" idx="10"/>
           </p:nvPr>
         </p:nvSpPr>
-        <p:spPr/>
+        <p:spPr>
+          <a:xfrm>
+            <a:off x="2072640" y="6470704"/>
+            <a:ext cx="1104900" cy="274320"/>
+          </a:xfrm>
+        </p:spPr>
         <p:txBody>
           <a:bodyPr/>
           <a:lstStyle/>
           <a:p>
-            <a:fld id="{0C2FB128-6CE9-48CA-A63B-D694A7BBCE3E}" type="datetimeFigureOut">
+            <a:fld id="{D8887631-421A-4B90-81F4-114CAE3EC1BA}" type="datetimeFigureOut">
               <a:rPr lang="en-US" smtClean="0"/>
               <a:t>10/3/2026</a:t>
             </a:fld>
@@ -21539,7 +21794,7 @@
           <a:bodyPr/>
           <a:lstStyle/>
           <a:p>
-            <a:fld id="{B2E7DF40-EA43-448D-AAC9-8AB76A8B3E4D}" type="slidenum">
+            <a:fld id="{030EC083-285A-4D45-98F3-6009BB62C01A}" type="slidenum">
               <a:rPr lang="en-US" smtClean="0"/>
               <a:t>‹#›</a:t>
             </a:fld>
@@ -21552,7 +21807,7 @@
           <p:cNvPr id="8" name="chart">
             <a:extLst>
               <a:ext uri="{FF2B5EF4-FFF2-40B4-BE49-F238E27FC236}">
-                <a16:creationId xmlns:a16="http://schemas.microsoft.com/office/drawing/2014/main" id="{7C1A0484-24D9-6A55-F125-128EF10F4815}"/>
+                <a16:creationId xmlns:a16="http://schemas.microsoft.com/office/drawing/2014/main" id="{CB244A70-8F9A-E0A8-E9CB-B730ADB84527}"/>
               </a:ext>
             </a:extLst>
           </p:cNvPr>
@@ -21565,8 +21820,8 @@
         </p:nvSpPr>
         <p:spPr>
           <a:xfrm>
-            <a:off x="1024128" y="2286000"/>
-            <a:ext cx="6804051" cy="3591560"/>
+            <a:off x="2072640" y="2286000"/>
+            <a:ext cx="6070093" cy="3591560"/>
           </a:xfrm>
         </p:spPr>
         <p:txBody>
@@ -21582,7 +21837,7 @@
           <p:cNvPr id="9" name="body">
             <a:extLst>
               <a:ext uri="{FF2B5EF4-FFF2-40B4-BE49-F238E27FC236}">
-                <a16:creationId xmlns:a16="http://schemas.microsoft.com/office/drawing/2014/main" id="{9F6C1CE3-7171-41A9-3789-2A5F4D873EB6}"/>
+                <a16:creationId xmlns:a16="http://schemas.microsoft.com/office/drawing/2014/main" id="{D30D998D-1B13-E103-D75F-85C4247B0AE6}"/>
               </a:ext>
             </a:extLst>
           </p:cNvPr>
@@ -21595,8 +21850,8 @@
         </p:nvSpPr>
         <p:spPr>
           <a:xfrm>
-            <a:off x="8216983" y="2429663"/>
-            <a:ext cx="2527219" cy="3304235"/>
+            <a:off x="8489596" y="2429663"/>
+            <a:ext cx="2254606" cy="3304235"/>
           </a:xfrm>
           <a:prstGeom prst="rect">
             <a:avLst/>
@@ -21625,7 +21880,7 @@
           <p:cNvPr id="10" name="source">
             <a:extLst>
               <a:ext uri="{FF2B5EF4-FFF2-40B4-BE49-F238E27FC236}">
-                <a16:creationId xmlns:a16="http://schemas.microsoft.com/office/drawing/2014/main" id="{A394E1D1-37C1-D577-D3D8-81220E4303D5}"/>
+                <a16:creationId xmlns:a16="http://schemas.microsoft.com/office/drawing/2014/main" id="{014B31B5-2444-390F-7A94-25F6E8B922E4}"/>
               </a:ext>
             </a:extLst>
           </p:cNvPr>
@@ -21638,7 +21893,7 @@
         </p:nvSpPr>
         <p:spPr>
           <a:xfrm>
-            <a:off x="1024128" y="6004560"/>
+            <a:off x="2072640" y="6004560"/>
             <a:ext cx="1905000" cy="304800"/>
           </a:xfrm>
           <a:prstGeom prst="roundRect">
@@ -21680,7 +21935,7 @@
     </p:spTree>
     <p:extLst>
       <p:ext uri="{BB962C8B-B14F-4D97-AF65-F5344CB8AC3E}">
-        <p14:creationId xmlns:p14="http://schemas.microsoft.com/office/powerpoint/2010/main" val="660748780"/>
+        <p14:creationId xmlns:p14="http://schemas.microsoft.com/office/powerpoint/2010/main" val="529492294"/>
       </p:ext>
     </p:extLst>
   </p:cSld>
@@ -21712,7 +21967,7 @@
           <p:cNvPr id="7" name="creative_background">
             <a:extLst>
               <a:ext uri="{FF2B5EF4-FFF2-40B4-BE49-F238E27FC236}">
-                <a16:creationId xmlns:a16="http://schemas.microsoft.com/office/drawing/2014/main" id="{51C0436E-45E7-06C1-0349-8794D203AA14}"/>
+                <a16:creationId xmlns:a16="http://schemas.microsoft.com/office/drawing/2014/main" id="{0E48BE95-CD0F-EE94-0BB0-63BA620E5B07}"/>
               </a:ext>
             </a:extLst>
           </p:cNvPr>
@@ -21753,7 +22008,12 @@
             <p:ph type="title"/>
           </p:nvPr>
         </p:nvSpPr>
-        <p:spPr/>
+        <p:spPr>
+          <a:xfrm>
+            <a:off x="2072640" y="585216"/>
+            <a:ext cx="8674100" cy="1499616"/>
+          </a:xfrm>
+        </p:spPr>
         <p:txBody>
           <a:bodyPr/>
           <a:lstStyle>
@@ -21780,12 +22040,17 @@
             <p:ph type="dt" sz="half" idx="10"/>
           </p:nvPr>
         </p:nvSpPr>
-        <p:spPr/>
+        <p:spPr>
+          <a:xfrm>
+            <a:off x="2072640" y="6470704"/>
+            <a:ext cx="1104900" cy="274320"/>
+          </a:xfrm>
+        </p:spPr>
         <p:txBody>
           <a:bodyPr/>
           <a:lstStyle/>
           <a:p>
-            <a:fld id="{0C2FB128-6CE9-48CA-A63B-D694A7BBCE3E}" type="datetimeFigureOut">
+            <a:fld id="{D8887631-421A-4B90-81F4-114CAE3EC1BA}" type="datetimeFigureOut">
               <a:rPr lang="en-US" smtClean="0"/>
               <a:t>10/3/2026</a:t>
             </a:fld>
@@ -21827,7 +22092,7 @@
           <a:bodyPr/>
           <a:lstStyle/>
           <a:p>
-            <a:fld id="{B2E7DF40-EA43-448D-AAC9-8AB76A8B3E4D}" type="slidenum">
+            <a:fld id="{030EC083-285A-4D45-98F3-6009BB62C01A}" type="slidenum">
               <a:rPr lang="en-US" smtClean="0"/>
               <a:t>‹#›</a:t>
             </a:fld>
@@ -21840,7 +22105,7 @@
           <p:cNvPr id="8" name="item_1_title">
             <a:extLst>
               <a:ext uri="{FF2B5EF4-FFF2-40B4-BE49-F238E27FC236}">
-                <a16:creationId xmlns:a16="http://schemas.microsoft.com/office/drawing/2014/main" id="{56DB6B49-2839-E958-3471-C517C79400E4}"/>
+                <a16:creationId xmlns:a16="http://schemas.microsoft.com/office/drawing/2014/main" id="{D1E61CE4-D569-D1D0-EE7F-E92BDADA46C5}"/>
               </a:ext>
             </a:extLst>
           </p:cNvPr>
@@ -21853,8 +22118,8 @@
         </p:nvSpPr>
         <p:spPr>
           <a:xfrm>
-            <a:off x="1198591" y="2472230"/>
-            <a:ext cx="4411418" cy="387325"/>
+            <a:off x="2228283" y="2472230"/>
+            <a:ext cx="3935555" cy="387325"/>
           </a:xfrm>
         </p:spPr>
         <p:txBody>
@@ -21890,7 +22155,7 @@
           <p:cNvPr id="9" name="item_1">
             <a:extLst>
               <a:ext uri="{FF2B5EF4-FFF2-40B4-BE49-F238E27FC236}">
-                <a16:creationId xmlns:a16="http://schemas.microsoft.com/office/drawing/2014/main" id="{D08B8B26-609F-69A2-0CD3-5AAA3B186807}"/>
+                <a16:creationId xmlns:a16="http://schemas.microsoft.com/office/drawing/2014/main" id="{178F38AC-3120-E137-82B6-BBFF26332DDE}"/>
               </a:ext>
             </a:extLst>
           </p:cNvPr>
@@ -21903,8 +22168,8 @@
         </p:nvSpPr>
         <p:spPr>
           <a:xfrm>
-            <a:off x="1198591" y="2859554"/>
-            <a:ext cx="4411418" cy="929580"/>
+            <a:off x="2228284" y="2859554"/>
+            <a:ext cx="3935555" cy="929580"/>
           </a:xfrm>
           <a:prstGeom prst="rect">
             <a:avLst/>
@@ -21938,7 +22203,7 @@
           <p:cNvPr id="10" name="item_2_title">
             <a:extLst>
               <a:ext uri="{FF2B5EF4-FFF2-40B4-BE49-F238E27FC236}">
-                <a16:creationId xmlns:a16="http://schemas.microsoft.com/office/drawing/2014/main" id="{0178503A-4214-A898-EE7A-F5997030A983}"/>
+                <a16:creationId xmlns:a16="http://schemas.microsoft.com/office/drawing/2014/main" id="{CD955452-4398-FE3A-11D3-244CB2659014}"/>
               </a:ext>
             </a:extLst>
           </p:cNvPr>
@@ -21951,8 +22216,8 @@
         </p:nvSpPr>
         <p:spPr>
           <a:xfrm>
-            <a:off x="6158321" y="2472230"/>
-            <a:ext cx="4411418" cy="387325"/>
+            <a:off x="6653004" y="2472230"/>
+            <a:ext cx="3935555" cy="387325"/>
           </a:xfrm>
           <a:prstGeom prst="rect">
             <a:avLst/>
@@ -21991,7 +22256,7 @@
           <p:cNvPr id="11" name="item_2">
             <a:extLst>
               <a:ext uri="{FF2B5EF4-FFF2-40B4-BE49-F238E27FC236}">
-                <a16:creationId xmlns:a16="http://schemas.microsoft.com/office/drawing/2014/main" id="{43DEC6F6-46E0-6DC9-01E5-C0E45C471632}"/>
+                <a16:creationId xmlns:a16="http://schemas.microsoft.com/office/drawing/2014/main" id="{6C451228-1F80-A10D-6BFE-CE4E6DE1EE6B}"/>
               </a:ext>
             </a:extLst>
           </p:cNvPr>
@@ -22004,8 +22269,8 @@
         </p:nvSpPr>
         <p:spPr>
           <a:xfrm>
-            <a:off x="6158321" y="2859554"/>
-            <a:ext cx="4411418" cy="929580"/>
+            <a:off x="6653004" y="2859554"/>
+            <a:ext cx="3935555" cy="929580"/>
           </a:xfrm>
           <a:prstGeom prst="rect">
             <a:avLst/>
@@ -22039,7 +22304,7 @@
           <p:cNvPr id="12" name="item_3_title">
             <a:extLst>
               <a:ext uri="{FF2B5EF4-FFF2-40B4-BE49-F238E27FC236}">
-                <a16:creationId xmlns:a16="http://schemas.microsoft.com/office/drawing/2014/main" id="{9DADD5DE-008C-AB11-839D-C3016AE1D715}"/>
+                <a16:creationId xmlns:a16="http://schemas.microsoft.com/office/drawing/2014/main" id="{761137DC-8BCF-3D1B-8775-6AA369EE9BC5}"/>
               </a:ext>
             </a:extLst>
           </p:cNvPr>
@@ -22052,8 +22317,8 @@
         </p:nvSpPr>
         <p:spPr>
           <a:xfrm>
-            <a:off x="1198591" y="4374427"/>
-            <a:ext cx="4411418" cy="387325"/>
+            <a:off x="2228284" y="4374427"/>
+            <a:ext cx="3935555" cy="387325"/>
           </a:xfrm>
           <a:prstGeom prst="rect">
             <a:avLst/>
@@ -22092,7 +22357,7 @@
           <p:cNvPr id="13" name="item_3">
             <a:extLst>
               <a:ext uri="{FF2B5EF4-FFF2-40B4-BE49-F238E27FC236}">
-                <a16:creationId xmlns:a16="http://schemas.microsoft.com/office/drawing/2014/main" id="{C72602F9-C722-7A6D-A45E-AEAC5680B1B2}"/>
+                <a16:creationId xmlns:a16="http://schemas.microsoft.com/office/drawing/2014/main" id="{F6F7C13C-952A-3EA5-E65E-FC2AAC12BE50}"/>
               </a:ext>
             </a:extLst>
           </p:cNvPr>
@@ -22105,8 +22370,8 @@
         </p:nvSpPr>
         <p:spPr>
           <a:xfrm>
-            <a:off x="1198591" y="4761750"/>
-            <a:ext cx="4411418" cy="929580"/>
+            <a:off x="2228284" y="4761750"/>
+            <a:ext cx="3935555" cy="929580"/>
           </a:xfrm>
           <a:prstGeom prst="rect">
             <a:avLst/>
@@ -22140,7 +22405,7 @@
           <p:cNvPr id="14" name="item_4_title">
             <a:extLst>
               <a:ext uri="{FF2B5EF4-FFF2-40B4-BE49-F238E27FC236}">
-                <a16:creationId xmlns:a16="http://schemas.microsoft.com/office/drawing/2014/main" id="{B57ED4E9-9537-03B8-0701-70D6FCD29ACB}"/>
+                <a16:creationId xmlns:a16="http://schemas.microsoft.com/office/drawing/2014/main" id="{3F973C8E-7951-3D09-A422-D1CF1BBFA890}"/>
               </a:ext>
             </a:extLst>
           </p:cNvPr>
@@ -22153,8 +22418,8 @@
         </p:nvSpPr>
         <p:spPr>
           <a:xfrm>
-            <a:off x="6158321" y="4374427"/>
-            <a:ext cx="4411418" cy="387325"/>
+            <a:off x="6653004" y="4374427"/>
+            <a:ext cx="3935555" cy="387325"/>
           </a:xfrm>
           <a:prstGeom prst="rect">
             <a:avLst/>
@@ -22193,7 +22458,7 @@
           <p:cNvPr id="15" name="item_4">
             <a:extLst>
               <a:ext uri="{FF2B5EF4-FFF2-40B4-BE49-F238E27FC236}">
-                <a16:creationId xmlns:a16="http://schemas.microsoft.com/office/drawing/2014/main" id="{CF82C050-6198-F4E9-FEBB-481C35711F79}"/>
+                <a16:creationId xmlns:a16="http://schemas.microsoft.com/office/drawing/2014/main" id="{05A476D9-0A2C-AA1F-FCE2-0064574F254B}"/>
               </a:ext>
             </a:extLst>
           </p:cNvPr>
@@ -22206,8 +22471,8 @@
         </p:nvSpPr>
         <p:spPr>
           <a:xfrm>
-            <a:off x="6158321" y="4761750"/>
-            <a:ext cx="4411418" cy="929580"/>
+            <a:off x="6653004" y="4761750"/>
+            <a:ext cx="3935555" cy="929580"/>
           </a:xfrm>
           <a:prstGeom prst="rect">
             <a:avLst/>
@@ -22241,7 +22506,7 @@
           <p:cNvPr id="16" name="source">
             <a:extLst>
               <a:ext uri="{FF2B5EF4-FFF2-40B4-BE49-F238E27FC236}">
-                <a16:creationId xmlns:a16="http://schemas.microsoft.com/office/drawing/2014/main" id="{81EDE7F3-CA0D-079F-D534-D0ABBC7D2AE4}"/>
+                <a16:creationId xmlns:a16="http://schemas.microsoft.com/office/drawing/2014/main" id="{99CF9875-FC8A-5035-C75A-4B4553A09176}"/>
               </a:ext>
             </a:extLst>
           </p:cNvPr>
@@ -22254,7 +22519,7 @@
         </p:nvSpPr>
         <p:spPr>
           <a:xfrm>
-            <a:off x="1024128" y="6004560"/>
+            <a:off x="2072640" y="6004560"/>
             <a:ext cx="1905000" cy="304800"/>
           </a:xfrm>
           <a:prstGeom prst="roundRect">
@@ -22296,7 +22561,7 @@
     </p:spTree>
     <p:extLst>
       <p:ext uri="{BB962C8B-B14F-4D97-AF65-F5344CB8AC3E}">
-        <p14:creationId xmlns:p14="http://schemas.microsoft.com/office/powerpoint/2010/main" val="1078164853"/>
+        <p14:creationId xmlns:p14="http://schemas.microsoft.com/office/powerpoint/2010/main" val="2240167386"/>
       </p:ext>
     </p:extLst>
   </p:cSld>
@@ -22333,7 +22598,7 @@
           <p:cNvPr id="9" name="creative_background_master">
             <a:extLst>
               <a:ext uri="{FF2B5EF4-FFF2-40B4-BE49-F238E27FC236}">
-                <a16:creationId xmlns:a16="http://schemas.microsoft.com/office/drawing/2014/main" id="{15F82195-7427-CF2A-D318-942C95C55AB3}"/>
+                <a16:creationId xmlns:a16="http://schemas.microsoft.com/office/drawing/2014/main" id="{68705B89-BF4F-50BD-631D-28BB557D96C4}"/>
               </a:ext>
             </a:extLst>
           </p:cNvPr>
@@ -22494,7 +22759,7 @@
             </a:lvl1pPr>
           </a:lstStyle>
           <a:p>
-            <a:fld id="{0C2FB128-6CE9-48CA-A63B-D694A7BBCE3E}" type="datetimeFigureOut">
+            <a:fld id="{D8887631-421A-4B90-81F4-114CAE3EC1BA}" type="datetimeFigureOut">
               <a:rPr lang="en-US" smtClean="0"/>
               <a:t>10/3/2026</a:t>
             </a:fld>
@@ -22576,7 +22841,7 @@
             </a:lvl1pPr>
           </a:lstStyle>
           <a:p>
-            <a:fld id="{B2E7DF40-EA43-448D-AAC9-8AB76A8B3E4D}" type="slidenum">
+            <a:fld id="{030EC083-285A-4D45-98F3-6009BB62C01A}" type="slidenum">
               <a:rPr lang="en-US" smtClean="0"/>
               <a:t>‹#›</a:t>
             </a:fld>
@@ -22587,7 +22852,7 @@
     </p:spTree>
     <p:extLst>
       <p:ext uri="{BB962C8B-B14F-4D97-AF65-F5344CB8AC3E}">
-        <p14:creationId xmlns:p14="http://schemas.microsoft.com/office/powerpoint/2010/main" val="2708016062"/>
+        <p14:creationId xmlns:p14="http://schemas.microsoft.com/office/powerpoint/2010/main" val="1808351535"/>
       </p:ext>
     </p:extLst>
   </p:cSld>
@@ -22980,10 +23245,10 @@
         <a:srgbClr val="E8E8E7"/>
       </a:lt2>
       <a:accent1>
-        <a:srgbClr val="936916"/>
+        <a:srgbClr val="69405F"/>
       </a:accent1>
       <a:accent2>
-        <a:srgbClr val="69405F"/>
+        <a:srgbClr val="BB830F"/>
       </a:accent2>
       <a:accent3>
         <a:srgbClr val="564D53"/>
@@ -22992,7 +23257,7 @@
         <a:srgbClr val="69405F"/>
       </a:accent4>
       <a:accent5>
-        <a:srgbClr val="936916"/>
+        <a:srgbClr val="69405F"/>
       </a:accent5>
       <a:accent6>
         <a:srgbClr val="564D53"/>

--- a/design/templates/mashrabiya-plum/template.pptx
+++ b/design/templates/mashrabiya-plum/template.pptx
@@ -126,7 +126,7 @@
           <p:cNvPr id="9" name="creative_background">
             <a:extLst>
               <a:ext uri="{FF2B5EF4-FFF2-40B4-BE49-F238E27FC236}">
-                <a16:creationId xmlns:a16="http://schemas.microsoft.com/office/drawing/2014/main" id="{77D2835E-FC2B-E1F1-6F9A-63310D67BC4A}"/>
+                <a16:creationId xmlns:a16="http://schemas.microsoft.com/office/drawing/2014/main" id="{DBD5E9D7-74F8-6AC8-6FF0-00698562B865}"/>
               </a:ext>
             </a:extLst>
           </p:cNvPr>
@@ -295,9 +295,9 @@
             </a:lvl1pPr>
           </a:lstStyle>
           <a:p>
-            <a:fld id="{D8887631-421A-4B90-81F4-114CAE3EC1BA}" type="datetimeFigureOut">
+            <a:fld id="{6456BABC-F92F-414F-A0E9-B90674473BDD}" type="datetimeFigureOut">
               <a:rPr lang="en-US" smtClean="0"/>
-              <a:t>10/3/2026</a:t>
+              <a:t>10/4/2026</a:t>
             </a:fld>
             <a:endParaRPr lang="en-US"/>
           </a:p>
@@ -337,7 +337,7 @@
           <a:bodyPr/>
           <a:lstStyle/>
           <a:p>
-            <a:fld id="{030EC083-285A-4D45-98F3-6009BB62C01A}" type="slidenum">
+            <a:fld id="{34BF67FC-BCB9-49F6-958A-F6E3E81E1F27}" type="slidenum">
               <a:rPr lang="en-US" smtClean="0"/>
               <a:t>‹#›</a:t>
             </a:fld>
@@ -348,7 +348,7 @@
     </p:spTree>
     <p:extLst>
       <p:ext uri="{BB962C8B-B14F-4D97-AF65-F5344CB8AC3E}">
-        <p14:creationId xmlns:p14="http://schemas.microsoft.com/office/powerpoint/2010/main" val="100217875"/>
+        <p14:creationId xmlns:p14="http://schemas.microsoft.com/office/powerpoint/2010/main" val="1439663423"/>
       </p:ext>
     </p:extLst>
   </p:cSld>
@@ -380,7 +380,7 @@
           <p:cNvPr id="7" name="creative_background">
             <a:extLst>
               <a:ext uri="{FF2B5EF4-FFF2-40B4-BE49-F238E27FC236}">
-                <a16:creationId xmlns:a16="http://schemas.microsoft.com/office/drawing/2014/main" id="{BA6618F1-156A-B62E-BDD1-427D2945B233}"/>
+                <a16:creationId xmlns:a16="http://schemas.microsoft.com/office/drawing/2014/main" id="{E11599C3-6AF3-EF06-B7D9-D618255C6386}"/>
               </a:ext>
             </a:extLst>
           </p:cNvPr>
@@ -463,9 +463,9 @@
           <a:bodyPr/>
           <a:lstStyle/>
           <a:p>
-            <a:fld id="{D8887631-421A-4B90-81F4-114CAE3EC1BA}" type="datetimeFigureOut">
+            <a:fld id="{6456BABC-F92F-414F-A0E9-B90674473BDD}" type="datetimeFigureOut">
               <a:rPr lang="en-US" smtClean="0"/>
-              <a:t>10/3/2026</a:t>
+              <a:t>10/4/2026</a:t>
             </a:fld>
             <a:endParaRPr lang="en-US"/>
           </a:p>
@@ -505,7 +505,7 @@
           <a:bodyPr/>
           <a:lstStyle/>
           <a:p>
-            <a:fld id="{030EC083-285A-4D45-98F3-6009BB62C01A}" type="slidenum">
+            <a:fld id="{34BF67FC-BCB9-49F6-958A-F6E3E81E1F27}" type="slidenum">
               <a:rPr lang="en-US" smtClean="0"/>
               <a:t>‹#›</a:t>
             </a:fld>
@@ -518,7 +518,7 @@
           <p:cNvPr id="8" name="body">
             <a:extLst>
               <a:ext uri="{FF2B5EF4-FFF2-40B4-BE49-F238E27FC236}">
-                <a16:creationId xmlns:a16="http://schemas.microsoft.com/office/drawing/2014/main" id="{333598C9-BB93-8914-47D9-0A1563A0055D}"/>
+                <a16:creationId xmlns:a16="http://schemas.microsoft.com/office/drawing/2014/main" id="{7EE1D09E-A1B6-8259-16AA-1030594A0CF7}"/>
               </a:ext>
             </a:extLst>
           </p:cNvPr>
@@ -558,7 +558,7 @@
           <p:cNvPr id="9" name="source">
             <a:extLst>
               <a:ext uri="{FF2B5EF4-FFF2-40B4-BE49-F238E27FC236}">
-                <a16:creationId xmlns:a16="http://schemas.microsoft.com/office/drawing/2014/main" id="{32C7ED47-6A7E-BA74-99F8-5DC73ECC028A}"/>
+                <a16:creationId xmlns:a16="http://schemas.microsoft.com/office/drawing/2014/main" id="{AB26E557-9167-BD58-CFB5-4DA2F7D4C963}"/>
               </a:ext>
             </a:extLst>
           </p:cNvPr>
@@ -613,7 +613,7 @@
     </p:spTree>
     <p:extLst>
       <p:ext uri="{BB962C8B-B14F-4D97-AF65-F5344CB8AC3E}">
-        <p14:creationId xmlns:p14="http://schemas.microsoft.com/office/powerpoint/2010/main" val="4240176124"/>
+        <p14:creationId xmlns:p14="http://schemas.microsoft.com/office/powerpoint/2010/main" val="1220510116"/>
       </p:ext>
     </p:extLst>
   </p:cSld>
@@ -645,7 +645,7 @@
           <p:cNvPr id="7" name="creative_background">
             <a:extLst>
               <a:ext uri="{FF2B5EF4-FFF2-40B4-BE49-F238E27FC236}">
-                <a16:creationId xmlns:a16="http://schemas.microsoft.com/office/drawing/2014/main" id="{7D5C79C4-A3E7-ECA4-4147-756B3C5589A8}"/>
+                <a16:creationId xmlns:a16="http://schemas.microsoft.com/office/drawing/2014/main" id="{C3DAA16B-104C-CF2E-C389-E54F3A392A95}"/>
               </a:ext>
             </a:extLst>
           </p:cNvPr>
@@ -728,9 +728,9 @@
           <a:bodyPr/>
           <a:lstStyle/>
           <a:p>
-            <a:fld id="{D8887631-421A-4B90-81F4-114CAE3EC1BA}" type="datetimeFigureOut">
+            <a:fld id="{6456BABC-F92F-414F-A0E9-B90674473BDD}" type="datetimeFigureOut">
               <a:rPr lang="en-US" smtClean="0"/>
-              <a:t>10/3/2026</a:t>
+              <a:t>10/4/2026</a:t>
             </a:fld>
             <a:endParaRPr lang="en-US"/>
           </a:p>
@@ -770,7 +770,7 @@
           <a:bodyPr/>
           <a:lstStyle/>
           <a:p>
-            <a:fld id="{030EC083-285A-4D45-98F3-6009BB62C01A}" type="slidenum">
+            <a:fld id="{34BF67FC-BCB9-49F6-958A-F6E3E81E1F27}" type="slidenum">
               <a:rPr lang="en-US" smtClean="0"/>
               <a:t>‹#›</a:t>
             </a:fld>
@@ -783,7 +783,7 @@
           <p:cNvPr id="8" name="body">
             <a:extLst>
               <a:ext uri="{FF2B5EF4-FFF2-40B4-BE49-F238E27FC236}">
-                <a16:creationId xmlns:a16="http://schemas.microsoft.com/office/drawing/2014/main" id="{E9661C39-4E99-944C-543D-3CEB5A515D87}"/>
+                <a16:creationId xmlns:a16="http://schemas.microsoft.com/office/drawing/2014/main" id="{867898FA-793F-40CD-05B4-D64470FA0A9A}"/>
               </a:ext>
             </a:extLst>
           </p:cNvPr>
@@ -826,7 +826,7 @@
     </p:spTree>
     <p:extLst>
       <p:ext uri="{BB962C8B-B14F-4D97-AF65-F5344CB8AC3E}">
-        <p14:creationId xmlns:p14="http://schemas.microsoft.com/office/powerpoint/2010/main" val="1215376158"/>
+        <p14:creationId xmlns:p14="http://schemas.microsoft.com/office/powerpoint/2010/main" val="1209298350"/>
       </p:ext>
     </p:extLst>
   </p:cSld>
@@ -902,7 +902,7 @@
           <p:cNvPr id="6" name="section_number">
             <a:extLst>
               <a:ext uri="{FF2B5EF4-FFF2-40B4-BE49-F238E27FC236}">
-                <a16:creationId xmlns:a16="http://schemas.microsoft.com/office/drawing/2014/main" id="{176BFCD7-7F31-5FA8-C8F0-E1B9B417109F}"/>
+                <a16:creationId xmlns:a16="http://schemas.microsoft.com/office/drawing/2014/main" id="{A9A4EC60-1860-EC1D-E09B-8B50A7DE5598}"/>
               </a:ext>
             </a:extLst>
           </p:cNvPr>
@@ -955,7 +955,7 @@
           <p:cNvPr id="7" name="subtitle">
             <a:extLst>
               <a:ext uri="{FF2B5EF4-FFF2-40B4-BE49-F238E27FC236}">
-                <a16:creationId xmlns:a16="http://schemas.microsoft.com/office/drawing/2014/main" id="{BD4F2ADA-87DD-329C-B407-C55C35989366}"/>
+                <a16:creationId xmlns:a16="http://schemas.microsoft.com/office/drawing/2014/main" id="{44FC74A8-CD47-5DE2-6BF8-52520CCD9470}"/>
               </a:ext>
             </a:extLst>
           </p:cNvPr>
@@ -1007,7 +1007,7 @@
           <p:cNvPr id="8" name="pattern">
             <a:extLst>
               <a:ext uri="{FF2B5EF4-FFF2-40B4-BE49-F238E27FC236}">
-                <a16:creationId xmlns:a16="http://schemas.microsoft.com/office/drawing/2014/main" id="{D6CF40B2-4E4A-5B15-1E84-0DA42AD94313}"/>
+                <a16:creationId xmlns:a16="http://schemas.microsoft.com/office/drawing/2014/main" id="{7478DC1C-4483-B52F-8165-CF492ACDC5B1}"/>
               </a:ext>
             </a:extLst>
           </p:cNvPr>
@@ -1075,7 +1075,7 @@
           <p:cNvPr id="9" name="pattern">
             <a:extLst>
               <a:ext uri="{FF2B5EF4-FFF2-40B4-BE49-F238E27FC236}">
-                <a16:creationId xmlns:a16="http://schemas.microsoft.com/office/drawing/2014/main" id="{AFEF08B1-1674-4206-8009-41B403C36C22}"/>
+                <a16:creationId xmlns:a16="http://schemas.microsoft.com/office/drawing/2014/main" id="{74C11EA6-1AFF-814E-2710-74893F0B59A3}"/>
               </a:ext>
             </a:extLst>
           </p:cNvPr>
@@ -1143,7 +1143,7 @@
           <p:cNvPr id="10" name="pattern">
             <a:extLst>
               <a:ext uri="{FF2B5EF4-FFF2-40B4-BE49-F238E27FC236}">
-                <a16:creationId xmlns:a16="http://schemas.microsoft.com/office/drawing/2014/main" id="{9CB6F137-A85A-E13B-CF9B-B7B52EE08204}"/>
+                <a16:creationId xmlns:a16="http://schemas.microsoft.com/office/drawing/2014/main" id="{63E42845-E2BA-D321-1E1A-2378C4E700AF}"/>
               </a:ext>
             </a:extLst>
           </p:cNvPr>
@@ -1211,7 +1211,7 @@
           <p:cNvPr id="11" name="pattern">
             <a:extLst>
               <a:ext uri="{FF2B5EF4-FFF2-40B4-BE49-F238E27FC236}">
-                <a16:creationId xmlns:a16="http://schemas.microsoft.com/office/drawing/2014/main" id="{E136E921-5520-1919-0F37-770BED0342A5}"/>
+                <a16:creationId xmlns:a16="http://schemas.microsoft.com/office/drawing/2014/main" id="{4BECEB1A-C9FD-4D62-B73D-9F4D1091B2D5}"/>
               </a:ext>
             </a:extLst>
           </p:cNvPr>
@@ -1279,7 +1279,7 @@
           <p:cNvPr id="12" name="pattern">
             <a:extLst>
               <a:ext uri="{FF2B5EF4-FFF2-40B4-BE49-F238E27FC236}">
-                <a16:creationId xmlns:a16="http://schemas.microsoft.com/office/drawing/2014/main" id="{80DAB25A-4F48-7C19-4F02-2AA5C798E601}"/>
+                <a16:creationId xmlns:a16="http://schemas.microsoft.com/office/drawing/2014/main" id="{2CA6F656-8FDA-850C-7782-61ED24A4CE87}"/>
               </a:ext>
             </a:extLst>
           </p:cNvPr>
@@ -1347,7 +1347,7 @@
           <p:cNvPr id="13" name="pattern">
             <a:extLst>
               <a:ext uri="{FF2B5EF4-FFF2-40B4-BE49-F238E27FC236}">
-                <a16:creationId xmlns:a16="http://schemas.microsoft.com/office/drawing/2014/main" id="{F11C20D3-2070-B784-04FD-05494EB95804}"/>
+                <a16:creationId xmlns:a16="http://schemas.microsoft.com/office/drawing/2014/main" id="{3ED8665D-0BEB-96FB-213D-F25BE4A6D6B0}"/>
               </a:ext>
             </a:extLst>
           </p:cNvPr>
@@ -1415,7 +1415,7 @@
           <p:cNvPr id="14" name="pattern">
             <a:extLst>
               <a:ext uri="{FF2B5EF4-FFF2-40B4-BE49-F238E27FC236}">
-                <a16:creationId xmlns:a16="http://schemas.microsoft.com/office/drawing/2014/main" id="{5115E2E4-5999-8E8B-B693-84D06F4AA569}"/>
+                <a16:creationId xmlns:a16="http://schemas.microsoft.com/office/drawing/2014/main" id="{FBAB019C-60C7-E598-521A-BA799D430E97}"/>
               </a:ext>
             </a:extLst>
           </p:cNvPr>
@@ -1483,7 +1483,7 @@
           <p:cNvPr id="15" name="pattern">
             <a:extLst>
               <a:ext uri="{FF2B5EF4-FFF2-40B4-BE49-F238E27FC236}">
-                <a16:creationId xmlns:a16="http://schemas.microsoft.com/office/drawing/2014/main" id="{5D8AF617-4637-9EC4-A77E-DF152C80BCE3}"/>
+                <a16:creationId xmlns:a16="http://schemas.microsoft.com/office/drawing/2014/main" id="{2CE0306D-09FA-1F4A-2EC4-74D216BCE86B}"/>
               </a:ext>
             </a:extLst>
           </p:cNvPr>
@@ -1551,7 +1551,7 @@
           <p:cNvPr id="16" name="pattern">
             <a:extLst>
               <a:ext uri="{FF2B5EF4-FFF2-40B4-BE49-F238E27FC236}">
-                <a16:creationId xmlns:a16="http://schemas.microsoft.com/office/drawing/2014/main" id="{E7AAA5B2-8BA3-2615-9CC0-1F022F592527}"/>
+                <a16:creationId xmlns:a16="http://schemas.microsoft.com/office/drawing/2014/main" id="{529AF87C-0A43-5674-3608-78862F337826}"/>
               </a:ext>
             </a:extLst>
           </p:cNvPr>
@@ -1619,7 +1619,7 @@
           <p:cNvPr id="17" name="pattern">
             <a:extLst>
               <a:ext uri="{FF2B5EF4-FFF2-40B4-BE49-F238E27FC236}">
-                <a16:creationId xmlns:a16="http://schemas.microsoft.com/office/drawing/2014/main" id="{490DC36C-9C34-EF2C-55E1-A879AA9DBB10}"/>
+                <a16:creationId xmlns:a16="http://schemas.microsoft.com/office/drawing/2014/main" id="{31A96CD1-B343-03C4-66B4-D34DCB4F75B7}"/>
               </a:ext>
             </a:extLst>
           </p:cNvPr>
@@ -1687,7 +1687,7 @@
           <p:cNvPr id="18" name="pattern">
             <a:extLst>
               <a:ext uri="{FF2B5EF4-FFF2-40B4-BE49-F238E27FC236}">
-                <a16:creationId xmlns:a16="http://schemas.microsoft.com/office/drawing/2014/main" id="{A19798C1-0BDD-9B64-7A9C-B06C689A245F}"/>
+                <a16:creationId xmlns:a16="http://schemas.microsoft.com/office/drawing/2014/main" id="{C505C2A9-F222-E22C-CC68-ADD8C375301B}"/>
               </a:ext>
             </a:extLst>
           </p:cNvPr>
@@ -1755,7 +1755,7 @@
           <p:cNvPr id="19" name="pattern">
             <a:extLst>
               <a:ext uri="{FF2B5EF4-FFF2-40B4-BE49-F238E27FC236}">
-                <a16:creationId xmlns:a16="http://schemas.microsoft.com/office/drawing/2014/main" id="{610E8778-5BB7-A9D3-61FB-7E0B05460433}"/>
+                <a16:creationId xmlns:a16="http://schemas.microsoft.com/office/drawing/2014/main" id="{A001DA33-4290-D3FE-E949-9C2E3BFA3F43}"/>
               </a:ext>
             </a:extLst>
           </p:cNvPr>
@@ -1823,7 +1823,7 @@
           <p:cNvPr id="20" name="pattern">
             <a:extLst>
               <a:ext uri="{FF2B5EF4-FFF2-40B4-BE49-F238E27FC236}">
-                <a16:creationId xmlns:a16="http://schemas.microsoft.com/office/drawing/2014/main" id="{28618727-EFFD-3DFF-8F19-4715613818BC}"/>
+                <a16:creationId xmlns:a16="http://schemas.microsoft.com/office/drawing/2014/main" id="{FD4BCA88-E145-2FD3-2E88-C9C44E44F1BA}"/>
               </a:ext>
             </a:extLst>
           </p:cNvPr>
@@ -1891,7 +1891,7 @@
           <p:cNvPr id="21" name="pattern">
             <a:extLst>
               <a:ext uri="{FF2B5EF4-FFF2-40B4-BE49-F238E27FC236}">
-                <a16:creationId xmlns:a16="http://schemas.microsoft.com/office/drawing/2014/main" id="{E21713FD-E10C-A9A7-B17A-610580E29F07}"/>
+                <a16:creationId xmlns:a16="http://schemas.microsoft.com/office/drawing/2014/main" id="{2675AE7B-8009-62EA-4EA8-85C235F26347}"/>
               </a:ext>
             </a:extLst>
           </p:cNvPr>
@@ -1959,7 +1959,7 @@
           <p:cNvPr id="22" name="pattern">
             <a:extLst>
               <a:ext uri="{FF2B5EF4-FFF2-40B4-BE49-F238E27FC236}">
-                <a16:creationId xmlns:a16="http://schemas.microsoft.com/office/drawing/2014/main" id="{C106F1CD-EF4F-6E52-2A1D-325A8D462F73}"/>
+                <a16:creationId xmlns:a16="http://schemas.microsoft.com/office/drawing/2014/main" id="{05F6C851-E21D-BC52-EEC1-4FAC1B21DE89}"/>
               </a:ext>
             </a:extLst>
           </p:cNvPr>
@@ -2027,7 +2027,7 @@
           <p:cNvPr id="23" name="pattern">
             <a:extLst>
               <a:ext uri="{FF2B5EF4-FFF2-40B4-BE49-F238E27FC236}">
-                <a16:creationId xmlns:a16="http://schemas.microsoft.com/office/drawing/2014/main" id="{120B35A7-586E-253D-8557-D07C4B868275}"/>
+                <a16:creationId xmlns:a16="http://schemas.microsoft.com/office/drawing/2014/main" id="{9329F9D1-A434-E439-B7E7-DDC3008E44B0}"/>
               </a:ext>
             </a:extLst>
           </p:cNvPr>
@@ -2095,7 +2095,7 @@
           <p:cNvPr id="24" name="pattern">
             <a:extLst>
               <a:ext uri="{FF2B5EF4-FFF2-40B4-BE49-F238E27FC236}">
-                <a16:creationId xmlns:a16="http://schemas.microsoft.com/office/drawing/2014/main" id="{385106DB-3D4E-491E-62C7-E8DB6CD32BBE}"/>
+                <a16:creationId xmlns:a16="http://schemas.microsoft.com/office/drawing/2014/main" id="{FFA9405D-53D5-E659-6FBF-7D1CB236868E}"/>
               </a:ext>
             </a:extLst>
           </p:cNvPr>
@@ -2163,7 +2163,7 @@
           <p:cNvPr id="25" name="pattern">
             <a:extLst>
               <a:ext uri="{FF2B5EF4-FFF2-40B4-BE49-F238E27FC236}">
-                <a16:creationId xmlns:a16="http://schemas.microsoft.com/office/drawing/2014/main" id="{21BBF887-C833-CC71-BEBE-E8C8D168B156}"/>
+                <a16:creationId xmlns:a16="http://schemas.microsoft.com/office/drawing/2014/main" id="{55BA0AE4-2056-AD0D-023D-0D2F1634442B}"/>
               </a:ext>
             </a:extLst>
           </p:cNvPr>
@@ -2231,7 +2231,7 @@
           <p:cNvPr id="26" name="pattern">
             <a:extLst>
               <a:ext uri="{FF2B5EF4-FFF2-40B4-BE49-F238E27FC236}">
-                <a16:creationId xmlns:a16="http://schemas.microsoft.com/office/drawing/2014/main" id="{71CDF262-CF13-F629-8E27-827CAB4ED9A5}"/>
+                <a16:creationId xmlns:a16="http://schemas.microsoft.com/office/drawing/2014/main" id="{4EFE9D8F-E1C4-1133-A7A3-FB2B052B21FC}"/>
               </a:ext>
             </a:extLst>
           </p:cNvPr>
@@ -2299,7 +2299,7 @@
           <p:cNvPr id="27" name="pattern">
             <a:extLst>
               <a:ext uri="{FF2B5EF4-FFF2-40B4-BE49-F238E27FC236}">
-                <a16:creationId xmlns:a16="http://schemas.microsoft.com/office/drawing/2014/main" id="{C62E9F4B-1C3B-8B7D-051F-C75C0955A662}"/>
+                <a16:creationId xmlns:a16="http://schemas.microsoft.com/office/drawing/2014/main" id="{C8685D46-282A-C40B-70C7-DC0FA1A1D584}"/>
               </a:ext>
             </a:extLst>
           </p:cNvPr>
@@ -2367,7 +2367,7 @@
           <p:cNvPr id="28" name="pattern">
             <a:extLst>
               <a:ext uri="{FF2B5EF4-FFF2-40B4-BE49-F238E27FC236}">
-                <a16:creationId xmlns:a16="http://schemas.microsoft.com/office/drawing/2014/main" id="{C3956FF8-1081-BF72-49FD-5E580135C2DA}"/>
+                <a16:creationId xmlns:a16="http://schemas.microsoft.com/office/drawing/2014/main" id="{E6FFA0E2-EFCD-8952-495C-9D04FC958DDE}"/>
               </a:ext>
             </a:extLst>
           </p:cNvPr>
@@ -2435,7 +2435,7 @@
           <p:cNvPr id="29" name="pattern">
             <a:extLst>
               <a:ext uri="{FF2B5EF4-FFF2-40B4-BE49-F238E27FC236}">
-                <a16:creationId xmlns:a16="http://schemas.microsoft.com/office/drawing/2014/main" id="{EA6C6927-42C6-75C3-55F8-82B6BD7E61BC}"/>
+                <a16:creationId xmlns:a16="http://schemas.microsoft.com/office/drawing/2014/main" id="{02599654-D38B-0DDE-743A-B383A556B00F}"/>
               </a:ext>
             </a:extLst>
           </p:cNvPr>
@@ -2503,7 +2503,7 @@
           <p:cNvPr id="30" name="pattern">
             <a:extLst>
               <a:ext uri="{FF2B5EF4-FFF2-40B4-BE49-F238E27FC236}">
-                <a16:creationId xmlns:a16="http://schemas.microsoft.com/office/drawing/2014/main" id="{6A881D36-0622-D4D1-A698-4B27F8BF52FE}"/>
+                <a16:creationId xmlns:a16="http://schemas.microsoft.com/office/drawing/2014/main" id="{5E5AFB79-821E-0209-E43A-9834617BE1E1}"/>
               </a:ext>
             </a:extLst>
           </p:cNvPr>
@@ -2571,7 +2571,7 @@
           <p:cNvPr id="31" name="pattern">
             <a:extLst>
               <a:ext uri="{FF2B5EF4-FFF2-40B4-BE49-F238E27FC236}">
-                <a16:creationId xmlns:a16="http://schemas.microsoft.com/office/drawing/2014/main" id="{C54F087A-E7A1-EB01-94E0-556C18BDA2E1}"/>
+                <a16:creationId xmlns:a16="http://schemas.microsoft.com/office/drawing/2014/main" id="{9F596164-736B-9920-B65D-8B4D9926AAED}"/>
               </a:ext>
             </a:extLst>
           </p:cNvPr>
@@ -2639,7 +2639,7 @@
           <p:cNvPr id="32" name="pattern">
             <a:extLst>
               <a:ext uri="{FF2B5EF4-FFF2-40B4-BE49-F238E27FC236}">
-                <a16:creationId xmlns:a16="http://schemas.microsoft.com/office/drawing/2014/main" id="{E18B277C-EB08-A3FD-6B52-B61752CE3B7F}"/>
+                <a16:creationId xmlns:a16="http://schemas.microsoft.com/office/drawing/2014/main" id="{48AD7306-CA5E-F45E-50FB-3EEFE6670FA9}"/>
               </a:ext>
             </a:extLst>
           </p:cNvPr>
@@ -2707,7 +2707,7 @@
           <p:cNvPr id="33" name="pattern">
             <a:extLst>
               <a:ext uri="{FF2B5EF4-FFF2-40B4-BE49-F238E27FC236}">
-                <a16:creationId xmlns:a16="http://schemas.microsoft.com/office/drawing/2014/main" id="{A09A4555-B7EF-3BF2-38A5-A46D3DC68C54}"/>
+                <a16:creationId xmlns:a16="http://schemas.microsoft.com/office/drawing/2014/main" id="{93CC6088-3287-FECB-A3EA-F5E35B85CEAD}"/>
               </a:ext>
             </a:extLst>
           </p:cNvPr>
@@ -2775,7 +2775,7 @@
           <p:cNvPr id="34" name="pattern">
             <a:extLst>
               <a:ext uri="{FF2B5EF4-FFF2-40B4-BE49-F238E27FC236}">
-                <a16:creationId xmlns:a16="http://schemas.microsoft.com/office/drawing/2014/main" id="{D3121E89-C65C-8C0A-5E00-BFE8CDB797F9}"/>
+                <a16:creationId xmlns:a16="http://schemas.microsoft.com/office/drawing/2014/main" id="{9E1AA16F-97F9-4601-A080-796289A937B8}"/>
               </a:ext>
             </a:extLst>
           </p:cNvPr>
@@ -2843,7 +2843,7 @@
           <p:cNvPr id="35" name="pattern">
             <a:extLst>
               <a:ext uri="{FF2B5EF4-FFF2-40B4-BE49-F238E27FC236}">
-                <a16:creationId xmlns:a16="http://schemas.microsoft.com/office/drawing/2014/main" id="{D7D5D412-DC15-A892-C8D2-FD3A17102167}"/>
+                <a16:creationId xmlns:a16="http://schemas.microsoft.com/office/drawing/2014/main" id="{DBD3F1DD-84EE-C1D6-7A6D-FBC8FD124535}"/>
               </a:ext>
             </a:extLst>
           </p:cNvPr>
@@ -2911,7 +2911,7 @@
           <p:cNvPr id="36" name="pattern">
             <a:extLst>
               <a:ext uri="{FF2B5EF4-FFF2-40B4-BE49-F238E27FC236}">
-                <a16:creationId xmlns:a16="http://schemas.microsoft.com/office/drawing/2014/main" id="{B4C1C963-FF30-6B7F-7DD3-E9E34A0F5570}"/>
+                <a16:creationId xmlns:a16="http://schemas.microsoft.com/office/drawing/2014/main" id="{7AB1A985-F918-729E-1494-F77F21228C3A}"/>
               </a:ext>
             </a:extLst>
           </p:cNvPr>
@@ -2979,7 +2979,7 @@
           <p:cNvPr id="37" name="pattern">
             <a:extLst>
               <a:ext uri="{FF2B5EF4-FFF2-40B4-BE49-F238E27FC236}">
-                <a16:creationId xmlns:a16="http://schemas.microsoft.com/office/drawing/2014/main" id="{8962CF0B-20BE-6185-1212-54CECAD37717}"/>
+                <a16:creationId xmlns:a16="http://schemas.microsoft.com/office/drawing/2014/main" id="{97F6A421-34FE-C8E2-730B-7CD2FD22CF29}"/>
               </a:ext>
             </a:extLst>
           </p:cNvPr>
@@ -3047,7 +3047,7 @@
           <p:cNvPr id="38" name="pattern">
             <a:extLst>
               <a:ext uri="{FF2B5EF4-FFF2-40B4-BE49-F238E27FC236}">
-                <a16:creationId xmlns:a16="http://schemas.microsoft.com/office/drawing/2014/main" id="{7888BB8F-0AB6-D59D-A974-7D6ED20223DB}"/>
+                <a16:creationId xmlns:a16="http://schemas.microsoft.com/office/drawing/2014/main" id="{5673FC38-B2A0-2124-9AD7-1A38FDDE25B8}"/>
               </a:ext>
             </a:extLst>
           </p:cNvPr>
@@ -3115,7 +3115,7 @@
           <p:cNvPr id="39" name="pattern">
             <a:extLst>
               <a:ext uri="{FF2B5EF4-FFF2-40B4-BE49-F238E27FC236}">
-                <a16:creationId xmlns:a16="http://schemas.microsoft.com/office/drawing/2014/main" id="{8896BE7E-40AC-FB46-5BF0-D7C95DB02896}"/>
+                <a16:creationId xmlns:a16="http://schemas.microsoft.com/office/drawing/2014/main" id="{69B2560B-F972-E0A0-9250-7FEE68DF7889}"/>
               </a:ext>
             </a:extLst>
           </p:cNvPr>
@@ -3183,7 +3183,7 @@
           <p:cNvPr id="40" name="pattern">
             <a:extLst>
               <a:ext uri="{FF2B5EF4-FFF2-40B4-BE49-F238E27FC236}">
-                <a16:creationId xmlns:a16="http://schemas.microsoft.com/office/drawing/2014/main" id="{EA298442-F65F-A2E8-D1BF-4A0C7D7A8B49}"/>
+                <a16:creationId xmlns:a16="http://schemas.microsoft.com/office/drawing/2014/main" id="{71C3AED4-7C4A-97DE-F282-5F600C1FAE80}"/>
               </a:ext>
             </a:extLst>
           </p:cNvPr>
@@ -3251,7 +3251,7 @@
           <p:cNvPr id="41" name="pattern">
             <a:extLst>
               <a:ext uri="{FF2B5EF4-FFF2-40B4-BE49-F238E27FC236}">
-                <a16:creationId xmlns:a16="http://schemas.microsoft.com/office/drawing/2014/main" id="{BD32795E-9F8C-35B9-A847-1779F7EBAD0D}"/>
+                <a16:creationId xmlns:a16="http://schemas.microsoft.com/office/drawing/2014/main" id="{767CCF02-03D7-209F-F198-629159D19EEB}"/>
               </a:ext>
             </a:extLst>
           </p:cNvPr>
@@ -3319,7 +3319,7 @@
           <p:cNvPr id="42" name="pattern">
             <a:extLst>
               <a:ext uri="{FF2B5EF4-FFF2-40B4-BE49-F238E27FC236}">
-                <a16:creationId xmlns:a16="http://schemas.microsoft.com/office/drawing/2014/main" id="{E91FB005-5777-BA08-120F-D38B95DCD6DA}"/>
+                <a16:creationId xmlns:a16="http://schemas.microsoft.com/office/drawing/2014/main" id="{D4765ECD-87A9-D620-E840-DCB5D581D45D}"/>
               </a:ext>
             </a:extLst>
           </p:cNvPr>
@@ -3387,7 +3387,7 @@
           <p:cNvPr id="43" name="pattern">
             <a:extLst>
               <a:ext uri="{FF2B5EF4-FFF2-40B4-BE49-F238E27FC236}">
-                <a16:creationId xmlns:a16="http://schemas.microsoft.com/office/drawing/2014/main" id="{F93EF362-173F-4313-6161-BB9338100A57}"/>
+                <a16:creationId xmlns:a16="http://schemas.microsoft.com/office/drawing/2014/main" id="{04CA3359-4618-208C-1B38-3B47E4BA0CCA}"/>
               </a:ext>
             </a:extLst>
           </p:cNvPr>
@@ -3455,7 +3455,7 @@
           <p:cNvPr id="44" name="pattern">
             <a:extLst>
               <a:ext uri="{FF2B5EF4-FFF2-40B4-BE49-F238E27FC236}">
-                <a16:creationId xmlns:a16="http://schemas.microsoft.com/office/drawing/2014/main" id="{55A057A0-6684-3824-7365-DE351B11140C}"/>
+                <a16:creationId xmlns:a16="http://schemas.microsoft.com/office/drawing/2014/main" id="{077300DF-398C-2284-FF4D-0A149EAC569B}"/>
               </a:ext>
             </a:extLst>
           </p:cNvPr>
@@ -3523,7 +3523,7 @@
           <p:cNvPr id="45" name="pattern">
             <a:extLst>
               <a:ext uri="{FF2B5EF4-FFF2-40B4-BE49-F238E27FC236}">
-                <a16:creationId xmlns:a16="http://schemas.microsoft.com/office/drawing/2014/main" id="{7A59EA8A-81AF-D531-B719-A67033A14257}"/>
+                <a16:creationId xmlns:a16="http://schemas.microsoft.com/office/drawing/2014/main" id="{04D6FCD2-B156-467B-6AAD-3141A74FE406}"/>
               </a:ext>
             </a:extLst>
           </p:cNvPr>
@@ -3591,7 +3591,7 @@
           <p:cNvPr id="46" name="pattern">
             <a:extLst>
               <a:ext uri="{FF2B5EF4-FFF2-40B4-BE49-F238E27FC236}">
-                <a16:creationId xmlns:a16="http://schemas.microsoft.com/office/drawing/2014/main" id="{F6F769E4-C572-6C9D-0360-AAE22A5CB220}"/>
+                <a16:creationId xmlns:a16="http://schemas.microsoft.com/office/drawing/2014/main" id="{4D3EA5DF-1114-8FDC-4240-D2E9636B6167}"/>
               </a:ext>
             </a:extLst>
           </p:cNvPr>
@@ -3659,7 +3659,7 @@
           <p:cNvPr id="47" name="pattern">
             <a:extLst>
               <a:ext uri="{FF2B5EF4-FFF2-40B4-BE49-F238E27FC236}">
-                <a16:creationId xmlns:a16="http://schemas.microsoft.com/office/drawing/2014/main" id="{0C7B1694-F5C6-7582-CA24-614DF093A173}"/>
+                <a16:creationId xmlns:a16="http://schemas.microsoft.com/office/drawing/2014/main" id="{61D282A6-96A7-7F32-5AE3-94E30BAE4DE8}"/>
               </a:ext>
             </a:extLst>
           </p:cNvPr>
@@ -3727,7 +3727,7 @@
           <p:cNvPr id="48" name="pattern">
             <a:extLst>
               <a:ext uri="{FF2B5EF4-FFF2-40B4-BE49-F238E27FC236}">
-                <a16:creationId xmlns:a16="http://schemas.microsoft.com/office/drawing/2014/main" id="{0C386FA1-9A65-E48C-B0F5-80C0111DFE9C}"/>
+                <a16:creationId xmlns:a16="http://schemas.microsoft.com/office/drawing/2014/main" id="{BC685AF7-7A88-63F8-7176-39F49940FF91}"/>
               </a:ext>
             </a:extLst>
           </p:cNvPr>
@@ -3795,7 +3795,7 @@
           <p:cNvPr id="49" name="pattern">
             <a:extLst>
               <a:ext uri="{FF2B5EF4-FFF2-40B4-BE49-F238E27FC236}">
-                <a16:creationId xmlns:a16="http://schemas.microsoft.com/office/drawing/2014/main" id="{A496B8FA-D08C-54BD-7F8B-636A11180880}"/>
+                <a16:creationId xmlns:a16="http://schemas.microsoft.com/office/drawing/2014/main" id="{FB20517C-A8A9-1CF8-5748-BE8CFBF48E77}"/>
               </a:ext>
             </a:extLst>
           </p:cNvPr>
@@ -3863,7 +3863,7 @@
           <p:cNvPr id="50" name="pattern">
             <a:extLst>
               <a:ext uri="{FF2B5EF4-FFF2-40B4-BE49-F238E27FC236}">
-                <a16:creationId xmlns:a16="http://schemas.microsoft.com/office/drawing/2014/main" id="{69966630-8050-1B37-02B5-7517D139F12C}"/>
+                <a16:creationId xmlns:a16="http://schemas.microsoft.com/office/drawing/2014/main" id="{269256DE-805F-F6AD-015F-14BBD537B782}"/>
               </a:ext>
             </a:extLst>
           </p:cNvPr>
@@ -3931,7 +3931,7 @@
           <p:cNvPr id="51" name="pattern">
             <a:extLst>
               <a:ext uri="{FF2B5EF4-FFF2-40B4-BE49-F238E27FC236}">
-                <a16:creationId xmlns:a16="http://schemas.microsoft.com/office/drawing/2014/main" id="{552D4AFF-5F73-8403-78FF-38BD9F3BC57D}"/>
+                <a16:creationId xmlns:a16="http://schemas.microsoft.com/office/drawing/2014/main" id="{B56C8829-75BB-265E-E6E1-DD4A84375280}"/>
               </a:ext>
             </a:extLst>
           </p:cNvPr>
@@ -3999,7 +3999,7 @@
           <p:cNvPr id="52" name="pattern">
             <a:extLst>
               <a:ext uri="{FF2B5EF4-FFF2-40B4-BE49-F238E27FC236}">
-                <a16:creationId xmlns:a16="http://schemas.microsoft.com/office/drawing/2014/main" id="{1B6EDCB3-DBD7-3694-DE6F-CB10CCEE63E9}"/>
+                <a16:creationId xmlns:a16="http://schemas.microsoft.com/office/drawing/2014/main" id="{7335E80B-96AF-F82F-CFE3-28E6EC96CFE2}"/>
               </a:ext>
             </a:extLst>
           </p:cNvPr>
@@ -4067,7 +4067,7 @@
           <p:cNvPr id="53" name="pattern">
             <a:extLst>
               <a:ext uri="{FF2B5EF4-FFF2-40B4-BE49-F238E27FC236}">
-                <a16:creationId xmlns:a16="http://schemas.microsoft.com/office/drawing/2014/main" id="{7E708AF7-53C1-7D73-6159-7646C268FB57}"/>
+                <a16:creationId xmlns:a16="http://schemas.microsoft.com/office/drawing/2014/main" id="{55741567-6575-FE75-AB39-4CCC6F0C8A6D}"/>
               </a:ext>
             </a:extLst>
           </p:cNvPr>
@@ -4135,7 +4135,7 @@
           <p:cNvPr id="54" name="pattern">
             <a:extLst>
               <a:ext uri="{FF2B5EF4-FFF2-40B4-BE49-F238E27FC236}">
-                <a16:creationId xmlns:a16="http://schemas.microsoft.com/office/drawing/2014/main" id="{AEDBE4DE-6E4C-74B2-9A65-FB8E7359D0D2}"/>
+                <a16:creationId xmlns:a16="http://schemas.microsoft.com/office/drawing/2014/main" id="{938F11DD-8BFC-788B-966D-1C44ADE1C707}"/>
               </a:ext>
             </a:extLst>
           </p:cNvPr>
@@ -4203,7 +4203,7 @@
           <p:cNvPr id="55" name="pattern">
             <a:extLst>
               <a:ext uri="{FF2B5EF4-FFF2-40B4-BE49-F238E27FC236}">
-                <a16:creationId xmlns:a16="http://schemas.microsoft.com/office/drawing/2014/main" id="{1F97C2C6-24AD-BF7B-C824-FBE19B5E0859}"/>
+                <a16:creationId xmlns:a16="http://schemas.microsoft.com/office/drawing/2014/main" id="{8F119114-6503-FE0C-C85C-61227B50CED2}"/>
               </a:ext>
             </a:extLst>
           </p:cNvPr>
@@ -4271,7 +4271,7 @@
           <p:cNvPr id="56" name="pattern">
             <a:extLst>
               <a:ext uri="{FF2B5EF4-FFF2-40B4-BE49-F238E27FC236}">
-                <a16:creationId xmlns:a16="http://schemas.microsoft.com/office/drawing/2014/main" id="{5C9DA924-F9A3-9FF6-2D16-6DC23BA2E4B3}"/>
+                <a16:creationId xmlns:a16="http://schemas.microsoft.com/office/drawing/2014/main" id="{CD94D8A1-5CB8-A446-FEB4-94B87DCA6E60}"/>
               </a:ext>
             </a:extLst>
           </p:cNvPr>
@@ -4339,7 +4339,7 @@
           <p:cNvPr id="57" name="pattern">
             <a:extLst>
               <a:ext uri="{FF2B5EF4-FFF2-40B4-BE49-F238E27FC236}">
-                <a16:creationId xmlns:a16="http://schemas.microsoft.com/office/drawing/2014/main" id="{2C4EAFCD-D60C-8622-7BF7-80D2158C900D}"/>
+                <a16:creationId xmlns:a16="http://schemas.microsoft.com/office/drawing/2014/main" id="{58B2E0C5-32C1-57EC-DFD4-CED1B28DBC95}"/>
               </a:ext>
             </a:extLst>
           </p:cNvPr>
@@ -4407,7 +4407,7 @@
           <p:cNvPr id="58" name="pattern">
             <a:extLst>
               <a:ext uri="{FF2B5EF4-FFF2-40B4-BE49-F238E27FC236}">
-                <a16:creationId xmlns:a16="http://schemas.microsoft.com/office/drawing/2014/main" id="{7F2ADCC7-542E-D9A4-D28D-9145022D8C48}"/>
+                <a16:creationId xmlns:a16="http://schemas.microsoft.com/office/drawing/2014/main" id="{F5F569B1-FC98-E22A-B202-62D5D836EF19}"/>
               </a:ext>
             </a:extLst>
           </p:cNvPr>
@@ -4475,7 +4475,7 @@
           <p:cNvPr id="59" name="pattern">
             <a:extLst>
               <a:ext uri="{FF2B5EF4-FFF2-40B4-BE49-F238E27FC236}">
-                <a16:creationId xmlns:a16="http://schemas.microsoft.com/office/drawing/2014/main" id="{2E6AA026-0B1D-EDBE-04CD-3B25FC35490D}"/>
+                <a16:creationId xmlns:a16="http://schemas.microsoft.com/office/drawing/2014/main" id="{6E68A7CF-0D0C-DB38-B6E2-1AF5F96ED036}"/>
               </a:ext>
             </a:extLst>
           </p:cNvPr>
@@ -4543,7 +4543,7 @@
           <p:cNvPr id="60" name="pattern">
             <a:extLst>
               <a:ext uri="{FF2B5EF4-FFF2-40B4-BE49-F238E27FC236}">
-                <a16:creationId xmlns:a16="http://schemas.microsoft.com/office/drawing/2014/main" id="{E445C4A8-A059-82E3-F996-F48D9AC05D7E}"/>
+                <a16:creationId xmlns:a16="http://schemas.microsoft.com/office/drawing/2014/main" id="{BA82C5EA-7108-DA0A-2A93-5FAA939F18EC}"/>
               </a:ext>
             </a:extLst>
           </p:cNvPr>
@@ -4611,7 +4611,7 @@
           <p:cNvPr id="61" name="pattern">
             <a:extLst>
               <a:ext uri="{FF2B5EF4-FFF2-40B4-BE49-F238E27FC236}">
-                <a16:creationId xmlns:a16="http://schemas.microsoft.com/office/drawing/2014/main" id="{70B6384E-C6B4-B305-0BDD-3D8918A6D92D}"/>
+                <a16:creationId xmlns:a16="http://schemas.microsoft.com/office/drawing/2014/main" id="{C1FE3070-4D91-6FDE-13BD-16F4C9D21167}"/>
               </a:ext>
             </a:extLst>
           </p:cNvPr>
@@ -4679,7 +4679,7 @@
           <p:cNvPr id="62" name="pattern">
             <a:extLst>
               <a:ext uri="{FF2B5EF4-FFF2-40B4-BE49-F238E27FC236}">
-                <a16:creationId xmlns:a16="http://schemas.microsoft.com/office/drawing/2014/main" id="{1A49E83C-09C9-9AAE-0AB7-F0350F22E5D8}"/>
+                <a16:creationId xmlns:a16="http://schemas.microsoft.com/office/drawing/2014/main" id="{86AF7291-0DED-283B-2B97-2EB04B413EE5}"/>
               </a:ext>
             </a:extLst>
           </p:cNvPr>
@@ -4747,7 +4747,7 @@
           <p:cNvPr id="63" name="pattern">
             <a:extLst>
               <a:ext uri="{FF2B5EF4-FFF2-40B4-BE49-F238E27FC236}">
-                <a16:creationId xmlns:a16="http://schemas.microsoft.com/office/drawing/2014/main" id="{6E9B9F30-7995-D56B-FA39-B019E41CDA06}"/>
+                <a16:creationId xmlns:a16="http://schemas.microsoft.com/office/drawing/2014/main" id="{54E34206-3295-4FA2-7171-A5B81FC3E5FE}"/>
               </a:ext>
             </a:extLst>
           </p:cNvPr>
@@ -4815,7 +4815,7 @@
           <p:cNvPr id="64" name="pattern">
             <a:extLst>
               <a:ext uri="{FF2B5EF4-FFF2-40B4-BE49-F238E27FC236}">
-                <a16:creationId xmlns:a16="http://schemas.microsoft.com/office/drawing/2014/main" id="{49A34428-043B-4F74-40EF-C3021DEB9389}"/>
+                <a16:creationId xmlns:a16="http://schemas.microsoft.com/office/drawing/2014/main" id="{731056AC-DA63-295B-2D17-BACE459E228B}"/>
               </a:ext>
             </a:extLst>
           </p:cNvPr>
@@ -4883,7 +4883,7 @@
           <p:cNvPr id="65" name="pattern">
             <a:extLst>
               <a:ext uri="{FF2B5EF4-FFF2-40B4-BE49-F238E27FC236}">
-                <a16:creationId xmlns:a16="http://schemas.microsoft.com/office/drawing/2014/main" id="{120A5118-E63B-6154-535D-BCE9A9AA02B1}"/>
+                <a16:creationId xmlns:a16="http://schemas.microsoft.com/office/drawing/2014/main" id="{6AA627B2-FB39-CB8D-0973-15AA50C56457}"/>
               </a:ext>
             </a:extLst>
           </p:cNvPr>
@@ -4951,7 +4951,7 @@
           <p:cNvPr id="66" name="pattern">
             <a:extLst>
               <a:ext uri="{FF2B5EF4-FFF2-40B4-BE49-F238E27FC236}">
-                <a16:creationId xmlns:a16="http://schemas.microsoft.com/office/drawing/2014/main" id="{B5DE2516-0044-8378-CB70-D29DF24BAF09}"/>
+                <a16:creationId xmlns:a16="http://schemas.microsoft.com/office/drawing/2014/main" id="{2EBF746D-FD45-81CE-C680-0B13C9B5F979}"/>
               </a:ext>
             </a:extLst>
           </p:cNvPr>
@@ -5019,7 +5019,7 @@
           <p:cNvPr id="67" name="pattern">
             <a:extLst>
               <a:ext uri="{FF2B5EF4-FFF2-40B4-BE49-F238E27FC236}">
-                <a16:creationId xmlns:a16="http://schemas.microsoft.com/office/drawing/2014/main" id="{6ECDE149-A91B-FA35-8968-894672AE7BDC}"/>
+                <a16:creationId xmlns:a16="http://schemas.microsoft.com/office/drawing/2014/main" id="{A5985236-7D9E-3DCF-B1EA-45E6111DCCFD}"/>
               </a:ext>
             </a:extLst>
           </p:cNvPr>
@@ -5087,7 +5087,7 @@
           <p:cNvPr id="68" name="pattern">
             <a:extLst>
               <a:ext uri="{FF2B5EF4-FFF2-40B4-BE49-F238E27FC236}">
-                <a16:creationId xmlns:a16="http://schemas.microsoft.com/office/drawing/2014/main" id="{C79686B2-17D6-0A55-C9B6-97D4764C8808}"/>
+                <a16:creationId xmlns:a16="http://schemas.microsoft.com/office/drawing/2014/main" id="{3BE40F17-F685-D834-89E5-BC1067A23CF0}"/>
               </a:ext>
             </a:extLst>
           </p:cNvPr>
@@ -5155,7 +5155,7 @@
           <p:cNvPr id="69" name="pattern">
             <a:extLst>
               <a:ext uri="{FF2B5EF4-FFF2-40B4-BE49-F238E27FC236}">
-                <a16:creationId xmlns:a16="http://schemas.microsoft.com/office/drawing/2014/main" id="{68C3FE08-65E1-5967-3A26-40C27F69DAA5}"/>
+                <a16:creationId xmlns:a16="http://schemas.microsoft.com/office/drawing/2014/main" id="{E4EB5218-A185-D024-6F9B-B6CA41D52273}"/>
               </a:ext>
             </a:extLst>
           </p:cNvPr>
@@ -5223,7 +5223,7 @@
           <p:cNvPr id="70" name="pattern">
             <a:extLst>
               <a:ext uri="{FF2B5EF4-FFF2-40B4-BE49-F238E27FC236}">
-                <a16:creationId xmlns:a16="http://schemas.microsoft.com/office/drawing/2014/main" id="{2CAB88FB-946A-F2DA-F5F4-4C55DAA6FC47}"/>
+                <a16:creationId xmlns:a16="http://schemas.microsoft.com/office/drawing/2014/main" id="{AC977670-1D53-4DBA-1776-3A3D6818A455}"/>
               </a:ext>
             </a:extLst>
           </p:cNvPr>
@@ -5291,7 +5291,7 @@
           <p:cNvPr id="71" name="pattern">
             <a:extLst>
               <a:ext uri="{FF2B5EF4-FFF2-40B4-BE49-F238E27FC236}">
-                <a16:creationId xmlns:a16="http://schemas.microsoft.com/office/drawing/2014/main" id="{926C13FE-F558-2A05-5E57-8A8B6847860C}"/>
+                <a16:creationId xmlns:a16="http://schemas.microsoft.com/office/drawing/2014/main" id="{CEE88D89-1F80-D353-353D-BF0B9CFFD632}"/>
               </a:ext>
             </a:extLst>
           </p:cNvPr>
@@ -5359,7 +5359,7 @@
           <p:cNvPr id="72" name="pattern">
             <a:extLst>
               <a:ext uri="{FF2B5EF4-FFF2-40B4-BE49-F238E27FC236}">
-                <a16:creationId xmlns:a16="http://schemas.microsoft.com/office/drawing/2014/main" id="{C0165CDE-74F3-FE68-14BB-5C26C07C66C8}"/>
+                <a16:creationId xmlns:a16="http://schemas.microsoft.com/office/drawing/2014/main" id="{48C31AB2-AFD2-CC56-C394-EA859D86568A}"/>
               </a:ext>
             </a:extLst>
           </p:cNvPr>
@@ -5427,7 +5427,7 @@
           <p:cNvPr id="73" name="pattern">
             <a:extLst>
               <a:ext uri="{FF2B5EF4-FFF2-40B4-BE49-F238E27FC236}">
-                <a16:creationId xmlns:a16="http://schemas.microsoft.com/office/drawing/2014/main" id="{CB45BA18-9322-E3DA-EDFF-54FB38B0C146}"/>
+                <a16:creationId xmlns:a16="http://schemas.microsoft.com/office/drawing/2014/main" id="{FB7E511C-4EF9-414A-56AA-44D9126C4CE0}"/>
               </a:ext>
             </a:extLst>
           </p:cNvPr>
@@ -5495,7 +5495,7 @@
           <p:cNvPr id="74" name="pattern">
             <a:extLst>
               <a:ext uri="{FF2B5EF4-FFF2-40B4-BE49-F238E27FC236}">
-                <a16:creationId xmlns:a16="http://schemas.microsoft.com/office/drawing/2014/main" id="{C600C2AE-602B-FB25-31AD-F335C6A6CE8C}"/>
+                <a16:creationId xmlns:a16="http://schemas.microsoft.com/office/drawing/2014/main" id="{56D85516-4D0A-5D58-44BE-620237DDE241}"/>
               </a:ext>
             </a:extLst>
           </p:cNvPr>
@@ -5563,7 +5563,7 @@
           <p:cNvPr id="75" name="pattern">
             <a:extLst>
               <a:ext uri="{FF2B5EF4-FFF2-40B4-BE49-F238E27FC236}">
-                <a16:creationId xmlns:a16="http://schemas.microsoft.com/office/drawing/2014/main" id="{9ECBF463-2192-E18B-2B7E-0BE179B1B803}"/>
+                <a16:creationId xmlns:a16="http://schemas.microsoft.com/office/drawing/2014/main" id="{6C04B5AF-CC08-656C-3856-C6AF5C4774F9}"/>
               </a:ext>
             </a:extLst>
           </p:cNvPr>
@@ -5631,7 +5631,7 @@
           <p:cNvPr id="76" name="pattern">
             <a:extLst>
               <a:ext uri="{FF2B5EF4-FFF2-40B4-BE49-F238E27FC236}">
-                <a16:creationId xmlns:a16="http://schemas.microsoft.com/office/drawing/2014/main" id="{98FC7B79-08C7-F5AC-FBE4-B8962BF6F8EA}"/>
+                <a16:creationId xmlns:a16="http://schemas.microsoft.com/office/drawing/2014/main" id="{BC667ADB-AFB2-AD4F-24A4-38199E60EC21}"/>
               </a:ext>
             </a:extLst>
           </p:cNvPr>
@@ -5699,7 +5699,7 @@
           <p:cNvPr id="77" name="pattern">
             <a:extLst>
               <a:ext uri="{FF2B5EF4-FFF2-40B4-BE49-F238E27FC236}">
-                <a16:creationId xmlns:a16="http://schemas.microsoft.com/office/drawing/2014/main" id="{00588A35-6C7F-CF17-3ABA-8F8EB2CB87D5}"/>
+                <a16:creationId xmlns:a16="http://schemas.microsoft.com/office/drawing/2014/main" id="{0EF8F1E8-09AC-1A78-0599-057FCD057BF0}"/>
               </a:ext>
             </a:extLst>
           </p:cNvPr>
@@ -5767,7 +5767,7 @@
           <p:cNvPr id="78" name="pattern">
             <a:extLst>
               <a:ext uri="{FF2B5EF4-FFF2-40B4-BE49-F238E27FC236}">
-                <a16:creationId xmlns:a16="http://schemas.microsoft.com/office/drawing/2014/main" id="{BA219AD9-AFF0-7980-ECCA-B202A9BF412F}"/>
+                <a16:creationId xmlns:a16="http://schemas.microsoft.com/office/drawing/2014/main" id="{02D39318-427A-DEFB-ACDE-F011F33CC2B0}"/>
               </a:ext>
             </a:extLst>
           </p:cNvPr>
@@ -5835,7 +5835,7 @@
           <p:cNvPr id="79" name="pattern">
             <a:extLst>
               <a:ext uri="{FF2B5EF4-FFF2-40B4-BE49-F238E27FC236}">
-                <a16:creationId xmlns:a16="http://schemas.microsoft.com/office/drawing/2014/main" id="{7870AC1E-0D8C-87E0-8748-98D441856886}"/>
+                <a16:creationId xmlns:a16="http://schemas.microsoft.com/office/drawing/2014/main" id="{D2947C14-421D-73AC-5A35-1DF7AD5C60D0}"/>
               </a:ext>
             </a:extLst>
           </p:cNvPr>
@@ -5903,7 +5903,7 @@
           <p:cNvPr id="80" name="pattern">
             <a:extLst>
               <a:ext uri="{FF2B5EF4-FFF2-40B4-BE49-F238E27FC236}">
-                <a16:creationId xmlns:a16="http://schemas.microsoft.com/office/drawing/2014/main" id="{9DC583FF-8B1B-7BA0-2E06-15DD0F07BAAD}"/>
+                <a16:creationId xmlns:a16="http://schemas.microsoft.com/office/drawing/2014/main" id="{83B3A23E-B430-DA67-7243-5507435ABAC5}"/>
               </a:ext>
             </a:extLst>
           </p:cNvPr>
@@ -5971,7 +5971,7 @@
           <p:cNvPr id="81" name="pattern">
             <a:extLst>
               <a:ext uri="{FF2B5EF4-FFF2-40B4-BE49-F238E27FC236}">
-                <a16:creationId xmlns:a16="http://schemas.microsoft.com/office/drawing/2014/main" id="{920D0CDE-7D97-7F74-8BEF-C1B13A77BEBA}"/>
+                <a16:creationId xmlns:a16="http://schemas.microsoft.com/office/drawing/2014/main" id="{C87F1131-E990-FDAB-B28A-4C464566FECA}"/>
               </a:ext>
             </a:extLst>
           </p:cNvPr>
@@ -6039,7 +6039,7 @@
           <p:cNvPr id="82" name="pattern">
             <a:extLst>
               <a:ext uri="{FF2B5EF4-FFF2-40B4-BE49-F238E27FC236}">
-                <a16:creationId xmlns:a16="http://schemas.microsoft.com/office/drawing/2014/main" id="{5746888B-DFD6-2BE5-1838-7C22C49EC2CD}"/>
+                <a16:creationId xmlns:a16="http://schemas.microsoft.com/office/drawing/2014/main" id="{0277B400-E150-AF60-600F-D3F3E9EEF266}"/>
               </a:ext>
             </a:extLst>
           </p:cNvPr>
@@ -6107,7 +6107,7 @@
           <p:cNvPr id="83" name="pattern">
             <a:extLst>
               <a:ext uri="{FF2B5EF4-FFF2-40B4-BE49-F238E27FC236}">
-                <a16:creationId xmlns:a16="http://schemas.microsoft.com/office/drawing/2014/main" id="{7430E0D0-262B-E94E-715C-EB7A1404990B}"/>
+                <a16:creationId xmlns:a16="http://schemas.microsoft.com/office/drawing/2014/main" id="{1A6A88AD-CE90-96DF-F7F9-6F7577043192}"/>
               </a:ext>
             </a:extLst>
           </p:cNvPr>
@@ -6175,7 +6175,7 @@
           <p:cNvPr id="84" name="pattern">
             <a:extLst>
               <a:ext uri="{FF2B5EF4-FFF2-40B4-BE49-F238E27FC236}">
-                <a16:creationId xmlns:a16="http://schemas.microsoft.com/office/drawing/2014/main" id="{7914F503-A70D-3FDD-1C48-FD0902E89770}"/>
+                <a16:creationId xmlns:a16="http://schemas.microsoft.com/office/drawing/2014/main" id="{F53DDF5A-228E-420A-3074-5CB5257936DC}"/>
               </a:ext>
             </a:extLst>
           </p:cNvPr>
@@ -6243,7 +6243,7 @@
           <p:cNvPr id="85" name="pattern">
             <a:extLst>
               <a:ext uri="{FF2B5EF4-FFF2-40B4-BE49-F238E27FC236}">
-                <a16:creationId xmlns:a16="http://schemas.microsoft.com/office/drawing/2014/main" id="{83491B2E-6A4F-A28F-174F-AECA6620FD4B}"/>
+                <a16:creationId xmlns:a16="http://schemas.microsoft.com/office/drawing/2014/main" id="{AFD726D2-E2E9-0914-3EA1-21D1427BDD6A}"/>
               </a:ext>
             </a:extLst>
           </p:cNvPr>
@@ -6311,7 +6311,7 @@
           <p:cNvPr id="86" name="pattern">
             <a:extLst>
               <a:ext uri="{FF2B5EF4-FFF2-40B4-BE49-F238E27FC236}">
-                <a16:creationId xmlns:a16="http://schemas.microsoft.com/office/drawing/2014/main" id="{EB6C70A3-7DDA-E35D-5AED-711307889196}"/>
+                <a16:creationId xmlns:a16="http://schemas.microsoft.com/office/drawing/2014/main" id="{DB0C923C-9D45-A1A1-13D3-3FF2B1536E6B}"/>
               </a:ext>
             </a:extLst>
           </p:cNvPr>
@@ -6379,7 +6379,7 @@
           <p:cNvPr id="87" name="pattern">
             <a:extLst>
               <a:ext uri="{FF2B5EF4-FFF2-40B4-BE49-F238E27FC236}">
-                <a16:creationId xmlns:a16="http://schemas.microsoft.com/office/drawing/2014/main" id="{E0169BFB-4B93-05F6-4631-44B3D2DDD74A}"/>
+                <a16:creationId xmlns:a16="http://schemas.microsoft.com/office/drawing/2014/main" id="{0B969B00-D367-8AC8-DC3E-8F6D4C42F939}"/>
               </a:ext>
             </a:extLst>
           </p:cNvPr>
@@ -6447,7 +6447,7 @@
           <p:cNvPr id="88" name="pattern">
             <a:extLst>
               <a:ext uri="{FF2B5EF4-FFF2-40B4-BE49-F238E27FC236}">
-                <a16:creationId xmlns:a16="http://schemas.microsoft.com/office/drawing/2014/main" id="{FDFE8CA5-3312-B513-95DD-78C578AF73D0}"/>
+                <a16:creationId xmlns:a16="http://schemas.microsoft.com/office/drawing/2014/main" id="{D7C6A836-2C1D-D728-6A76-C96AA8CDE844}"/>
               </a:ext>
             </a:extLst>
           </p:cNvPr>
@@ -6515,7 +6515,7 @@
           <p:cNvPr id="89" name="pattern">
             <a:extLst>
               <a:ext uri="{FF2B5EF4-FFF2-40B4-BE49-F238E27FC236}">
-                <a16:creationId xmlns:a16="http://schemas.microsoft.com/office/drawing/2014/main" id="{19919B6B-C409-35CC-1F1F-D84C1D8FEFF2}"/>
+                <a16:creationId xmlns:a16="http://schemas.microsoft.com/office/drawing/2014/main" id="{D1A4EA09-9708-3C7F-5F58-0AA7E78039CE}"/>
               </a:ext>
             </a:extLst>
           </p:cNvPr>
@@ -6583,7 +6583,7 @@
           <p:cNvPr id="90" name="pattern">
             <a:extLst>
               <a:ext uri="{FF2B5EF4-FFF2-40B4-BE49-F238E27FC236}">
-                <a16:creationId xmlns:a16="http://schemas.microsoft.com/office/drawing/2014/main" id="{EE038F0B-7AD6-4E44-1A23-F32772CF9CB3}"/>
+                <a16:creationId xmlns:a16="http://schemas.microsoft.com/office/drawing/2014/main" id="{BF9F487E-6A6E-896C-8FC9-5C40152E0680}"/>
               </a:ext>
             </a:extLst>
           </p:cNvPr>
@@ -6651,7 +6651,7 @@
           <p:cNvPr id="91" name="pattern">
             <a:extLst>
               <a:ext uri="{FF2B5EF4-FFF2-40B4-BE49-F238E27FC236}">
-                <a16:creationId xmlns:a16="http://schemas.microsoft.com/office/drawing/2014/main" id="{C2D1C170-74CE-5DEE-64F9-179D9DAF7122}"/>
+                <a16:creationId xmlns:a16="http://schemas.microsoft.com/office/drawing/2014/main" id="{984B8060-3379-14DE-B8E7-301CF7F52115}"/>
               </a:ext>
             </a:extLst>
           </p:cNvPr>
@@ -6719,7 +6719,7 @@
           <p:cNvPr id="92" name="pattern">
             <a:extLst>
               <a:ext uri="{FF2B5EF4-FFF2-40B4-BE49-F238E27FC236}">
-                <a16:creationId xmlns:a16="http://schemas.microsoft.com/office/drawing/2014/main" id="{D903CB17-6EA3-A8B3-1091-F922D5FECDC6}"/>
+                <a16:creationId xmlns:a16="http://schemas.microsoft.com/office/drawing/2014/main" id="{DFFAB521-5DFE-BBB7-5D74-E772FE2A6BFB}"/>
               </a:ext>
             </a:extLst>
           </p:cNvPr>
@@ -6787,7 +6787,7 @@
           <p:cNvPr id="93" name="pattern">
             <a:extLst>
               <a:ext uri="{FF2B5EF4-FFF2-40B4-BE49-F238E27FC236}">
-                <a16:creationId xmlns:a16="http://schemas.microsoft.com/office/drawing/2014/main" id="{E538D1F8-5E0E-C00F-A560-7AD6A1C072DA}"/>
+                <a16:creationId xmlns:a16="http://schemas.microsoft.com/office/drawing/2014/main" id="{F3EE4E93-F3AA-CA51-DD09-D6E6FC1E51BE}"/>
               </a:ext>
             </a:extLst>
           </p:cNvPr>
@@ -6855,7 +6855,7 @@
           <p:cNvPr id="94" name="pattern">
             <a:extLst>
               <a:ext uri="{FF2B5EF4-FFF2-40B4-BE49-F238E27FC236}">
-                <a16:creationId xmlns:a16="http://schemas.microsoft.com/office/drawing/2014/main" id="{EEEEBA4A-9DE3-4A95-A4C7-E9EAC6B10492}"/>
+                <a16:creationId xmlns:a16="http://schemas.microsoft.com/office/drawing/2014/main" id="{8555091B-8057-97AE-F615-07EBC0529882}"/>
               </a:ext>
             </a:extLst>
           </p:cNvPr>
@@ -6923,7 +6923,7 @@
           <p:cNvPr id="95" name="pattern">
             <a:extLst>
               <a:ext uri="{FF2B5EF4-FFF2-40B4-BE49-F238E27FC236}">
-                <a16:creationId xmlns:a16="http://schemas.microsoft.com/office/drawing/2014/main" id="{3A43E359-F8F7-AF59-612C-714C247C9E05}"/>
+                <a16:creationId xmlns:a16="http://schemas.microsoft.com/office/drawing/2014/main" id="{2ABE5B1B-86FB-25AD-A14E-FF34981528FE}"/>
               </a:ext>
             </a:extLst>
           </p:cNvPr>
@@ -6991,7 +6991,7 @@
           <p:cNvPr id="96" name="pattern">
             <a:extLst>
               <a:ext uri="{FF2B5EF4-FFF2-40B4-BE49-F238E27FC236}">
-                <a16:creationId xmlns:a16="http://schemas.microsoft.com/office/drawing/2014/main" id="{FDBDA16B-AF2F-7FE2-5B68-4827AE9F476F}"/>
+                <a16:creationId xmlns:a16="http://schemas.microsoft.com/office/drawing/2014/main" id="{692597DF-FB00-60E2-18E9-A0ADE6599789}"/>
               </a:ext>
             </a:extLst>
           </p:cNvPr>
@@ -7059,7 +7059,7 @@
           <p:cNvPr id="97" name="pattern">
             <a:extLst>
               <a:ext uri="{FF2B5EF4-FFF2-40B4-BE49-F238E27FC236}">
-                <a16:creationId xmlns:a16="http://schemas.microsoft.com/office/drawing/2014/main" id="{8CA0DE66-8991-5E20-BF4B-85CC45E000F7}"/>
+                <a16:creationId xmlns:a16="http://schemas.microsoft.com/office/drawing/2014/main" id="{7B6725AD-192E-3B87-6034-492B7CCFD196}"/>
               </a:ext>
             </a:extLst>
           </p:cNvPr>
@@ -7127,7 +7127,7 @@
           <p:cNvPr id="98" name="pattern">
             <a:extLst>
               <a:ext uri="{FF2B5EF4-FFF2-40B4-BE49-F238E27FC236}">
-                <a16:creationId xmlns:a16="http://schemas.microsoft.com/office/drawing/2014/main" id="{DD139B2B-6D74-6F52-6353-DFC894935C6C}"/>
+                <a16:creationId xmlns:a16="http://schemas.microsoft.com/office/drawing/2014/main" id="{27270521-66B1-95D0-6168-2B4A2F140B58}"/>
               </a:ext>
             </a:extLst>
           </p:cNvPr>
@@ -7195,7 +7195,7 @@
           <p:cNvPr id="99" name="pattern">
             <a:extLst>
               <a:ext uri="{FF2B5EF4-FFF2-40B4-BE49-F238E27FC236}">
-                <a16:creationId xmlns:a16="http://schemas.microsoft.com/office/drawing/2014/main" id="{339C4164-712F-E0F6-77B2-B443599B1FB7}"/>
+                <a16:creationId xmlns:a16="http://schemas.microsoft.com/office/drawing/2014/main" id="{78D206D7-1B76-F53A-E14A-7160FB8C6E91}"/>
               </a:ext>
             </a:extLst>
           </p:cNvPr>
@@ -7263,7 +7263,7 @@
           <p:cNvPr id="100" name="pattern">
             <a:extLst>
               <a:ext uri="{FF2B5EF4-FFF2-40B4-BE49-F238E27FC236}">
-                <a16:creationId xmlns:a16="http://schemas.microsoft.com/office/drawing/2014/main" id="{6D5A86BC-14A7-9510-E964-591E85BABBDD}"/>
+                <a16:creationId xmlns:a16="http://schemas.microsoft.com/office/drawing/2014/main" id="{45A8827D-43DD-E942-3F31-19D23CAEFDF5}"/>
               </a:ext>
             </a:extLst>
           </p:cNvPr>
@@ -7331,7 +7331,7 @@
           <p:cNvPr id="101" name="pattern">
             <a:extLst>
               <a:ext uri="{FF2B5EF4-FFF2-40B4-BE49-F238E27FC236}">
-                <a16:creationId xmlns:a16="http://schemas.microsoft.com/office/drawing/2014/main" id="{ADEF08D3-F98B-2FF8-C037-27B2A5D7C4AE}"/>
+                <a16:creationId xmlns:a16="http://schemas.microsoft.com/office/drawing/2014/main" id="{0E50DD8B-B78A-89C1-D716-B082D8026F1B}"/>
               </a:ext>
             </a:extLst>
           </p:cNvPr>
@@ -7399,7 +7399,7 @@
           <p:cNvPr id="102" name="pattern">
             <a:extLst>
               <a:ext uri="{FF2B5EF4-FFF2-40B4-BE49-F238E27FC236}">
-                <a16:creationId xmlns:a16="http://schemas.microsoft.com/office/drawing/2014/main" id="{612301DC-A8D8-1CE8-2AE4-35557E88B84C}"/>
+                <a16:creationId xmlns:a16="http://schemas.microsoft.com/office/drawing/2014/main" id="{6E344292-F04C-2A3E-13F1-F3C8B5EF85BD}"/>
               </a:ext>
             </a:extLst>
           </p:cNvPr>
@@ -7467,7 +7467,7 @@
           <p:cNvPr id="103" name="pattern">
             <a:extLst>
               <a:ext uri="{FF2B5EF4-FFF2-40B4-BE49-F238E27FC236}">
-                <a16:creationId xmlns:a16="http://schemas.microsoft.com/office/drawing/2014/main" id="{07ACB345-156E-A40C-2D29-5DE153BFE2DD}"/>
+                <a16:creationId xmlns:a16="http://schemas.microsoft.com/office/drawing/2014/main" id="{EF0633FA-0870-7551-B308-713F76F9730A}"/>
               </a:ext>
             </a:extLst>
           </p:cNvPr>
@@ -7535,7 +7535,7 @@
           <p:cNvPr id="104" name="pattern">
             <a:extLst>
               <a:ext uri="{FF2B5EF4-FFF2-40B4-BE49-F238E27FC236}">
-                <a16:creationId xmlns:a16="http://schemas.microsoft.com/office/drawing/2014/main" id="{DC90F5C1-C3AB-0660-44CD-4BA9E9DA0A58}"/>
+                <a16:creationId xmlns:a16="http://schemas.microsoft.com/office/drawing/2014/main" id="{6ADB51B9-2785-A10D-411F-57CFFE32D82F}"/>
               </a:ext>
             </a:extLst>
           </p:cNvPr>
@@ -7603,7 +7603,7 @@
           <p:cNvPr id="105" name="pattern">
             <a:extLst>
               <a:ext uri="{FF2B5EF4-FFF2-40B4-BE49-F238E27FC236}">
-                <a16:creationId xmlns:a16="http://schemas.microsoft.com/office/drawing/2014/main" id="{E1F22995-0947-8780-C51F-564EB69085D7}"/>
+                <a16:creationId xmlns:a16="http://schemas.microsoft.com/office/drawing/2014/main" id="{182AAC34-9CFB-A20C-BA49-494DC128E2B1}"/>
               </a:ext>
             </a:extLst>
           </p:cNvPr>
@@ -7671,7 +7671,7 @@
           <p:cNvPr id="106" name="pattern">
             <a:extLst>
               <a:ext uri="{FF2B5EF4-FFF2-40B4-BE49-F238E27FC236}">
-                <a16:creationId xmlns:a16="http://schemas.microsoft.com/office/drawing/2014/main" id="{5B546A8A-10F1-5E6E-DA55-B1C2FB5A9C12}"/>
+                <a16:creationId xmlns:a16="http://schemas.microsoft.com/office/drawing/2014/main" id="{1E22CB0E-4E0C-E0EA-BD37-C1FD664187DB}"/>
               </a:ext>
             </a:extLst>
           </p:cNvPr>
@@ -7739,7 +7739,7 @@
           <p:cNvPr id="107" name="pattern">
             <a:extLst>
               <a:ext uri="{FF2B5EF4-FFF2-40B4-BE49-F238E27FC236}">
-                <a16:creationId xmlns:a16="http://schemas.microsoft.com/office/drawing/2014/main" id="{30705A6A-F701-0C36-3CF4-5FE2853B2053}"/>
+                <a16:creationId xmlns:a16="http://schemas.microsoft.com/office/drawing/2014/main" id="{5B64FD36-BF9A-9E84-3E05-F3622FC6762A}"/>
               </a:ext>
             </a:extLst>
           </p:cNvPr>
@@ -7807,7 +7807,7 @@
           <p:cNvPr id="108" name="pattern">
             <a:extLst>
               <a:ext uri="{FF2B5EF4-FFF2-40B4-BE49-F238E27FC236}">
-                <a16:creationId xmlns:a16="http://schemas.microsoft.com/office/drawing/2014/main" id="{715E2562-7DF5-50A9-1623-5436F52FF4FC}"/>
+                <a16:creationId xmlns:a16="http://schemas.microsoft.com/office/drawing/2014/main" id="{04C87FAA-8DE9-3634-BCCC-A3888E519257}"/>
               </a:ext>
             </a:extLst>
           </p:cNvPr>
@@ -7875,7 +7875,7 @@
           <p:cNvPr id="109" name="pattern">
             <a:extLst>
               <a:ext uri="{FF2B5EF4-FFF2-40B4-BE49-F238E27FC236}">
-                <a16:creationId xmlns:a16="http://schemas.microsoft.com/office/drawing/2014/main" id="{AF975666-489F-F088-F53F-10BB5F9D9242}"/>
+                <a16:creationId xmlns:a16="http://schemas.microsoft.com/office/drawing/2014/main" id="{FFC89B37-EFA9-2683-A3F4-9DADB151B27B}"/>
               </a:ext>
             </a:extLst>
           </p:cNvPr>
@@ -7943,7 +7943,7 @@
           <p:cNvPr id="110" name="pattern">
             <a:extLst>
               <a:ext uri="{FF2B5EF4-FFF2-40B4-BE49-F238E27FC236}">
-                <a16:creationId xmlns:a16="http://schemas.microsoft.com/office/drawing/2014/main" id="{A7A3D2D3-CA76-317A-3685-07A77B1CAE2A}"/>
+                <a16:creationId xmlns:a16="http://schemas.microsoft.com/office/drawing/2014/main" id="{F90C901C-C526-BA2B-ED18-E6C370C256DE}"/>
               </a:ext>
             </a:extLst>
           </p:cNvPr>
@@ -8011,7 +8011,7 @@
           <p:cNvPr id="111" name="pattern">
             <a:extLst>
               <a:ext uri="{FF2B5EF4-FFF2-40B4-BE49-F238E27FC236}">
-                <a16:creationId xmlns:a16="http://schemas.microsoft.com/office/drawing/2014/main" id="{79EAAF1E-B1BA-C6CD-DAE9-481C8BDA1F60}"/>
+                <a16:creationId xmlns:a16="http://schemas.microsoft.com/office/drawing/2014/main" id="{1831E5AA-D522-A879-0151-3F7968A2A88F}"/>
               </a:ext>
             </a:extLst>
           </p:cNvPr>
@@ -8079,7 +8079,7 @@
           <p:cNvPr id="112" name="pattern">
             <a:extLst>
               <a:ext uri="{FF2B5EF4-FFF2-40B4-BE49-F238E27FC236}">
-                <a16:creationId xmlns:a16="http://schemas.microsoft.com/office/drawing/2014/main" id="{2C47B2CC-3F1D-076F-2A36-2FC93D82A696}"/>
+                <a16:creationId xmlns:a16="http://schemas.microsoft.com/office/drawing/2014/main" id="{9419F922-56B0-A1F0-2492-D54850C529E9}"/>
               </a:ext>
             </a:extLst>
           </p:cNvPr>
@@ -8147,7 +8147,7 @@
           <p:cNvPr id="113" name="pattern">
             <a:extLst>
               <a:ext uri="{FF2B5EF4-FFF2-40B4-BE49-F238E27FC236}">
-                <a16:creationId xmlns:a16="http://schemas.microsoft.com/office/drawing/2014/main" id="{D93C2575-44D6-792C-38F5-628E51352DAA}"/>
+                <a16:creationId xmlns:a16="http://schemas.microsoft.com/office/drawing/2014/main" id="{3B1718EB-33CD-5C91-3AD6-E619485A87E3}"/>
               </a:ext>
             </a:extLst>
           </p:cNvPr>
@@ -8215,7 +8215,7 @@
           <p:cNvPr id="114" name="pattern">
             <a:extLst>
               <a:ext uri="{FF2B5EF4-FFF2-40B4-BE49-F238E27FC236}">
-                <a16:creationId xmlns:a16="http://schemas.microsoft.com/office/drawing/2014/main" id="{0D4936D7-A69B-C17A-695E-DADC77E5F3B7}"/>
+                <a16:creationId xmlns:a16="http://schemas.microsoft.com/office/drawing/2014/main" id="{096B3783-929B-DA84-BA2A-5C9A1AAA232F}"/>
               </a:ext>
             </a:extLst>
           </p:cNvPr>
@@ -8283,7 +8283,7 @@
           <p:cNvPr id="115" name="pattern">
             <a:extLst>
               <a:ext uri="{FF2B5EF4-FFF2-40B4-BE49-F238E27FC236}">
-                <a16:creationId xmlns:a16="http://schemas.microsoft.com/office/drawing/2014/main" id="{01ABDC72-FA84-0D33-63CF-40F0A1048C72}"/>
+                <a16:creationId xmlns:a16="http://schemas.microsoft.com/office/drawing/2014/main" id="{80D5784F-5973-FA1C-5919-A7844309C6F5}"/>
               </a:ext>
             </a:extLst>
           </p:cNvPr>
@@ -8351,7 +8351,7 @@
           <p:cNvPr id="116" name="pattern">
             <a:extLst>
               <a:ext uri="{FF2B5EF4-FFF2-40B4-BE49-F238E27FC236}">
-                <a16:creationId xmlns:a16="http://schemas.microsoft.com/office/drawing/2014/main" id="{D93F1AC6-D8FC-2C21-CB1B-06FCF04B3B78}"/>
+                <a16:creationId xmlns:a16="http://schemas.microsoft.com/office/drawing/2014/main" id="{1B9F1DF0-6F62-6B6F-2EAE-880C97E6152B}"/>
               </a:ext>
             </a:extLst>
           </p:cNvPr>
@@ -8419,7 +8419,7 @@
           <p:cNvPr id="117" name="pattern">
             <a:extLst>
               <a:ext uri="{FF2B5EF4-FFF2-40B4-BE49-F238E27FC236}">
-                <a16:creationId xmlns:a16="http://schemas.microsoft.com/office/drawing/2014/main" id="{060466AD-89ED-31DC-B568-04D969F5FC92}"/>
+                <a16:creationId xmlns:a16="http://schemas.microsoft.com/office/drawing/2014/main" id="{8932998F-4E4C-F730-0374-07A2D3D1CA60}"/>
               </a:ext>
             </a:extLst>
           </p:cNvPr>
@@ -8487,7 +8487,7 @@
           <p:cNvPr id="118" name="pattern">
             <a:extLst>
               <a:ext uri="{FF2B5EF4-FFF2-40B4-BE49-F238E27FC236}">
-                <a16:creationId xmlns:a16="http://schemas.microsoft.com/office/drawing/2014/main" id="{13612DBE-2C58-EF7C-EAFC-969F892E960A}"/>
+                <a16:creationId xmlns:a16="http://schemas.microsoft.com/office/drawing/2014/main" id="{E58EED18-45C6-644D-4095-4E6799A26F16}"/>
               </a:ext>
             </a:extLst>
           </p:cNvPr>
@@ -8555,7 +8555,7 @@
           <p:cNvPr id="119" name="pattern">
             <a:extLst>
               <a:ext uri="{FF2B5EF4-FFF2-40B4-BE49-F238E27FC236}">
-                <a16:creationId xmlns:a16="http://schemas.microsoft.com/office/drawing/2014/main" id="{A158CB72-3547-881C-5772-97480DC02751}"/>
+                <a16:creationId xmlns:a16="http://schemas.microsoft.com/office/drawing/2014/main" id="{66CD1503-17FE-9EA2-E9B6-3F33850A7F2A}"/>
               </a:ext>
             </a:extLst>
           </p:cNvPr>
@@ -8623,7 +8623,7 @@
           <p:cNvPr id="120" name="pattern">
             <a:extLst>
               <a:ext uri="{FF2B5EF4-FFF2-40B4-BE49-F238E27FC236}">
-                <a16:creationId xmlns:a16="http://schemas.microsoft.com/office/drawing/2014/main" id="{45495684-907C-62A7-5321-72E08761B772}"/>
+                <a16:creationId xmlns:a16="http://schemas.microsoft.com/office/drawing/2014/main" id="{935B4E9E-704C-5431-7D9D-5F67E866CA19}"/>
               </a:ext>
             </a:extLst>
           </p:cNvPr>
@@ -8691,7 +8691,7 @@
           <p:cNvPr id="121" name="pattern">
             <a:extLst>
               <a:ext uri="{FF2B5EF4-FFF2-40B4-BE49-F238E27FC236}">
-                <a16:creationId xmlns:a16="http://schemas.microsoft.com/office/drawing/2014/main" id="{11EEF196-9FCD-FB6B-EA0A-7B27529072BE}"/>
+                <a16:creationId xmlns:a16="http://schemas.microsoft.com/office/drawing/2014/main" id="{B23C97F0-74B7-1591-BC3A-06E07F1D0523}"/>
               </a:ext>
             </a:extLst>
           </p:cNvPr>
@@ -8759,7 +8759,7 @@
           <p:cNvPr id="122" name="pattern">
             <a:extLst>
               <a:ext uri="{FF2B5EF4-FFF2-40B4-BE49-F238E27FC236}">
-                <a16:creationId xmlns:a16="http://schemas.microsoft.com/office/drawing/2014/main" id="{94226140-EEEA-2B5D-8083-FD537B0E98C7}"/>
+                <a16:creationId xmlns:a16="http://schemas.microsoft.com/office/drawing/2014/main" id="{0BD942B5-91E9-B6E5-DF7D-455872B8F3EB}"/>
               </a:ext>
             </a:extLst>
           </p:cNvPr>
@@ -8827,7 +8827,7 @@
           <p:cNvPr id="123" name="pattern">
             <a:extLst>
               <a:ext uri="{FF2B5EF4-FFF2-40B4-BE49-F238E27FC236}">
-                <a16:creationId xmlns:a16="http://schemas.microsoft.com/office/drawing/2014/main" id="{430BD7BA-8F4F-D724-5735-4DAC3538F480}"/>
+                <a16:creationId xmlns:a16="http://schemas.microsoft.com/office/drawing/2014/main" id="{E3153C7D-B962-FC87-2DCB-0006913C6492}"/>
               </a:ext>
             </a:extLst>
           </p:cNvPr>
@@ -8895,7 +8895,7 @@
           <p:cNvPr id="124" name="pattern">
             <a:extLst>
               <a:ext uri="{FF2B5EF4-FFF2-40B4-BE49-F238E27FC236}">
-                <a16:creationId xmlns:a16="http://schemas.microsoft.com/office/drawing/2014/main" id="{B9C956A6-0D9F-B275-2312-B639B25F9A1A}"/>
+                <a16:creationId xmlns:a16="http://schemas.microsoft.com/office/drawing/2014/main" id="{3A4A93BB-1FD3-087F-BB4E-90D8891345A3}"/>
               </a:ext>
             </a:extLst>
           </p:cNvPr>
@@ -8963,7 +8963,7 @@
           <p:cNvPr id="125" name="pattern">
             <a:extLst>
               <a:ext uri="{FF2B5EF4-FFF2-40B4-BE49-F238E27FC236}">
-                <a16:creationId xmlns:a16="http://schemas.microsoft.com/office/drawing/2014/main" id="{35B2A67A-DF2F-8141-6E95-A4BA37DD8091}"/>
+                <a16:creationId xmlns:a16="http://schemas.microsoft.com/office/drawing/2014/main" id="{1F9B7F42-3834-84B3-4207-7CE9662A128A}"/>
               </a:ext>
             </a:extLst>
           </p:cNvPr>
@@ -9031,7 +9031,7 @@
           <p:cNvPr id="126" name="pattern">
             <a:extLst>
               <a:ext uri="{FF2B5EF4-FFF2-40B4-BE49-F238E27FC236}">
-                <a16:creationId xmlns:a16="http://schemas.microsoft.com/office/drawing/2014/main" id="{57FCCCCF-7A78-0855-E55B-25A04D1B03AA}"/>
+                <a16:creationId xmlns:a16="http://schemas.microsoft.com/office/drawing/2014/main" id="{0A3B7AEC-EE77-38CC-F702-EF6F6C1C4214}"/>
               </a:ext>
             </a:extLst>
           </p:cNvPr>
@@ -9099,7 +9099,7 @@
           <p:cNvPr id="127" name="pattern">
             <a:extLst>
               <a:ext uri="{FF2B5EF4-FFF2-40B4-BE49-F238E27FC236}">
-                <a16:creationId xmlns:a16="http://schemas.microsoft.com/office/drawing/2014/main" id="{3D0A8640-513F-9742-C441-90BFBFECBE25}"/>
+                <a16:creationId xmlns:a16="http://schemas.microsoft.com/office/drawing/2014/main" id="{5415CC14-C0A5-CD32-47C6-2BCE72A8C033}"/>
               </a:ext>
             </a:extLst>
           </p:cNvPr>
@@ -9167,7 +9167,7 @@
           <p:cNvPr id="128" name="pattern">
             <a:extLst>
               <a:ext uri="{FF2B5EF4-FFF2-40B4-BE49-F238E27FC236}">
-                <a16:creationId xmlns:a16="http://schemas.microsoft.com/office/drawing/2014/main" id="{6A22AD30-09BC-1A6B-5B68-CD6C6C79D56F}"/>
+                <a16:creationId xmlns:a16="http://schemas.microsoft.com/office/drawing/2014/main" id="{BF1C9AE1-1536-260B-E7EE-15B620274033}"/>
               </a:ext>
             </a:extLst>
           </p:cNvPr>
@@ -9235,7 +9235,7 @@
           <p:cNvPr id="129" name="pattern">
             <a:extLst>
               <a:ext uri="{FF2B5EF4-FFF2-40B4-BE49-F238E27FC236}">
-                <a16:creationId xmlns:a16="http://schemas.microsoft.com/office/drawing/2014/main" id="{EFD758B5-6D43-B5E3-078C-5B158D2B4D02}"/>
+                <a16:creationId xmlns:a16="http://schemas.microsoft.com/office/drawing/2014/main" id="{61955CE2-4C67-2BCD-ABF0-A36F953D8996}"/>
               </a:ext>
             </a:extLst>
           </p:cNvPr>
@@ -9303,7 +9303,7 @@
           <p:cNvPr id="130" name="pattern">
             <a:extLst>
               <a:ext uri="{FF2B5EF4-FFF2-40B4-BE49-F238E27FC236}">
-                <a16:creationId xmlns:a16="http://schemas.microsoft.com/office/drawing/2014/main" id="{7507BEAF-AD0A-9A94-BB03-7141D5F4EFFD}"/>
+                <a16:creationId xmlns:a16="http://schemas.microsoft.com/office/drawing/2014/main" id="{9E58B7E9-F2AC-4D9D-0551-4214FC474199}"/>
               </a:ext>
             </a:extLst>
           </p:cNvPr>
@@ -9371,7 +9371,7 @@
           <p:cNvPr id="131" name="pattern">
             <a:extLst>
               <a:ext uri="{FF2B5EF4-FFF2-40B4-BE49-F238E27FC236}">
-                <a16:creationId xmlns:a16="http://schemas.microsoft.com/office/drawing/2014/main" id="{8C4665BF-7D96-F39D-34FA-252C7BE78296}"/>
+                <a16:creationId xmlns:a16="http://schemas.microsoft.com/office/drawing/2014/main" id="{697E1CFB-B9BA-9B06-F0A4-9408A96EFF55}"/>
               </a:ext>
             </a:extLst>
           </p:cNvPr>
@@ -9439,7 +9439,7 @@
           <p:cNvPr id="132" name="pattern">
             <a:extLst>
               <a:ext uri="{FF2B5EF4-FFF2-40B4-BE49-F238E27FC236}">
-                <a16:creationId xmlns:a16="http://schemas.microsoft.com/office/drawing/2014/main" id="{DDA314C8-EC76-66E3-4351-82EEC04B1293}"/>
+                <a16:creationId xmlns:a16="http://schemas.microsoft.com/office/drawing/2014/main" id="{5E0965B7-BD63-0313-2B32-2966F8102CC6}"/>
               </a:ext>
             </a:extLst>
           </p:cNvPr>
@@ -9507,7 +9507,7 @@
           <p:cNvPr id="133" name="pattern">
             <a:extLst>
               <a:ext uri="{FF2B5EF4-FFF2-40B4-BE49-F238E27FC236}">
-                <a16:creationId xmlns:a16="http://schemas.microsoft.com/office/drawing/2014/main" id="{4AE8C024-7740-29A3-B2E6-1E428A4CE682}"/>
+                <a16:creationId xmlns:a16="http://schemas.microsoft.com/office/drawing/2014/main" id="{077E647D-0F7D-6E8A-F222-4DA9802BDDD7}"/>
               </a:ext>
             </a:extLst>
           </p:cNvPr>
@@ -9575,7 +9575,7 @@
           <p:cNvPr id="134" name="pattern">
             <a:extLst>
               <a:ext uri="{FF2B5EF4-FFF2-40B4-BE49-F238E27FC236}">
-                <a16:creationId xmlns:a16="http://schemas.microsoft.com/office/drawing/2014/main" id="{A37A14FF-0D0F-2715-E404-1994F5BAAEBA}"/>
+                <a16:creationId xmlns:a16="http://schemas.microsoft.com/office/drawing/2014/main" id="{76EA449F-89BC-402D-8B47-54905121EEA4}"/>
               </a:ext>
             </a:extLst>
           </p:cNvPr>
@@ -9643,7 +9643,7 @@
           <p:cNvPr id="135" name="pattern">
             <a:extLst>
               <a:ext uri="{FF2B5EF4-FFF2-40B4-BE49-F238E27FC236}">
-                <a16:creationId xmlns:a16="http://schemas.microsoft.com/office/drawing/2014/main" id="{796F66A0-B59A-8CE3-6061-2FDD9F295F9D}"/>
+                <a16:creationId xmlns:a16="http://schemas.microsoft.com/office/drawing/2014/main" id="{3B056C63-4CB2-9DD7-D58E-7B9215E1792D}"/>
               </a:ext>
             </a:extLst>
           </p:cNvPr>
@@ -9709,7 +9709,7 @@
     </p:spTree>
     <p:extLst>
       <p:ext uri="{BB962C8B-B14F-4D97-AF65-F5344CB8AC3E}">
-        <p14:creationId xmlns:p14="http://schemas.microsoft.com/office/powerpoint/2010/main" val="337799682"/>
+        <p14:creationId xmlns:p14="http://schemas.microsoft.com/office/powerpoint/2010/main" val="4150434407"/>
       </p:ext>
     </p:extLst>
   </p:cSld>
@@ -9741,7 +9741,7 @@
           <p:cNvPr id="7" name="creative_background">
             <a:extLst>
               <a:ext uri="{FF2B5EF4-FFF2-40B4-BE49-F238E27FC236}">
-                <a16:creationId xmlns:a16="http://schemas.microsoft.com/office/drawing/2014/main" id="{78603F49-99B6-5523-F55D-0B87EC251C08}"/>
+                <a16:creationId xmlns:a16="http://schemas.microsoft.com/office/drawing/2014/main" id="{9636F81E-AEC5-FEFB-C6BE-2AC82187F6CF}"/>
               </a:ext>
             </a:extLst>
           </p:cNvPr>
@@ -9824,9 +9824,9 @@
           <a:bodyPr/>
           <a:lstStyle/>
           <a:p>
-            <a:fld id="{D8887631-421A-4B90-81F4-114CAE3EC1BA}" type="datetimeFigureOut">
+            <a:fld id="{6456BABC-F92F-414F-A0E9-B90674473BDD}" type="datetimeFigureOut">
               <a:rPr lang="en-US" smtClean="0"/>
-              <a:t>10/3/2026</a:t>
+              <a:t>10/4/2026</a:t>
             </a:fld>
             <a:endParaRPr lang="en-US"/>
           </a:p>
@@ -9866,7 +9866,7 @@
           <a:bodyPr/>
           <a:lstStyle/>
           <a:p>
-            <a:fld id="{030EC083-285A-4D45-98F3-6009BB62C01A}" type="slidenum">
+            <a:fld id="{34BF67FC-BCB9-49F6-958A-F6E3E81E1F27}" type="slidenum">
               <a:rPr lang="en-US" smtClean="0"/>
               <a:t>‹#›</a:t>
             </a:fld>
@@ -9879,7 +9879,7 @@
           <p:cNvPr id="8" name="item_1_title">
             <a:extLst>
               <a:ext uri="{FF2B5EF4-FFF2-40B4-BE49-F238E27FC236}">
-                <a16:creationId xmlns:a16="http://schemas.microsoft.com/office/drawing/2014/main" id="{0089A524-F2D0-5727-A60B-7C1E4E255606}"/>
+                <a16:creationId xmlns:a16="http://schemas.microsoft.com/office/drawing/2014/main" id="{F32E57B0-EC89-9022-D215-AC39449B2969}"/>
               </a:ext>
             </a:extLst>
           </p:cNvPr>
@@ -9929,7 +9929,7 @@
           <p:cNvPr id="9" name="item_1">
             <a:extLst>
               <a:ext uri="{FF2B5EF4-FFF2-40B4-BE49-F238E27FC236}">
-                <a16:creationId xmlns:a16="http://schemas.microsoft.com/office/drawing/2014/main" id="{AB0F9F3B-E5A8-11B0-A098-D31789624890}"/>
+                <a16:creationId xmlns:a16="http://schemas.microsoft.com/office/drawing/2014/main" id="{B8581DA1-0E10-2238-E3DE-6C391502BD2F}"/>
               </a:ext>
             </a:extLst>
           </p:cNvPr>
@@ -9977,7 +9977,7 @@
           <p:cNvPr id="10" name="item_2_title">
             <a:extLst>
               <a:ext uri="{FF2B5EF4-FFF2-40B4-BE49-F238E27FC236}">
-                <a16:creationId xmlns:a16="http://schemas.microsoft.com/office/drawing/2014/main" id="{64D91349-A3D2-C5E4-4B67-8F2D4CBDF47B}"/>
+                <a16:creationId xmlns:a16="http://schemas.microsoft.com/office/drawing/2014/main" id="{4D239F2D-0F62-8FD4-0EB5-2AB1FE8D906F}"/>
               </a:ext>
             </a:extLst>
           </p:cNvPr>
@@ -10030,7 +10030,7 @@
           <p:cNvPr id="11" name="item_2">
             <a:extLst>
               <a:ext uri="{FF2B5EF4-FFF2-40B4-BE49-F238E27FC236}">
-                <a16:creationId xmlns:a16="http://schemas.microsoft.com/office/drawing/2014/main" id="{35BAFBEA-696D-8463-D3DF-059BB193B131}"/>
+                <a16:creationId xmlns:a16="http://schemas.microsoft.com/office/drawing/2014/main" id="{614F3ED1-9E28-B4C7-57F2-2BDC5B658062}"/>
               </a:ext>
             </a:extLst>
           </p:cNvPr>
@@ -10078,7 +10078,7 @@
           <p:cNvPr id="12" name="item_3_title">
             <a:extLst>
               <a:ext uri="{FF2B5EF4-FFF2-40B4-BE49-F238E27FC236}">
-                <a16:creationId xmlns:a16="http://schemas.microsoft.com/office/drawing/2014/main" id="{7BB491BA-F67C-AB9F-CDCE-790ED48ED478}"/>
+                <a16:creationId xmlns:a16="http://schemas.microsoft.com/office/drawing/2014/main" id="{C9BFF87C-3D81-597E-44AA-5EFDBB7624CD}"/>
               </a:ext>
             </a:extLst>
           </p:cNvPr>
@@ -10131,7 +10131,7 @@
           <p:cNvPr id="13" name="item_3">
             <a:extLst>
               <a:ext uri="{FF2B5EF4-FFF2-40B4-BE49-F238E27FC236}">
-                <a16:creationId xmlns:a16="http://schemas.microsoft.com/office/drawing/2014/main" id="{564C8F4C-3F53-0D97-45D3-DFB7C765D7B4}"/>
+                <a16:creationId xmlns:a16="http://schemas.microsoft.com/office/drawing/2014/main" id="{AE5A1076-8C5A-3D85-836E-AF95A06D90D0}"/>
               </a:ext>
             </a:extLst>
           </p:cNvPr>
@@ -10179,7 +10179,7 @@
           <p:cNvPr id="14" name="item_4_title">
             <a:extLst>
               <a:ext uri="{FF2B5EF4-FFF2-40B4-BE49-F238E27FC236}">
-                <a16:creationId xmlns:a16="http://schemas.microsoft.com/office/drawing/2014/main" id="{4D4C7095-D671-64EA-EC8F-E2C156B37D91}"/>
+                <a16:creationId xmlns:a16="http://schemas.microsoft.com/office/drawing/2014/main" id="{4275CDA1-2188-93B5-2FF0-EB7ACB9AB5DE}"/>
               </a:ext>
             </a:extLst>
           </p:cNvPr>
@@ -10232,7 +10232,7 @@
           <p:cNvPr id="15" name="item_4">
             <a:extLst>
               <a:ext uri="{FF2B5EF4-FFF2-40B4-BE49-F238E27FC236}">
-                <a16:creationId xmlns:a16="http://schemas.microsoft.com/office/drawing/2014/main" id="{1CC551E1-D3F0-AA64-D86D-DE0BC0A88116}"/>
+                <a16:creationId xmlns:a16="http://schemas.microsoft.com/office/drawing/2014/main" id="{38A4312A-3BC3-0249-C117-19F1CB345E76}"/>
               </a:ext>
             </a:extLst>
           </p:cNvPr>
@@ -10280,7 +10280,7 @@
           <p:cNvPr id="16" name="source">
             <a:extLst>
               <a:ext uri="{FF2B5EF4-FFF2-40B4-BE49-F238E27FC236}">
-                <a16:creationId xmlns:a16="http://schemas.microsoft.com/office/drawing/2014/main" id="{B5F5E7A2-DF62-2AE8-CBF4-081008AC445C}"/>
+                <a16:creationId xmlns:a16="http://schemas.microsoft.com/office/drawing/2014/main" id="{E1A4A55F-6776-2018-1D28-B8344050FE25}"/>
               </a:ext>
             </a:extLst>
           </p:cNvPr>
@@ -10335,7 +10335,7 @@
     </p:spTree>
     <p:extLst>
       <p:ext uri="{BB962C8B-B14F-4D97-AF65-F5344CB8AC3E}">
-        <p14:creationId xmlns:p14="http://schemas.microsoft.com/office/powerpoint/2010/main" val="1200283526"/>
+        <p14:creationId xmlns:p14="http://schemas.microsoft.com/office/powerpoint/2010/main" val="4105484440"/>
       </p:ext>
     </p:extLst>
   </p:cSld>
@@ -10367,7 +10367,7 @@
           <p:cNvPr id="7" name="creative_background">
             <a:extLst>
               <a:ext uri="{FF2B5EF4-FFF2-40B4-BE49-F238E27FC236}">
-                <a16:creationId xmlns:a16="http://schemas.microsoft.com/office/drawing/2014/main" id="{3A6BA556-0BC7-6E28-E1D3-18121E215535}"/>
+                <a16:creationId xmlns:a16="http://schemas.microsoft.com/office/drawing/2014/main" id="{3052BFB3-D761-D8B9-8C1B-C01AD749D965}"/>
               </a:ext>
             </a:extLst>
           </p:cNvPr>
@@ -10450,9 +10450,9 @@
           <a:bodyPr/>
           <a:lstStyle/>
           <a:p>
-            <a:fld id="{D8887631-421A-4B90-81F4-114CAE3EC1BA}" type="datetimeFigureOut">
+            <a:fld id="{6456BABC-F92F-414F-A0E9-B90674473BDD}" type="datetimeFigureOut">
               <a:rPr lang="en-US" smtClean="0"/>
-              <a:t>10/3/2026</a:t>
+              <a:t>10/4/2026</a:t>
             </a:fld>
             <a:endParaRPr lang="en-US"/>
           </a:p>
@@ -10492,7 +10492,7 @@
           <a:bodyPr/>
           <a:lstStyle/>
           <a:p>
-            <a:fld id="{030EC083-285A-4D45-98F3-6009BB62C01A}" type="slidenum">
+            <a:fld id="{34BF67FC-BCB9-49F6-958A-F6E3E81E1F27}" type="slidenum">
               <a:rPr lang="en-US" smtClean="0"/>
               <a:t>‹#›</a:t>
             </a:fld>
@@ -10505,7 +10505,7 @@
           <p:cNvPr id="8" name="body">
             <a:extLst>
               <a:ext uri="{FF2B5EF4-FFF2-40B4-BE49-F238E27FC236}">
-                <a16:creationId xmlns:a16="http://schemas.microsoft.com/office/drawing/2014/main" id="{502BC4DA-3574-4D47-66FC-90A489FA32E9}"/>
+                <a16:creationId xmlns:a16="http://schemas.microsoft.com/office/drawing/2014/main" id="{8C8978F3-27F1-144F-9B59-13E43FD6C03F}"/>
               </a:ext>
             </a:extLst>
           </p:cNvPr>
@@ -10550,7 +10550,7 @@
           <p:cNvPr id="9" name="source">
             <a:extLst>
               <a:ext uri="{FF2B5EF4-FFF2-40B4-BE49-F238E27FC236}">
-                <a16:creationId xmlns:a16="http://schemas.microsoft.com/office/drawing/2014/main" id="{A5E59367-109A-1329-93C8-4C4FA39A0585}"/>
+                <a16:creationId xmlns:a16="http://schemas.microsoft.com/office/drawing/2014/main" id="{9FB586C4-6615-5FB1-3887-85366ABCCD63}"/>
               </a:ext>
             </a:extLst>
           </p:cNvPr>
@@ -10605,7 +10605,7 @@
     </p:spTree>
     <p:extLst>
       <p:ext uri="{BB962C8B-B14F-4D97-AF65-F5344CB8AC3E}">
-        <p14:creationId xmlns:p14="http://schemas.microsoft.com/office/powerpoint/2010/main" val="3617757885"/>
+        <p14:creationId xmlns:p14="http://schemas.microsoft.com/office/powerpoint/2010/main" val="1060128540"/>
       </p:ext>
     </p:extLst>
   </p:cSld>
@@ -10637,7 +10637,7 @@
           <p:cNvPr id="7" name="creative_background">
             <a:extLst>
               <a:ext uri="{FF2B5EF4-FFF2-40B4-BE49-F238E27FC236}">
-                <a16:creationId xmlns:a16="http://schemas.microsoft.com/office/drawing/2014/main" id="{8B2B5949-4562-5A7C-6B01-6312E93FBDB3}"/>
+                <a16:creationId xmlns:a16="http://schemas.microsoft.com/office/drawing/2014/main" id="{1D275C45-97F3-B021-3CD0-0D830F256EE4}"/>
               </a:ext>
             </a:extLst>
           </p:cNvPr>
@@ -10720,9 +10720,9 @@
           <a:bodyPr/>
           <a:lstStyle/>
           <a:p>
-            <a:fld id="{D8887631-421A-4B90-81F4-114CAE3EC1BA}" type="datetimeFigureOut">
+            <a:fld id="{6456BABC-F92F-414F-A0E9-B90674473BDD}" type="datetimeFigureOut">
               <a:rPr lang="en-US" smtClean="0"/>
-              <a:t>10/3/2026</a:t>
+              <a:t>10/4/2026</a:t>
             </a:fld>
             <a:endParaRPr lang="en-US"/>
           </a:p>
@@ -10762,7 +10762,7 @@
           <a:bodyPr/>
           <a:lstStyle/>
           <a:p>
-            <a:fld id="{030EC083-285A-4D45-98F3-6009BB62C01A}" type="slidenum">
+            <a:fld id="{34BF67FC-BCB9-49F6-958A-F6E3E81E1F27}" type="slidenum">
               <a:rPr lang="en-US" smtClean="0"/>
               <a:t>‹#›</a:t>
             </a:fld>
@@ -10775,7 +10775,7 @@
           <p:cNvPr id="8" name="item_1_title">
             <a:extLst>
               <a:ext uri="{FF2B5EF4-FFF2-40B4-BE49-F238E27FC236}">
-                <a16:creationId xmlns:a16="http://schemas.microsoft.com/office/drawing/2014/main" id="{F8B8DCEC-A5D3-9D99-47E4-9E95168880FA}"/>
+                <a16:creationId xmlns:a16="http://schemas.microsoft.com/office/drawing/2014/main" id="{6AB64375-E012-6A61-691B-170F06F791DC}"/>
               </a:ext>
             </a:extLst>
           </p:cNvPr>
@@ -10825,7 +10825,7 @@
           <p:cNvPr id="9" name="item_1">
             <a:extLst>
               <a:ext uri="{FF2B5EF4-FFF2-40B4-BE49-F238E27FC236}">
-                <a16:creationId xmlns:a16="http://schemas.microsoft.com/office/drawing/2014/main" id="{334C697F-0F53-D125-B64A-38AA143F672C}"/>
+                <a16:creationId xmlns:a16="http://schemas.microsoft.com/office/drawing/2014/main" id="{095EE44F-2CC5-9220-6572-361EA35C89FF}"/>
               </a:ext>
             </a:extLst>
           </p:cNvPr>
@@ -10873,7 +10873,7 @@
           <p:cNvPr id="10" name="item_2_title">
             <a:extLst>
               <a:ext uri="{FF2B5EF4-FFF2-40B4-BE49-F238E27FC236}">
-                <a16:creationId xmlns:a16="http://schemas.microsoft.com/office/drawing/2014/main" id="{23BE62A1-0220-89F4-14E0-C3F1893E1C7F}"/>
+                <a16:creationId xmlns:a16="http://schemas.microsoft.com/office/drawing/2014/main" id="{58987EC1-644E-5A01-41CD-269FE0B8FA97}"/>
               </a:ext>
             </a:extLst>
           </p:cNvPr>
@@ -10926,7 +10926,7 @@
           <p:cNvPr id="11" name="item_2">
             <a:extLst>
               <a:ext uri="{FF2B5EF4-FFF2-40B4-BE49-F238E27FC236}">
-                <a16:creationId xmlns:a16="http://schemas.microsoft.com/office/drawing/2014/main" id="{C7B78F10-8F04-2D56-0ED2-90A007343525}"/>
+                <a16:creationId xmlns:a16="http://schemas.microsoft.com/office/drawing/2014/main" id="{E31204D3-87EB-62A4-AB47-C817334E69A8}"/>
               </a:ext>
             </a:extLst>
           </p:cNvPr>
@@ -10974,7 +10974,7 @@
           <p:cNvPr id="12" name="item_3_title">
             <a:extLst>
               <a:ext uri="{FF2B5EF4-FFF2-40B4-BE49-F238E27FC236}">
-                <a16:creationId xmlns:a16="http://schemas.microsoft.com/office/drawing/2014/main" id="{9B709E6D-86D4-4B59-3E73-963445736CFD}"/>
+                <a16:creationId xmlns:a16="http://schemas.microsoft.com/office/drawing/2014/main" id="{0FB05602-AEC8-E40A-4484-8D77106A6623}"/>
               </a:ext>
             </a:extLst>
           </p:cNvPr>
@@ -11027,7 +11027,7 @@
           <p:cNvPr id="13" name="item_3">
             <a:extLst>
               <a:ext uri="{FF2B5EF4-FFF2-40B4-BE49-F238E27FC236}">
-                <a16:creationId xmlns:a16="http://schemas.microsoft.com/office/drawing/2014/main" id="{706DBCB1-BA70-985F-0C28-89A0220FC4B9}"/>
+                <a16:creationId xmlns:a16="http://schemas.microsoft.com/office/drawing/2014/main" id="{16D42138-98A2-DD23-7549-F51C92ECFD9A}"/>
               </a:ext>
             </a:extLst>
           </p:cNvPr>
@@ -11075,7 +11075,7 @@
           <p:cNvPr id="14" name="item_4_title">
             <a:extLst>
               <a:ext uri="{FF2B5EF4-FFF2-40B4-BE49-F238E27FC236}">
-                <a16:creationId xmlns:a16="http://schemas.microsoft.com/office/drawing/2014/main" id="{CA1AD4C8-7B8A-6741-7E4F-9F0B6935875F}"/>
+                <a16:creationId xmlns:a16="http://schemas.microsoft.com/office/drawing/2014/main" id="{8BDAF31A-D62E-4A58-FC9A-C99BC80611D0}"/>
               </a:ext>
             </a:extLst>
           </p:cNvPr>
@@ -11128,7 +11128,7 @@
           <p:cNvPr id="15" name="item_4">
             <a:extLst>
               <a:ext uri="{FF2B5EF4-FFF2-40B4-BE49-F238E27FC236}">
-                <a16:creationId xmlns:a16="http://schemas.microsoft.com/office/drawing/2014/main" id="{7F8FBD56-0433-2289-E1B2-7FAC932462E7}"/>
+                <a16:creationId xmlns:a16="http://schemas.microsoft.com/office/drawing/2014/main" id="{B3E823C1-C7ED-2945-2440-DCCD9BD28AC9}"/>
               </a:ext>
             </a:extLst>
           </p:cNvPr>
@@ -11176,7 +11176,7 @@
           <p:cNvPr id="16" name="source">
             <a:extLst>
               <a:ext uri="{FF2B5EF4-FFF2-40B4-BE49-F238E27FC236}">
-                <a16:creationId xmlns:a16="http://schemas.microsoft.com/office/drawing/2014/main" id="{791E7608-CE8E-C8D0-9B2A-E38136BAB25D}"/>
+                <a16:creationId xmlns:a16="http://schemas.microsoft.com/office/drawing/2014/main" id="{F5B99AF9-B241-FA6A-2CAA-6D139911012B}"/>
               </a:ext>
             </a:extLst>
           </p:cNvPr>
@@ -11231,7 +11231,7 @@
     </p:spTree>
     <p:extLst>
       <p:ext uri="{BB962C8B-B14F-4D97-AF65-F5344CB8AC3E}">
-        <p14:creationId xmlns:p14="http://schemas.microsoft.com/office/powerpoint/2010/main" val="1838223051"/>
+        <p14:creationId xmlns:p14="http://schemas.microsoft.com/office/powerpoint/2010/main" val="3822291125"/>
       </p:ext>
     </p:extLst>
   </p:cSld>
@@ -11263,7 +11263,7 @@
           <p:cNvPr id="7" name="creative_background">
             <a:extLst>
               <a:ext uri="{FF2B5EF4-FFF2-40B4-BE49-F238E27FC236}">
-                <a16:creationId xmlns:a16="http://schemas.microsoft.com/office/drawing/2014/main" id="{674BC3CE-0D70-438A-75C2-DFB3DEB65684}"/>
+                <a16:creationId xmlns:a16="http://schemas.microsoft.com/office/drawing/2014/main" id="{42AA698C-AFEC-4506-160C-4187359280F5}"/>
               </a:ext>
             </a:extLst>
           </p:cNvPr>
@@ -11346,9 +11346,9 @@
           <a:bodyPr/>
           <a:lstStyle/>
           <a:p>
-            <a:fld id="{D8887631-421A-4B90-81F4-114CAE3EC1BA}" type="datetimeFigureOut">
+            <a:fld id="{6456BABC-F92F-414F-A0E9-B90674473BDD}" type="datetimeFigureOut">
               <a:rPr lang="en-US" smtClean="0"/>
-              <a:t>10/3/2026</a:t>
+              <a:t>10/4/2026</a:t>
             </a:fld>
             <a:endParaRPr lang="en-US"/>
           </a:p>
@@ -11388,7 +11388,7 @@
           <a:bodyPr/>
           <a:lstStyle/>
           <a:p>
-            <a:fld id="{030EC083-285A-4D45-98F3-6009BB62C01A}" type="slidenum">
+            <a:fld id="{34BF67FC-BCB9-49F6-958A-F6E3E81E1F27}" type="slidenum">
               <a:rPr lang="en-US" smtClean="0"/>
               <a:t>‹#›</a:t>
             </a:fld>
@@ -11401,7 +11401,7 @@
           <p:cNvPr id="8" name="body">
             <a:extLst>
               <a:ext uri="{FF2B5EF4-FFF2-40B4-BE49-F238E27FC236}">
-                <a16:creationId xmlns:a16="http://schemas.microsoft.com/office/drawing/2014/main" id="{5F33BDFE-F705-07F4-50B5-B47FBF3C1C62}"/>
+                <a16:creationId xmlns:a16="http://schemas.microsoft.com/office/drawing/2014/main" id="{F6DC210C-50C5-C095-8E2B-51401E6DF0A7}"/>
               </a:ext>
             </a:extLst>
           </p:cNvPr>
@@ -11441,7 +11441,7 @@
           <p:cNvPr id="9" name="kpi_value_1">
             <a:extLst>
               <a:ext uri="{FF2B5EF4-FFF2-40B4-BE49-F238E27FC236}">
-                <a16:creationId xmlns:a16="http://schemas.microsoft.com/office/drawing/2014/main" id="{EAB1FF35-EBC6-3E1E-00AC-6B69D8AEF697}"/>
+                <a16:creationId xmlns:a16="http://schemas.microsoft.com/office/drawing/2014/main" id="{E01D317F-ED97-5CEB-0533-858B1232BDCE}"/>
               </a:ext>
             </a:extLst>
           </p:cNvPr>
@@ -11494,7 +11494,7 @@
           <p:cNvPr id="10" name="kpi_label_1">
             <a:extLst>
               <a:ext uri="{FF2B5EF4-FFF2-40B4-BE49-F238E27FC236}">
-                <a16:creationId xmlns:a16="http://schemas.microsoft.com/office/drawing/2014/main" id="{88FC4C86-7FAB-1176-6E16-EE6ED8B7C8FE}"/>
+                <a16:creationId xmlns:a16="http://schemas.microsoft.com/office/drawing/2014/main" id="{9742E636-D72B-5549-F549-F2ED00903FD6}"/>
               </a:ext>
             </a:extLst>
           </p:cNvPr>
@@ -11542,7 +11542,7 @@
           <p:cNvPr id="11" name="source">
             <a:extLst>
               <a:ext uri="{FF2B5EF4-FFF2-40B4-BE49-F238E27FC236}">
-                <a16:creationId xmlns:a16="http://schemas.microsoft.com/office/drawing/2014/main" id="{9B8FF99D-1F69-4526-63F6-EC052AECFB64}"/>
+                <a16:creationId xmlns:a16="http://schemas.microsoft.com/office/drawing/2014/main" id="{682CE8ED-6C42-1919-0982-16E7C2ABF9E4}"/>
               </a:ext>
             </a:extLst>
           </p:cNvPr>
@@ -11597,7 +11597,7 @@
     </p:spTree>
     <p:extLst>
       <p:ext uri="{BB962C8B-B14F-4D97-AF65-F5344CB8AC3E}">
-        <p14:creationId xmlns:p14="http://schemas.microsoft.com/office/powerpoint/2010/main" val="525294267"/>
+        <p14:creationId xmlns:p14="http://schemas.microsoft.com/office/powerpoint/2010/main" val="2671846481"/>
       </p:ext>
     </p:extLst>
   </p:cSld>
@@ -11629,7 +11629,7 @@
           <p:cNvPr id="7" name="creative_background">
             <a:extLst>
               <a:ext uri="{FF2B5EF4-FFF2-40B4-BE49-F238E27FC236}">
-                <a16:creationId xmlns:a16="http://schemas.microsoft.com/office/drawing/2014/main" id="{2D588195-7175-7D33-319D-30E8BABDF123}"/>
+                <a16:creationId xmlns:a16="http://schemas.microsoft.com/office/drawing/2014/main" id="{F74B0506-4685-B2BF-2745-EAB482BAEF20}"/>
               </a:ext>
             </a:extLst>
           </p:cNvPr>
@@ -11712,9 +11712,9 @@
           <a:bodyPr/>
           <a:lstStyle/>
           <a:p>
-            <a:fld id="{D8887631-421A-4B90-81F4-114CAE3EC1BA}" type="datetimeFigureOut">
+            <a:fld id="{6456BABC-F92F-414F-A0E9-B90674473BDD}" type="datetimeFigureOut">
               <a:rPr lang="en-US" smtClean="0"/>
-              <a:t>10/3/2026</a:t>
+              <a:t>10/4/2026</a:t>
             </a:fld>
             <a:endParaRPr lang="en-US"/>
           </a:p>
@@ -11754,7 +11754,7 @@
           <a:bodyPr/>
           <a:lstStyle/>
           <a:p>
-            <a:fld id="{030EC083-285A-4D45-98F3-6009BB62C01A}" type="slidenum">
+            <a:fld id="{34BF67FC-BCB9-49F6-958A-F6E3E81E1F27}" type="slidenum">
               <a:rPr lang="en-US" smtClean="0"/>
               <a:t>‹#›</a:t>
             </a:fld>
@@ -11767,7 +11767,7 @@
           <p:cNvPr id="8" name="body">
             <a:extLst>
               <a:ext uri="{FF2B5EF4-FFF2-40B4-BE49-F238E27FC236}">
-                <a16:creationId xmlns:a16="http://schemas.microsoft.com/office/drawing/2014/main" id="{42DF423B-ACA7-2A4F-C533-A5BF6FE13A77}"/>
+                <a16:creationId xmlns:a16="http://schemas.microsoft.com/office/drawing/2014/main" id="{3856CC4B-2C25-F0EF-FCA1-EBD7C19B4929}"/>
               </a:ext>
             </a:extLst>
           </p:cNvPr>
@@ -11807,7 +11807,7 @@
           <p:cNvPr id="9" name="kpi_value_1">
             <a:extLst>
               <a:ext uri="{FF2B5EF4-FFF2-40B4-BE49-F238E27FC236}">
-                <a16:creationId xmlns:a16="http://schemas.microsoft.com/office/drawing/2014/main" id="{F3FE3AE2-3578-4A80-2F48-34B1C323110A}"/>
+                <a16:creationId xmlns:a16="http://schemas.microsoft.com/office/drawing/2014/main" id="{ABB203ED-E15D-7CB0-C363-0B62FF170913}"/>
               </a:ext>
             </a:extLst>
           </p:cNvPr>
@@ -11860,7 +11860,7 @@
           <p:cNvPr id="10" name="kpi_label_1">
             <a:extLst>
               <a:ext uri="{FF2B5EF4-FFF2-40B4-BE49-F238E27FC236}">
-                <a16:creationId xmlns:a16="http://schemas.microsoft.com/office/drawing/2014/main" id="{BC577F0C-640F-0367-BA6B-1FAA661FC108}"/>
+                <a16:creationId xmlns:a16="http://schemas.microsoft.com/office/drawing/2014/main" id="{F5508797-08E1-7DB9-60A3-12221076CACE}"/>
               </a:ext>
             </a:extLst>
           </p:cNvPr>
@@ -11908,7 +11908,7 @@
           <p:cNvPr id="11" name="kpi_value_2">
             <a:extLst>
               <a:ext uri="{FF2B5EF4-FFF2-40B4-BE49-F238E27FC236}">
-                <a16:creationId xmlns:a16="http://schemas.microsoft.com/office/drawing/2014/main" id="{44B5A912-D176-ACE0-A349-152FF6859E95}"/>
+                <a16:creationId xmlns:a16="http://schemas.microsoft.com/office/drawing/2014/main" id="{73879EAF-C015-0A39-3EAE-D95880A830DE}"/>
               </a:ext>
             </a:extLst>
           </p:cNvPr>
@@ -11961,7 +11961,7 @@
           <p:cNvPr id="12" name="kpi_label_2">
             <a:extLst>
               <a:ext uri="{FF2B5EF4-FFF2-40B4-BE49-F238E27FC236}">
-                <a16:creationId xmlns:a16="http://schemas.microsoft.com/office/drawing/2014/main" id="{6F66F821-1302-0A2F-9383-ACFF1D623EDA}"/>
+                <a16:creationId xmlns:a16="http://schemas.microsoft.com/office/drawing/2014/main" id="{764A2950-088C-4CAC-A021-C2145E0D59DD}"/>
               </a:ext>
             </a:extLst>
           </p:cNvPr>
@@ -12009,7 +12009,7 @@
           <p:cNvPr id="13" name="kpi_value_3">
             <a:extLst>
               <a:ext uri="{FF2B5EF4-FFF2-40B4-BE49-F238E27FC236}">
-                <a16:creationId xmlns:a16="http://schemas.microsoft.com/office/drawing/2014/main" id="{26C03958-4845-C50A-D002-4731F8439096}"/>
+                <a16:creationId xmlns:a16="http://schemas.microsoft.com/office/drawing/2014/main" id="{666B2BBC-3FAA-AA09-84D7-7A455ED0F694}"/>
               </a:ext>
             </a:extLst>
           </p:cNvPr>
@@ -12062,7 +12062,7 @@
           <p:cNvPr id="14" name="kpi_label_3">
             <a:extLst>
               <a:ext uri="{FF2B5EF4-FFF2-40B4-BE49-F238E27FC236}">
-                <a16:creationId xmlns:a16="http://schemas.microsoft.com/office/drawing/2014/main" id="{B56AA25A-1F26-8DB4-F253-8744096A26A4}"/>
+                <a16:creationId xmlns:a16="http://schemas.microsoft.com/office/drawing/2014/main" id="{59209872-BB09-813D-BEF8-16281218F63E}"/>
               </a:ext>
             </a:extLst>
           </p:cNvPr>
@@ -12110,7 +12110,7 @@
           <p:cNvPr id="15" name="kpi_value_4">
             <a:extLst>
               <a:ext uri="{FF2B5EF4-FFF2-40B4-BE49-F238E27FC236}">
-                <a16:creationId xmlns:a16="http://schemas.microsoft.com/office/drawing/2014/main" id="{D7870A5C-84CC-ECCB-CB91-ED7153B53537}"/>
+                <a16:creationId xmlns:a16="http://schemas.microsoft.com/office/drawing/2014/main" id="{56043670-FCBA-6766-3F61-A0E6A8D45CCC}"/>
               </a:ext>
             </a:extLst>
           </p:cNvPr>
@@ -12163,7 +12163,7 @@
           <p:cNvPr id="16" name="kpi_label_4">
             <a:extLst>
               <a:ext uri="{FF2B5EF4-FFF2-40B4-BE49-F238E27FC236}">
-                <a16:creationId xmlns:a16="http://schemas.microsoft.com/office/drawing/2014/main" id="{8EAD38C5-4E13-7A94-326B-F05B35F2EAC1}"/>
+                <a16:creationId xmlns:a16="http://schemas.microsoft.com/office/drawing/2014/main" id="{B5586620-49B9-78C0-A8FE-B596DF6F515C}"/>
               </a:ext>
             </a:extLst>
           </p:cNvPr>
@@ -12211,7 +12211,7 @@
           <p:cNvPr id="17" name="source">
             <a:extLst>
               <a:ext uri="{FF2B5EF4-FFF2-40B4-BE49-F238E27FC236}">
-                <a16:creationId xmlns:a16="http://schemas.microsoft.com/office/drawing/2014/main" id="{7188DB7A-E094-11DC-3410-04E4790822E9}"/>
+                <a16:creationId xmlns:a16="http://schemas.microsoft.com/office/drawing/2014/main" id="{67EF3C2A-86D3-3997-9673-6822FD16794A}"/>
               </a:ext>
             </a:extLst>
           </p:cNvPr>
@@ -12266,7 +12266,7 @@
     </p:spTree>
     <p:extLst>
       <p:ext uri="{BB962C8B-B14F-4D97-AF65-F5344CB8AC3E}">
-        <p14:creationId xmlns:p14="http://schemas.microsoft.com/office/powerpoint/2010/main" val="2182479485"/>
+        <p14:creationId xmlns:p14="http://schemas.microsoft.com/office/powerpoint/2010/main" val="4222296680"/>
       </p:ext>
     </p:extLst>
   </p:cSld>
@@ -12298,7 +12298,7 @@
           <p:cNvPr id="7" name="creative_background">
             <a:extLst>
               <a:ext uri="{FF2B5EF4-FFF2-40B4-BE49-F238E27FC236}">
-                <a16:creationId xmlns:a16="http://schemas.microsoft.com/office/drawing/2014/main" id="{E36147AD-50A2-A4FD-E754-91966993A9A1}"/>
+                <a16:creationId xmlns:a16="http://schemas.microsoft.com/office/drawing/2014/main" id="{9B55C68D-C0EC-5435-0510-842DC171FE60}"/>
               </a:ext>
             </a:extLst>
           </p:cNvPr>
@@ -12381,9 +12381,9 @@
           <a:bodyPr/>
           <a:lstStyle/>
           <a:p>
-            <a:fld id="{D8887631-421A-4B90-81F4-114CAE3EC1BA}" type="datetimeFigureOut">
+            <a:fld id="{6456BABC-F92F-414F-A0E9-B90674473BDD}" type="datetimeFigureOut">
               <a:rPr lang="en-US" smtClean="0"/>
-              <a:t>10/3/2026</a:t>
+              <a:t>10/4/2026</a:t>
             </a:fld>
             <a:endParaRPr lang="en-US"/>
           </a:p>
@@ -12423,7 +12423,7 @@
           <a:bodyPr/>
           <a:lstStyle/>
           <a:p>
-            <a:fld id="{030EC083-285A-4D45-98F3-6009BB62C01A}" type="slidenum">
+            <a:fld id="{34BF67FC-BCB9-49F6-958A-F6E3E81E1F27}" type="slidenum">
               <a:rPr lang="en-US" smtClean="0"/>
               <a:t>‹#›</a:t>
             </a:fld>
@@ -12436,7 +12436,7 @@
           <p:cNvPr id="8" name="body">
             <a:extLst>
               <a:ext uri="{FF2B5EF4-FFF2-40B4-BE49-F238E27FC236}">
-                <a16:creationId xmlns:a16="http://schemas.microsoft.com/office/drawing/2014/main" id="{4E4CFB07-0D0F-8132-A442-050F8A33FF6A}"/>
+                <a16:creationId xmlns:a16="http://schemas.microsoft.com/office/drawing/2014/main" id="{401CE891-4FA0-DA59-7455-7B01BDFADD96}"/>
               </a:ext>
             </a:extLst>
           </p:cNvPr>
@@ -12476,7 +12476,7 @@
           <p:cNvPr id="9" name="kpi_value_1">
             <a:extLst>
               <a:ext uri="{FF2B5EF4-FFF2-40B4-BE49-F238E27FC236}">
-                <a16:creationId xmlns:a16="http://schemas.microsoft.com/office/drawing/2014/main" id="{1A944D52-833E-E9BC-E9F1-4D9F3CB6A7CB}"/>
+                <a16:creationId xmlns:a16="http://schemas.microsoft.com/office/drawing/2014/main" id="{6E365BFB-4B6C-162D-E196-73A9EC0D944A}"/>
               </a:ext>
             </a:extLst>
           </p:cNvPr>
@@ -12529,7 +12529,7 @@
           <p:cNvPr id="10" name="kpi_label_1">
             <a:extLst>
               <a:ext uri="{FF2B5EF4-FFF2-40B4-BE49-F238E27FC236}">
-                <a16:creationId xmlns:a16="http://schemas.microsoft.com/office/drawing/2014/main" id="{7753B592-9650-3B07-D935-6A08CBADFCB5}"/>
+                <a16:creationId xmlns:a16="http://schemas.microsoft.com/office/drawing/2014/main" id="{2FA3A59A-F122-68BD-DF0B-A24F7445FEF7}"/>
               </a:ext>
             </a:extLst>
           </p:cNvPr>
@@ -12577,7 +12577,7 @@
           <p:cNvPr id="11" name="kpi_value_2">
             <a:extLst>
               <a:ext uri="{FF2B5EF4-FFF2-40B4-BE49-F238E27FC236}">
-                <a16:creationId xmlns:a16="http://schemas.microsoft.com/office/drawing/2014/main" id="{6A2AFA44-9EB0-A42C-4F4F-86771B89F6A9}"/>
+                <a16:creationId xmlns:a16="http://schemas.microsoft.com/office/drawing/2014/main" id="{DCB757EC-80C1-4E27-C280-588CDE750384}"/>
               </a:ext>
             </a:extLst>
           </p:cNvPr>
@@ -12630,7 +12630,7 @@
           <p:cNvPr id="12" name="kpi_label_2">
             <a:extLst>
               <a:ext uri="{FF2B5EF4-FFF2-40B4-BE49-F238E27FC236}">
-                <a16:creationId xmlns:a16="http://schemas.microsoft.com/office/drawing/2014/main" id="{45767EA7-4824-5659-FECC-377EB5F8E7A4}"/>
+                <a16:creationId xmlns:a16="http://schemas.microsoft.com/office/drawing/2014/main" id="{17B311DE-B564-6DBD-65EC-4B3FBD0E8498}"/>
               </a:ext>
             </a:extLst>
           </p:cNvPr>
@@ -12678,7 +12678,7 @@
           <p:cNvPr id="13" name="source">
             <a:extLst>
               <a:ext uri="{FF2B5EF4-FFF2-40B4-BE49-F238E27FC236}">
-                <a16:creationId xmlns:a16="http://schemas.microsoft.com/office/drawing/2014/main" id="{DA7806EA-C686-6984-91BF-01C30D0D64C2}"/>
+                <a16:creationId xmlns:a16="http://schemas.microsoft.com/office/drawing/2014/main" id="{8BE3A6CE-E65C-A672-C3EF-CB4545322176}"/>
               </a:ext>
             </a:extLst>
           </p:cNvPr>
@@ -12733,7 +12733,7 @@
     </p:spTree>
     <p:extLst>
       <p:ext uri="{BB962C8B-B14F-4D97-AF65-F5344CB8AC3E}">
-        <p14:creationId xmlns:p14="http://schemas.microsoft.com/office/powerpoint/2010/main" val="1836186835"/>
+        <p14:creationId xmlns:p14="http://schemas.microsoft.com/office/powerpoint/2010/main" val="4069023206"/>
       </p:ext>
     </p:extLst>
   </p:cSld>
@@ -12765,7 +12765,7 @@
           <p:cNvPr id="7" name="creative_background">
             <a:extLst>
               <a:ext uri="{FF2B5EF4-FFF2-40B4-BE49-F238E27FC236}">
-                <a16:creationId xmlns:a16="http://schemas.microsoft.com/office/drawing/2014/main" id="{084B9E5E-668D-D086-15BD-3B9493FF1A64}"/>
+                <a16:creationId xmlns:a16="http://schemas.microsoft.com/office/drawing/2014/main" id="{E012B7C4-1138-4E5F-0DB0-9CF58FC26A7D}"/>
               </a:ext>
             </a:extLst>
           </p:cNvPr>
@@ -12848,9 +12848,9 @@
           <a:bodyPr/>
           <a:lstStyle/>
           <a:p>
-            <a:fld id="{D8887631-421A-4B90-81F4-114CAE3EC1BA}" type="datetimeFigureOut">
+            <a:fld id="{6456BABC-F92F-414F-A0E9-B90674473BDD}" type="datetimeFigureOut">
               <a:rPr lang="en-US" smtClean="0"/>
-              <a:t>10/3/2026</a:t>
+              <a:t>10/4/2026</a:t>
             </a:fld>
             <a:endParaRPr lang="en-US"/>
           </a:p>
@@ -12890,7 +12890,7 @@
           <a:bodyPr/>
           <a:lstStyle/>
           <a:p>
-            <a:fld id="{030EC083-285A-4D45-98F3-6009BB62C01A}" type="slidenum">
+            <a:fld id="{34BF67FC-BCB9-49F6-958A-F6E3E81E1F27}" type="slidenum">
               <a:rPr lang="en-US" smtClean="0"/>
               <a:t>‹#›</a:t>
             </a:fld>
@@ -12903,7 +12903,7 @@
           <p:cNvPr id="8" name="body">
             <a:extLst>
               <a:ext uri="{FF2B5EF4-FFF2-40B4-BE49-F238E27FC236}">
-                <a16:creationId xmlns:a16="http://schemas.microsoft.com/office/drawing/2014/main" id="{1295F5CC-86EC-C65F-6583-7EFEA7AC61BB}"/>
+                <a16:creationId xmlns:a16="http://schemas.microsoft.com/office/drawing/2014/main" id="{C33C4555-58A2-CCC8-E22A-87AD8A7972CD}"/>
               </a:ext>
             </a:extLst>
           </p:cNvPr>
@@ -12943,7 +12943,7 @@
           <p:cNvPr id="9" name="kpi_value_1">
             <a:extLst>
               <a:ext uri="{FF2B5EF4-FFF2-40B4-BE49-F238E27FC236}">
-                <a16:creationId xmlns:a16="http://schemas.microsoft.com/office/drawing/2014/main" id="{D0897CD4-9811-A0FD-36F7-E8E63B0E5920}"/>
+                <a16:creationId xmlns:a16="http://schemas.microsoft.com/office/drawing/2014/main" id="{2736974F-4782-C845-CA02-1AED50F14D9A}"/>
               </a:ext>
             </a:extLst>
           </p:cNvPr>
@@ -12996,7 +12996,7 @@
           <p:cNvPr id="10" name="kpi_label_1">
             <a:extLst>
               <a:ext uri="{FF2B5EF4-FFF2-40B4-BE49-F238E27FC236}">
-                <a16:creationId xmlns:a16="http://schemas.microsoft.com/office/drawing/2014/main" id="{ABB13779-7C5F-C49E-0FA2-AFFC4D7429AC}"/>
+                <a16:creationId xmlns:a16="http://schemas.microsoft.com/office/drawing/2014/main" id="{41A095AA-F8FA-17F8-7336-3062751B99CB}"/>
               </a:ext>
             </a:extLst>
           </p:cNvPr>
@@ -13044,7 +13044,7 @@
           <p:cNvPr id="11" name="kpi_value_2">
             <a:extLst>
               <a:ext uri="{FF2B5EF4-FFF2-40B4-BE49-F238E27FC236}">
-                <a16:creationId xmlns:a16="http://schemas.microsoft.com/office/drawing/2014/main" id="{B12093DA-72BF-D091-F14D-CC6365052692}"/>
+                <a16:creationId xmlns:a16="http://schemas.microsoft.com/office/drawing/2014/main" id="{138E623E-E6A3-50AC-649C-644038097D87}"/>
               </a:ext>
             </a:extLst>
           </p:cNvPr>
@@ -13097,7 +13097,7 @@
           <p:cNvPr id="12" name="kpi_label_2">
             <a:extLst>
               <a:ext uri="{FF2B5EF4-FFF2-40B4-BE49-F238E27FC236}">
-                <a16:creationId xmlns:a16="http://schemas.microsoft.com/office/drawing/2014/main" id="{B746F3CA-FB86-2CF4-0E88-0565C2FEE68F}"/>
+                <a16:creationId xmlns:a16="http://schemas.microsoft.com/office/drawing/2014/main" id="{3F22298D-0F7D-409C-912C-D93456C0E581}"/>
               </a:ext>
             </a:extLst>
           </p:cNvPr>
@@ -13145,7 +13145,7 @@
           <p:cNvPr id="13" name="kpi_value_3">
             <a:extLst>
               <a:ext uri="{FF2B5EF4-FFF2-40B4-BE49-F238E27FC236}">
-                <a16:creationId xmlns:a16="http://schemas.microsoft.com/office/drawing/2014/main" id="{F767DEB8-DE26-7BFD-0F13-B39983E6BF78}"/>
+                <a16:creationId xmlns:a16="http://schemas.microsoft.com/office/drawing/2014/main" id="{E4AFE87C-887B-50F8-B89E-605D872369DF}"/>
               </a:ext>
             </a:extLst>
           </p:cNvPr>
@@ -13198,7 +13198,7 @@
           <p:cNvPr id="14" name="kpi_label_3">
             <a:extLst>
               <a:ext uri="{FF2B5EF4-FFF2-40B4-BE49-F238E27FC236}">
-                <a16:creationId xmlns:a16="http://schemas.microsoft.com/office/drawing/2014/main" id="{716B4D5F-D2D0-C192-7459-04ECFB56A722}"/>
+                <a16:creationId xmlns:a16="http://schemas.microsoft.com/office/drawing/2014/main" id="{C92E41FC-644D-4735-FDAF-3F752A590C62}"/>
               </a:ext>
             </a:extLst>
           </p:cNvPr>
@@ -13246,7 +13246,7 @@
           <p:cNvPr id="15" name="kpi_value_4">
             <a:extLst>
               <a:ext uri="{FF2B5EF4-FFF2-40B4-BE49-F238E27FC236}">
-                <a16:creationId xmlns:a16="http://schemas.microsoft.com/office/drawing/2014/main" id="{6F6A6204-4613-A3B7-7C21-BD0F480EF0B1}"/>
+                <a16:creationId xmlns:a16="http://schemas.microsoft.com/office/drawing/2014/main" id="{307453AE-CF73-ED27-B09C-1A6D5E07509F}"/>
               </a:ext>
             </a:extLst>
           </p:cNvPr>
@@ -13299,7 +13299,7 @@
           <p:cNvPr id="16" name="kpi_label_4">
             <a:extLst>
               <a:ext uri="{FF2B5EF4-FFF2-40B4-BE49-F238E27FC236}">
-                <a16:creationId xmlns:a16="http://schemas.microsoft.com/office/drawing/2014/main" id="{52759681-0457-B21A-EC3E-3FE463B6430C}"/>
+                <a16:creationId xmlns:a16="http://schemas.microsoft.com/office/drawing/2014/main" id="{B871E818-0BD5-BB0A-0586-C71442717F18}"/>
               </a:ext>
             </a:extLst>
           </p:cNvPr>
@@ -13347,7 +13347,7 @@
           <p:cNvPr id="17" name="source">
             <a:extLst>
               <a:ext uri="{FF2B5EF4-FFF2-40B4-BE49-F238E27FC236}">
-                <a16:creationId xmlns:a16="http://schemas.microsoft.com/office/drawing/2014/main" id="{0506AD36-AC79-C51B-B1F0-161F72288B13}"/>
+                <a16:creationId xmlns:a16="http://schemas.microsoft.com/office/drawing/2014/main" id="{66F23339-F9FF-2697-FC7A-53E0BD7750AC}"/>
               </a:ext>
             </a:extLst>
           </p:cNvPr>
@@ -13402,7 +13402,7 @@
     </p:spTree>
     <p:extLst>
       <p:ext uri="{BB962C8B-B14F-4D97-AF65-F5344CB8AC3E}">
-        <p14:creationId xmlns:p14="http://schemas.microsoft.com/office/powerpoint/2010/main" val="1252894221"/>
+        <p14:creationId xmlns:p14="http://schemas.microsoft.com/office/powerpoint/2010/main" val="1097218603"/>
       </p:ext>
     </p:extLst>
   </p:cSld>
@@ -13434,7 +13434,7 @@
           <p:cNvPr id="7" name="creative_background">
             <a:extLst>
               <a:ext uri="{FF2B5EF4-FFF2-40B4-BE49-F238E27FC236}">
-                <a16:creationId xmlns:a16="http://schemas.microsoft.com/office/drawing/2014/main" id="{B08C9785-E22C-1824-00CC-98003FC9830D}"/>
+                <a16:creationId xmlns:a16="http://schemas.microsoft.com/office/drawing/2014/main" id="{1C5E09F7-01CA-E8CD-216A-FA92F264143F}"/>
               </a:ext>
             </a:extLst>
           </p:cNvPr>
@@ -13517,9 +13517,9 @@
           <a:bodyPr/>
           <a:lstStyle/>
           <a:p>
-            <a:fld id="{D8887631-421A-4B90-81F4-114CAE3EC1BA}" type="datetimeFigureOut">
+            <a:fld id="{6456BABC-F92F-414F-A0E9-B90674473BDD}" type="datetimeFigureOut">
               <a:rPr lang="en-US" smtClean="0"/>
-              <a:t>10/3/2026</a:t>
+              <a:t>10/4/2026</a:t>
             </a:fld>
             <a:endParaRPr lang="en-US"/>
           </a:p>
@@ -13559,7 +13559,7 @@
           <a:bodyPr/>
           <a:lstStyle/>
           <a:p>
-            <a:fld id="{030EC083-285A-4D45-98F3-6009BB62C01A}" type="slidenum">
+            <a:fld id="{34BF67FC-BCB9-49F6-958A-F6E3E81E1F27}" type="slidenum">
               <a:rPr lang="en-US" smtClean="0"/>
               <a:t>‹#›</a:t>
             </a:fld>
@@ -13572,7 +13572,7 @@
           <p:cNvPr id="8" name="item_1_title">
             <a:extLst>
               <a:ext uri="{FF2B5EF4-FFF2-40B4-BE49-F238E27FC236}">
-                <a16:creationId xmlns:a16="http://schemas.microsoft.com/office/drawing/2014/main" id="{6A7FF8EB-D6BC-2626-99C1-5E424D69DA05}"/>
+                <a16:creationId xmlns:a16="http://schemas.microsoft.com/office/drawing/2014/main" id="{DA2D21FA-07AE-1069-DAC9-4CADE017564B}"/>
               </a:ext>
             </a:extLst>
           </p:cNvPr>
@@ -13622,7 +13622,7 @@
           <p:cNvPr id="9" name="item_1">
             <a:extLst>
               <a:ext uri="{FF2B5EF4-FFF2-40B4-BE49-F238E27FC236}">
-                <a16:creationId xmlns:a16="http://schemas.microsoft.com/office/drawing/2014/main" id="{643D53BE-3C71-7AE6-3278-29771CC36162}"/>
+                <a16:creationId xmlns:a16="http://schemas.microsoft.com/office/drawing/2014/main" id="{863A74C3-029F-2EB6-1669-FFEB186D2D79}"/>
               </a:ext>
             </a:extLst>
           </p:cNvPr>
@@ -13670,7 +13670,7 @@
           <p:cNvPr id="10" name="item_2_title">
             <a:extLst>
               <a:ext uri="{FF2B5EF4-FFF2-40B4-BE49-F238E27FC236}">
-                <a16:creationId xmlns:a16="http://schemas.microsoft.com/office/drawing/2014/main" id="{887276C7-F2A3-FA7E-9C53-A033BEC04542}"/>
+                <a16:creationId xmlns:a16="http://schemas.microsoft.com/office/drawing/2014/main" id="{ED0C5DF0-3EE2-244F-6A3D-7604B2D5F769}"/>
               </a:ext>
             </a:extLst>
           </p:cNvPr>
@@ -13723,7 +13723,7 @@
           <p:cNvPr id="11" name="item_2">
             <a:extLst>
               <a:ext uri="{FF2B5EF4-FFF2-40B4-BE49-F238E27FC236}">
-                <a16:creationId xmlns:a16="http://schemas.microsoft.com/office/drawing/2014/main" id="{4A1F4567-7FF7-0F02-6B85-C1DA9CD21570}"/>
+                <a16:creationId xmlns:a16="http://schemas.microsoft.com/office/drawing/2014/main" id="{C37DFB4A-5B0A-C325-EC2F-74D598C69563}"/>
               </a:ext>
             </a:extLst>
           </p:cNvPr>
@@ -13771,7 +13771,7 @@
           <p:cNvPr id="12" name="item_3_title">
             <a:extLst>
               <a:ext uri="{FF2B5EF4-FFF2-40B4-BE49-F238E27FC236}">
-                <a16:creationId xmlns:a16="http://schemas.microsoft.com/office/drawing/2014/main" id="{82EBCBDC-7327-0807-6A53-6089198EEEF4}"/>
+                <a16:creationId xmlns:a16="http://schemas.microsoft.com/office/drawing/2014/main" id="{0FAA0A8C-3742-39A4-7165-85172DFB6E30}"/>
               </a:ext>
             </a:extLst>
           </p:cNvPr>
@@ -13824,7 +13824,7 @@
           <p:cNvPr id="13" name="item_3">
             <a:extLst>
               <a:ext uri="{FF2B5EF4-FFF2-40B4-BE49-F238E27FC236}">
-                <a16:creationId xmlns:a16="http://schemas.microsoft.com/office/drawing/2014/main" id="{A3790F13-867E-5F1E-C645-8D06F5DE9219}"/>
+                <a16:creationId xmlns:a16="http://schemas.microsoft.com/office/drawing/2014/main" id="{401E80E7-21B6-A041-46C7-D3B22C3D71E6}"/>
               </a:ext>
             </a:extLst>
           </p:cNvPr>
@@ -13872,7 +13872,7 @@
           <p:cNvPr id="14" name="item_4_title">
             <a:extLst>
               <a:ext uri="{FF2B5EF4-FFF2-40B4-BE49-F238E27FC236}">
-                <a16:creationId xmlns:a16="http://schemas.microsoft.com/office/drawing/2014/main" id="{7B6D2CBF-6056-1997-A7DE-42C445E03E37}"/>
+                <a16:creationId xmlns:a16="http://schemas.microsoft.com/office/drawing/2014/main" id="{ABB5B67D-3FDF-3E65-2FED-6DDB48A1CDCE}"/>
               </a:ext>
             </a:extLst>
           </p:cNvPr>
@@ -13925,7 +13925,7 @@
           <p:cNvPr id="15" name="item_4">
             <a:extLst>
               <a:ext uri="{FF2B5EF4-FFF2-40B4-BE49-F238E27FC236}">
-                <a16:creationId xmlns:a16="http://schemas.microsoft.com/office/drawing/2014/main" id="{C82B6F2B-7C72-6453-5A04-73EE9D0B64D2}"/>
+                <a16:creationId xmlns:a16="http://schemas.microsoft.com/office/drawing/2014/main" id="{D0EA94DE-4DB4-49A9-7812-031B9793D157}"/>
               </a:ext>
             </a:extLst>
           </p:cNvPr>
@@ -13973,7 +13973,7 @@
           <p:cNvPr id="16" name="source">
             <a:extLst>
               <a:ext uri="{FF2B5EF4-FFF2-40B4-BE49-F238E27FC236}">
-                <a16:creationId xmlns:a16="http://schemas.microsoft.com/office/drawing/2014/main" id="{14890E4A-A761-CBF8-99B9-13E48D6929A5}"/>
+                <a16:creationId xmlns:a16="http://schemas.microsoft.com/office/drawing/2014/main" id="{E2364235-4E9D-8FEA-5084-901428C11188}"/>
               </a:ext>
             </a:extLst>
           </p:cNvPr>
@@ -14028,7 +14028,7 @@
     </p:spTree>
     <p:extLst>
       <p:ext uri="{BB962C8B-B14F-4D97-AF65-F5344CB8AC3E}">
-        <p14:creationId xmlns:p14="http://schemas.microsoft.com/office/powerpoint/2010/main" val="2903133957"/>
+        <p14:creationId xmlns:p14="http://schemas.microsoft.com/office/powerpoint/2010/main" val="48318917"/>
       </p:ext>
     </p:extLst>
   </p:cSld>
@@ -14060,7 +14060,7 @@
           <p:cNvPr id="7" name="creative_background">
             <a:extLst>
               <a:ext uri="{FF2B5EF4-FFF2-40B4-BE49-F238E27FC236}">
-                <a16:creationId xmlns:a16="http://schemas.microsoft.com/office/drawing/2014/main" id="{D1101E78-1F9E-A99B-C346-782510A0B8B6}"/>
+                <a16:creationId xmlns:a16="http://schemas.microsoft.com/office/drawing/2014/main" id="{6FFD2CF0-C9EF-73BF-99D3-5DFDFF2A64B8}"/>
               </a:ext>
             </a:extLst>
           </p:cNvPr>
@@ -14143,9 +14143,9 @@
           <a:bodyPr/>
           <a:lstStyle/>
           <a:p>
-            <a:fld id="{D8887631-421A-4B90-81F4-114CAE3EC1BA}" type="datetimeFigureOut">
+            <a:fld id="{6456BABC-F92F-414F-A0E9-B90674473BDD}" type="datetimeFigureOut">
               <a:rPr lang="en-US" smtClean="0"/>
-              <a:t>10/3/2026</a:t>
+              <a:t>10/4/2026</a:t>
             </a:fld>
             <a:endParaRPr lang="en-US"/>
           </a:p>
@@ -14185,7 +14185,7 @@
           <a:bodyPr/>
           <a:lstStyle/>
           <a:p>
-            <a:fld id="{030EC083-285A-4D45-98F3-6009BB62C01A}" type="slidenum">
+            <a:fld id="{34BF67FC-BCB9-49F6-958A-F6E3E81E1F27}" type="slidenum">
               <a:rPr lang="en-US" smtClean="0"/>
               <a:t>‹#›</a:t>
             </a:fld>
@@ -14198,7 +14198,7 @@
           <p:cNvPr id="8" name="marker_1">
             <a:extLst>
               <a:ext uri="{FF2B5EF4-FFF2-40B4-BE49-F238E27FC236}">
-                <a16:creationId xmlns:a16="http://schemas.microsoft.com/office/drawing/2014/main" id="{BD912433-1979-E3DD-2F50-DB0C24446C4A}"/>
+                <a16:creationId xmlns:a16="http://schemas.microsoft.com/office/drawing/2014/main" id="{ED524539-CD01-2962-9969-7794557488E7}"/>
               </a:ext>
             </a:extLst>
           </p:cNvPr>
@@ -14254,7 +14254,7 @@
           <p:cNvPr id="9" name="item_1_title">
             <a:extLst>
               <a:ext uri="{FF2B5EF4-FFF2-40B4-BE49-F238E27FC236}">
-                <a16:creationId xmlns:a16="http://schemas.microsoft.com/office/drawing/2014/main" id="{5DA4015A-DFC6-00D7-346E-CFF933FF749B}"/>
+                <a16:creationId xmlns:a16="http://schemas.microsoft.com/office/drawing/2014/main" id="{AE3B5E8E-B8B5-CA66-1C50-439375265076}"/>
               </a:ext>
             </a:extLst>
           </p:cNvPr>
@@ -14307,7 +14307,7 @@
           <p:cNvPr id="10" name="item_1">
             <a:extLst>
               <a:ext uri="{FF2B5EF4-FFF2-40B4-BE49-F238E27FC236}">
-                <a16:creationId xmlns:a16="http://schemas.microsoft.com/office/drawing/2014/main" id="{F2DBCB2C-DEEB-5F34-D5DA-2F342BE01731}"/>
+                <a16:creationId xmlns:a16="http://schemas.microsoft.com/office/drawing/2014/main" id="{A9DDE432-0527-6FD8-A072-AA0A6F5EE70F}"/>
               </a:ext>
             </a:extLst>
           </p:cNvPr>
@@ -14355,7 +14355,7 @@
           <p:cNvPr id="11" name="marker_2">
             <a:extLst>
               <a:ext uri="{FF2B5EF4-FFF2-40B4-BE49-F238E27FC236}">
-                <a16:creationId xmlns:a16="http://schemas.microsoft.com/office/drawing/2014/main" id="{77C5C0CC-2A50-AD92-584E-09E6F0FB6EDB}"/>
+                <a16:creationId xmlns:a16="http://schemas.microsoft.com/office/drawing/2014/main" id="{22331715-8985-C58A-9E68-BABE3923BEC5}"/>
               </a:ext>
             </a:extLst>
           </p:cNvPr>
@@ -14411,7 +14411,7 @@
           <p:cNvPr id="12" name="item_2_title">
             <a:extLst>
               <a:ext uri="{FF2B5EF4-FFF2-40B4-BE49-F238E27FC236}">
-                <a16:creationId xmlns:a16="http://schemas.microsoft.com/office/drawing/2014/main" id="{EB18324D-FC1C-BF09-D75E-9707FED8B3BC}"/>
+                <a16:creationId xmlns:a16="http://schemas.microsoft.com/office/drawing/2014/main" id="{3041D6E1-D115-5F4E-E1D5-A70273D20EF4}"/>
               </a:ext>
             </a:extLst>
           </p:cNvPr>
@@ -14464,7 +14464,7 @@
           <p:cNvPr id="13" name="item_2">
             <a:extLst>
               <a:ext uri="{FF2B5EF4-FFF2-40B4-BE49-F238E27FC236}">
-                <a16:creationId xmlns:a16="http://schemas.microsoft.com/office/drawing/2014/main" id="{CF469754-45DF-F9B4-FAFF-F913202F8AEB}"/>
+                <a16:creationId xmlns:a16="http://schemas.microsoft.com/office/drawing/2014/main" id="{CAC52495-078D-DF38-7478-5EA99EF5F851}"/>
               </a:ext>
             </a:extLst>
           </p:cNvPr>
@@ -14512,7 +14512,7 @@
           <p:cNvPr id="14" name="source">
             <a:extLst>
               <a:ext uri="{FF2B5EF4-FFF2-40B4-BE49-F238E27FC236}">
-                <a16:creationId xmlns:a16="http://schemas.microsoft.com/office/drawing/2014/main" id="{C21431B9-973A-D1E3-6DF8-CA7D6C84A37C}"/>
+                <a16:creationId xmlns:a16="http://schemas.microsoft.com/office/drawing/2014/main" id="{50B60A93-7401-6D41-8CA4-DB71D50E17E4}"/>
               </a:ext>
             </a:extLst>
           </p:cNvPr>
@@ -14567,7 +14567,7 @@
     </p:spTree>
     <p:extLst>
       <p:ext uri="{BB962C8B-B14F-4D97-AF65-F5344CB8AC3E}">
-        <p14:creationId xmlns:p14="http://schemas.microsoft.com/office/powerpoint/2010/main" val="3874180633"/>
+        <p14:creationId xmlns:p14="http://schemas.microsoft.com/office/powerpoint/2010/main" val="3405676054"/>
       </p:ext>
     </p:extLst>
   </p:cSld>
@@ -14599,7 +14599,7 @@
           <p:cNvPr id="7" name="creative_background">
             <a:extLst>
               <a:ext uri="{FF2B5EF4-FFF2-40B4-BE49-F238E27FC236}">
-                <a16:creationId xmlns:a16="http://schemas.microsoft.com/office/drawing/2014/main" id="{24474828-7CF7-17E7-1DEF-9BD9B1E1918F}"/>
+                <a16:creationId xmlns:a16="http://schemas.microsoft.com/office/drawing/2014/main" id="{50D39D85-7D48-0326-566D-8900620B8E15}"/>
               </a:ext>
             </a:extLst>
           </p:cNvPr>
@@ -14682,9 +14682,9 @@
           <a:bodyPr/>
           <a:lstStyle/>
           <a:p>
-            <a:fld id="{D8887631-421A-4B90-81F4-114CAE3EC1BA}" type="datetimeFigureOut">
+            <a:fld id="{6456BABC-F92F-414F-A0E9-B90674473BDD}" type="datetimeFigureOut">
               <a:rPr lang="en-US" smtClean="0"/>
-              <a:t>10/3/2026</a:t>
+              <a:t>10/4/2026</a:t>
             </a:fld>
             <a:endParaRPr lang="en-US"/>
           </a:p>
@@ -14724,7 +14724,7 @@
           <a:bodyPr/>
           <a:lstStyle/>
           <a:p>
-            <a:fld id="{030EC083-285A-4D45-98F3-6009BB62C01A}" type="slidenum">
+            <a:fld id="{34BF67FC-BCB9-49F6-958A-F6E3E81E1F27}" type="slidenum">
               <a:rPr lang="en-US" smtClean="0"/>
               <a:t>‹#›</a:t>
             </a:fld>
@@ -14737,7 +14737,7 @@
           <p:cNvPr id="8" name="item_1_title">
             <a:extLst>
               <a:ext uri="{FF2B5EF4-FFF2-40B4-BE49-F238E27FC236}">
-                <a16:creationId xmlns:a16="http://schemas.microsoft.com/office/drawing/2014/main" id="{B514784F-0EE7-D1A0-F134-82A283F2D02D}"/>
+                <a16:creationId xmlns:a16="http://schemas.microsoft.com/office/drawing/2014/main" id="{223CCC13-660E-02ED-CA3F-6263E1E2047A}"/>
               </a:ext>
             </a:extLst>
           </p:cNvPr>
@@ -14787,7 +14787,7 @@
           <p:cNvPr id="9" name="item_1">
             <a:extLst>
               <a:ext uri="{FF2B5EF4-FFF2-40B4-BE49-F238E27FC236}">
-                <a16:creationId xmlns:a16="http://schemas.microsoft.com/office/drawing/2014/main" id="{99FD1503-56CC-E6B9-AF54-922EF4EE5997}"/>
+                <a16:creationId xmlns:a16="http://schemas.microsoft.com/office/drawing/2014/main" id="{DBC8AB01-143A-2B04-F582-1331B79A51D7}"/>
               </a:ext>
             </a:extLst>
           </p:cNvPr>
@@ -14835,7 +14835,7 @@
           <p:cNvPr id="10" name="item_2_title">
             <a:extLst>
               <a:ext uri="{FF2B5EF4-FFF2-40B4-BE49-F238E27FC236}">
-                <a16:creationId xmlns:a16="http://schemas.microsoft.com/office/drawing/2014/main" id="{BED159D9-DEDF-735D-1529-2BD14C50ECA9}"/>
+                <a16:creationId xmlns:a16="http://schemas.microsoft.com/office/drawing/2014/main" id="{2F34FD53-5C32-FB47-607C-C3E71533D709}"/>
               </a:ext>
             </a:extLst>
           </p:cNvPr>
@@ -14888,7 +14888,7 @@
           <p:cNvPr id="11" name="item_2">
             <a:extLst>
               <a:ext uri="{FF2B5EF4-FFF2-40B4-BE49-F238E27FC236}">
-                <a16:creationId xmlns:a16="http://schemas.microsoft.com/office/drawing/2014/main" id="{7749E16A-7DFD-D003-62D4-6BE9D0EB0CF9}"/>
+                <a16:creationId xmlns:a16="http://schemas.microsoft.com/office/drawing/2014/main" id="{A665258C-4C22-A9E9-06BA-E978169D3093}"/>
               </a:ext>
             </a:extLst>
           </p:cNvPr>
@@ -14936,7 +14936,7 @@
           <p:cNvPr id="12" name="item_3_title">
             <a:extLst>
               <a:ext uri="{FF2B5EF4-FFF2-40B4-BE49-F238E27FC236}">
-                <a16:creationId xmlns:a16="http://schemas.microsoft.com/office/drawing/2014/main" id="{BEE16419-2531-AB0E-5BA7-14DCD62B6F06}"/>
+                <a16:creationId xmlns:a16="http://schemas.microsoft.com/office/drawing/2014/main" id="{04D445D9-D56C-F48D-4714-B9F403789481}"/>
               </a:ext>
             </a:extLst>
           </p:cNvPr>
@@ -14989,7 +14989,7 @@
           <p:cNvPr id="13" name="item_3">
             <a:extLst>
               <a:ext uri="{FF2B5EF4-FFF2-40B4-BE49-F238E27FC236}">
-                <a16:creationId xmlns:a16="http://schemas.microsoft.com/office/drawing/2014/main" id="{2D877595-FAF0-ECAA-A7B0-393854D213CB}"/>
+                <a16:creationId xmlns:a16="http://schemas.microsoft.com/office/drawing/2014/main" id="{7C50D9A4-EC21-5774-10D0-B93B1D06D02E}"/>
               </a:ext>
             </a:extLst>
           </p:cNvPr>
@@ -15037,7 +15037,7 @@
           <p:cNvPr id="14" name="item_4_title">
             <a:extLst>
               <a:ext uri="{FF2B5EF4-FFF2-40B4-BE49-F238E27FC236}">
-                <a16:creationId xmlns:a16="http://schemas.microsoft.com/office/drawing/2014/main" id="{30E79AC0-E2FC-95DA-E84B-61B56C24239E}"/>
+                <a16:creationId xmlns:a16="http://schemas.microsoft.com/office/drawing/2014/main" id="{FB7D8DEE-1E37-FBC7-1169-3B9A0E084123}"/>
               </a:ext>
             </a:extLst>
           </p:cNvPr>
@@ -15090,7 +15090,7 @@
           <p:cNvPr id="15" name="item_4">
             <a:extLst>
               <a:ext uri="{FF2B5EF4-FFF2-40B4-BE49-F238E27FC236}">
-                <a16:creationId xmlns:a16="http://schemas.microsoft.com/office/drawing/2014/main" id="{B2CD9B4B-A805-BC23-70C4-77D3B85B60BA}"/>
+                <a16:creationId xmlns:a16="http://schemas.microsoft.com/office/drawing/2014/main" id="{89BEF11B-7A19-15E4-3F26-B1A34BE20BA0}"/>
               </a:ext>
             </a:extLst>
           </p:cNvPr>
@@ -15138,7 +15138,7 @@
           <p:cNvPr id="16" name="source">
             <a:extLst>
               <a:ext uri="{FF2B5EF4-FFF2-40B4-BE49-F238E27FC236}">
-                <a16:creationId xmlns:a16="http://schemas.microsoft.com/office/drawing/2014/main" id="{11B6B2A4-7682-4E04-44CB-79C782277AB5}"/>
+                <a16:creationId xmlns:a16="http://schemas.microsoft.com/office/drawing/2014/main" id="{40346EF3-E8EA-7297-24BE-AA986804EC81}"/>
               </a:ext>
             </a:extLst>
           </p:cNvPr>
@@ -15193,7 +15193,7 @@
     </p:spTree>
     <p:extLst>
       <p:ext uri="{BB962C8B-B14F-4D97-AF65-F5344CB8AC3E}">
-        <p14:creationId xmlns:p14="http://schemas.microsoft.com/office/powerpoint/2010/main" val="2420834013"/>
+        <p14:creationId xmlns:p14="http://schemas.microsoft.com/office/powerpoint/2010/main" val="2455251097"/>
       </p:ext>
     </p:extLst>
   </p:cSld>
@@ -15225,7 +15225,7 @@
           <p:cNvPr id="7" name="creative_background">
             <a:extLst>
               <a:ext uri="{FF2B5EF4-FFF2-40B4-BE49-F238E27FC236}">
-                <a16:creationId xmlns:a16="http://schemas.microsoft.com/office/drawing/2014/main" id="{702A9A75-BA31-63E5-16A5-A2A8C5BFEB53}"/>
+                <a16:creationId xmlns:a16="http://schemas.microsoft.com/office/drawing/2014/main" id="{358CFE69-6515-B099-8801-3748E0E7158F}"/>
               </a:ext>
             </a:extLst>
           </p:cNvPr>
@@ -15308,9 +15308,9 @@
           <a:bodyPr/>
           <a:lstStyle/>
           <a:p>
-            <a:fld id="{D8887631-421A-4B90-81F4-114CAE3EC1BA}" type="datetimeFigureOut">
+            <a:fld id="{6456BABC-F92F-414F-A0E9-B90674473BDD}" type="datetimeFigureOut">
               <a:rPr lang="en-US" smtClean="0"/>
-              <a:t>10/3/2026</a:t>
+              <a:t>10/4/2026</a:t>
             </a:fld>
             <a:endParaRPr lang="en-US"/>
           </a:p>
@@ -15350,7 +15350,7 @@
           <a:bodyPr/>
           <a:lstStyle/>
           <a:p>
-            <a:fld id="{030EC083-285A-4D45-98F3-6009BB62C01A}" type="slidenum">
+            <a:fld id="{34BF67FC-BCB9-49F6-958A-F6E3E81E1F27}" type="slidenum">
               <a:rPr lang="en-US" smtClean="0"/>
               <a:t>‹#›</a:t>
             </a:fld>
@@ -15363,7 +15363,7 @@
           <p:cNvPr id="8" name="item_1_title">
             <a:extLst>
               <a:ext uri="{FF2B5EF4-FFF2-40B4-BE49-F238E27FC236}">
-                <a16:creationId xmlns:a16="http://schemas.microsoft.com/office/drawing/2014/main" id="{AB4796FE-591C-0615-E0F0-F93DC20606BD}"/>
+                <a16:creationId xmlns:a16="http://schemas.microsoft.com/office/drawing/2014/main" id="{F4DE61DE-D50D-705E-6747-7C69DB3A5BDF}"/>
               </a:ext>
             </a:extLst>
           </p:cNvPr>
@@ -15413,7 +15413,7 @@
           <p:cNvPr id="9" name="item_1">
             <a:extLst>
               <a:ext uri="{FF2B5EF4-FFF2-40B4-BE49-F238E27FC236}">
-                <a16:creationId xmlns:a16="http://schemas.microsoft.com/office/drawing/2014/main" id="{9A3362E4-D824-73D2-5D32-5AB444ACFDB3}"/>
+                <a16:creationId xmlns:a16="http://schemas.microsoft.com/office/drawing/2014/main" id="{89DDFDD8-6269-D1AA-6978-CF23E55FAEA8}"/>
               </a:ext>
             </a:extLst>
           </p:cNvPr>
@@ -15461,7 +15461,7 @@
           <p:cNvPr id="10" name="item_2_title">
             <a:extLst>
               <a:ext uri="{FF2B5EF4-FFF2-40B4-BE49-F238E27FC236}">
-                <a16:creationId xmlns:a16="http://schemas.microsoft.com/office/drawing/2014/main" id="{6A95A663-6415-9D88-D9F5-F8862493B65D}"/>
+                <a16:creationId xmlns:a16="http://schemas.microsoft.com/office/drawing/2014/main" id="{307D8816-AD3E-A852-A9CA-92B07B4A6398}"/>
               </a:ext>
             </a:extLst>
           </p:cNvPr>
@@ -15514,7 +15514,7 @@
           <p:cNvPr id="11" name="item_2">
             <a:extLst>
               <a:ext uri="{FF2B5EF4-FFF2-40B4-BE49-F238E27FC236}">
-                <a16:creationId xmlns:a16="http://schemas.microsoft.com/office/drawing/2014/main" id="{210A806D-C737-4BDF-218E-ACC10606D96F}"/>
+                <a16:creationId xmlns:a16="http://schemas.microsoft.com/office/drawing/2014/main" id="{B876197F-FCA3-2F29-B3FC-5DD81F20F7DE}"/>
               </a:ext>
             </a:extLst>
           </p:cNvPr>
@@ -15562,7 +15562,7 @@
           <p:cNvPr id="12" name="item_3_title">
             <a:extLst>
               <a:ext uri="{FF2B5EF4-FFF2-40B4-BE49-F238E27FC236}">
-                <a16:creationId xmlns:a16="http://schemas.microsoft.com/office/drawing/2014/main" id="{2B355F66-F00C-0E88-02F2-99DCC4F9ACE6}"/>
+                <a16:creationId xmlns:a16="http://schemas.microsoft.com/office/drawing/2014/main" id="{244ADBBE-0E34-12CD-032B-1C6F1B5625A9}"/>
               </a:ext>
             </a:extLst>
           </p:cNvPr>
@@ -15615,7 +15615,7 @@
           <p:cNvPr id="13" name="item_3">
             <a:extLst>
               <a:ext uri="{FF2B5EF4-FFF2-40B4-BE49-F238E27FC236}">
-                <a16:creationId xmlns:a16="http://schemas.microsoft.com/office/drawing/2014/main" id="{9C94C1AB-253C-A994-F969-A1FB51203E79}"/>
+                <a16:creationId xmlns:a16="http://schemas.microsoft.com/office/drawing/2014/main" id="{5C309991-5CBA-014F-4321-47323555B994}"/>
               </a:ext>
             </a:extLst>
           </p:cNvPr>
@@ -15663,7 +15663,7 @@
           <p:cNvPr id="14" name="item_4_title">
             <a:extLst>
               <a:ext uri="{FF2B5EF4-FFF2-40B4-BE49-F238E27FC236}">
-                <a16:creationId xmlns:a16="http://schemas.microsoft.com/office/drawing/2014/main" id="{6C2CB319-54E0-AF67-3B78-DE50B6821754}"/>
+                <a16:creationId xmlns:a16="http://schemas.microsoft.com/office/drawing/2014/main" id="{3F8428EE-E46C-40FA-A5FE-666C1FA95C89}"/>
               </a:ext>
             </a:extLst>
           </p:cNvPr>
@@ -15716,7 +15716,7 @@
           <p:cNvPr id="15" name="item_4">
             <a:extLst>
               <a:ext uri="{FF2B5EF4-FFF2-40B4-BE49-F238E27FC236}">
-                <a16:creationId xmlns:a16="http://schemas.microsoft.com/office/drawing/2014/main" id="{B0E23F74-5088-002D-F920-BDA5E768ED12}"/>
+                <a16:creationId xmlns:a16="http://schemas.microsoft.com/office/drawing/2014/main" id="{12E8BF17-F3E7-E9E4-FB57-4F15624CE587}"/>
               </a:ext>
             </a:extLst>
           </p:cNvPr>
@@ -15764,7 +15764,7 @@
           <p:cNvPr id="16" name="source">
             <a:extLst>
               <a:ext uri="{FF2B5EF4-FFF2-40B4-BE49-F238E27FC236}">
-                <a16:creationId xmlns:a16="http://schemas.microsoft.com/office/drawing/2014/main" id="{3C557CF0-6E55-E436-84B0-9288E01011E1}"/>
+                <a16:creationId xmlns:a16="http://schemas.microsoft.com/office/drawing/2014/main" id="{2CD5817E-8FCF-2C39-2D32-A20FDB965B71}"/>
               </a:ext>
             </a:extLst>
           </p:cNvPr>
@@ -15819,7 +15819,7 @@
     </p:spTree>
     <p:extLst>
       <p:ext uri="{BB962C8B-B14F-4D97-AF65-F5344CB8AC3E}">
-        <p14:creationId xmlns:p14="http://schemas.microsoft.com/office/powerpoint/2010/main" val="4239406287"/>
+        <p14:creationId xmlns:p14="http://schemas.microsoft.com/office/powerpoint/2010/main" val="2736492785"/>
       </p:ext>
     </p:extLst>
   </p:cSld>
@@ -15851,7 +15851,7 @@
           <p:cNvPr id="7" name="creative_background">
             <a:extLst>
               <a:ext uri="{FF2B5EF4-FFF2-40B4-BE49-F238E27FC236}">
-                <a16:creationId xmlns:a16="http://schemas.microsoft.com/office/drawing/2014/main" id="{BBA042B4-D5E8-9E11-DE90-10A9AE77D73C}"/>
+                <a16:creationId xmlns:a16="http://schemas.microsoft.com/office/drawing/2014/main" id="{4C86AFEF-EFB2-2622-E2DF-D63590C5A528}"/>
               </a:ext>
             </a:extLst>
           </p:cNvPr>
@@ -15934,9 +15934,9 @@
           <a:bodyPr/>
           <a:lstStyle/>
           <a:p>
-            <a:fld id="{D8887631-421A-4B90-81F4-114CAE3EC1BA}" type="datetimeFigureOut">
+            <a:fld id="{6456BABC-F92F-414F-A0E9-B90674473BDD}" type="datetimeFigureOut">
               <a:rPr lang="en-US" smtClean="0"/>
-              <a:t>10/3/2026</a:t>
+              <a:t>10/4/2026</a:t>
             </a:fld>
             <a:endParaRPr lang="en-US"/>
           </a:p>
@@ -15976,7 +15976,7 @@
           <a:bodyPr/>
           <a:lstStyle/>
           <a:p>
-            <a:fld id="{030EC083-285A-4D45-98F3-6009BB62C01A}" type="slidenum">
+            <a:fld id="{34BF67FC-BCB9-49F6-958A-F6E3E81E1F27}" type="slidenum">
               <a:rPr lang="en-US" smtClean="0"/>
               <a:t>‹#›</a:t>
             </a:fld>
@@ -15989,7 +15989,7 @@
           <p:cNvPr id="8" name="kpi_value_1">
             <a:extLst>
               <a:ext uri="{FF2B5EF4-FFF2-40B4-BE49-F238E27FC236}">
-                <a16:creationId xmlns:a16="http://schemas.microsoft.com/office/drawing/2014/main" id="{92B90432-4C41-B990-6DB7-F40ECC0DA5DF}"/>
+                <a16:creationId xmlns:a16="http://schemas.microsoft.com/office/drawing/2014/main" id="{606F444C-81AC-AD04-9F17-7B298954A598}"/>
               </a:ext>
             </a:extLst>
           </p:cNvPr>
@@ -16039,7 +16039,7 @@
           <p:cNvPr id="9" name="kpi_label_1">
             <a:extLst>
               <a:ext uri="{FF2B5EF4-FFF2-40B4-BE49-F238E27FC236}">
-                <a16:creationId xmlns:a16="http://schemas.microsoft.com/office/drawing/2014/main" id="{58E59069-E552-289A-2C74-5EFBAB53EC33}"/>
+                <a16:creationId xmlns:a16="http://schemas.microsoft.com/office/drawing/2014/main" id="{622B6664-C703-FD09-C498-E252FB8C56F7}"/>
               </a:ext>
             </a:extLst>
           </p:cNvPr>
@@ -16087,7 +16087,7 @@
           <p:cNvPr id="10" name="quote">
             <a:extLst>
               <a:ext uri="{FF2B5EF4-FFF2-40B4-BE49-F238E27FC236}">
-                <a16:creationId xmlns:a16="http://schemas.microsoft.com/office/drawing/2014/main" id="{3DB77994-EEB5-7534-7D1E-41030F08076D}"/>
+                <a16:creationId xmlns:a16="http://schemas.microsoft.com/office/drawing/2014/main" id="{8838C43F-B699-F780-18AB-B821EC8F729A}"/>
               </a:ext>
             </a:extLst>
           </p:cNvPr>
@@ -16137,7 +16137,7 @@
           <p:cNvPr id="11" name="attribution">
             <a:extLst>
               <a:ext uri="{FF2B5EF4-FFF2-40B4-BE49-F238E27FC236}">
-                <a16:creationId xmlns:a16="http://schemas.microsoft.com/office/drawing/2014/main" id="{84F112C5-9ECD-BEE9-2DBE-54106CB9702F}"/>
+                <a16:creationId xmlns:a16="http://schemas.microsoft.com/office/drawing/2014/main" id="{24E7C6F7-2677-BF76-538B-E724039BB3A6}"/>
               </a:ext>
             </a:extLst>
           </p:cNvPr>
@@ -16185,7 +16185,7 @@
           <p:cNvPr id="12" name="item_1_title">
             <a:extLst>
               <a:ext uri="{FF2B5EF4-FFF2-40B4-BE49-F238E27FC236}">
-                <a16:creationId xmlns:a16="http://schemas.microsoft.com/office/drawing/2014/main" id="{1AE790B1-9ACF-4A16-399A-89B09E1185CD}"/>
+                <a16:creationId xmlns:a16="http://schemas.microsoft.com/office/drawing/2014/main" id="{A3AF58E4-6603-1338-DC9F-5F03F5F20278}"/>
               </a:ext>
             </a:extLst>
           </p:cNvPr>
@@ -16238,7 +16238,7 @@
           <p:cNvPr id="13" name="item_1">
             <a:extLst>
               <a:ext uri="{FF2B5EF4-FFF2-40B4-BE49-F238E27FC236}">
-                <a16:creationId xmlns:a16="http://schemas.microsoft.com/office/drawing/2014/main" id="{CBFC8A79-43E8-FDB9-2104-627E0F753BB8}"/>
+                <a16:creationId xmlns:a16="http://schemas.microsoft.com/office/drawing/2014/main" id="{9B632CAC-1E4F-0AE1-6797-1356CAB6C58C}"/>
               </a:ext>
             </a:extLst>
           </p:cNvPr>
@@ -16286,7 +16286,7 @@
           <p:cNvPr id="14" name="source">
             <a:extLst>
               <a:ext uri="{FF2B5EF4-FFF2-40B4-BE49-F238E27FC236}">
-                <a16:creationId xmlns:a16="http://schemas.microsoft.com/office/drawing/2014/main" id="{EFB8D1DC-9849-7740-499F-AE2CCE3E25BF}"/>
+                <a16:creationId xmlns:a16="http://schemas.microsoft.com/office/drawing/2014/main" id="{A0AD1C46-269B-C9B6-B7AF-02648F6E4F13}"/>
               </a:ext>
             </a:extLst>
           </p:cNvPr>
@@ -16341,7 +16341,7 @@
     </p:spTree>
     <p:extLst>
       <p:ext uri="{BB962C8B-B14F-4D97-AF65-F5344CB8AC3E}">
-        <p14:creationId xmlns:p14="http://schemas.microsoft.com/office/powerpoint/2010/main" val="1839188322"/>
+        <p14:creationId xmlns:p14="http://schemas.microsoft.com/office/powerpoint/2010/main" val="3449137739"/>
       </p:ext>
     </p:extLst>
   </p:cSld>
@@ -16373,7 +16373,7 @@
           <p:cNvPr id="7" name="creative_background">
             <a:extLst>
               <a:ext uri="{FF2B5EF4-FFF2-40B4-BE49-F238E27FC236}">
-                <a16:creationId xmlns:a16="http://schemas.microsoft.com/office/drawing/2014/main" id="{B1298B01-C826-1218-FB25-4BD0566136F1}"/>
+                <a16:creationId xmlns:a16="http://schemas.microsoft.com/office/drawing/2014/main" id="{5C84D332-CC7D-C1A6-773C-1CC59C9C68AB}"/>
               </a:ext>
             </a:extLst>
           </p:cNvPr>
@@ -16456,9 +16456,9 @@
           <a:bodyPr/>
           <a:lstStyle/>
           <a:p>
-            <a:fld id="{D8887631-421A-4B90-81F4-114CAE3EC1BA}" type="datetimeFigureOut">
+            <a:fld id="{6456BABC-F92F-414F-A0E9-B90674473BDD}" type="datetimeFigureOut">
               <a:rPr lang="en-US" smtClean="0"/>
-              <a:t>10/3/2026</a:t>
+              <a:t>10/4/2026</a:t>
             </a:fld>
             <a:endParaRPr lang="en-US"/>
           </a:p>
@@ -16498,7 +16498,7 @@
           <a:bodyPr/>
           <a:lstStyle/>
           <a:p>
-            <a:fld id="{030EC083-285A-4D45-98F3-6009BB62C01A}" type="slidenum">
+            <a:fld id="{34BF67FC-BCB9-49F6-958A-F6E3E81E1F27}" type="slidenum">
               <a:rPr lang="en-US" smtClean="0"/>
               <a:t>‹#›</a:t>
             </a:fld>
@@ -16511,7 +16511,7 @@
           <p:cNvPr id="8" name="item_1_title">
             <a:extLst>
               <a:ext uri="{FF2B5EF4-FFF2-40B4-BE49-F238E27FC236}">
-                <a16:creationId xmlns:a16="http://schemas.microsoft.com/office/drawing/2014/main" id="{974C669D-EDD4-98B5-F4F7-8345BBFBA313}"/>
+                <a16:creationId xmlns:a16="http://schemas.microsoft.com/office/drawing/2014/main" id="{BA82654A-E5C4-512F-CB02-857FA3C5C2A7}"/>
               </a:ext>
             </a:extLst>
           </p:cNvPr>
@@ -16561,7 +16561,7 @@
           <p:cNvPr id="9" name="item_1">
             <a:extLst>
               <a:ext uri="{FF2B5EF4-FFF2-40B4-BE49-F238E27FC236}">
-                <a16:creationId xmlns:a16="http://schemas.microsoft.com/office/drawing/2014/main" id="{0AAA6C9C-8338-9EB0-C866-A81826B059D0}"/>
+                <a16:creationId xmlns:a16="http://schemas.microsoft.com/office/drawing/2014/main" id="{4C24FAD4-0672-E482-C32B-C53AA8049CCE}"/>
               </a:ext>
             </a:extLst>
           </p:cNvPr>
@@ -16609,7 +16609,7 @@
           <p:cNvPr id="10" name="item_2_title">
             <a:extLst>
               <a:ext uri="{FF2B5EF4-FFF2-40B4-BE49-F238E27FC236}">
-                <a16:creationId xmlns:a16="http://schemas.microsoft.com/office/drawing/2014/main" id="{78ECE221-14E3-A860-0EFC-1F1348D3C728}"/>
+                <a16:creationId xmlns:a16="http://schemas.microsoft.com/office/drawing/2014/main" id="{C2276725-E150-E0F2-2489-0BB74ED76368}"/>
               </a:ext>
             </a:extLst>
           </p:cNvPr>
@@ -16662,7 +16662,7 @@
           <p:cNvPr id="11" name="item_2">
             <a:extLst>
               <a:ext uri="{FF2B5EF4-FFF2-40B4-BE49-F238E27FC236}">
-                <a16:creationId xmlns:a16="http://schemas.microsoft.com/office/drawing/2014/main" id="{1C6C3E9B-6BE6-F1A0-28C9-C31B7EF76701}"/>
+                <a16:creationId xmlns:a16="http://schemas.microsoft.com/office/drawing/2014/main" id="{1048EC5F-62CD-4C18-8132-AADC93BBADCA}"/>
               </a:ext>
             </a:extLst>
           </p:cNvPr>
@@ -16710,7 +16710,7 @@
           <p:cNvPr id="12" name="item_3_title">
             <a:extLst>
               <a:ext uri="{FF2B5EF4-FFF2-40B4-BE49-F238E27FC236}">
-                <a16:creationId xmlns:a16="http://schemas.microsoft.com/office/drawing/2014/main" id="{43B557F3-6C27-DFB0-9F61-03198CF0C349}"/>
+                <a16:creationId xmlns:a16="http://schemas.microsoft.com/office/drawing/2014/main" id="{03F877A6-B044-97B6-A0B8-2F9E4E3360E6}"/>
               </a:ext>
             </a:extLst>
           </p:cNvPr>
@@ -16763,7 +16763,7 @@
           <p:cNvPr id="13" name="item_3">
             <a:extLst>
               <a:ext uri="{FF2B5EF4-FFF2-40B4-BE49-F238E27FC236}">
-                <a16:creationId xmlns:a16="http://schemas.microsoft.com/office/drawing/2014/main" id="{0D123C70-65BD-8CB5-F279-5CB863B77873}"/>
+                <a16:creationId xmlns:a16="http://schemas.microsoft.com/office/drawing/2014/main" id="{A1452BD6-DB66-DFFA-5665-462C2FB6DCA7}"/>
               </a:ext>
             </a:extLst>
           </p:cNvPr>
@@ -16811,7 +16811,7 @@
           <p:cNvPr id="14" name="source">
             <a:extLst>
               <a:ext uri="{FF2B5EF4-FFF2-40B4-BE49-F238E27FC236}">
-                <a16:creationId xmlns:a16="http://schemas.microsoft.com/office/drawing/2014/main" id="{88E7192C-B05E-058F-516E-559D85C6E1B5}"/>
+                <a16:creationId xmlns:a16="http://schemas.microsoft.com/office/drawing/2014/main" id="{53325AF5-6011-1863-3F7A-45CD57E722C9}"/>
               </a:ext>
             </a:extLst>
           </p:cNvPr>
@@ -16866,7 +16866,7 @@
     </p:spTree>
     <p:extLst>
       <p:ext uri="{BB962C8B-B14F-4D97-AF65-F5344CB8AC3E}">
-        <p14:creationId xmlns:p14="http://schemas.microsoft.com/office/powerpoint/2010/main" val="292457935"/>
+        <p14:creationId xmlns:p14="http://schemas.microsoft.com/office/powerpoint/2010/main" val="2471293880"/>
       </p:ext>
     </p:extLst>
   </p:cSld>
@@ -16898,7 +16898,7 @@
           <p:cNvPr id="7" name="creative_background">
             <a:extLst>
               <a:ext uri="{FF2B5EF4-FFF2-40B4-BE49-F238E27FC236}">
-                <a16:creationId xmlns:a16="http://schemas.microsoft.com/office/drawing/2014/main" id="{16E3D915-F499-8560-CE69-8A804207FEA8}"/>
+                <a16:creationId xmlns:a16="http://schemas.microsoft.com/office/drawing/2014/main" id="{1EA576D4-0412-B8DD-9881-F5390EF4152C}"/>
               </a:ext>
             </a:extLst>
           </p:cNvPr>
@@ -16981,9 +16981,9 @@
           <a:bodyPr/>
           <a:lstStyle/>
           <a:p>
-            <a:fld id="{D8887631-421A-4B90-81F4-114CAE3EC1BA}" type="datetimeFigureOut">
+            <a:fld id="{6456BABC-F92F-414F-A0E9-B90674473BDD}" type="datetimeFigureOut">
               <a:rPr lang="en-US" smtClean="0"/>
-              <a:t>10/3/2026</a:t>
+              <a:t>10/4/2026</a:t>
             </a:fld>
             <a:endParaRPr lang="en-US"/>
           </a:p>
@@ -17023,7 +17023,7 @@
           <a:bodyPr/>
           <a:lstStyle/>
           <a:p>
-            <a:fld id="{030EC083-285A-4D45-98F3-6009BB62C01A}" type="slidenum">
+            <a:fld id="{34BF67FC-BCB9-49F6-958A-F6E3E81E1F27}" type="slidenum">
               <a:rPr lang="en-US" smtClean="0"/>
               <a:t>‹#›</a:t>
             </a:fld>
@@ -17036,7 +17036,7 @@
           <p:cNvPr id="8" name="marker_1">
             <a:extLst>
               <a:ext uri="{FF2B5EF4-FFF2-40B4-BE49-F238E27FC236}">
-                <a16:creationId xmlns:a16="http://schemas.microsoft.com/office/drawing/2014/main" id="{11B7BC93-47F8-F06C-2120-663B1860900A}"/>
+                <a16:creationId xmlns:a16="http://schemas.microsoft.com/office/drawing/2014/main" id="{D0F99DB8-E273-E051-5ABC-CCFDB8B2D34D}"/>
               </a:ext>
             </a:extLst>
           </p:cNvPr>
@@ -17092,7 +17092,7 @@
           <p:cNvPr id="9" name="item_1_title">
             <a:extLst>
               <a:ext uri="{FF2B5EF4-FFF2-40B4-BE49-F238E27FC236}">
-                <a16:creationId xmlns:a16="http://schemas.microsoft.com/office/drawing/2014/main" id="{ECCF3E13-E876-814F-A891-035545E7EC15}"/>
+                <a16:creationId xmlns:a16="http://schemas.microsoft.com/office/drawing/2014/main" id="{6D1EB2A1-E0D9-B5B8-05B6-A965A7296C0E}"/>
               </a:ext>
             </a:extLst>
           </p:cNvPr>
@@ -17145,7 +17145,7 @@
           <p:cNvPr id="10" name="item_1">
             <a:extLst>
               <a:ext uri="{FF2B5EF4-FFF2-40B4-BE49-F238E27FC236}">
-                <a16:creationId xmlns:a16="http://schemas.microsoft.com/office/drawing/2014/main" id="{6446AF21-772E-C0C7-5FD0-73B6101303E0}"/>
+                <a16:creationId xmlns:a16="http://schemas.microsoft.com/office/drawing/2014/main" id="{FAB53548-B151-42B9-E33A-446BD8B00310}"/>
               </a:ext>
             </a:extLst>
           </p:cNvPr>
@@ -17193,7 +17193,7 @@
           <p:cNvPr id="11" name="marker_2">
             <a:extLst>
               <a:ext uri="{FF2B5EF4-FFF2-40B4-BE49-F238E27FC236}">
-                <a16:creationId xmlns:a16="http://schemas.microsoft.com/office/drawing/2014/main" id="{B0BA52C4-85F8-9531-FEAD-F06C7CA042A1}"/>
+                <a16:creationId xmlns:a16="http://schemas.microsoft.com/office/drawing/2014/main" id="{E68B2674-A4F7-DD2D-85E9-861D5B2986B4}"/>
               </a:ext>
             </a:extLst>
           </p:cNvPr>
@@ -17249,7 +17249,7 @@
           <p:cNvPr id="12" name="item_2_title">
             <a:extLst>
               <a:ext uri="{FF2B5EF4-FFF2-40B4-BE49-F238E27FC236}">
-                <a16:creationId xmlns:a16="http://schemas.microsoft.com/office/drawing/2014/main" id="{A8427360-A6B1-1A48-7438-BD939DF062F1}"/>
+                <a16:creationId xmlns:a16="http://schemas.microsoft.com/office/drawing/2014/main" id="{559C731A-DBA2-8FE0-D828-A9756F168CC6}"/>
               </a:ext>
             </a:extLst>
           </p:cNvPr>
@@ -17302,7 +17302,7 @@
           <p:cNvPr id="13" name="item_2">
             <a:extLst>
               <a:ext uri="{FF2B5EF4-FFF2-40B4-BE49-F238E27FC236}">
-                <a16:creationId xmlns:a16="http://schemas.microsoft.com/office/drawing/2014/main" id="{C24F6EAE-8BD7-2452-FECF-085F8312B289}"/>
+                <a16:creationId xmlns:a16="http://schemas.microsoft.com/office/drawing/2014/main" id="{DD4841E9-F8D7-2A51-885A-401E5ED5A237}"/>
               </a:ext>
             </a:extLst>
           </p:cNvPr>
@@ -17350,7 +17350,7 @@
           <p:cNvPr id="14" name="source">
             <a:extLst>
               <a:ext uri="{FF2B5EF4-FFF2-40B4-BE49-F238E27FC236}">
-                <a16:creationId xmlns:a16="http://schemas.microsoft.com/office/drawing/2014/main" id="{0A104B50-6A1A-0B10-1D7F-4EA5113DCFAD}"/>
+                <a16:creationId xmlns:a16="http://schemas.microsoft.com/office/drawing/2014/main" id="{D6E40818-D71F-9D51-A998-94B8A0B10506}"/>
               </a:ext>
             </a:extLst>
           </p:cNvPr>
@@ -17405,7 +17405,7 @@
     </p:spTree>
     <p:extLst>
       <p:ext uri="{BB962C8B-B14F-4D97-AF65-F5344CB8AC3E}">
-        <p14:creationId xmlns:p14="http://schemas.microsoft.com/office/powerpoint/2010/main" val="1337632277"/>
+        <p14:creationId xmlns:p14="http://schemas.microsoft.com/office/powerpoint/2010/main" val="2116983440"/>
       </p:ext>
     </p:extLst>
   </p:cSld>
@@ -17437,7 +17437,7 @@
           <p:cNvPr id="7" name="creative_background">
             <a:extLst>
               <a:ext uri="{FF2B5EF4-FFF2-40B4-BE49-F238E27FC236}">
-                <a16:creationId xmlns:a16="http://schemas.microsoft.com/office/drawing/2014/main" id="{6810E634-E5D0-07E0-7D68-EE66EB954C3A}"/>
+                <a16:creationId xmlns:a16="http://schemas.microsoft.com/office/drawing/2014/main" id="{25493C0E-C91B-6899-2144-8B31D064869B}"/>
               </a:ext>
             </a:extLst>
           </p:cNvPr>
@@ -17520,9 +17520,9 @@
           <a:bodyPr/>
           <a:lstStyle/>
           <a:p>
-            <a:fld id="{D8887631-421A-4B90-81F4-114CAE3EC1BA}" type="datetimeFigureOut">
+            <a:fld id="{6456BABC-F92F-414F-A0E9-B90674473BDD}" type="datetimeFigureOut">
               <a:rPr lang="en-US" smtClean="0"/>
-              <a:t>10/3/2026</a:t>
+              <a:t>10/4/2026</a:t>
             </a:fld>
             <a:endParaRPr lang="en-US"/>
           </a:p>
@@ -17562,7 +17562,7 @@
           <a:bodyPr/>
           <a:lstStyle/>
           <a:p>
-            <a:fld id="{030EC083-285A-4D45-98F3-6009BB62C01A}" type="slidenum">
+            <a:fld id="{34BF67FC-BCB9-49F6-958A-F6E3E81E1F27}" type="slidenum">
               <a:rPr lang="en-US" smtClean="0"/>
               <a:t>‹#›</a:t>
             </a:fld>
@@ -17575,7 +17575,7 @@
           <p:cNvPr id="8" name="kpi_value_1">
             <a:extLst>
               <a:ext uri="{FF2B5EF4-FFF2-40B4-BE49-F238E27FC236}">
-                <a16:creationId xmlns:a16="http://schemas.microsoft.com/office/drawing/2014/main" id="{96F011A6-47B1-DBEA-D697-CEE3C25F3E26}"/>
+                <a16:creationId xmlns:a16="http://schemas.microsoft.com/office/drawing/2014/main" id="{E58EF9D0-363E-6F03-ED59-6C1F1736BC8B}"/>
               </a:ext>
             </a:extLst>
           </p:cNvPr>
@@ -17625,7 +17625,7 @@
           <p:cNvPr id="9" name="kpi_label_1">
             <a:extLst>
               <a:ext uri="{FF2B5EF4-FFF2-40B4-BE49-F238E27FC236}">
-                <a16:creationId xmlns:a16="http://schemas.microsoft.com/office/drawing/2014/main" id="{A52421EC-F98C-0B1F-87C4-E48B44B0662C}"/>
+                <a16:creationId xmlns:a16="http://schemas.microsoft.com/office/drawing/2014/main" id="{7A7CF6F4-9371-7125-FEBB-D01EE5B718C1}"/>
               </a:ext>
             </a:extLst>
           </p:cNvPr>
@@ -17673,7 +17673,7 @@
           <p:cNvPr id="10" name="quote">
             <a:extLst>
               <a:ext uri="{FF2B5EF4-FFF2-40B4-BE49-F238E27FC236}">
-                <a16:creationId xmlns:a16="http://schemas.microsoft.com/office/drawing/2014/main" id="{C2BD440E-809B-5931-57B8-E19E6DB4B123}"/>
+                <a16:creationId xmlns:a16="http://schemas.microsoft.com/office/drawing/2014/main" id="{092A7147-4B7B-F4D6-9256-EC9396864CB3}"/>
               </a:ext>
             </a:extLst>
           </p:cNvPr>
@@ -17723,7 +17723,7 @@
           <p:cNvPr id="11" name="attribution">
             <a:extLst>
               <a:ext uri="{FF2B5EF4-FFF2-40B4-BE49-F238E27FC236}">
-                <a16:creationId xmlns:a16="http://schemas.microsoft.com/office/drawing/2014/main" id="{7C10A1FF-D5D3-16C1-D8B3-4094F9A5C6F9}"/>
+                <a16:creationId xmlns:a16="http://schemas.microsoft.com/office/drawing/2014/main" id="{BEF20935-BC1C-555B-0796-DEDD378D2AFD}"/>
               </a:ext>
             </a:extLst>
           </p:cNvPr>
@@ -17771,7 +17771,7 @@
           <p:cNvPr id="12" name="item_1_title">
             <a:extLst>
               <a:ext uri="{FF2B5EF4-FFF2-40B4-BE49-F238E27FC236}">
-                <a16:creationId xmlns:a16="http://schemas.microsoft.com/office/drawing/2014/main" id="{E20105A4-DCF0-00EB-96A5-9CEA5D073F67}"/>
+                <a16:creationId xmlns:a16="http://schemas.microsoft.com/office/drawing/2014/main" id="{AA7D632E-AD9D-DDA9-12E9-A92FB490C16C}"/>
               </a:ext>
             </a:extLst>
           </p:cNvPr>
@@ -17824,7 +17824,7 @@
           <p:cNvPr id="13" name="item_1">
             <a:extLst>
               <a:ext uri="{FF2B5EF4-FFF2-40B4-BE49-F238E27FC236}">
-                <a16:creationId xmlns:a16="http://schemas.microsoft.com/office/drawing/2014/main" id="{787DFD28-D99D-7E09-E204-F6DAB811C082}"/>
+                <a16:creationId xmlns:a16="http://schemas.microsoft.com/office/drawing/2014/main" id="{5B4DC58C-B765-6F12-CC59-94EA951B9019}"/>
               </a:ext>
             </a:extLst>
           </p:cNvPr>
@@ -17872,7 +17872,7 @@
           <p:cNvPr id="14" name="source">
             <a:extLst>
               <a:ext uri="{FF2B5EF4-FFF2-40B4-BE49-F238E27FC236}">
-                <a16:creationId xmlns:a16="http://schemas.microsoft.com/office/drawing/2014/main" id="{9993040B-FCC5-4B1F-670A-040A7B314BEE}"/>
+                <a16:creationId xmlns:a16="http://schemas.microsoft.com/office/drawing/2014/main" id="{30DF5BFA-6666-7C39-7834-070B5C2B0D78}"/>
               </a:ext>
             </a:extLst>
           </p:cNvPr>
@@ -17927,7 +17927,7 @@
     </p:spTree>
     <p:extLst>
       <p:ext uri="{BB962C8B-B14F-4D97-AF65-F5344CB8AC3E}">
-        <p14:creationId xmlns:p14="http://schemas.microsoft.com/office/powerpoint/2010/main" val="121224255"/>
+        <p14:creationId xmlns:p14="http://schemas.microsoft.com/office/powerpoint/2010/main" val="2278082963"/>
       </p:ext>
     </p:extLst>
   </p:cSld>
@@ -17959,7 +17959,7 @@
           <p:cNvPr id="7" name="creative_background">
             <a:extLst>
               <a:ext uri="{FF2B5EF4-FFF2-40B4-BE49-F238E27FC236}">
-                <a16:creationId xmlns:a16="http://schemas.microsoft.com/office/drawing/2014/main" id="{3827D195-82A8-F1F6-66F5-DE02CE1ED0FC}"/>
+                <a16:creationId xmlns:a16="http://schemas.microsoft.com/office/drawing/2014/main" id="{89B3ADE0-EBE0-C883-9BB6-2522799CD6BD}"/>
               </a:ext>
             </a:extLst>
           </p:cNvPr>
@@ -18042,9 +18042,9 @@
           <a:bodyPr/>
           <a:lstStyle/>
           <a:p>
-            <a:fld id="{D8887631-421A-4B90-81F4-114CAE3EC1BA}" type="datetimeFigureOut">
+            <a:fld id="{6456BABC-F92F-414F-A0E9-B90674473BDD}" type="datetimeFigureOut">
               <a:rPr lang="en-US" smtClean="0"/>
-              <a:t>10/3/2026</a:t>
+              <a:t>10/4/2026</a:t>
             </a:fld>
             <a:endParaRPr lang="en-US"/>
           </a:p>
@@ -18084,7 +18084,7 @@
           <a:bodyPr/>
           <a:lstStyle/>
           <a:p>
-            <a:fld id="{030EC083-285A-4D45-98F3-6009BB62C01A}" type="slidenum">
+            <a:fld id="{34BF67FC-BCB9-49F6-958A-F6E3E81E1F27}" type="slidenum">
               <a:rPr lang="en-US" smtClean="0"/>
               <a:t>‹#›</a:t>
             </a:fld>
@@ -18097,7 +18097,7 @@
           <p:cNvPr id="8" name="marker_1">
             <a:extLst>
               <a:ext uri="{FF2B5EF4-FFF2-40B4-BE49-F238E27FC236}">
-                <a16:creationId xmlns:a16="http://schemas.microsoft.com/office/drawing/2014/main" id="{669DCE2E-D96E-0CFC-4349-37602ACBC073}"/>
+                <a16:creationId xmlns:a16="http://schemas.microsoft.com/office/drawing/2014/main" id="{110741D0-CC86-2FA6-2130-B79A4F0CE1A8}"/>
               </a:ext>
             </a:extLst>
           </p:cNvPr>
@@ -18153,7 +18153,7 @@
           <p:cNvPr id="9" name="item_1">
             <a:extLst>
               <a:ext uri="{FF2B5EF4-FFF2-40B4-BE49-F238E27FC236}">
-                <a16:creationId xmlns:a16="http://schemas.microsoft.com/office/drawing/2014/main" id="{4258023E-9F18-69A1-0982-01AA81772357}"/>
+                <a16:creationId xmlns:a16="http://schemas.microsoft.com/office/drawing/2014/main" id="{848D7DFD-1597-D57D-1243-3609CFD68DEA}"/>
               </a:ext>
             </a:extLst>
           </p:cNvPr>
@@ -18201,7 +18201,7 @@
           <p:cNvPr id="10" name="marker_2">
             <a:extLst>
               <a:ext uri="{FF2B5EF4-FFF2-40B4-BE49-F238E27FC236}">
-                <a16:creationId xmlns:a16="http://schemas.microsoft.com/office/drawing/2014/main" id="{A64B9C31-EC56-2DC9-5376-90D60DDF35EF}"/>
+                <a16:creationId xmlns:a16="http://schemas.microsoft.com/office/drawing/2014/main" id="{43F971E5-26CB-F68C-EB60-3FEABF01BFF0}"/>
               </a:ext>
             </a:extLst>
           </p:cNvPr>
@@ -18257,7 +18257,7 @@
           <p:cNvPr id="11" name="item_2">
             <a:extLst>
               <a:ext uri="{FF2B5EF4-FFF2-40B4-BE49-F238E27FC236}">
-                <a16:creationId xmlns:a16="http://schemas.microsoft.com/office/drawing/2014/main" id="{DA8E8007-81F8-2C10-A0E3-EAA29C86EE36}"/>
+                <a16:creationId xmlns:a16="http://schemas.microsoft.com/office/drawing/2014/main" id="{249EA2E7-FAC0-5DB1-D562-C40727185489}"/>
               </a:ext>
             </a:extLst>
           </p:cNvPr>
@@ -18305,7 +18305,7 @@
           <p:cNvPr id="12" name="marker_3">
             <a:extLst>
               <a:ext uri="{FF2B5EF4-FFF2-40B4-BE49-F238E27FC236}">
-                <a16:creationId xmlns:a16="http://schemas.microsoft.com/office/drawing/2014/main" id="{96C56E56-398E-F7F4-30F1-23E1165D9ED4}"/>
+                <a16:creationId xmlns:a16="http://schemas.microsoft.com/office/drawing/2014/main" id="{D173577A-5763-4F2F-CEE2-D5C0DD559A18}"/>
               </a:ext>
             </a:extLst>
           </p:cNvPr>
@@ -18361,7 +18361,7 @@
           <p:cNvPr id="13" name="item_3">
             <a:extLst>
               <a:ext uri="{FF2B5EF4-FFF2-40B4-BE49-F238E27FC236}">
-                <a16:creationId xmlns:a16="http://schemas.microsoft.com/office/drawing/2014/main" id="{10B7C1C2-E674-6F8C-9243-4889D91428DE}"/>
+                <a16:creationId xmlns:a16="http://schemas.microsoft.com/office/drawing/2014/main" id="{CF2EB5A4-0FE6-BA13-1B79-3DF46F04A8A3}"/>
               </a:ext>
             </a:extLst>
           </p:cNvPr>
@@ -18409,7 +18409,7 @@
           <p:cNvPr id="14" name="marker_4">
             <a:extLst>
               <a:ext uri="{FF2B5EF4-FFF2-40B4-BE49-F238E27FC236}">
-                <a16:creationId xmlns:a16="http://schemas.microsoft.com/office/drawing/2014/main" id="{86BA4019-68C5-16C0-04E0-4EE1E0C5A700}"/>
+                <a16:creationId xmlns:a16="http://schemas.microsoft.com/office/drawing/2014/main" id="{ED6AC119-26BD-89CB-5720-1F87CCCD229C}"/>
               </a:ext>
             </a:extLst>
           </p:cNvPr>
@@ -18465,7 +18465,7 @@
           <p:cNvPr id="15" name="item_4">
             <a:extLst>
               <a:ext uri="{FF2B5EF4-FFF2-40B4-BE49-F238E27FC236}">
-                <a16:creationId xmlns:a16="http://schemas.microsoft.com/office/drawing/2014/main" id="{CE5D65AE-7BA8-03E4-9DFC-BD2D147F556C}"/>
+                <a16:creationId xmlns:a16="http://schemas.microsoft.com/office/drawing/2014/main" id="{A2AC9EFA-AF2D-30CD-3A4A-C4FCC0A98B01}"/>
               </a:ext>
             </a:extLst>
           </p:cNvPr>
@@ -18513,7 +18513,7 @@
           <p:cNvPr id="16" name="source">
             <a:extLst>
               <a:ext uri="{FF2B5EF4-FFF2-40B4-BE49-F238E27FC236}">
-                <a16:creationId xmlns:a16="http://schemas.microsoft.com/office/drawing/2014/main" id="{1D5026DF-6EB6-1E57-515B-ACBDF192D681}"/>
+                <a16:creationId xmlns:a16="http://schemas.microsoft.com/office/drawing/2014/main" id="{FEEAD3B3-DF3C-5F79-CBE7-17F947E521AB}"/>
               </a:ext>
             </a:extLst>
           </p:cNvPr>
@@ -18568,7 +18568,7 @@
     </p:spTree>
     <p:extLst>
       <p:ext uri="{BB962C8B-B14F-4D97-AF65-F5344CB8AC3E}">
-        <p14:creationId xmlns:p14="http://schemas.microsoft.com/office/powerpoint/2010/main" val="4049993685"/>
+        <p14:creationId xmlns:p14="http://schemas.microsoft.com/office/powerpoint/2010/main" val="3946177122"/>
       </p:ext>
     </p:extLst>
   </p:cSld>
@@ -18600,7 +18600,7 @@
           <p:cNvPr id="7" name="creative_background">
             <a:extLst>
               <a:ext uri="{FF2B5EF4-FFF2-40B4-BE49-F238E27FC236}">
-                <a16:creationId xmlns:a16="http://schemas.microsoft.com/office/drawing/2014/main" id="{A89793DF-175F-E724-E14F-590CECCC0795}"/>
+                <a16:creationId xmlns:a16="http://schemas.microsoft.com/office/drawing/2014/main" id="{A88F509D-58DB-B1C1-38CF-ED661EFA44E3}"/>
               </a:ext>
             </a:extLst>
           </p:cNvPr>
@@ -18683,9 +18683,9 @@
           <a:bodyPr/>
           <a:lstStyle/>
           <a:p>
-            <a:fld id="{D8887631-421A-4B90-81F4-114CAE3EC1BA}" type="datetimeFigureOut">
+            <a:fld id="{6456BABC-F92F-414F-A0E9-B90674473BDD}" type="datetimeFigureOut">
               <a:rPr lang="en-US" smtClean="0"/>
-              <a:t>10/3/2026</a:t>
+              <a:t>10/4/2026</a:t>
             </a:fld>
             <a:endParaRPr lang="en-US"/>
           </a:p>
@@ -18725,7 +18725,7 @@
           <a:bodyPr/>
           <a:lstStyle/>
           <a:p>
-            <a:fld id="{030EC083-285A-4D45-98F3-6009BB62C01A}" type="slidenum">
+            <a:fld id="{34BF67FC-BCB9-49F6-958A-F6E3E81E1F27}" type="slidenum">
               <a:rPr lang="en-US" smtClean="0"/>
               <a:t>‹#›</a:t>
             </a:fld>
@@ -18738,7 +18738,7 @@
           <p:cNvPr id="8" name="decisions_title">
             <a:extLst>
               <a:ext uri="{FF2B5EF4-FFF2-40B4-BE49-F238E27FC236}">
-                <a16:creationId xmlns:a16="http://schemas.microsoft.com/office/drawing/2014/main" id="{7E901BD3-D2FB-39B8-160E-7905982694AF}"/>
+                <a16:creationId xmlns:a16="http://schemas.microsoft.com/office/drawing/2014/main" id="{00888D6E-0659-47AD-82AB-30709D2E0DB0}"/>
               </a:ext>
             </a:extLst>
           </p:cNvPr>
@@ -18788,7 +18788,7 @@
           <p:cNvPr id="9" name="decisions">
             <a:extLst>
               <a:ext uri="{FF2B5EF4-FFF2-40B4-BE49-F238E27FC236}">
-                <a16:creationId xmlns:a16="http://schemas.microsoft.com/office/drawing/2014/main" id="{659619E1-522D-9DB6-CF22-6D52CFC4CF56}"/>
+                <a16:creationId xmlns:a16="http://schemas.microsoft.com/office/drawing/2014/main" id="{BF95A588-F095-EB94-3991-B47718CAFCDE}"/>
               </a:ext>
             </a:extLst>
           </p:cNvPr>
@@ -18831,7 +18831,7 @@
           <p:cNvPr id="10" name="item_1_title">
             <a:extLst>
               <a:ext uri="{FF2B5EF4-FFF2-40B4-BE49-F238E27FC236}">
-                <a16:creationId xmlns:a16="http://schemas.microsoft.com/office/drawing/2014/main" id="{86F0247B-EAB2-D52C-198A-20482213AAC6}"/>
+                <a16:creationId xmlns:a16="http://schemas.microsoft.com/office/drawing/2014/main" id="{BDAD96B2-B9EF-14AD-4F19-0E0056679FD1}"/>
               </a:ext>
             </a:extLst>
           </p:cNvPr>
@@ -18884,7 +18884,7 @@
           <p:cNvPr id="11" name="item_1">
             <a:extLst>
               <a:ext uri="{FF2B5EF4-FFF2-40B4-BE49-F238E27FC236}">
-                <a16:creationId xmlns:a16="http://schemas.microsoft.com/office/drawing/2014/main" id="{336A914A-28DD-0938-05D8-77E05C4DCD12}"/>
+                <a16:creationId xmlns:a16="http://schemas.microsoft.com/office/drawing/2014/main" id="{E33CBD3F-D96F-2848-882A-77A34FECEC27}"/>
               </a:ext>
             </a:extLst>
           </p:cNvPr>
@@ -18932,7 +18932,7 @@
           <p:cNvPr id="12" name="item_2_title">
             <a:extLst>
               <a:ext uri="{FF2B5EF4-FFF2-40B4-BE49-F238E27FC236}">
-                <a16:creationId xmlns:a16="http://schemas.microsoft.com/office/drawing/2014/main" id="{0305C88C-A7DB-1C4C-C93C-28626C9E268F}"/>
+                <a16:creationId xmlns:a16="http://schemas.microsoft.com/office/drawing/2014/main" id="{6D0FCECD-F273-CAAD-F4DE-4F7CADBE4AEC}"/>
               </a:ext>
             </a:extLst>
           </p:cNvPr>
@@ -18985,7 +18985,7 @@
           <p:cNvPr id="13" name="item_2">
             <a:extLst>
               <a:ext uri="{FF2B5EF4-FFF2-40B4-BE49-F238E27FC236}">
-                <a16:creationId xmlns:a16="http://schemas.microsoft.com/office/drawing/2014/main" id="{D7CBA92D-D0D3-ADF4-EC75-F3DD62E70013}"/>
+                <a16:creationId xmlns:a16="http://schemas.microsoft.com/office/drawing/2014/main" id="{F2D36961-335B-FBBE-D211-7A3A96A1B33B}"/>
               </a:ext>
             </a:extLst>
           </p:cNvPr>
@@ -19033,7 +19033,7 @@
           <p:cNvPr id="14" name="item_3_title">
             <a:extLst>
               <a:ext uri="{FF2B5EF4-FFF2-40B4-BE49-F238E27FC236}">
-                <a16:creationId xmlns:a16="http://schemas.microsoft.com/office/drawing/2014/main" id="{064DD7EB-DA98-BAB3-9DFE-1323508A28CC}"/>
+                <a16:creationId xmlns:a16="http://schemas.microsoft.com/office/drawing/2014/main" id="{04843ED8-E0D5-182A-98B8-46E22CC5DCC7}"/>
               </a:ext>
             </a:extLst>
           </p:cNvPr>
@@ -19086,7 +19086,7 @@
           <p:cNvPr id="15" name="item_3">
             <a:extLst>
               <a:ext uri="{FF2B5EF4-FFF2-40B4-BE49-F238E27FC236}">
-                <a16:creationId xmlns:a16="http://schemas.microsoft.com/office/drawing/2014/main" id="{37F0D237-450C-395D-AED0-CFE11F87729F}"/>
+                <a16:creationId xmlns:a16="http://schemas.microsoft.com/office/drawing/2014/main" id="{3BE662E0-B0BC-852E-FD29-55CB032BE5FA}"/>
               </a:ext>
             </a:extLst>
           </p:cNvPr>
@@ -19134,7 +19134,7 @@
           <p:cNvPr id="16" name="source">
             <a:extLst>
               <a:ext uri="{FF2B5EF4-FFF2-40B4-BE49-F238E27FC236}">
-                <a16:creationId xmlns:a16="http://schemas.microsoft.com/office/drawing/2014/main" id="{F43D4032-7E72-344F-8FE4-8B71FA950784}"/>
+                <a16:creationId xmlns:a16="http://schemas.microsoft.com/office/drawing/2014/main" id="{CC743E7F-61A0-7403-E8EE-A905FF59808D}"/>
               </a:ext>
             </a:extLst>
           </p:cNvPr>
@@ -19189,7 +19189,7 @@
     </p:spTree>
     <p:extLst>
       <p:ext uri="{BB962C8B-B14F-4D97-AF65-F5344CB8AC3E}">
-        <p14:creationId xmlns:p14="http://schemas.microsoft.com/office/powerpoint/2010/main" val="877472727"/>
+        <p14:creationId xmlns:p14="http://schemas.microsoft.com/office/powerpoint/2010/main" val="2668731814"/>
       </p:ext>
     </p:extLst>
   </p:cSld>
@@ -19221,7 +19221,7 @@
           <p:cNvPr id="7" name="creative_background">
             <a:extLst>
               <a:ext uri="{FF2B5EF4-FFF2-40B4-BE49-F238E27FC236}">
-                <a16:creationId xmlns:a16="http://schemas.microsoft.com/office/drawing/2014/main" id="{B94E7306-7A5D-672F-9266-CD6657FE166A}"/>
+                <a16:creationId xmlns:a16="http://schemas.microsoft.com/office/drawing/2014/main" id="{C6EF4E35-6076-B711-29A9-01AD665A416E}"/>
               </a:ext>
             </a:extLst>
           </p:cNvPr>
@@ -19304,9 +19304,9 @@
           <a:bodyPr/>
           <a:lstStyle/>
           <a:p>
-            <a:fld id="{D8887631-421A-4B90-81F4-114CAE3EC1BA}" type="datetimeFigureOut">
+            <a:fld id="{6456BABC-F92F-414F-A0E9-B90674473BDD}" type="datetimeFigureOut">
               <a:rPr lang="en-US" smtClean="0"/>
-              <a:t>10/3/2026</a:t>
+              <a:t>10/4/2026</a:t>
             </a:fld>
             <a:endParaRPr lang="en-US"/>
           </a:p>
@@ -19346,7 +19346,7 @@
           <a:bodyPr/>
           <a:lstStyle/>
           <a:p>
-            <a:fld id="{030EC083-285A-4D45-98F3-6009BB62C01A}" type="slidenum">
+            <a:fld id="{34BF67FC-BCB9-49F6-958A-F6E3E81E1F27}" type="slidenum">
               <a:rPr lang="en-US" smtClean="0"/>
               <a:t>‹#›</a:t>
             </a:fld>
@@ -19359,7 +19359,7 @@
           <p:cNvPr id="8" name="body">
             <a:extLst>
               <a:ext uri="{FF2B5EF4-FFF2-40B4-BE49-F238E27FC236}">
-                <a16:creationId xmlns:a16="http://schemas.microsoft.com/office/drawing/2014/main" id="{5D705AC9-649D-18AE-2237-AFAC881057DC}"/>
+                <a16:creationId xmlns:a16="http://schemas.microsoft.com/office/drawing/2014/main" id="{23B9B2D8-B054-1AF6-AD7D-E5BEF0B7A137}"/>
               </a:ext>
             </a:extLst>
           </p:cNvPr>
@@ -19399,7 +19399,7 @@
           <p:cNvPr id="9" name="kpi_value_1">
             <a:extLst>
               <a:ext uri="{FF2B5EF4-FFF2-40B4-BE49-F238E27FC236}">
-                <a16:creationId xmlns:a16="http://schemas.microsoft.com/office/drawing/2014/main" id="{6339D812-FC18-B108-A13B-3E7F13BF4DC2}"/>
+                <a16:creationId xmlns:a16="http://schemas.microsoft.com/office/drawing/2014/main" id="{1E493357-E4A4-7F33-3EFD-EE70F473F231}"/>
               </a:ext>
             </a:extLst>
           </p:cNvPr>
@@ -19452,7 +19452,7 @@
           <p:cNvPr id="10" name="kpi_label_1">
             <a:extLst>
               <a:ext uri="{FF2B5EF4-FFF2-40B4-BE49-F238E27FC236}">
-                <a16:creationId xmlns:a16="http://schemas.microsoft.com/office/drawing/2014/main" id="{936C0D16-D79C-6411-E960-F01E62C2EA2B}"/>
+                <a16:creationId xmlns:a16="http://schemas.microsoft.com/office/drawing/2014/main" id="{A8CCCC9F-5C45-4FB2-3DDB-DB61D31ECB4E}"/>
               </a:ext>
             </a:extLst>
           </p:cNvPr>
@@ -19500,7 +19500,7 @@
           <p:cNvPr id="11" name="kpi_value_2">
             <a:extLst>
               <a:ext uri="{FF2B5EF4-FFF2-40B4-BE49-F238E27FC236}">
-                <a16:creationId xmlns:a16="http://schemas.microsoft.com/office/drawing/2014/main" id="{0A843882-76CF-D6C5-716A-80265C74DAB3}"/>
+                <a16:creationId xmlns:a16="http://schemas.microsoft.com/office/drawing/2014/main" id="{B347A880-FED8-7CBA-175B-F7F5449AB6A2}"/>
               </a:ext>
             </a:extLst>
           </p:cNvPr>
@@ -19553,7 +19553,7 @@
           <p:cNvPr id="12" name="kpi_label_2">
             <a:extLst>
               <a:ext uri="{FF2B5EF4-FFF2-40B4-BE49-F238E27FC236}">
-                <a16:creationId xmlns:a16="http://schemas.microsoft.com/office/drawing/2014/main" id="{47E36131-073A-F364-B7FA-9C9B3D5E2210}"/>
+                <a16:creationId xmlns:a16="http://schemas.microsoft.com/office/drawing/2014/main" id="{C2AE1611-3CF9-3F23-998A-9183BF466384}"/>
               </a:ext>
             </a:extLst>
           </p:cNvPr>
@@ -19601,7 +19601,7 @@
           <p:cNvPr id="13" name="source">
             <a:extLst>
               <a:ext uri="{FF2B5EF4-FFF2-40B4-BE49-F238E27FC236}">
-                <a16:creationId xmlns:a16="http://schemas.microsoft.com/office/drawing/2014/main" id="{65C4EB83-4287-8770-D505-9D71C8CFBCA3}"/>
+                <a16:creationId xmlns:a16="http://schemas.microsoft.com/office/drawing/2014/main" id="{C8630CA6-771F-5B4A-1CDE-E01F89A01F39}"/>
               </a:ext>
             </a:extLst>
           </p:cNvPr>
@@ -19656,7 +19656,7 @@
     </p:spTree>
     <p:extLst>
       <p:ext uri="{BB962C8B-B14F-4D97-AF65-F5344CB8AC3E}">
-        <p14:creationId xmlns:p14="http://schemas.microsoft.com/office/powerpoint/2010/main" val="746777690"/>
+        <p14:creationId xmlns:p14="http://schemas.microsoft.com/office/powerpoint/2010/main" val="1727565621"/>
       </p:ext>
     </p:extLst>
   </p:cSld>
@@ -19688,7 +19688,7 @@
           <p:cNvPr id="7" name="creative_background">
             <a:extLst>
               <a:ext uri="{FF2B5EF4-FFF2-40B4-BE49-F238E27FC236}">
-                <a16:creationId xmlns:a16="http://schemas.microsoft.com/office/drawing/2014/main" id="{CF1D5ED9-F183-ED3A-521C-AE7964453DA2}"/>
+                <a16:creationId xmlns:a16="http://schemas.microsoft.com/office/drawing/2014/main" id="{80E66103-856D-D7EB-D4A3-8808E90E2FF3}"/>
               </a:ext>
             </a:extLst>
           </p:cNvPr>
@@ -19771,9 +19771,9 @@
           <a:bodyPr/>
           <a:lstStyle/>
           <a:p>
-            <a:fld id="{D8887631-421A-4B90-81F4-114CAE3EC1BA}" type="datetimeFigureOut">
+            <a:fld id="{6456BABC-F92F-414F-A0E9-B90674473BDD}" type="datetimeFigureOut">
               <a:rPr lang="en-US" smtClean="0"/>
-              <a:t>10/3/2026</a:t>
+              <a:t>10/4/2026</a:t>
             </a:fld>
             <a:endParaRPr lang="en-US"/>
           </a:p>
@@ -19813,7 +19813,7 @@
           <a:bodyPr/>
           <a:lstStyle/>
           <a:p>
-            <a:fld id="{030EC083-285A-4D45-98F3-6009BB62C01A}" type="slidenum">
+            <a:fld id="{34BF67FC-BCB9-49F6-958A-F6E3E81E1F27}" type="slidenum">
               <a:rPr lang="en-US" smtClean="0"/>
               <a:t>‹#›</a:t>
             </a:fld>
@@ -19826,7 +19826,7 @@
           <p:cNvPr id="8" name="body">
             <a:extLst>
               <a:ext uri="{FF2B5EF4-FFF2-40B4-BE49-F238E27FC236}">
-                <a16:creationId xmlns:a16="http://schemas.microsoft.com/office/drawing/2014/main" id="{CE828636-F5F5-3CA0-7C07-27A180C5BF23}"/>
+                <a16:creationId xmlns:a16="http://schemas.microsoft.com/office/drawing/2014/main" id="{A5F6C923-577B-7BDF-0752-71FE78BD65C8}"/>
               </a:ext>
             </a:extLst>
           </p:cNvPr>
@@ -19866,7 +19866,7 @@
           <p:cNvPr id="9" name="kpi_value_1">
             <a:extLst>
               <a:ext uri="{FF2B5EF4-FFF2-40B4-BE49-F238E27FC236}">
-                <a16:creationId xmlns:a16="http://schemas.microsoft.com/office/drawing/2014/main" id="{1E3D28FC-6838-6011-65A3-D4B3334DFD94}"/>
+                <a16:creationId xmlns:a16="http://schemas.microsoft.com/office/drawing/2014/main" id="{D60532EB-F1D6-C3B5-BE79-9FC94149A4C5}"/>
               </a:ext>
             </a:extLst>
           </p:cNvPr>
@@ -19919,7 +19919,7 @@
           <p:cNvPr id="10" name="kpi_label_1">
             <a:extLst>
               <a:ext uri="{FF2B5EF4-FFF2-40B4-BE49-F238E27FC236}">
-                <a16:creationId xmlns:a16="http://schemas.microsoft.com/office/drawing/2014/main" id="{B2C3C53A-DE86-D629-4D61-4A325FADC9EE}"/>
+                <a16:creationId xmlns:a16="http://schemas.microsoft.com/office/drawing/2014/main" id="{5BEDC09A-0FEC-78E8-ADF0-10AA40957B8D}"/>
               </a:ext>
             </a:extLst>
           </p:cNvPr>
@@ -19967,7 +19967,7 @@
           <p:cNvPr id="11" name="kpi_value_2">
             <a:extLst>
               <a:ext uri="{FF2B5EF4-FFF2-40B4-BE49-F238E27FC236}">
-                <a16:creationId xmlns:a16="http://schemas.microsoft.com/office/drawing/2014/main" id="{A8E26330-DA3F-8290-4544-5AE3D67E0275}"/>
+                <a16:creationId xmlns:a16="http://schemas.microsoft.com/office/drawing/2014/main" id="{6DC5BE08-F729-82A0-CA0B-3E430635E9C4}"/>
               </a:ext>
             </a:extLst>
           </p:cNvPr>
@@ -20020,7 +20020,7 @@
           <p:cNvPr id="12" name="kpi_label_2">
             <a:extLst>
               <a:ext uri="{FF2B5EF4-FFF2-40B4-BE49-F238E27FC236}">
-                <a16:creationId xmlns:a16="http://schemas.microsoft.com/office/drawing/2014/main" id="{27136362-C0A7-214D-85CD-97015E1F975E}"/>
+                <a16:creationId xmlns:a16="http://schemas.microsoft.com/office/drawing/2014/main" id="{2C93D126-BC22-6869-0572-C2CEB365325C}"/>
               </a:ext>
             </a:extLst>
           </p:cNvPr>
@@ -20068,7 +20068,7 @@
           <p:cNvPr id="13" name="kpi_value_3">
             <a:extLst>
               <a:ext uri="{FF2B5EF4-FFF2-40B4-BE49-F238E27FC236}">
-                <a16:creationId xmlns:a16="http://schemas.microsoft.com/office/drawing/2014/main" id="{644996F9-E79A-DD2C-E8B0-B397277F4A63}"/>
+                <a16:creationId xmlns:a16="http://schemas.microsoft.com/office/drawing/2014/main" id="{0A24277D-8809-B805-3B11-6507492FF4EE}"/>
               </a:ext>
             </a:extLst>
           </p:cNvPr>
@@ -20121,7 +20121,7 @@
           <p:cNvPr id="14" name="kpi_label_3">
             <a:extLst>
               <a:ext uri="{FF2B5EF4-FFF2-40B4-BE49-F238E27FC236}">
-                <a16:creationId xmlns:a16="http://schemas.microsoft.com/office/drawing/2014/main" id="{77DB1560-9828-A5B2-77E4-CED36B97EAD3}"/>
+                <a16:creationId xmlns:a16="http://schemas.microsoft.com/office/drawing/2014/main" id="{73DF317A-482D-FD66-29A7-FF39A0F97ECD}"/>
               </a:ext>
             </a:extLst>
           </p:cNvPr>
@@ -20169,7 +20169,7 @@
           <p:cNvPr id="15" name="kpi_value_4">
             <a:extLst>
               <a:ext uri="{FF2B5EF4-FFF2-40B4-BE49-F238E27FC236}">
-                <a16:creationId xmlns:a16="http://schemas.microsoft.com/office/drawing/2014/main" id="{10025CD0-DE1A-FA47-A111-EEC74E456036}"/>
+                <a16:creationId xmlns:a16="http://schemas.microsoft.com/office/drawing/2014/main" id="{8BFED4EA-50D0-CDE7-5955-0BDE392B9A78}"/>
               </a:ext>
             </a:extLst>
           </p:cNvPr>
@@ -20222,7 +20222,7 @@
           <p:cNvPr id="16" name="kpi_label_4">
             <a:extLst>
               <a:ext uri="{FF2B5EF4-FFF2-40B4-BE49-F238E27FC236}">
-                <a16:creationId xmlns:a16="http://schemas.microsoft.com/office/drawing/2014/main" id="{9045E619-B64E-D64B-B045-A43B37BB7C69}"/>
+                <a16:creationId xmlns:a16="http://schemas.microsoft.com/office/drawing/2014/main" id="{EA1FFEA7-669B-2986-FC50-7DC0B3C51A69}"/>
               </a:ext>
             </a:extLst>
           </p:cNvPr>
@@ -20270,7 +20270,7 @@
           <p:cNvPr id="17" name="source">
             <a:extLst>
               <a:ext uri="{FF2B5EF4-FFF2-40B4-BE49-F238E27FC236}">
-                <a16:creationId xmlns:a16="http://schemas.microsoft.com/office/drawing/2014/main" id="{D6FE39A8-F6AC-D5D7-A7D2-3A328FA47A2C}"/>
+                <a16:creationId xmlns:a16="http://schemas.microsoft.com/office/drawing/2014/main" id="{85DF4DEF-A2E1-12A3-1D31-A8EE12C22FE1}"/>
               </a:ext>
             </a:extLst>
           </p:cNvPr>
@@ -20325,7 +20325,7 @@
     </p:spTree>
     <p:extLst>
       <p:ext uri="{BB962C8B-B14F-4D97-AF65-F5344CB8AC3E}">
-        <p14:creationId xmlns:p14="http://schemas.microsoft.com/office/powerpoint/2010/main" val="2548721282"/>
+        <p14:creationId xmlns:p14="http://schemas.microsoft.com/office/powerpoint/2010/main" val="4013402654"/>
       </p:ext>
     </p:extLst>
   </p:cSld>
@@ -20357,7 +20357,7 @@
           <p:cNvPr id="7" name="creative_background">
             <a:extLst>
               <a:ext uri="{FF2B5EF4-FFF2-40B4-BE49-F238E27FC236}">
-                <a16:creationId xmlns:a16="http://schemas.microsoft.com/office/drawing/2014/main" id="{84CFA40B-DA4A-B125-0D8F-DB4C9139DF57}"/>
+                <a16:creationId xmlns:a16="http://schemas.microsoft.com/office/drawing/2014/main" id="{C3A1C1AE-5405-2921-C55D-88F0B2D91BE7}"/>
               </a:ext>
             </a:extLst>
           </p:cNvPr>
@@ -20440,9 +20440,9 @@
           <a:bodyPr/>
           <a:lstStyle/>
           <a:p>
-            <a:fld id="{D8887631-421A-4B90-81F4-114CAE3EC1BA}" type="datetimeFigureOut">
+            <a:fld id="{6456BABC-F92F-414F-A0E9-B90674473BDD}" type="datetimeFigureOut">
               <a:rPr lang="en-US" smtClean="0"/>
-              <a:t>10/3/2026</a:t>
+              <a:t>10/4/2026</a:t>
             </a:fld>
             <a:endParaRPr lang="en-US"/>
           </a:p>
@@ -20482,7 +20482,7 @@
           <a:bodyPr/>
           <a:lstStyle/>
           <a:p>
-            <a:fld id="{030EC083-285A-4D45-98F3-6009BB62C01A}" type="slidenum">
+            <a:fld id="{34BF67FC-BCB9-49F6-958A-F6E3E81E1F27}" type="slidenum">
               <a:rPr lang="en-US" smtClean="0"/>
               <a:t>‹#›</a:t>
             </a:fld>
@@ -20495,7 +20495,7 @@
           <p:cNvPr id="8" name="body">
             <a:extLst>
               <a:ext uri="{FF2B5EF4-FFF2-40B4-BE49-F238E27FC236}">
-                <a16:creationId xmlns:a16="http://schemas.microsoft.com/office/drawing/2014/main" id="{82916589-6EA9-6E69-5AEA-178A2EED854D}"/>
+                <a16:creationId xmlns:a16="http://schemas.microsoft.com/office/drawing/2014/main" id="{44F540FE-A3B9-19A4-DF21-844F9C20F014}"/>
               </a:ext>
             </a:extLst>
           </p:cNvPr>
@@ -20535,7 +20535,7 @@
           <p:cNvPr id="9" name="quote">
             <a:extLst>
               <a:ext uri="{FF2B5EF4-FFF2-40B4-BE49-F238E27FC236}">
-                <a16:creationId xmlns:a16="http://schemas.microsoft.com/office/drawing/2014/main" id="{C126E4DB-5C3B-7D81-A032-DB3568DB6BF9}"/>
+                <a16:creationId xmlns:a16="http://schemas.microsoft.com/office/drawing/2014/main" id="{66C0B051-70F2-81C9-2903-3115BCDD1D90}"/>
               </a:ext>
             </a:extLst>
           </p:cNvPr>
@@ -20585,7 +20585,7 @@
           <p:cNvPr id="10" name="attribution">
             <a:extLst>
               <a:ext uri="{FF2B5EF4-FFF2-40B4-BE49-F238E27FC236}">
-                <a16:creationId xmlns:a16="http://schemas.microsoft.com/office/drawing/2014/main" id="{E3378EA5-65B7-FD93-AAE4-05C9441E01F5}"/>
+                <a16:creationId xmlns:a16="http://schemas.microsoft.com/office/drawing/2014/main" id="{119D5839-4869-5CE5-A1AD-BD6664B8ECF9}"/>
               </a:ext>
             </a:extLst>
           </p:cNvPr>
@@ -20633,7 +20633,7 @@
           <p:cNvPr id="11" name="source">
             <a:extLst>
               <a:ext uri="{FF2B5EF4-FFF2-40B4-BE49-F238E27FC236}">
-                <a16:creationId xmlns:a16="http://schemas.microsoft.com/office/drawing/2014/main" id="{9C4DE8AA-E6F9-9757-1E78-5E71C4C623C9}"/>
+                <a16:creationId xmlns:a16="http://schemas.microsoft.com/office/drawing/2014/main" id="{24A700C8-7021-5B87-51FA-8C00D5F08711}"/>
               </a:ext>
             </a:extLst>
           </p:cNvPr>
@@ -20688,7 +20688,7 @@
     </p:spTree>
     <p:extLst>
       <p:ext uri="{BB962C8B-B14F-4D97-AF65-F5344CB8AC3E}">
-        <p14:creationId xmlns:p14="http://schemas.microsoft.com/office/powerpoint/2010/main" val="3278155858"/>
+        <p14:creationId xmlns:p14="http://schemas.microsoft.com/office/powerpoint/2010/main" val="396925642"/>
       </p:ext>
     </p:extLst>
   </p:cSld>
@@ -20720,7 +20720,7 @@
           <p:cNvPr id="7" name="creative_background">
             <a:extLst>
               <a:ext uri="{FF2B5EF4-FFF2-40B4-BE49-F238E27FC236}">
-                <a16:creationId xmlns:a16="http://schemas.microsoft.com/office/drawing/2014/main" id="{3CB90FDE-6BE6-A96A-F5FD-BAB62F06F5D7}"/>
+                <a16:creationId xmlns:a16="http://schemas.microsoft.com/office/drawing/2014/main" id="{02FA697E-B01F-F153-0B7E-8313389125AB}"/>
               </a:ext>
             </a:extLst>
           </p:cNvPr>
@@ -20803,9 +20803,9 @@
           <a:bodyPr/>
           <a:lstStyle/>
           <a:p>
-            <a:fld id="{D8887631-421A-4B90-81F4-114CAE3EC1BA}" type="datetimeFigureOut">
+            <a:fld id="{6456BABC-F92F-414F-A0E9-B90674473BDD}" type="datetimeFigureOut">
               <a:rPr lang="en-US" smtClean="0"/>
-              <a:t>10/3/2026</a:t>
+              <a:t>10/4/2026</a:t>
             </a:fld>
             <a:endParaRPr lang="en-US"/>
           </a:p>
@@ -20845,7 +20845,7 @@
           <a:bodyPr/>
           <a:lstStyle/>
           <a:p>
-            <a:fld id="{030EC083-285A-4D45-98F3-6009BB62C01A}" type="slidenum">
+            <a:fld id="{34BF67FC-BCB9-49F6-958A-F6E3E81E1F27}" type="slidenum">
               <a:rPr lang="en-US" smtClean="0"/>
               <a:t>‹#›</a:t>
             </a:fld>
@@ -20858,7 +20858,7 @@
           <p:cNvPr id="8" name="item_1_title">
             <a:extLst>
               <a:ext uri="{FF2B5EF4-FFF2-40B4-BE49-F238E27FC236}">
-                <a16:creationId xmlns:a16="http://schemas.microsoft.com/office/drawing/2014/main" id="{C99B8770-4F84-99C2-7318-896F1FCE49E0}"/>
+                <a16:creationId xmlns:a16="http://schemas.microsoft.com/office/drawing/2014/main" id="{1F743968-2B2B-A902-84F3-A478A5FA75A3}"/>
               </a:ext>
             </a:extLst>
           </p:cNvPr>
@@ -20908,7 +20908,7 @@
           <p:cNvPr id="9" name="item_1">
             <a:extLst>
               <a:ext uri="{FF2B5EF4-FFF2-40B4-BE49-F238E27FC236}">
-                <a16:creationId xmlns:a16="http://schemas.microsoft.com/office/drawing/2014/main" id="{7151A94B-46F7-C3E6-48AE-CCC9BAD94BD2}"/>
+                <a16:creationId xmlns:a16="http://schemas.microsoft.com/office/drawing/2014/main" id="{3A1F9B79-E8A2-D87F-0001-843BADF6A3E4}"/>
               </a:ext>
             </a:extLst>
           </p:cNvPr>
@@ -20956,7 +20956,7 @@
           <p:cNvPr id="10" name="item_2_title">
             <a:extLst>
               <a:ext uri="{FF2B5EF4-FFF2-40B4-BE49-F238E27FC236}">
-                <a16:creationId xmlns:a16="http://schemas.microsoft.com/office/drawing/2014/main" id="{D0C2E571-79B8-96AC-FAD1-0C7A9031B15D}"/>
+                <a16:creationId xmlns:a16="http://schemas.microsoft.com/office/drawing/2014/main" id="{C12D4DF4-44B4-5F90-95AC-10FBBD5A645A}"/>
               </a:ext>
             </a:extLst>
           </p:cNvPr>
@@ -21009,7 +21009,7 @@
           <p:cNvPr id="11" name="item_2">
             <a:extLst>
               <a:ext uri="{FF2B5EF4-FFF2-40B4-BE49-F238E27FC236}">
-                <a16:creationId xmlns:a16="http://schemas.microsoft.com/office/drawing/2014/main" id="{AA249AF2-181F-A018-B908-D102976B45F6}"/>
+                <a16:creationId xmlns:a16="http://schemas.microsoft.com/office/drawing/2014/main" id="{699E8116-9DCF-6018-E7B4-373003F45AA3}"/>
               </a:ext>
             </a:extLst>
           </p:cNvPr>
@@ -21057,7 +21057,7 @@
           <p:cNvPr id="12" name="item_3_title">
             <a:extLst>
               <a:ext uri="{FF2B5EF4-FFF2-40B4-BE49-F238E27FC236}">
-                <a16:creationId xmlns:a16="http://schemas.microsoft.com/office/drawing/2014/main" id="{EC1B7031-18F1-E7A9-EA0A-55D1A726BB1A}"/>
+                <a16:creationId xmlns:a16="http://schemas.microsoft.com/office/drawing/2014/main" id="{203CFBDA-0636-ABB5-48ED-C197D1A7FBD1}"/>
               </a:ext>
             </a:extLst>
           </p:cNvPr>
@@ -21110,7 +21110,7 @@
           <p:cNvPr id="13" name="item_3">
             <a:extLst>
               <a:ext uri="{FF2B5EF4-FFF2-40B4-BE49-F238E27FC236}">
-                <a16:creationId xmlns:a16="http://schemas.microsoft.com/office/drawing/2014/main" id="{C384D99C-72FA-5DC4-144F-05395E4CC466}"/>
+                <a16:creationId xmlns:a16="http://schemas.microsoft.com/office/drawing/2014/main" id="{7B1EFAA9-F525-0AB7-23B0-1DE7374C6738}"/>
               </a:ext>
             </a:extLst>
           </p:cNvPr>
@@ -21158,7 +21158,7 @@
           <p:cNvPr id="14" name="source">
             <a:extLst>
               <a:ext uri="{FF2B5EF4-FFF2-40B4-BE49-F238E27FC236}">
-                <a16:creationId xmlns:a16="http://schemas.microsoft.com/office/drawing/2014/main" id="{FD24D303-D08A-0D7B-781A-BEF028951C9B}"/>
+                <a16:creationId xmlns:a16="http://schemas.microsoft.com/office/drawing/2014/main" id="{2AFF08E8-5D83-31FB-4D3F-79AC74E8BFB0}"/>
               </a:ext>
             </a:extLst>
           </p:cNvPr>
@@ -21213,7 +21213,7 @@
     </p:spTree>
     <p:extLst>
       <p:ext uri="{BB962C8B-B14F-4D97-AF65-F5344CB8AC3E}">
-        <p14:creationId xmlns:p14="http://schemas.microsoft.com/office/powerpoint/2010/main" val="1436115623"/>
+        <p14:creationId xmlns:p14="http://schemas.microsoft.com/office/powerpoint/2010/main" val="91135261"/>
       </p:ext>
     </p:extLst>
   </p:cSld>
@@ -21245,7 +21245,7 @@
           <p:cNvPr id="7" name="creative_background">
             <a:extLst>
               <a:ext uri="{FF2B5EF4-FFF2-40B4-BE49-F238E27FC236}">
-                <a16:creationId xmlns:a16="http://schemas.microsoft.com/office/drawing/2014/main" id="{7ABD1E3D-3CF6-2DB1-ADC0-DC6DF1F3E13B}"/>
+                <a16:creationId xmlns:a16="http://schemas.microsoft.com/office/drawing/2014/main" id="{4E86428D-6B1A-291A-2992-9E005D4C34F0}"/>
               </a:ext>
             </a:extLst>
           </p:cNvPr>
@@ -21328,9 +21328,9 @@
           <a:bodyPr/>
           <a:lstStyle/>
           <a:p>
-            <a:fld id="{D8887631-421A-4B90-81F4-114CAE3EC1BA}" type="datetimeFigureOut">
+            <a:fld id="{6456BABC-F92F-414F-A0E9-B90674473BDD}" type="datetimeFigureOut">
               <a:rPr lang="en-US" smtClean="0"/>
-              <a:t>10/3/2026</a:t>
+              <a:t>10/4/2026</a:t>
             </a:fld>
             <a:endParaRPr lang="en-US"/>
           </a:p>
@@ -21370,7 +21370,7 @@
           <a:bodyPr/>
           <a:lstStyle/>
           <a:p>
-            <a:fld id="{030EC083-285A-4D45-98F3-6009BB62C01A}" type="slidenum">
+            <a:fld id="{34BF67FC-BCB9-49F6-958A-F6E3E81E1F27}" type="slidenum">
               <a:rPr lang="en-US" smtClean="0"/>
               <a:t>‹#›</a:t>
             </a:fld>
@@ -21383,7 +21383,7 @@
           <p:cNvPr id="8" name="item_1_title">
             <a:extLst>
               <a:ext uri="{FF2B5EF4-FFF2-40B4-BE49-F238E27FC236}">
-                <a16:creationId xmlns:a16="http://schemas.microsoft.com/office/drawing/2014/main" id="{E894B60B-DDC0-A4F8-5A06-82329B23ACA8}"/>
+                <a16:creationId xmlns:a16="http://schemas.microsoft.com/office/drawing/2014/main" id="{FC668ACA-36D0-16D8-B44F-8E1F2F03199C}"/>
               </a:ext>
             </a:extLst>
           </p:cNvPr>
@@ -21433,7 +21433,7 @@
           <p:cNvPr id="9" name="item_1">
             <a:extLst>
               <a:ext uri="{FF2B5EF4-FFF2-40B4-BE49-F238E27FC236}">
-                <a16:creationId xmlns:a16="http://schemas.microsoft.com/office/drawing/2014/main" id="{CE9AEBE8-E859-361E-2FE8-353DA056CADB}"/>
+                <a16:creationId xmlns:a16="http://schemas.microsoft.com/office/drawing/2014/main" id="{EF3340F9-14AE-AB39-7936-35788321DAF0}"/>
               </a:ext>
             </a:extLst>
           </p:cNvPr>
@@ -21481,7 +21481,7 @@
           <p:cNvPr id="10" name="item_2_title">
             <a:extLst>
               <a:ext uri="{FF2B5EF4-FFF2-40B4-BE49-F238E27FC236}">
-                <a16:creationId xmlns:a16="http://schemas.microsoft.com/office/drawing/2014/main" id="{93600ADA-0609-AB85-472F-DC56170E4AC2}"/>
+                <a16:creationId xmlns:a16="http://schemas.microsoft.com/office/drawing/2014/main" id="{8AEB890D-5437-3B58-0878-564BCF87CA78}"/>
               </a:ext>
             </a:extLst>
           </p:cNvPr>
@@ -21534,7 +21534,7 @@
           <p:cNvPr id="11" name="item_2">
             <a:extLst>
               <a:ext uri="{FF2B5EF4-FFF2-40B4-BE49-F238E27FC236}">
-                <a16:creationId xmlns:a16="http://schemas.microsoft.com/office/drawing/2014/main" id="{235EEC07-24BF-F222-0B5D-2C52A4BCF341}"/>
+                <a16:creationId xmlns:a16="http://schemas.microsoft.com/office/drawing/2014/main" id="{7B6957FC-5492-63A6-58B5-6401D6132FFC}"/>
               </a:ext>
             </a:extLst>
           </p:cNvPr>
@@ -21582,7 +21582,7 @@
           <p:cNvPr id="12" name="source">
             <a:extLst>
               <a:ext uri="{FF2B5EF4-FFF2-40B4-BE49-F238E27FC236}">
-                <a16:creationId xmlns:a16="http://schemas.microsoft.com/office/drawing/2014/main" id="{05AE656E-99B7-F684-DBC8-29739AD04639}"/>
+                <a16:creationId xmlns:a16="http://schemas.microsoft.com/office/drawing/2014/main" id="{18C57F90-33D8-6A9C-21A7-D5CF3CB6063B}"/>
               </a:ext>
             </a:extLst>
           </p:cNvPr>
@@ -21637,7 +21637,7 @@
     </p:spTree>
     <p:extLst>
       <p:ext uri="{BB962C8B-B14F-4D97-AF65-F5344CB8AC3E}">
-        <p14:creationId xmlns:p14="http://schemas.microsoft.com/office/powerpoint/2010/main" val="2993036378"/>
+        <p14:creationId xmlns:p14="http://schemas.microsoft.com/office/powerpoint/2010/main" val="4124889845"/>
       </p:ext>
     </p:extLst>
   </p:cSld>
@@ -21669,7 +21669,7 @@
           <p:cNvPr id="7" name="creative_background">
             <a:extLst>
               <a:ext uri="{FF2B5EF4-FFF2-40B4-BE49-F238E27FC236}">
-                <a16:creationId xmlns:a16="http://schemas.microsoft.com/office/drawing/2014/main" id="{8411B4D7-0363-4EFA-1E31-E8023FC4F0AE}"/>
+                <a16:creationId xmlns:a16="http://schemas.microsoft.com/office/drawing/2014/main" id="{7B8A3253-5BA1-4058-C69A-BE40D7E44C32}"/>
               </a:ext>
             </a:extLst>
           </p:cNvPr>
@@ -21752,9 +21752,9 @@
           <a:bodyPr/>
           <a:lstStyle/>
           <a:p>
-            <a:fld id="{D8887631-421A-4B90-81F4-114CAE3EC1BA}" type="datetimeFigureOut">
+            <a:fld id="{6456BABC-F92F-414F-A0E9-B90674473BDD}" type="datetimeFigureOut">
               <a:rPr lang="en-US" smtClean="0"/>
-              <a:t>10/3/2026</a:t>
+              <a:t>10/4/2026</a:t>
             </a:fld>
             <a:endParaRPr lang="en-US"/>
           </a:p>
@@ -21794,7 +21794,7 @@
           <a:bodyPr/>
           <a:lstStyle/>
           <a:p>
-            <a:fld id="{030EC083-285A-4D45-98F3-6009BB62C01A}" type="slidenum">
+            <a:fld id="{34BF67FC-BCB9-49F6-958A-F6E3E81E1F27}" type="slidenum">
               <a:rPr lang="en-US" smtClean="0"/>
               <a:t>‹#›</a:t>
             </a:fld>
@@ -21807,7 +21807,7 @@
           <p:cNvPr id="8" name="chart">
             <a:extLst>
               <a:ext uri="{FF2B5EF4-FFF2-40B4-BE49-F238E27FC236}">
-                <a16:creationId xmlns:a16="http://schemas.microsoft.com/office/drawing/2014/main" id="{CB244A70-8F9A-E0A8-E9CB-B730ADB84527}"/>
+                <a16:creationId xmlns:a16="http://schemas.microsoft.com/office/drawing/2014/main" id="{FB3F479A-A229-5D75-19F8-D779BF993C83}"/>
               </a:ext>
             </a:extLst>
           </p:cNvPr>
@@ -21837,7 +21837,7 @@
           <p:cNvPr id="9" name="body">
             <a:extLst>
               <a:ext uri="{FF2B5EF4-FFF2-40B4-BE49-F238E27FC236}">
-                <a16:creationId xmlns:a16="http://schemas.microsoft.com/office/drawing/2014/main" id="{D30D998D-1B13-E103-D75F-85C4247B0AE6}"/>
+                <a16:creationId xmlns:a16="http://schemas.microsoft.com/office/drawing/2014/main" id="{5702C30D-853B-CD41-335C-1CB30688EB52}"/>
               </a:ext>
             </a:extLst>
           </p:cNvPr>
@@ -21880,7 +21880,7 @@
           <p:cNvPr id="10" name="source">
             <a:extLst>
               <a:ext uri="{FF2B5EF4-FFF2-40B4-BE49-F238E27FC236}">
-                <a16:creationId xmlns:a16="http://schemas.microsoft.com/office/drawing/2014/main" id="{014B31B5-2444-390F-7A94-25F6E8B922E4}"/>
+                <a16:creationId xmlns:a16="http://schemas.microsoft.com/office/drawing/2014/main" id="{5D968009-881B-734C-FC16-9352D4774D51}"/>
               </a:ext>
             </a:extLst>
           </p:cNvPr>
@@ -21935,7 +21935,7 @@
     </p:spTree>
     <p:extLst>
       <p:ext uri="{BB962C8B-B14F-4D97-AF65-F5344CB8AC3E}">
-        <p14:creationId xmlns:p14="http://schemas.microsoft.com/office/powerpoint/2010/main" val="529492294"/>
+        <p14:creationId xmlns:p14="http://schemas.microsoft.com/office/powerpoint/2010/main" val="2783062142"/>
       </p:ext>
     </p:extLst>
   </p:cSld>
@@ -21967,7 +21967,7 @@
           <p:cNvPr id="7" name="creative_background">
             <a:extLst>
               <a:ext uri="{FF2B5EF4-FFF2-40B4-BE49-F238E27FC236}">
-                <a16:creationId xmlns:a16="http://schemas.microsoft.com/office/drawing/2014/main" id="{0E48BE95-CD0F-EE94-0BB0-63BA620E5B07}"/>
+                <a16:creationId xmlns:a16="http://schemas.microsoft.com/office/drawing/2014/main" id="{230C0FE8-627E-6A18-8DD2-9638EFE2C332}"/>
               </a:ext>
             </a:extLst>
           </p:cNvPr>
@@ -22050,9 +22050,9 @@
           <a:bodyPr/>
           <a:lstStyle/>
           <a:p>
-            <a:fld id="{D8887631-421A-4B90-81F4-114CAE3EC1BA}" type="datetimeFigureOut">
+            <a:fld id="{6456BABC-F92F-414F-A0E9-B90674473BDD}" type="datetimeFigureOut">
               <a:rPr lang="en-US" smtClean="0"/>
-              <a:t>10/3/2026</a:t>
+              <a:t>10/4/2026</a:t>
             </a:fld>
             <a:endParaRPr lang="en-US"/>
           </a:p>
@@ -22092,7 +22092,7 @@
           <a:bodyPr/>
           <a:lstStyle/>
           <a:p>
-            <a:fld id="{030EC083-285A-4D45-98F3-6009BB62C01A}" type="slidenum">
+            <a:fld id="{34BF67FC-BCB9-49F6-958A-F6E3E81E1F27}" type="slidenum">
               <a:rPr lang="en-US" smtClean="0"/>
               <a:t>‹#›</a:t>
             </a:fld>
@@ -22105,7 +22105,7 @@
           <p:cNvPr id="8" name="item_1_title">
             <a:extLst>
               <a:ext uri="{FF2B5EF4-FFF2-40B4-BE49-F238E27FC236}">
-                <a16:creationId xmlns:a16="http://schemas.microsoft.com/office/drawing/2014/main" id="{D1E61CE4-D569-D1D0-EE7F-E92BDADA46C5}"/>
+                <a16:creationId xmlns:a16="http://schemas.microsoft.com/office/drawing/2014/main" id="{73156795-B393-773C-78A1-ADCFB3C3F8B7}"/>
               </a:ext>
             </a:extLst>
           </p:cNvPr>
@@ -22155,7 +22155,7 @@
           <p:cNvPr id="9" name="item_1">
             <a:extLst>
               <a:ext uri="{FF2B5EF4-FFF2-40B4-BE49-F238E27FC236}">
-                <a16:creationId xmlns:a16="http://schemas.microsoft.com/office/drawing/2014/main" id="{178F38AC-3120-E137-82B6-BBFF26332DDE}"/>
+                <a16:creationId xmlns:a16="http://schemas.microsoft.com/office/drawing/2014/main" id="{FF06DF83-FF64-B748-DDB1-92D62ED42C44}"/>
               </a:ext>
             </a:extLst>
           </p:cNvPr>
@@ -22203,7 +22203,7 @@
           <p:cNvPr id="10" name="item_2_title">
             <a:extLst>
               <a:ext uri="{FF2B5EF4-FFF2-40B4-BE49-F238E27FC236}">
-                <a16:creationId xmlns:a16="http://schemas.microsoft.com/office/drawing/2014/main" id="{CD955452-4398-FE3A-11D3-244CB2659014}"/>
+                <a16:creationId xmlns:a16="http://schemas.microsoft.com/office/drawing/2014/main" id="{D74E3625-7258-97C9-4847-923736E261AD}"/>
               </a:ext>
             </a:extLst>
           </p:cNvPr>
@@ -22256,7 +22256,7 @@
           <p:cNvPr id="11" name="item_2">
             <a:extLst>
               <a:ext uri="{FF2B5EF4-FFF2-40B4-BE49-F238E27FC236}">
-                <a16:creationId xmlns:a16="http://schemas.microsoft.com/office/drawing/2014/main" id="{6C451228-1F80-A10D-6BFE-CE4E6DE1EE6B}"/>
+                <a16:creationId xmlns:a16="http://schemas.microsoft.com/office/drawing/2014/main" id="{DB577775-FB14-4DCB-7B32-C6D2B8B60E03}"/>
               </a:ext>
             </a:extLst>
           </p:cNvPr>
@@ -22304,7 +22304,7 @@
           <p:cNvPr id="12" name="item_3_title">
             <a:extLst>
               <a:ext uri="{FF2B5EF4-FFF2-40B4-BE49-F238E27FC236}">
-                <a16:creationId xmlns:a16="http://schemas.microsoft.com/office/drawing/2014/main" id="{761137DC-8BCF-3D1B-8775-6AA369EE9BC5}"/>
+                <a16:creationId xmlns:a16="http://schemas.microsoft.com/office/drawing/2014/main" id="{0641AA5D-7DC6-791F-B9AC-762394B8FED0}"/>
               </a:ext>
             </a:extLst>
           </p:cNvPr>
@@ -22357,7 +22357,7 @@
           <p:cNvPr id="13" name="item_3">
             <a:extLst>
               <a:ext uri="{FF2B5EF4-FFF2-40B4-BE49-F238E27FC236}">
-                <a16:creationId xmlns:a16="http://schemas.microsoft.com/office/drawing/2014/main" id="{F6F7C13C-952A-3EA5-E65E-FC2AAC12BE50}"/>
+                <a16:creationId xmlns:a16="http://schemas.microsoft.com/office/drawing/2014/main" id="{12D410B7-644C-E71E-D011-A069286A6C26}"/>
               </a:ext>
             </a:extLst>
           </p:cNvPr>
@@ -22405,7 +22405,7 @@
           <p:cNvPr id="14" name="item_4_title">
             <a:extLst>
               <a:ext uri="{FF2B5EF4-FFF2-40B4-BE49-F238E27FC236}">
-                <a16:creationId xmlns:a16="http://schemas.microsoft.com/office/drawing/2014/main" id="{3F973C8E-7951-3D09-A422-D1CF1BBFA890}"/>
+                <a16:creationId xmlns:a16="http://schemas.microsoft.com/office/drawing/2014/main" id="{D90FA61B-04CF-4AE8-8E8A-AFE39AB0875C}"/>
               </a:ext>
             </a:extLst>
           </p:cNvPr>
@@ -22458,7 +22458,7 @@
           <p:cNvPr id="15" name="item_4">
             <a:extLst>
               <a:ext uri="{FF2B5EF4-FFF2-40B4-BE49-F238E27FC236}">
-                <a16:creationId xmlns:a16="http://schemas.microsoft.com/office/drawing/2014/main" id="{05A476D9-0A2C-AA1F-FCE2-0064574F254B}"/>
+                <a16:creationId xmlns:a16="http://schemas.microsoft.com/office/drawing/2014/main" id="{9875B6DA-EAB7-9538-6186-C77A330D7203}"/>
               </a:ext>
             </a:extLst>
           </p:cNvPr>
@@ -22506,7 +22506,7 @@
           <p:cNvPr id="16" name="source">
             <a:extLst>
               <a:ext uri="{FF2B5EF4-FFF2-40B4-BE49-F238E27FC236}">
-                <a16:creationId xmlns:a16="http://schemas.microsoft.com/office/drawing/2014/main" id="{99CF9875-FC8A-5035-C75A-4B4553A09176}"/>
+                <a16:creationId xmlns:a16="http://schemas.microsoft.com/office/drawing/2014/main" id="{159E1E7A-7C5E-23E8-27BB-D3F92D87D7B8}"/>
               </a:ext>
             </a:extLst>
           </p:cNvPr>
@@ -22561,7 +22561,7 @@
     </p:spTree>
     <p:extLst>
       <p:ext uri="{BB962C8B-B14F-4D97-AF65-F5344CB8AC3E}">
-        <p14:creationId xmlns:p14="http://schemas.microsoft.com/office/powerpoint/2010/main" val="2240167386"/>
+        <p14:creationId xmlns:p14="http://schemas.microsoft.com/office/powerpoint/2010/main" val="3568594685"/>
       </p:ext>
     </p:extLst>
   </p:cSld>
@@ -22598,7 +22598,7 @@
           <p:cNvPr id="9" name="creative_background_master">
             <a:extLst>
               <a:ext uri="{FF2B5EF4-FFF2-40B4-BE49-F238E27FC236}">
-                <a16:creationId xmlns:a16="http://schemas.microsoft.com/office/drawing/2014/main" id="{68705B89-BF4F-50BD-631D-28BB557D96C4}"/>
+                <a16:creationId xmlns:a16="http://schemas.microsoft.com/office/drawing/2014/main" id="{6CDF301C-14C9-80F4-3239-01A002C0B933}"/>
               </a:ext>
             </a:extLst>
           </p:cNvPr>
@@ -22759,9 +22759,9 @@
             </a:lvl1pPr>
           </a:lstStyle>
           <a:p>
-            <a:fld id="{D8887631-421A-4B90-81F4-114CAE3EC1BA}" type="datetimeFigureOut">
+            <a:fld id="{6456BABC-F92F-414F-A0E9-B90674473BDD}" type="datetimeFigureOut">
               <a:rPr lang="en-US" smtClean="0"/>
-              <a:t>10/3/2026</a:t>
+              <a:t>10/4/2026</a:t>
             </a:fld>
             <a:endParaRPr lang="en-US"/>
           </a:p>
@@ -22841,7 +22841,7 @@
             </a:lvl1pPr>
           </a:lstStyle>
           <a:p>
-            <a:fld id="{030EC083-285A-4D45-98F3-6009BB62C01A}" type="slidenum">
+            <a:fld id="{34BF67FC-BCB9-49F6-958A-F6E3E81E1F27}" type="slidenum">
               <a:rPr lang="en-US" smtClean="0"/>
               <a:t>‹#›</a:t>
             </a:fld>
@@ -22852,7 +22852,7 @@
     </p:spTree>
     <p:extLst>
       <p:ext uri="{BB962C8B-B14F-4D97-AF65-F5344CB8AC3E}">
-        <p14:creationId xmlns:p14="http://schemas.microsoft.com/office/powerpoint/2010/main" val="1808351535"/>
+        <p14:creationId xmlns:p14="http://schemas.microsoft.com/office/powerpoint/2010/main" val="1607059128"/>
       </p:ext>
     </p:extLst>
   </p:cSld>
